--- a/docs/presentation/nanolang-developer-overview.pptx
+++ b/docs/presentation/nanolang-developer-overview.pptx
@@ -16,6 +16,9 @@
     <p:sldId id="264" r:id="rId16"/>
     <p:sldId id="265" r:id="rId17"/>
     <p:sldId id="266" r:id="rId18"/>
+    <p:sldId id="267" r:id="rId19"/>
+    <p:sldId id="268" r:id="rId20"/>
+    <p:sldId id="269" r:id="rId21"/>
   </p:sldIdLst>
   <p:sldSz cx="12191695" cy="6858000" type="screen4x3"/>
   <p:notesSz cx="6858000" cy="9144000"/>
@@ -512,12 +515,12 @@
           <a:lstStyle/>
           <a:p>
             <a:r>
-              <a:t>Authority: docs/PERSONA.md, README.md, docs/RELEASE_3.5.md.</a:t>
-            </a:r>
-          </a:p>
-          <a:p>
-            <a:r>
-              <a:t>I describe tested behavior and label 4.0 work as future work.</a:t>
+              <a:t>Authority: docs/PERSONA.md, README.md, docs/RELEASE_4.0.md.</a:t>
+            </a:r>
+          </a:p>
+          <a:p>
+            <a:r>
+              <a:t>I describe tested behavior. Work I have not done is labelled as such.</a:t>
             </a:r>
           </a:p>
         </p:txBody>
@@ -587,12 +590,12 @@
           <a:lstStyle/>
           <a:p>
             <a:r>
-              <a:t>Authority: docs/RELEASE_3.5.md and docs/ROADMAP.md.</a:t>
-            </a:r>
-          </a:p>
-          <a:p>
-            <a:r>
-              <a:t>The right column is roadmap work, not shipped behavior.</a:t>
+              <a:t>Authority: docs/EXTERN_FFI.md, src/nanovm/vm_ffi.c, src/nanovm/cop_protocol.c, docs/NANOISA_MEASUREMENTS.md.</a:t>
+            </a:r>
+          </a:p>
+          <a:p>
+            <a:r>
+              <a:t>The FFI boundary is tested; it is not part of the formally verified NanoCore subset.</a:t>
             </a:r>
           </a:p>
         </p:txBody>
@@ -662,7 +665,242 @@
           <a:lstStyle/>
           <a:p>
             <a:r>
-              <a:t>Authority: CONTRIBUTING.md, docs/PERSONA.md, and docs/ROADMAP.md.</a:t>
+              <a:t>Authority: src/nanovm/heap_cycles.c, Bacon and Rajan (PLDI 2001), tests/nanovm/test_vm.c.</a:t>
+            </a:r>
+          </a:p>
+          <a:p>
+            <a:r>
+              <a:t>The generated-C runtime already collected cycles; the VM did not, so the two disagreed about whether a program leaks.</a:t>
+            </a:r>
+          </a:p>
+          <a:p>
+            <a:r>
+              <a:t>The test that matters most is the one where a reachable cycle must survive and still be readable.</a:t>
+            </a:r>
+          </a:p>
+        </p:txBody>
+      </p:sp>
+      <p:sp>
+        <p:nvSpPr>
+          <p:cNvPr id="4" name="Slide Number Placeholder 3"/>
+          <p:cNvSpPr>
+            <a:spLocks noGrp="1"/>
+          </p:cNvSpPr>
+          <p:nvPr>
+            <p:ph type="sldNum" idx="5" sz="quarter"/>
+          </p:nvPr>
+        </p:nvSpPr>
+        <p:spPr/>
+      </p:sp>
+    </p:spTree>
+  </p:cSld>
+  <p:clrMapOvr>
+    <a:masterClrMapping/>
+  </p:clrMapOvr>
+</p:notes>
+</file>
+
+<file path=ppt/notesSlides/notesSlide12.xml><?xml version="1.0" encoding="utf-8"?>
+<p:notes xmlns:a="http://schemas.openxmlformats.org/drawingml/2006/main" xmlns:p="http://schemas.openxmlformats.org/presentationml/2006/main" xmlns:r="http://schemas.openxmlformats.org/officeDocument/2006/relationships">
+  <p:cSld>
+    <p:spTree>
+      <p:nvGrpSpPr>
+        <p:cNvPr id="1" name=""/>
+        <p:cNvGrpSpPr/>
+        <p:nvPr/>
+      </p:nvGrpSpPr>
+      <p:grpSpPr>
+        <a:xfrm>
+          <a:off x="0" y="0"/>
+          <a:ext cx="0" cy="0"/>
+          <a:chOff x="0" y="0"/>
+          <a:chExt cx="0" cy="0"/>
+        </a:xfrm>
+      </p:grpSpPr>
+      <p:sp>
+        <p:nvSpPr>
+          <p:cNvPr id="2" name="Slide Image Placeholder 1"/>
+          <p:cNvSpPr>
+            <a:spLocks noGrp="1"/>
+          </p:cNvSpPr>
+          <p:nvPr>
+            <p:ph type="sldImg" idx="2"/>
+          </p:nvPr>
+        </p:nvSpPr>
+        <p:spPr/>
+      </p:sp>
+      <p:sp>
+        <p:nvSpPr>
+          <p:cNvPr id="3" name="Notes Placeholder 2"/>
+          <p:cNvSpPr>
+            <a:spLocks noGrp="1"/>
+          </p:cNvSpPr>
+          <p:nvPr>
+            <p:ph type="body" idx="3" sz="quarter"/>
+          </p:nvPr>
+        </p:nvSpPr>
+        <p:spPr/>
+        <p:txBody>
+          <a:bodyPr/>
+          <a:lstStyle/>
+          <a:p>
+            <a:r>
+              <a:t>Authority: docs/NANOISA_MEASUREMENTS.md and scripts/benchmark_nanoisa.sh.</a:t>
+            </a:r>
+          </a:p>
+          <a:p>
+            <a:r>
+              <a:t>Before 4.0 the suite timed one process per sample, so every workload took about 17 ms whether it retired 78 instructions or 32,082.</a:t>
+            </a:r>
+          </a:p>
+          <a:p>
+            <a:r>
+              <a:t>It could not have detected an interpreter change of any size, which is why these questions stayed open.</a:t>
+            </a:r>
+          </a:p>
+        </p:txBody>
+      </p:sp>
+      <p:sp>
+        <p:nvSpPr>
+          <p:cNvPr id="4" name="Slide Number Placeholder 3"/>
+          <p:cNvSpPr>
+            <a:spLocks noGrp="1"/>
+          </p:cNvSpPr>
+          <p:nvPr>
+            <p:ph type="sldNum" idx="5" sz="quarter"/>
+          </p:nvPr>
+        </p:nvSpPr>
+        <p:spPr/>
+      </p:sp>
+    </p:spTree>
+  </p:cSld>
+  <p:clrMapOvr>
+    <a:masterClrMapping/>
+  </p:clrMapOvr>
+</p:notes>
+</file>
+
+<file path=ppt/notesSlides/notesSlide13.xml><?xml version="1.0" encoding="utf-8"?>
+<p:notes xmlns:a="http://schemas.openxmlformats.org/drawingml/2006/main" xmlns:p="http://schemas.openxmlformats.org/presentationml/2006/main" xmlns:r="http://schemas.openxmlformats.org/officeDocument/2006/relationships">
+  <p:cSld>
+    <p:spTree>
+      <p:nvGrpSpPr>
+        <p:cNvPr id="1" name=""/>
+        <p:cNvGrpSpPr/>
+        <p:nvPr/>
+      </p:nvGrpSpPr>
+      <p:grpSpPr>
+        <a:xfrm>
+          <a:off x="0" y="0"/>
+          <a:ext cx="0" cy="0"/>
+          <a:chOff x="0" y="0"/>
+          <a:chExt cx="0" cy="0"/>
+        </a:xfrm>
+      </p:grpSpPr>
+      <p:sp>
+        <p:nvSpPr>
+          <p:cNvPr id="2" name="Slide Image Placeholder 1"/>
+          <p:cNvSpPr>
+            <a:spLocks noGrp="1"/>
+          </p:cNvSpPr>
+          <p:nvPr>
+            <p:ph type="sldImg" idx="2"/>
+          </p:nvPr>
+        </p:nvSpPr>
+        <p:spPr/>
+      </p:sp>
+      <p:sp>
+        <p:nvSpPr>
+          <p:cNvPr id="3" name="Notes Placeholder 2"/>
+          <p:cNvSpPr>
+            <a:spLocks noGrp="1"/>
+          </p:cNvSpPr>
+          <p:nvPr>
+            <p:ph type="body" idx="3" sz="quarter"/>
+          </p:nvPr>
+        </p:nvSpPr>
+        <p:spPr/>
+        <p:txBody>
+          <a:bodyPr/>
+          <a:lstStyle/>
+          <a:p>
+            <a:r>
+              <a:t>Authority: docs/RELEASE_4.0.md, docs/ROADMAP.md, and the open issue list.</a:t>
+            </a:r>
+          </a:p>
+          <a:p>
+            <a:r>
+              <a:t>Phase 12 is 78 of 78. The right column is scope or filed defect, not vagueness.</a:t>
+            </a:r>
+          </a:p>
+        </p:txBody>
+      </p:sp>
+      <p:sp>
+        <p:nvSpPr>
+          <p:cNvPr id="4" name="Slide Number Placeholder 3"/>
+          <p:cNvSpPr>
+            <a:spLocks noGrp="1"/>
+          </p:cNvSpPr>
+          <p:nvPr>
+            <p:ph type="sldNum" idx="5" sz="quarter"/>
+          </p:nvPr>
+        </p:nvSpPr>
+        <p:spPr/>
+      </p:sp>
+    </p:spTree>
+  </p:cSld>
+  <p:clrMapOvr>
+    <a:masterClrMapping/>
+  </p:clrMapOvr>
+</p:notes>
+</file>
+
+<file path=ppt/notesSlides/notesSlide14.xml><?xml version="1.0" encoding="utf-8"?>
+<p:notes xmlns:a="http://schemas.openxmlformats.org/drawingml/2006/main" xmlns:p="http://schemas.openxmlformats.org/presentationml/2006/main" xmlns:r="http://schemas.openxmlformats.org/officeDocument/2006/relationships">
+  <p:cSld>
+    <p:spTree>
+      <p:nvGrpSpPr>
+        <p:cNvPr id="1" name=""/>
+        <p:cNvGrpSpPr/>
+        <p:nvPr/>
+      </p:nvGrpSpPr>
+      <p:grpSpPr>
+        <a:xfrm>
+          <a:off x="0" y="0"/>
+          <a:ext cx="0" cy="0"/>
+          <a:chOff x="0" y="0"/>
+          <a:chExt cx="0" cy="0"/>
+        </a:xfrm>
+      </p:grpSpPr>
+      <p:sp>
+        <p:nvSpPr>
+          <p:cNvPr id="2" name="Slide Image Placeholder 1"/>
+          <p:cNvSpPr>
+            <a:spLocks noGrp="1"/>
+          </p:cNvSpPr>
+          <p:nvPr>
+            <p:ph type="sldImg" idx="2"/>
+          </p:nvPr>
+        </p:nvSpPr>
+        <p:spPr/>
+      </p:sp>
+      <p:sp>
+        <p:nvSpPr>
+          <p:cNvPr id="3" name="Notes Placeholder 2"/>
+          <p:cNvSpPr>
+            <a:spLocks noGrp="1"/>
+          </p:cNvSpPr>
+          <p:nvPr>
+            <p:ph type="body" idx="3" sz="quarter"/>
+          </p:nvPr>
+        </p:nvSpPr>
+        <p:spPr/>
+        <p:txBody>
+          <a:bodyPr/>
+          <a:lstStyle/>
+          <a:p>
+            <a:r>
+              <a:t>Authority: CONTRIBUTING.md, docs/PERSONA.md, docs/ROADMAP.md.</a:t>
             </a:r>
           </a:p>
         </p:txBody>
@@ -735,11 +973,6 @@
               <a:t>Authority: docs/PERSONA.md and docs/CANONICAL_STYLE.md.</a:t>
             </a:r>
           </a:p>
-          <a:p>
-            <a:r>
-              <a:t>I do not claim that every legacy surface is equally regular; the active NanoISA work is separately scoped.</a:t>
-            </a:r>
-          </a:p>
         </p:txBody>
       </p:sp>
       <p:sp>
@@ -877,7 +1110,12 @@
           <a:lstStyle/>
           <a:p>
             <a:r>
-              <a:t>Authority: spec/nanoisa.yaml, scripts/gen_nanoisa_schema.py, src/nanoisa/assembler.c, and src/nanoisa/disassembler.c.</a:t>
+              <a:t>Authority: spec/nanoisa.yaml, scripts/gen_nanoisa_schema.py, src/nanoisa/assembler.c, src/nanoisa/disassembler.c.</a:t>
+            </a:r>
+          </a:p>
+          <a:p>
+            <a:r>
+              <a:t>Canonical disassembly reassembles to byte-identical bytecode; make test-disasm-roundtrip.</a:t>
             </a:r>
           </a:p>
         </p:txBody>
@@ -947,7 +1185,17 @@
           <a:lstStyle/>
           <a:p>
             <a:r>
-              <a:t>Authority: src/nanovm/vm.c, src/nanovm/vm_decode.c, and skills/nanovm-opcode-debugging/SKILL.md.</a:t>
+              <a:t>Authority: src/nanoisa/nvm_format_v2.[ch], src/nanoisa/nvm_v2_*.c, docs/NANOISA.md.</a:t>
+            </a:r>
+          </a:p>
+          <a:p>
+            <a:r>
+              <a:t>Subtraction form is the point: an offset near the top of the range cannot wrap into it.</a:t>
+            </a:r>
+          </a:p>
+          <a:p>
+            <a:r>
+              <a:t>An explicit length is why a string holding an embedded zero survives a round trip.</a:t>
             </a:r>
           </a:p>
         </p:txBody>
@@ -1017,7 +1265,12 @@
           <a:lstStyle/>
           <a:p>
             <a:r>
-              <a:t>Authority: CONTRIBUTING.md, userguide/part1_fundamentals/04_functions.md, and current test suites.</a:t>
+              <a:t>Authority: src/nanoisa/verifier.c, src/nanoisa/verifier_types.c, tests/nanoisa/test_verifier.c (93 tests).</a:t>
+            </a:r>
+          </a:p>
+          <a:p>
+            <a:r>
+              <a:t>Every call now carries its signature, so a module is provable before it is linked.</a:t>
             </a:r>
           </a:p>
         </p:txBody>
@@ -1087,12 +1340,17 @@
           <a:lstStyle/>
           <a:p>
             <a:r>
-              <a:t>Authority: docs/EXTERN_FFI.md, src/nanovm/vm_ffi.c, and src/nanovm/cop_protocol.c.</a:t>
-            </a:r>
-          </a:p>
-          <a:p>
-            <a:r>
-              <a:t>The FFI boundary is tested; it is not part of the formally verified NanoCore subset.</a:t>
+              <a:t>Authority: docs/RELEASE_4.0.md and the fix in src/nanoisa/verifier.c.</a:t>
+            </a:r>
+          </a:p>
+          <a:p>
+            <a:r>
+              <a:t>Fixing it exposed a second bug in the same walk and then eight latent codegen bugs it had hidden.</a:t>
+            </a:r>
+          </a:p>
+          <a:p>
+            <a:r>
+              <a:t>An unknown effect is now a hard failure: absence of data must not read as proof.</a:t>
             </a:r>
           </a:p>
         </p:txBody>
@@ -1162,7 +1420,17 @@
           <a:lstStyle/>
           <a:p>
             <a:r>
-              <a:t>Authority: src/nanovm/vm.c, src/stdlib_runtime.c, and skills/nanovm-opcode-debugging/SKILL.md.</a:t>
+              <a:t>Authority: src/nanovm/vm.c, docs/NANOISA_MEASUREMENTS.md, make test-dispatch-equivalence.</a:t>
+            </a:r>
+          </a:p>
+          <a:p>
+            <a:r>
+              <a:t>VM_CASE and VM_NEXT are the only difference, so the two strategies cannot drift in what an instruction does.</a:t>
+            </a:r>
+          </a:p>
+          <a:p>
+            <a:r>
+              <a:t>The threaded build has no loop around the handlers, so a stray break is a compile error rather than a silent exit.</a:t>
             </a:r>
           </a:p>
         </p:txBody>
@@ -1232,7 +1500,12 @@
           <a:lstStyle/>
           <a:p>
             <a:r>
-              <a:t>Authority: scripts/benchmark_nanoisa.sh, scripts/summarize_nanoisa_bench.py, and docs/RELEASE_3.5.md.</a:t>
+              <a:t>Authority: CONTRIBUTING.md and the current test suites, counted at the v4.0.0 tag.</a:t>
+            </a:r>
+          </a:p>
+          <a:p>
+            <a:r>
+              <a:t>make test-verify-all-programs additionally verifies every program in tests/, because compiling is not verifying.</a:t>
             </a:r>
           </a:p>
         </p:txBody>
@@ -4357,7 +4630,7 @@
         <p:spPr>
           <a:xfrm>
             <a:off x="640080" y="548640"/>
-            <a:ext cx="1828800" cy="274320"/>
+            <a:ext cx="2743200" cy="274320"/>
           </a:xfrm>
           <a:prstGeom prst="rect">
             <a:avLst/>
@@ -4377,7 +4650,7 @@
                 </a:solidFill>
                 <a:latin typeface="Arial"/>
               </a:rPr>
-              <a:t>NANOLANG</a:t>
+              <a:t>NANOLANG 4.0</a:t>
             </a:r>
           </a:p>
         </p:txBody>
@@ -4447,7 +4720,7 @@
         <p:spPr>
           <a:xfrm>
             <a:off x="685800" y="4069080"/>
-            <a:ext cx="5852160" cy="822960"/>
+            <a:ext cx="6126480" cy="822960"/>
           </a:xfrm>
           <a:prstGeom prst="rect">
             <a:avLst/>
@@ -4467,7 +4740,7 @@
                 </a:solidFill>
                 <a:latin typeface="Arial"/>
               </a:rPr>
-              <a:t>A developer's view of my syntax, compiler, NanoISA, NanoVM, and the 4.0 boundary.</a:t>
+              <a:t>A developer's view of my syntax, compiler, NanoISA, NanoVM, and what my verifier proves.</a:t>
             </a:r>
           </a:p>
         </p:txBody>
@@ -4481,7 +4754,7 @@
         <p:spPr>
           <a:xfrm>
             <a:off x="685800" y="5989320"/>
-            <a:ext cx="3657600" cy="274320"/>
+            <a:ext cx="5120640" cy="274320"/>
           </a:xfrm>
           <a:prstGeom prst="rect">
             <a:avLst/>
@@ -4501,7 +4774,7 @@
                 </a:solidFill>
                 <a:latin typeface="Arial"/>
               </a:rPr>
-              <a:t>3.5 shipped · 4.0 begins</a:t>
+              <a:t>NanoISA v2 · NanoVM v2 · Phase 12 complete</a:t>
             </a:r>
           </a:p>
         </p:txBody>
@@ -4596,7 +4869,7 @@
                 </a:solidFill>
                 <a:latin typeface="Arial"/>
               </a:rPr>
-              <a:t>3.5 shipped. 4.0 is a different promise.</a:t>
+              <a:t>FFI is an explicit unsafe boundary.</a:t>
             </a:r>
           </a:p>
         </p:txBody>
@@ -4630,7 +4903,7 @@
                 </a:solidFill>
                 <a:latin typeface="Arial"/>
               </a:rPr>
-              <a:t>I keep the boundary visible so a passing benchmark is not mistaken for a complete v2 verifier.</a:t>
+              <a:t>Imports carry signatures. The co-process can keep foreign code outside my VM process.</a:t>
             </a:r>
           </a:p>
         </p:txBody>
@@ -4712,8 +4985,8 @@
         </p:nvSpPr>
         <p:spPr>
           <a:xfrm>
-            <a:off x="731520" y="1828800"/>
-            <a:ext cx="5166360" cy="3566160"/>
+            <a:off x="731520" y="2057400"/>
+            <a:ext cx="2743200" cy="2377440"/>
           </a:xfrm>
           <a:prstGeom prst="roundRect">
             <a:avLst/>
@@ -4755,8 +5028,42 @@
         </p:nvSpPr>
         <p:spPr>
           <a:xfrm>
-            <a:off x="1005840" y="2148840"/>
-            <a:ext cx="4480560" cy="274320"/>
+            <a:off x="960120" y="2423160"/>
+            <a:ext cx="2286000" cy="274320"/>
+          </a:xfrm>
+          <a:prstGeom prst="rect">
+            <a:avLst/>
+          </a:prstGeom>
+          <a:noFill/>
+        </p:spPr>
+        <p:txBody>
+          <a:bodyPr wrap="square" lIns="45720" rIns="45720" tIns="27432" bIns="27432" anchor="t">
+            <a:spAutoFit/>
+          </a:bodyPr>
+          <a:lstStyle/>
+          <a:p>
+            <a:r>
+              <a:rPr sz="1800" b="1">
+                <a:solidFill>
+                  <a:srgbClr val="EEF1F3"/>
+                </a:solidFill>
+                <a:latin typeface="Arial"/>
+              </a:rPr>
+              <a:t>NanoLang</a:t>
+            </a:r>
+          </a:p>
+        </p:txBody>
+      </p:sp>
+      <p:sp>
+        <p:nvSpPr>
+          <p:cNvPr id="9" name="TextBox 8"/>
+          <p:cNvSpPr txBox="1"/>
+          <p:nvPr/>
+        </p:nvSpPr>
+        <p:spPr>
+          <a:xfrm>
+            <a:off x="960120" y="3063240"/>
+            <a:ext cx="2286000" cy="274320"/>
           </a:xfrm>
           <a:prstGeom prst="rect">
             <a:avLst/>
@@ -4772,89 +5079,11 @@
             <a:r>
               <a:rPr sz="1500" b="1">
                 <a:solidFill>
-                  <a:srgbClr val="76B900"/>
-                </a:solidFill>
-                <a:latin typeface="Arial"/>
-              </a:rPr>
-              <a:t>3.5 SHIPPED</a:t>
-            </a:r>
-          </a:p>
-        </p:txBody>
-      </p:sp>
-      <p:sp>
-        <p:nvSpPr>
-          <p:cNvPr id="9" name="TextBox 8"/>
-          <p:cNvSpPr txBox="1"/>
-          <p:nvPr/>
-        </p:nvSpPr>
-        <p:spPr>
-          <a:xfrm>
-            <a:off x="1005840" y="2651760"/>
-            <a:ext cx="4297680" cy="2011680"/>
-          </a:xfrm>
-          <a:prstGeom prst="rect">
-            <a:avLst/>
-          </a:prstGeom>
-          <a:noFill/>
-        </p:spPr>
-        <p:txBody>
-          <a:bodyPr wrap="square" lIns="45720" rIns="45720" tIns="27432" bIns="27432" anchor="t">
-            <a:spAutoFit/>
-          </a:bodyPr>
-          <a:lstStyle/>
-          <a:p>
-            <a:r>
-              <a:rPr sz="1900" b="1">
-                <a:solidFill>
-                  <a:srgbClr val="EEF1F3"/>
-                </a:solidFill>
-                <a:latin typeface="Arial"/>
-              </a:rPr>
-              <a:t>measurement</a:t>
-            </a:r>
-          </a:p>
-          <a:p>
-            <a:r>
-              <a:rPr sz="1900" b="1">
-                <a:solidFill>
-                  <a:srgbClr val="EEF1F3"/>
-                </a:solidFill>
-                <a:latin typeface="Arial"/>
-              </a:rPr>
-              <a:t>generated metadata</a:t>
-            </a:r>
-          </a:p>
-          <a:p>
-            <a:r>
-              <a:rPr sz="1900" b="1">
-                <a:solidFill>
-                  <a:srgbClr val="EEF1F3"/>
-                </a:solidFill>
-                <a:latin typeface="Arial"/>
-              </a:rPr>
-              <a:t>predecoded execution</a:t>
-            </a:r>
-          </a:p>
-          <a:p>
-            <a:r>
-              <a:rPr sz="1900" b="1">
-                <a:solidFill>
-                  <a:srgbClr val="EEF1F3"/>
-                </a:solidFill>
-                <a:latin typeface="Arial"/>
-              </a:rPr>
-              <a:t>tail calls</a:t>
-            </a:r>
-          </a:p>
-          <a:p>
-            <a:r>
-              <a:rPr sz="1900" b="1">
-                <a:solidFill>
-                  <a:srgbClr val="EEF1F3"/>
-                </a:solidFill>
-                <a:latin typeface="Arial"/>
-              </a:rPr>
-              <a:t>runtime diagnostics</a:t>
+                  <a:srgbClr val="72B7D6"/>
+                </a:solidFill>
+                <a:latin typeface="Arial"/>
+              </a:rPr>
+              <a:t>typed call</a:t>
             </a:r>
           </a:p>
         </p:txBody>
@@ -4867,14 +5096,14 @@
         </p:nvSpPr>
         <p:spPr>
           <a:xfrm>
-            <a:off x="6309360" y="1828800"/>
-            <a:ext cx="5166360" cy="3566160"/>
+            <a:off x="4709160" y="2057400"/>
+            <a:ext cx="2743200" cy="2377440"/>
           </a:xfrm>
           <a:prstGeom prst="roundRect">
             <a:avLst/>
           </a:prstGeom>
           <a:solidFill>
-            <a:srgbClr val="101317"/>
+            <a:srgbClr val="23282F"/>
           </a:solidFill>
           <a:ln>
             <a:noFill/>
@@ -4910,8 +5139,42 @@
         </p:nvSpPr>
         <p:spPr>
           <a:xfrm>
-            <a:off x="6583680" y="2148840"/>
-            <a:ext cx="4480560" cy="274320"/>
+            <a:off x="4937760" y="2423160"/>
+            <a:ext cx="2286000" cy="274320"/>
+          </a:xfrm>
+          <a:prstGeom prst="rect">
+            <a:avLst/>
+          </a:prstGeom>
+          <a:noFill/>
+        </p:spPr>
+        <p:txBody>
+          <a:bodyPr wrap="square" lIns="45720" rIns="45720" tIns="27432" bIns="27432" anchor="t">
+            <a:spAutoFit/>
+          </a:bodyPr>
+          <a:lstStyle/>
+          <a:p>
+            <a:r>
+              <a:rPr sz="1800" b="1">
+                <a:solidFill>
+                  <a:srgbClr val="EEF1F3"/>
+                </a:solidFill>
+                <a:latin typeface="Arial"/>
+              </a:rPr>
+              <a:t>NanoVM</a:t>
+            </a:r>
+          </a:p>
+        </p:txBody>
+      </p:sp>
+      <p:sp>
+        <p:nvSpPr>
+          <p:cNvPr id="12" name="TextBox 11"/>
+          <p:cNvSpPr txBox="1"/>
+          <p:nvPr/>
+        </p:nvSpPr>
+        <p:spPr>
+          <a:xfrm>
+            <a:off x="4937760" y="3063240"/>
+            <a:ext cx="2286000" cy="274320"/>
           </a:xfrm>
           <a:prstGeom prst="rect">
             <a:avLst/>
@@ -4927,89 +5190,157 @@
             <a:r>
               <a:rPr sz="1500" b="1">
                 <a:solidFill>
+                  <a:srgbClr val="76B900"/>
+                </a:solidFill>
+                <a:latin typeface="Arial"/>
+              </a:rPr>
+              <a:t>typed trap</a:t>
+            </a:r>
+          </a:p>
+        </p:txBody>
+      </p:sp>
+      <p:sp>
+        <p:nvSpPr>
+          <p:cNvPr id="13" name="Rounded Rectangle 12"/>
+          <p:cNvSpPr/>
+          <p:nvPr/>
+        </p:nvSpPr>
+        <p:spPr>
+          <a:xfrm>
+            <a:off x="8686800" y="2057400"/>
+            <a:ext cx="2743200" cy="2377440"/>
+          </a:xfrm>
+          <a:prstGeom prst="roundRect">
+            <a:avLst/>
+          </a:prstGeom>
+          <a:solidFill>
+            <a:srgbClr val="23282F"/>
+          </a:solidFill>
+          <a:ln>
+            <a:noFill/>
+          </a:ln>
+        </p:spPr>
+        <p:style>
+          <a:lnRef idx="1">
+            <a:schemeClr val="accent1"/>
+          </a:lnRef>
+          <a:fillRef idx="3">
+            <a:schemeClr val="accent1"/>
+          </a:fillRef>
+          <a:effectRef idx="2">
+            <a:schemeClr val="accent1"/>
+          </a:effectRef>
+          <a:fontRef idx="minor">
+            <a:schemeClr val="lt1"/>
+          </a:fontRef>
+        </p:style>
+        <p:txBody>
+          <a:bodyPr rtlCol="0" anchor="ctr"/>
+          <a:lstStyle/>
+          <a:p>
+            <a:pPr algn="ctr"/>
+          </a:p>
+        </p:txBody>
+      </p:sp>
+      <p:sp>
+        <p:nvSpPr>
+          <p:cNvPr id="14" name="TextBox 13"/>
+          <p:cNvSpPr txBox="1"/>
+          <p:nvPr/>
+        </p:nvSpPr>
+        <p:spPr>
+          <a:xfrm>
+            <a:off x="8915400" y="2423160"/>
+            <a:ext cx="2286000" cy="274320"/>
+          </a:xfrm>
+          <a:prstGeom prst="rect">
+            <a:avLst/>
+          </a:prstGeom>
+          <a:noFill/>
+        </p:spPr>
+        <p:txBody>
+          <a:bodyPr wrap="square" lIns="45720" rIns="45720" tIns="27432" bIns="27432" anchor="t">
+            <a:spAutoFit/>
+          </a:bodyPr>
+          <a:lstStyle/>
+          <a:p>
+            <a:r>
+              <a:rPr sz="1800" b="1">
+                <a:solidFill>
+                  <a:srgbClr val="EEF1F3"/>
+                </a:solidFill>
+                <a:latin typeface="Arial"/>
+              </a:rPr>
+              <a:t>nano_cop</a:t>
+            </a:r>
+          </a:p>
+        </p:txBody>
+      </p:sp>
+      <p:sp>
+        <p:nvSpPr>
+          <p:cNvPr id="15" name="TextBox 14"/>
+          <p:cNvSpPr txBox="1"/>
+          <p:nvPr/>
+        </p:nvSpPr>
+        <p:spPr>
+          <a:xfrm>
+            <a:off x="8915400" y="3063240"/>
+            <a:ext cx="2286000" cy="548640"/>
+          </a:xfrm>
+          <a:prstGeom prst="rect">
+            <a:avLst/>
+          </a:prstGeom>
+          <a:noFill/>
+        </p:spPr>
+        <p:txBody>
+          <a:bodyPr wrap="square" lIns="45720" rIns="45720" tIns="27432" bIns="27432" anchor="t">
+            <a:spAutoFit/>
+          </a:bodyPr>
+          <a:lstStyle/>
+          <a:p>
+            <a:r>
+              <a:rPr sz="1500" b="1">
+                <a:solidFill>
                   <a:srgbClr val="FF6B35"/>
                 </a:solidFill>
                 <a:latin typeface="Arial"/>
               </a:rPr>
-              <a:t>4.0 WORK</a:t>
-            </a:r>
-          </a:p>
-        </p:txBody>
-      </p:sp>
-      <p:sp>
-        <p:nvSpPr>
-          <p:cNvPr id="12" name="TextBox 11"/>
-          <p:cNvSpPr txBox="1"/>
-          <p:nvPr/>
-        </p:nvSpPr>
-        <p:spPr>
-          <a:xfrm>
-            <a:off x="6583680" y="2651760"/>
-            <a:ext cx="4297680" cy="2011680"/>
-          </a:xfrm>
-          <a:prstGeom prst="rect">
-            <a:avLst/>
-          </a:prstGeom>
-          <a:noFill/>
-        </p:spPr>
-        <p:txBody>
-          <a:bodyPr wrap="square" lIns="45720" rIns="45720" tIns="27432" bIns="27432" anchor="t">
-            <a:spAutoFit/>
-          </a:bodyPr>
-          <a:lstStyle/>
-          <a:p>
-            <a:r>
-              <a:rPr sz="1900" b="1">
-                <a:solidFill>
-                  <a:srgbClr val="EEF1F3"/>
-                </a:solidFill>
-                <a:latin typeface="Arial"/>
-              </a:rPr>
-              <a:t>stack/type-flow verifier</a:t>
-            </a:r>
-          </a:p>
-          <a:p>
-            <a:r>
-              <a:rPr sz="1900" b="1">
-                <a:solidFill>
-                  <a:srgbClr val="EEF1F3"/>
-                </a:solidFill>
-                <a:latin typeface="Arial"/>
-              </a:rPr>
-              <a:t>linked callable handles</a:t>
-            </a:r>
-          </a:p>
-          <a:p>
-            <a:r>
-              <a:rPr sz="1900" b="1">
-                <a:solidFill>
-                  <a:srgbClr val="EEF1F3"/>
-                </a:solidFill>
-                <a:latin typeface="Arial"/>
-              </a:rPr>
-              <a:t>v2 module contract</a:t>
-            </a:r>
-          </a:p>
-          <a:p>
-            <a:r>
-              <a:rPr sz="1900" b="1">
-                <a:solidFill>
-                  <a:srgbClr val="EEF1F3"/>
-                </a:solidFill>
-                <a:latin typeface="Arial"/>
-              </a:rPr>
-              <a:t>typed ABI and ownership</a:t>
-            </a:r>
-          </a:p>
-          <a:p>
-            <a:r>
-              <a:rPr sz="1900" b="1">
-                <a:solidFill>
-                  <a:srgbClr val="EEF1F3"/>
-                </a:solidFill>
-                <a:latin typeface="Arial"/>
-              </a:rPr>
-              <a:t>computed dispatch + fusions</a:t>
+              <a:t>foreign process</a:t>
+            </a:r>
+          </a:p>
+        </p:txBody>
+      </p:sp>
+      <p:sp>
+        <p:nvSpPr>
+          <p:cNvPr id="16" name="TextBox 15"/>
+          <p:cNvSpPr txBox="1"/>
+          <p:nvPr/>
+        </p:nvSpPr>
+        <p:spPr>
+          <a:xfrm>
+            <a:off x="914400" y="5120640"/>
+            <a:ext cx="10332720" cy="365760"/>
+          </a:xfrm>
+          <a:prstGeom prst="rect">
+            <a:avLst/>
+          </a:prstGeom>
+          <a:noFill/>
+        </p:spPr>
+        <p:txBody>
+          <a:bodyPr wrap="square" lIns="45720" rIns="45720" tIns="27432" bIns="27432" anchor="t">
+            <a:spAutoFit/>
+          </a:bodyPr>
+          <a:lstStyle/>
+          <a:p>
+            <a:pPr algn="ctr"/>
+            <a:r>
+              <a:rPr sz="1500" b="0">
+                <a:solidFill>
+                  <a:srgbClr val="72B7D6"/>
+                </a:solidFill>
+                <a:latin typeface="Arial"/>
+              </a:rPr>
+              <a:t>isolation costs about 48x per crossing — which is what batching exists to amortize</a:t>
             </a:r>
           </a:p>
         </p:txBody>
@@ -5075,6 +5406,1890 @@
           </a:p>
         </p:txBody>
       </p:sp>
+      <p:sp>
+        <p:nvSpPr>
+          <p:cNvPr id="3" name="TextBox 2"/>
+          <p:cNvSpPr txBox="1"/>
+          <p:nvPr/>
+        </p:nvSpPr>
+        <p:spPr>
+          <a:xfrm>
+            <a:off x="594360" y="457200"/>
+            <a:ext cx="10789920" cy="640080"/>
+          </a:xfrm>
+          <a:prstGeom prst="rect">
+            <a:avLst/>
+          </a:prstGeom>
+          <a:noFill/>
+        </p:spPr>
+        <p:txBody>
+          <a:bodyPr wrap="square" lIns="45720" rIns="45720" tIns="27432" bIns="27432" anchor="t">
+            <a:spAutoFit/>
+          </a:bodyPr>
+          <a:lstStyle/>
+          <a:p>
+            <a:r>
+              <a:rPr sz="2800" b="1">
+                <a:solidFill>
+                  <a:srgbClr val="EEF1F3"/>
+                </a:solidFill>
+                <a:latin typeface="Arial"/>
+              </a:rPr>
+              <a:t>I collect cycles, so my backends agree about leaks.</a:t>
+            </a:r>
+          </a:p>
+        </p:txBody>
+      </p:sp>
+      <p:sp>
+        <p:nvSpPr>
+          <p:cNvPr id="4" name="TextBox 3"/>
+          <p:cNvSpPr txBox="1"/>
+          <p:nvPr/>
+        </p:nvSpPr>
+        <p:spPr>
+          <a:xfrm>
+            <a:off x="621792" y="1170432"/>
+            <a:ext cx="10607040" cy="411480"/>
+          </a:xfrm>
+          <a:prstGeom prst="rect">
+            <a:avLst/>
+          </a:prstGeom>
+          <a:noFill/>
+        </p:spPr>
+        <p:txBody>
+          <a:bodyPr wrap="square" lIns="45720" rIns="45720" tIns="27432" bIns="27432" anchor="t">
+            <a:spAutoFit/>
+          </a:bodyPr>
+          <a:lstStyle/>
+          <a:p>
+            <a:r>
+              <a:rPr sz="1300" b="0">
+                <a:solidFill>
+                  <a:srgbClr val="72B7D6"/>
+                </a:solidFill>
+                <a:latin typeface="Arial"/>
+              </a:rPr>
+              <a:t>Reference counting cannot reclaim a cycle, and a cycle is constructible from ordinary NanoLang.</a:t>
+            </a:r>
+          </a:p>
+        </p:txBody>
+      </p:sp>
+      <p:sp>
+        <p:nvSpPr>
+          <p:cNvPr id="5" name="TextBox 4"/>
+          <p:cNvSpPr txBox="1"/>
+          <p:nvPr/>
+        </p:nvSpPr>
+        <p:spPr>
+          <a:xfrm>
+            <a:off x="411480" y="6638544"/>
+            <a:ext cx="1097280" cy="137160"/>
+          </a:xfrm>
+          <a:prstGeom prst="rect">
+            <a:avLst/>
+          </a:prstGeom>
+          <a:noFill/>
+        </p:spPr>
+        <p:txBody>
+          <a:bodyPr wrap="square" lIns="45720" rIns="45720" tIns="27432" bIns="27432" anchor="t">
+            <a:spAutoFit/>
+          </a:bodyPr>
+          <a:lstStyle/>
+          <a:p>
+            <a:r>
+              <a:rPr sz="800" b="1">
+                <a:solidFill>
+                  <a:srgbClr val="65707C"/>
+                </a:solidFill>
+                <a:latin typeface="Arial"/>
+              </a:rPr>
+              <a:t>NANOLANG</a:t>
+            </a:r>
+          </a:p>
+        </p:txBody>
+      </p:sp>
+      <p:sp>
+        <p:nvSpPr>
+          <p:cNvPr id="6" name="TextBox 5"/>
+          <p:cNvSpPr txBox="1"/>
+          <p:nvPr/>
+        </p:nvSpPr>
+        <p:spPr>
+          <a:xfrm>
+            <a:off x="11567160" y="6638544"/>
+            <a:ext cx="228600" cy="137160"/>
+          </a:xfrm>
+          <a:prstGeom prst="rect">
+            <a:avLst/>
+          </a:prstGeom>
+          <a:noFill/>
+        </p:spPr>
+        <p:txBody>
+          <a:bodyPr wrap="square" lIns="45720" rIns="45720" tIns="27432" bIns="27432" anchor="t">
+            <a:spAutoFit/>
+          </a:bodyPr>
+          <a:lstStyle/>
+          <a:p>
+            <a:pPr algn="r"/>
+            <a:r>
+              <a:rPr sz="800" b="1">
+                <a:solidFill>
+                  <a:srgbClr val="65707C"/>
+                </a:solidFill>
+                <a:latin typeface="Arial"/>
+              </a:rPr>
+              <a:t>11</a:t>
+            </a:r>
+          </a:p>
+        </p:txBody>
+      </p:sp>
+      <p:sp>
+        <p:nvSpPr>
+          <p:cNvPr id="7" name="Rounded Rectangle 6"/>
+          <p:cNvSpPr/>
+          <p:nvPr/>
+        </p:nvSpPr>
+        <p:spPr>
+          <a:xfrm>
+            <a:off x="731520" y="1920240"/>
+            <a:ext cx="5486400" cy="3200400"/>
+          </a:xfrm>
+          <a:prstGeom prst="roundRect">
+            <a:avLst/>
+          </a:prstGeom>
+          <a:solidFill>
+            <a:srgbClr val="23282F"/>
+          </a:solidFill>
+          <a:ln>
+            <a:noFill/>
+          </a:ln>
+        </p:spPr>
+        <p:style>
+          <a:lnRef idx="1">
+            <a:schemeClr val="accent1"/>
+          </a:lnRef>
+          <a:fillRef idx="3">
+            <a:schemeClr val="accent1"/>
+          </a:fillRef>
+          <a:effectRef idx="2">
+            <a:schemeClr val="accent1"/>
+          </a:effectRef>
+          <a:fontRef idx="minor">
+            <a:schemeClr val="lt1"/>
+          </a:fontRef>
+        </p:style>
+        <p:txBody>
+          <a:bodyPr rtlCol="0" anchor="ctr"/>
+          <a:lstStyle/>
+          <a:p>
+            <a:pPr algn="ctr"/>
+          </a:p>
+        </p:txBody>
+      </p:sp>
+      <p:sp>
+        <p:nvSpPr>
+          <p:cNvPr id="8" name="TextBox 7"/>
+          <p:cNvSpPr txBox="1"/>
+          <p:nvPr/>
+        </p:nvSpPr>
+        <p:spPr>
+          <a:xfrm>
+            <a:off x="1005840" y="2286000"/>
+            <a:ext cx="4937760" cy="2011680"/>
+          </a:xfrm>
+          <a:prstGeom prst="rect">
+            <a:avLst/>
+          </a:prstGeom>
+          <a:noFill/>
+        </p:spPr>
+        <p:txBody>
+          <a:bodyPr wrap="square" lIns="45720" rIns="45720" tIns="27432" bIns="27432" anchor="t">
+            <a:spAutoFit/>
+          </a:bodyPr>
+          <a:lstStyle/>
+          <a:p>
+            <a:r>
+              <a:rPr sz="1600" b="0">
+                <a:solidFill>
+                  <a:srgbClr val="EEF1F3"/>
+                </a:solidFill>
+                <a:latin typeface="Courier New"/>
+              </a:rPr>
+              <a:t>struct Node {</a:t>
+            </a:r>
+          </a:p>
+          <a:p>
+            <a:r>
+              <a:rPr sz="1600" b="0">
+                <a:solidFill>
+                  <a:srgbClr val="EEF1F3"/>
+                </a:solidFill>
+                <a:latin typeface="Courier New"/>
+              </a:rPr>
+              <a:t>  children: array&lt;Node&gt;</a:t>
+            </a:r>
+          </a:p>
+          <a:p>
+            <a:r>
+              <a:rPr sz="1600" b="0">
+                <a:solidFill>
+                  <a:srgbClr val="EEF1F3"/>
+                </a:solidFill>
+                <a:latin typeface="Courier New"/>
+              </a:rPr>
+              <a:t>}</a:t>
+            </a:r>
+          </a:p>
+          <a:p/>
+          <a:p>
+            <a:r>
+              <a:rPr sz="1600" b="0">
+                <a:solidFill>
+                  <a:srgbClr val="EEF1F3"/>
+                </a:solidFill>
+                <a:latin typeface="Courier New"/>
+              </a:rPr>
+              <a:t>set kids (array_push kids n)</a:t>
+            </a:r>
+          </a:p>
+        </p:txBody>
+      </p:sp>
+      <p:sp>
+        <p:nvSpPr>
+          <p:cNvPr id="9" name="Rounded Rectangle 8"/>
+          <p:cNvSpPr/>
+          <p:nvPr/>
+        </p:nvSpPr>
+        <p:spPr>
+          <a:xfrm>
+            <a:off x="6537960" y="1920240"/>
+            <a:ext cx="4937760" cy="3200400"/>
+          </a:xfrm>
+          <a:prstGeom prst="roundRect">
+            <a:avLst/>
+          </a:prstGeom>
+          <a:solidFill>
+            <a:srgbClr val="101317"/>
+          </a:solidFill>
+          <a:ln>
+            <a:noFill/>
+          </a:ln>
+        </p:spPr>
+        <p:style>
+          <a:lnRef idx="1">
+            <a:schemeClr val="accent1"/>
+          </a:lnRef>
+          <a:fillRef idx="3">
+            <a:schemeClr val="accent1"/>
+          </a:fillRef>
+          <a:effectRef idx="2">
+            <a:schemeClr val="accent1"/>
+          </a:effectRef>
+          <a:fontRef idx="minor">
+            <a:schemeClr val="lt1"/>
+          </a:fontRef>
+        </p:style>
+        <p:txBody>
+          <a:bodyPr rtlCol="0" anchor="ctr"/>
+          <a:lstStyle/>
+          <a:p>
+            <a:pPr algn="ctr"/>
+          </a:p>
+        </p:txBody>
+      </p:sp>
+      <p:sp>
+        <p:nvSpPr>
+          <p:cNvPr id="10" name="TextBox 9"/>
+          <p:cNvSpPr txBox="1"/>
+          <p:nvPr/>
+        </p:nvSpPr>
+        <p:spPr>
+          <a:xfrm>
+            <a:off x="6858000" y="2286000"/>
+            <a:ext cx="4297680" cy="2560320"/>
+          </a:xfrm>
+          <a:prstGeom prst="rect">
+            <a:avLst/>
+          </a:prstGeom>
+          <a:noFill/>
+        </p:spPr>
+        <p:txBody>
+          <a:bodyPr wrap="square" lIns="45720" rIns="45720" tIns="27432" bIns="27432" anchor="t">
+            <a:spAutoFit/>
+          </a:bodyPr>
+          <a:lstStyle/>
+          <a:p>
+            <a:r>
+              <a:rPr sz="1600" b="1">
+                <a:solidFill>
+                  <a:srgbClr val="EEF1F3"/>
+                </a:solidFill>
+                <a:latin typeface="Arial"/>
+              </a:rPr>
+              <a:t>array_push mutates in place,</a:t>
+            </a:r>
+          </a:p>
+          <a:p>
+            <a:r>
+              <a:rPr sz="1600" b="1">
+                <a:solidFill>
+                  <a:srgbClr val="EEF1F3"/>
+                </a:solidFill>
+                <a:latin typeface="Arial"/>
+              </a:rPr>
+              <a:t>so the field and the local are</a:t>
+            </a:r>
+          </a:p>
+          <a:p>
+            <a:r>
+              <a:rPr sz="1600" b="1">
+                <a:solidFill>
+                  <a:srgbClr val="EEF1F3"/>
+                </a:solidFill>
+                <a:latin typeface="Arial"/>
+              </a:rPr>
+              <a:t>one object -- and it now</a:t>
+            </a:r>
+          </a:p>
+          <a:p>
+            <a:r>
+              <a:rPr sz="1600" b="1">
+                <a:solidFill>
+                  <a:srgbClr val="EEF1F3"/>
+                </a:solidFill>
+                <a:latin typeface="Arial"/>
+              </a:rPr>
+              <a:t>contains its own owner.</a:t>
+            </a:r>
+          </a:p>
+          <a:p/>
+          <a:p>
+            <a:r>
+              <a:rPr sz="1600" b="1">
+                <a:solidFill>
+                  <a:srgbClr val="EEF1F3"/>
+                </a:solidFill>
+                <a:latin typeface="Arial"/>
+              </a:rPr>
+              <a:t>Forbidding that shape would</a:t>
+            </a:r>
+          </a:p>
+          <a:p>
+            <a:r>
+              <a:rPr sz="1600" b="1">
+                <a:solidFill>
+                  <a:srgbClr val="EEF1F3"/>
+                </a:solidFill>
+                <a:latin typeface="Arial"/>
+              </a:rPr>
+              <a:t>forbid trees and graphs.</a:t>
+            </a:r>
+          </a:p>
+        </p:txBody>
+      </p:sp>
+    </p:spTree>
+  </p:cSld>
+  <p:clrMapOvr>
+    <a:masterClrMapping/>
+  </p:clrMapOvr>
+</p:sld>
+</file>
+
+<file path=ppt/slides/slide12.xml><?xml version="1.0" encoding="utf-8"?>
+<p:sld xmlns:a="http://schemas.openxmlformats.org/drawingml/2006/main" xmlns:p="http://schemas.openxmlformats.org/presentationml/2006/main" xmlns:r="http://schemas.openxmlformats.org/officeDocument/2006/relationships">
+  <p:cSld>
+    <p:spTree>
+      <p:nvGrpSpPr>
+        <p:cNvPr id="1" name=""/>
+        <p:cNvGrpSpPr/>
+        <p:nvPr/>
+      </p:nvGrpSpPr>
+      <p:grpSpPr/>
+      <p:sp>
+        <p:nvSpPr>
+          <p:cNvPr id="2" name="Rectangle 1"/>
+          <p:cNvSpPr/>
+          <p:nvPr/>
+        </p:nvSpPr>
+        <p:spPr>
+          <a:xfrm>
+            <a:off x="0" y="0"/>
+            <a:ext cx="12191695" cy="6858000"/>
+          </a:xfrm>
+          <a:prstGeom prst="rect">
+            <a:avLst/>
+          </a:prstGeom>
+          <a:solidFill>
+            <a:srgbClr val="EEF1F3"/>
+          </a:solidFill>
+          <a:ln>
+            <a:noFill/>
+          </a:ln>
+        </p:spPr>
+        <p:style>
+          <a:lnRef idx="1">
+            <a:schemeClr val="accent1"/>
+          </a:lnRef>
+          <a:fillRef idx="3">
+            <a:schemeClr val="accent1"/>
+          </a:fillRef>
+          <a:effectRef idx="2">
+            <a:schemeClr val="accent1"/>
+          </a:effectRef>
+          <a:fontRef idx="minor">
+            <a:schemeClr val="lt1"/>
+          </a:fontRef>
+        </p:style>
+        <p:txBody>
+          <a:bodyPr rtlCol="0" anchor="ctr"/>
+          <a:lstStyle/>
+          <a:p>
+            <a:pPr algn="ctr"/>
+          </a:p>
+        </p:txBody>
+      </p:sp>
+      <p:sp>
+        <p:nvSpPr>
+          <p:cNvPr id="3" name="TextBox 2"/>
+          <p:cNvSpPr txBox="1"/>
+          <p:nvPr/>
+        </p:nvSpPr>
+        <p:spPr>
+          <a:xfrm>
+            <a:off x="594360" y="457200"/>
+            <a:ext cx="10789920" cy="640080"/>
+          </a:xfrm>
+          <a:prstGeom prst="rect">
+            <a:avLst/>
+          </a:prstGeom>
+          <a:noFill/>
+        </p:spPr>
+        <p:txBody>
+          <a:bodyPr wrap="square" lIns="45720" rIns="45720" tIns="27432" bIns="27432" anchor="t">
+            <a:spAutoFit/>
+          </a:bodyPr>
+          <a:lstStyle/>
+          <a:p>
+            <a:r>
+              <a:rPr sz="2800" b="1">
+                <a:solidFill>
+                  <a:srgbClr val="101317"/>
+                </a:solidFill>
+                <a:latin typeface="Arial"/>
+              </a:rPr>
+              <a:t>What I measured, and what I declined because of it.</a:t>
+            </a:r>
+          </a:p>
+        </p:txBody>
+      </p:sp>
+      <p:sp>
+        <p:nvSpPr>
+          <p:cNvPr id="4" name="TextBox 3"/>
+          <p:cNvSpPr txBox="1"/>
+          <p:nvPr/>
+        </p:nvSpPr>
+        <p:spPr>
+          <a:xfrm>
+            <a:off x="621792" y="1170432"/>
+            <a:ext cx="10607040" cy="411480"/>
+          </a:xfrm>
+          <a:prstGeom prst="rect">
+            <a:avLst/>
+          </a:prstGeom>
+          <a:noFill/>
+        </p:spPr>
+        <p:txBody>
+          <a:bodyPr wrap="square" lIns="45720" rIns="45720" tIns="27432" bIns="27432" anchor="t">
+            <a:spAutoFit/>
+          </a:bodyPr>
+          <a:lstStyle/>
+          <a:p>
+            <a:r>
+              <a:rPr sz="1300" b="0">
+                <a:solidFill>
+                  <a:srgbClr val="65707C"/>
+                </a:solidFill>
+                <a:latin typeface="Arial"/>
+              </a:rPr>
+              <a:t>A number without its spread is not evidence. Every claim below carries a noise band.</a:t>
+            </a:r>
+          </a:p>
+        </p:txBody>
+      </p:sp>
+      <p:sp>
+        <p:nvSpPr>
+          <p:cNvPr id="5" name="TextBox 4"/>
+          <p:cNvSpPr txBox="1"/>
+          <p:nvPr/>
+        </p:nvSpPr>
+        <p:spPr>
+          <a:xfrm>
+            <a:off x="411480" y="6638544"/>
+            <a:ext cx="1097280" cy="137160"/>
+          </a:xfrm>
+          <a:prstGeom prst="rect">
+            <a:avLst/>
+          </a:prstGeom>
+          <a:noFill/>
+        </p:spPr>
+        <p:txBody>
+          <a:bodyPr wrap="square" lIns="45720" rIns="45720" tIns="27432" bIns="27432" anchor="t">
+            <a:spAutoFit/>
+          </a:bodyPr>
+          <a:lstStyle/>
+          <a:p>
+            <a:r>
+              <a:rPr sz="800" b="1">
+                <a:solidFill>
+                  <a:srgbClr val="65707C"/>
+                </a:solidFill>
+                <a:latin typeface="Arial"/>
+              </a:rPr>
+              <a:t>NANOLANG</a:t>
+            </a:r>
+          </a:p>
+        </p:txBody>
+      </p:sp>
+      <p:sp>
+        <p:nvSpPr>
+          <p:cNvPr id="6" name="TextBox 5"/>
+          <p:cNvSpPr txBox="1"/>
+          <p:nvPr/>
+        </p:nvSpPr>
+        <p:spPr>
+          <a:xfrm>
+            <a:off x="11567160" y="6638544"/>
+            <a:ext cx="228600" cy="137160"/>
+          </a:xfrm>
+          <a:prstGeom prst="rect">
+            <a:avLst/>
+          </a:prstGeom>
+          <a:noFill/>
+        </p:spPr>
+        <p:txBody>
+          <a:bodyPr wrap="square" lIns="45720" rIns="45720" tIns="27432" bIns="27432" anchor="t">
+            <a:spAutoFit/>
+          </a:bodyPr>
+          <a:lstStyle/>
+          <a:p>
+            <a:pPr algn="r"/>
+            <a:r>
+              <a:rPr sz="800" b="1">
+                <a:solidFill>
+                  <a:srgbClr val="65707C"/>
+                </a:solidFill>
+                <a:latin typeface="Arial"/>
+              </a:rPr>
+              <a:t>12</a:t>
+            </a:r>
+          </a:p>
+        </p:txBody>
+      </p:sp>
+      <p:sp>
+        <p:nvSpPr>
+          <p:cNvPr id="7" name="Rounded Rectangle 6"/>
+          <p:cNvSpPr/>
+          <p:nvPr/>
+        </p:nvSpPr>
+        <p:spPr>
+          <a:xfrm>
+            <a:off x="822960" y="1828800"/>
+            <a:ext cx="10515600" cy="566928"/>
+          </a:xfrm>
+          <a:prstGeom prst="roundRect">
+            <a:avLst/>
+          </a:prstGeom>
+          <a:solidFill>
+            <a:srgbClr val="23282F"/>
+          </a:solidFill>
+          <a:ln>
+            <a:noFill/>
+          </a:ln>
+        </p:spPr>
+        <p:style>
+          <a:lnRef idx="1">
+            <a:schemeClr val="accent1"/>
+          </a:lnRef>
+          <a:fillRef idx="3">
+            <a:schemeClr val="accent1"/>
+          </a:fillRef>
+          <a:effectRef idx="2">
+            <a:schemeClr val="accent1"/>
+          </a:effectRef>
+          <a:fontRef idx="minor">
+            <a:schemeClr val="lt1"/>
+          </a:fontRef>
+        </p:style>
+        <p:txBody>
+          <a:bodyPr rtlCol="0" anchor="ctr"/>
+          <a:lstStyle/>
+          <a:p>
+            <a:pPr algn="ctr"/>
+          </a:p>
+        </p:txBody>
+      </p:sp>
+      <p:sp>
+        <p:nvSpPr>
+          <p:cNvPr id="8" name="TextBox 7"/>
+          <p:cNvSpPr txBox="1"/>
+          <p:nvPr/>
+        </p:nvSpPr>
+        <p:spPr>
+          <a:xfrm>
+            <a:off x="1097280" y="1965960"/>
+            <a:ext cx="3108960" cy="274320"/>
+          </a:xfrm>
+          <a:prstGeom prst="rect">
+            <a:avLst/>
+          </a:prstGeom>
+          <a:noFill/>
+        </p:spPr>
+        <p:txBody>
+          <a:bodyPr wrap="square" lIns="45720" rIns="45720" tIns="27432" bIns="27432" anchor="t">
+            <a:spAutoFit/>
+          </a:bodyPr>
+          <a:lstStyle/>
+          <a:p>
+            <a:r>
+              <a:rPr sz="1500" b="1">
+                <a:solidFill>
+                  <a:srgbClr val="EEF1F3"/>
+                </a:solidFill>
+                <a:latin typeface="Arial"/>
+              </a:rPr>
+              <a:t>cold startup</a:t>
+            </a:r>
+          </a:p>
+        </p:txBody>
+      </p:sp>
+      <p:sp>
+        <p:nvSpPr>
+          <p:cNvPr id="9" name="TextBox 8"/>
+          <p:cNvSpPr txBox="1"/>
+          <p:nvPr/>
+        </p:nvSpPr>
+        <p:spPr>
+          <a:xfrm>
+            <a:off x="4389120" y="1965960"/>
+            <a:ext cx="2194560" cy="274320"/>
+          </a:xfrm>
+          <a:prstGeom prst="rect">
+            <a:avLst/>
+          </a:prstGeom>
+          <a:noFill/>
+        </p:spPr>
+        <p:txBody>
+          <a:bodyPr wrap="square" lIns="45720" rIns="45720" tIns="27432" bIns="27432" anchor="t">
+            <a:spAutoFit/>
+          </a:bodyPr>
+          <a:lstStyle/>
+          <a:p>
+            <a:r>
+              <a:rPr sz="1500" b="1">
+                <a:solidFill>
+                  <a:srgbClr val="FF6B35"/>
+                </a:solidFill>
+                <a:latin typeface="Courier New"/>
+              </a:rPr>
+              <a:t>17.4 ms</a:t>
+            </a:r>
+          </a:p>
+        </p:txBody>
+      </p:sp>
+      <p:sp>
+        <p:nvSpPr>
+          <p:cNvPr id="10" name="TextBox 9"/>
+          <p:cNvSpPr txBox="1"/>
+          <p:nvPr/>
+        </p:nvSpPr>
+        <p:spPr>
+          <a:xfrm>
+            <a:off x="6766560" y="1965960"/>
+            <a:ext cx="4389120" cy="274320"/>
+          </a:xfrm>
+          <a:prstGeom prst="rect">
+            <a:avLst/>
+          </a:prstGeom>
+          <a:noFill/>
+        </p:spPr>
+        <p:txBody>
+          <a:bodyPr wrap="square" lIns="45720" rIns="45720" tIns="27432" bIns="27432" anchor="t">
+            <a:spAutoFit/>
+          </a:bodyPr>
+          <a:lstStyle/>
+          <a:p>
+            <a:r>
+              <a:rPr sz="1400" b="0">
+                <a:solidFill>
+                  <a:srgbClr val="EEF1F3"/>
+                </a:solidFill>
+                <a:latin typeface="Arial"/>
+              </a:rPr>
+              <a:t>60-1800x a single execution</a:t>
+            </a:r>
+          </a:p>
+        </p:txBody>
+      </p:sp>
+      <p:sp>
+        <p:nvSpPr>
+          <p:cNvPr id="11" name="Rounded Rectangle 10"/>
+          <p:cNvSpPr/>
+          <p:nvPr/>
+        </p:nvSpPr>
+        <p:spPr>
+          <a:xfrm>
+            <a:off x="822960" y="2542032"/>
+            <a:ext cx="10515600" cy="566928"/>
+          </a:xfrm>
+          <a:prstGeom prst="roundRect">
+            <a:avLst/>
+          </a:prstGeom>
+          <a:solidFill>
+            <a:srgbClr val="23282F"/>
+          </a:solidFill>
+          <a:ln>
+            <a:noFill/>
+          </a:ln>
+        </p:spPr>
+        <p:style>
+          <a:lnRef idx="1">
+            <a:schemeClr val="accent1"/>
+          </a:lnRef>
+          <a:fillRef idx="3">
+            <a:schemeClr val="accent1"/>
+          </a:fillRef>
+          <a:effectRef idx="2">
+            <a:schemeClr val="accent1"/>
+          </a:effectRef>
+          <a:fontRef idx="minor">
+            <a:schemeClr val="lt1"/>
+          </a:fontRef>
+        </p:style>
+        <p:txBody>
+          <a:bodyPr rtlCol="0" anchor="ctr"/>
+          <a:lstStyle/>
+          <a:p>
+            <a:pPr algn="ctr"/>
+          </a:p>
+        </p:txBody>
+      </p:sp>
+      <p:sp>
+        <p:nvSpPr>
+          <p:cNvPr id="12" name="TextBox 11"/>
+          <p:cNvSpPr txBox="1"/>
+          <p:nvPr/>
+        </p:nvSpPr>
+        <p:spPr>
+          <a:xfrm>
+            <a:off x="1097280" y="2679192"/>
+            <a:ext cx="3108960" cy="274320"/>
+          </a:xfrm>
+          <a:prstGeom prst="rect">
+            <a:avLst/>
+          </a:prstGeom>
+          <a:noFill/>
+        </p:spPr>
+        <p:txBody>
+          <a:bodyPr wrap="square" lIns="45720" rIns="45720" tIns="27432" bIns="27432" anchor="t">
+            <a:spAutoFit/>
+          </a:bodyPr>
+          <a:lstStyle/>
+          <a:p>
+            <a:r>
+              <a:rPr sz="1500" b="1">
+                <a:solidFill>
+                  <a:srgbClr val="EEF1F3"/>
+                </a:solidFill>
+                <a:latin typeface="Arial"/>
+              </a:rPr>
+              <a:t>Forth interpreter</a:t>
+            </a:r>
+          </a:p>
+        </p:txBody>
+      </p:sp>
+      <p:sp>
+        <p:nvSpPr>
+          <p:cNvPr id="13" name="TextBox 12"/>
+          <p:cNvSpPr txBox="1"/>
+          <p:nvPr/>
+        </p:nvSpPr>
+        <p:spPr>
+          <a:xfrm>
+            <a:off x="4389120" y="2679192"/>
+            <a:ext cx="2194560" cy="274320"/>
+          </a:xfrm>
+          <a:prstGeom prst="rect">
+            <a:avLst/>
+          </a:prstGeom>
+          <a:noFill/>
+        </p:spPr>
+        <p:txBody>
+          <a:bodyPr wrap="square" lIns="45720" rIns="45720" tIns="27432" bIns="27432" anchor="t">
+            <a:spAutoFit/>
+          </a:bodyPr>
+          <a:lstStyle/>
+          <a:p>
+            <a:r>
+              <a:rPr sz="1500" b="1">
+                <a:solidFill>
+                  <a:srgbClr val="76B900"/>
+                </a:solidFill>
+                <a:latin typeface="Courier New"/>
+              </a:rPr>
+              <a:t>282.7 us</a:t>
+            </a:r>
+          </a:p>
+        </p:txBody>
+      </p:sp>
+      <p:sp>
+        <p:nvSpPr>
+          <p:cNvPr id="14" name="TextBox 13"/>
+          <p:cNvSpPr txBox="1"/>
+          <p:nvPr/>
+        </p:nvSpPr>
+        <p:spPr>
+          <a:xfrm>
+            <a:off x="6766560" y="2679192"/>
+            <a:ext cx="4389120" cy="274320"/>
+          </a:xfrm>
+          <a:prstGeom prst="rect">
+            <a:avLst/>
+          </a:prstGeom>
+          <a:noFill/>
+        </p:spPr>
+        <p:txBody>
+          <a:bodyPr wrap="square" lIns="45720" rIns="45720" tIns="27432" bIns="27432" anchor="t">
+            <a:spAutoFit/>
+          </a:bodyPr>
+          <a:lstStyle/>
+          <a:p>
+            <a:r>
+              <a:rPr sz="1400" b="0">
+                <a:solidFill>
+                  <a:srgbClr val="EEF1F3"/>
+                </a:solidFill>
+                <a:latin typeface="Arial"/>
+              </a:rPr>
+              <a:t>IQR 1.6%</a:t>
+            </a:r>
+          </a:p>
+        </p:txBody>
+      </p:sp>
+      <p:sp>
+        <p:nvSpPr>
+          <p:cNvPr id="15" name="Rounded Rectangle 14"/>
+          <p:cNvSpPr/>
+          <p:nvPr/>
+        </p:nvSpPr>
+        <p:spPr>
+          <a:xfrm>
+            <a:off x="822960" y="3255264"/>
+            <a:ext cx="10515600" cy="566928"/>
+          </a:xfrm>
+          <a:prstGeom prst="roundRect">
+            <a:avLst/>
+          </a:prstGeom>
+          <a:solidFill>
+            <a:srgbClr val="23282F"/>
+          </a:solidFill>
+          <a:ln>
+            <a:noFill/>
+          </a:ln>
+        </p:spPr>
+        <p:style>
+          <a:lnRef idx="1">
+            <a:schemeClr val="accent1"/>
+          </a:lnRef>
+          <a:fillRef idx="3">
+            <a:schemeClr val="accent1"/>
+          </a:fillRef>
+          <a:effectRef idx="2">
+            <a:schemeClr val="accent1"/>
+          </a:effectRef>
+          <a:fontRef idx="minor">
+            <a:schemeClr val="lt1"/>
+          </a:fontRef>
+        </p:style>
+        <p:txBody>
+          <a:bodyPr rtlCol="0" anchor="ctr"/>
+          <a:lstStyle/>
+          <a:p>
+            <a:pPr algn="ctr"/>
+          </a:p>
+        </p:txBody>
+      </p:sp>
+      <p:sp>
+        <p:nvSpPr>
+          <p:cNvPr id="16" name="TextBox 15"/>
+          <p:cNvSpPr txBox="1"/>
+          <p:nvPr/>
+        </p:nvSpPr>
+        <p:spPr>
+          <a:xfrm>
+            <a:off x="1097280" y="3392424"/>
+            <a:ext cx="3108960" cy="274320"/>
+          </a:xfrm>
+          <a:prstGeom prst="rect">
+            <a:avLst/>
+          </a:prstGeom>
+          <a:noFill/>
+        </p:spPr>
+        <p:txBody>
+          <a:bodyPr wrap="square" lIns="45720" rIns="45720" tIns="27432" bIns="27432" anchor="t">
+            <a:spAutoFit/>
+          </a:bodyPr>
+          <a:lstStyle/>
+          <a:p>
+            <a:r>
+              <a:rPr sz="1500" b="1">
+                <a:solidFill>
+                  <a:srgbClr val="EEF1F3"/>
+                </a:solidFill>
+                <a:latin typeface="Arial"/>
+              </a:rPr>
+              <a:t>computed goto</a:t>
+            </a:r>
+          </a:p>
+        </p:txBody>
+      </p:sp>
+      <p:sp>
+        <p:nvSpPr>
+          <p:cNvPr id="17" name="TextBox 16"/>
+          <p:cNvSpPr txBox="1"/>
+          <p:nvPr/>
+        </p:nvSpPr>
+        <p:spPr>
+          <a:xfrm>
+            <a:off x="4389120" y="3392424"/>
+            <a:ext cx="2194560" cy="274320"/>
+          </a:xfrm>
+          <a:prstGeom prst="rect">
+            <a:avLst/>
+          </a:prstGeom>
+          <a:noFill/>
+        </p:spPr>
+        <p:txBody>
+          <a:bodyPr wrap="square" lIns="45720" rIns="45720" tIns="27432" bIns="27432" anchor="t">
+            <a:spAutoFit/>
+          </a:bodyPr>
+          <a:lstStyle/>
+          <a:p>
+            <a:r>
+              <a:rPr sz="1500" b="1">
+                <a:solidFill>
+                  <a:srgbClr val="76B900"/>
+                </a:solidFill>
+                <a:latin typeface="Courier New"/>
+              </a:rPr>
+              <a:t>-4.2%</a:t>
+            </a:r>
+          </a:p>
+        </p:txBody>
+      </p:sp>
+      <p:sp>
+        <p:nvSpPr>
+          <p:cNvPr id="18" name="TextBox 17"/>
+          <p:cNvSpPr txBox="1"/>
+          <p:nvPr/>
+        </p:nvSpPr>
+        <p:spPr>
+          <a:xfrm>
+            <a:off x="6766560" y="3392424"/>
+            <a:ext cx="4389120" cy="274320"/>
+          </a:xfrm>
+          <a:prstGeom prst="rect">
+            <a:avLst/>
+          </a:prstGeom>
+          <a:noFill/>
+        </p:spPr>
+        <p:txBody>
+          <a:bodyPr wrap="square" lIns="45720" rIns="45720" tIns="27432" bIns="27432" anchor="t">
+            <a:spAutoFit/>
+          </a:bodyPr>
+          <a:lstStyle/>
+          <a:p>
+            <a:r>
+              <a:rPr sz="1400" b="0">
+                <a:solidFill>
+                  <a:srgbClr val="EEF1F3"/>
+                </a:solidFill>
+                <a:latin typeface="Arial"/>
+              </a:rPr>
+              <a:t>accepted: beats the band</a:t>
+            </a:r>
+          </a:p>
+        </p:txBody>
+      </p:sp>
+      <p:sp>
+        <p:nvSpPr>
+          <p:cNvPr id="19" name="Rounded Rectangle 18"/>
+          <p:cNvSpPr/>
+          <p:nvPr/>
+        </p:nvSpPr>
+        <p:spPr>
+          <a:xfrm>
+            <a:off x="822960" y="3968496"/>
+            <a:ext cx="10515600" cy="566928"/>
+          </a:xfrm>
+          <a:prstGeom prst="roundRect">
+            <a:avLst/>
+          </a:prstGeom>
+          <a:solidFill>
+            <a:srgbClr val="23282F"/>
+          </a:solidFill>
+          <a:ln>
+            <a:noFill/>
+          </a:ln>
+        </p:spPr>
+        <p:style>
+          <a:lnRef idx="1">
+            <a:schemeClr val="accent1"/>
+          </a:lnRef>
+          <a:fillRef idx="3">
+            <a:schemeClr val="accent1"/>
+          </a:fillRef>
+          <a:effectRef idx="2">
+            <a:schemeClr val="accent1"/>
+          </a:effectRef>
+          <a:fontRef idx="minor">
+            <a:schemeClr val="lt1"/>
+          </a:fontRef>
+        </p:style>
+        <p:txBody>
+          <a:bodyPr rtlCol="0" anchor="ctr"/>
+          <a:lstStyle/>
+          <a:p>
+            <a:pPr algn="ctr"/>
+          </a:p>
+        </p:txBody>
+      </p:sp>
+      <p:sp>
+        <p:nvSpPr>
+          <p:cNvPr id="20" name="TextBox 19"/>
+          <p:cNvSpPr txBox="1"/>
+          <p:nvPr/>
+        </p:nvSpPr>
+        <p:spPr>
+          <a:xfrm>
+            <a:off x="1097280" y="4105656"/>
+            <a:ext cx="3108960" cy="274320"/>
+          </a:xfrm>
+          <a:prstGeom prst="rect">
+            <a:avLst/>
+          </a:prstGeom>
+          <a:noFill/>
+        </p:spPr>
+        <p:txBody>
+          <a:bodyPr wrap="square" lIns="45720" rIns="45720" tIns="27432" bIns="27432" anchor="t">
+            <a:spAutoFit/>
+          </a:bodyPr>
+          <a:lstStyle/>
+          <a:p>
+            <a:r>
+              <a:rPr sz="1500" b="1">
+                <a:solidFill>
+                  <a:srgbClr val="EEF1F3"/>
+                </a:solidFill>
+                <a:latin typeface="Arial"/>
+              </a:rPr>
+              <a:t>split tag stacks</a:t>
+            </a:r>
+          </a:p>
+        </p:txBody>
+      </p:sp>
+      <p:sp>
+        <p:nvSpPr>
+          <p:cNvPr id="21" name="TextBox 20"/>
+          <p:cNvSpPr txBox="1"/>
+          <p:nvPr/>
+        </p:nvSpPr>
+        <p:spPr>
+          <a:xfrm>
+            <a:off x="4389120" y="4105656"/>
+            <a:ext cx="2194560" cy="274320"/>
+          </a:xfrm>
+          <a:prstGeom prst="rect">
+            <a:avLst/>
+          </a:prstGeom>
+          <a:noFill/>
+        </p:spPr>
+        <p:txBody>
+          <a:bodyPr wrap="square" lIns="45720" rIns="45720" tIns="27432" bIns="27432" anchor="t">
+            <a:spAutoFit/>
+          </a:bodyPr>
+          <a:lstStyle/>
+          <a:p>
+            <a:r>
+              <a:rPr sz="1500" b="1">
+                <a:solidFill>
+                  <a:srgbClr val="65707C"/>
+                </a:solidFill>
+                <a:latin typeface="Courier New"/>
+              </a:rPr>
+              <a:t>unmeasurable</a:t>
+            </a:r>
+          </a:p>
+        </p:txBody>
+      </p:sp>
+      <p:sp>
+        <p:nvSpPr>
+          <p:cNvPr id="22" name="TextBox 21"/>
+          <p:cNvSpPr txBox="1"/>
+          <p:nvPr/>
+        </p:nvSpPr>
+        <p:spPr>
+          <a:xfrm>
+            <a:off x="6766560" y="4105656"/>
+            <a:ext cx="4389120" cy="274320"/>
+          </a:xfrm>
+          <a:prstGeom prst="rect">
+            <a:avLst/>
+          </a:prstGeom>
+          <a:noFill/>
+        </p:spPr>
+        <p:txBody>
+          <a:bodyPr wrap="square" lIns="45720" rIns="45720" tIns="27432" bIns="27432" anchor="t">
+            <a:spAutoFit/>
+          </a:bodyPr>
+          <a:lstStyle/>
+          <a:p>
+            <a:r>
+              <a:rPr sz="1400" b="0">
+                <a:solidFill>
+                  <a:srgbClr val="EEF1F3"/>
+                </a:solidFill>
+                <a:latin typeface="Arial"/>
+              </a:rPr>
+              <a:t>declined: band is 5-10%</a:t>
+            </a:r>
+          </a:p>
+        </p:txBody>
+      </p:sp>
+      <p:sp>
+        <p:nvSpPr>
+          <p:cNvPr id="23" name="Rounded Rectangle 22"/>
+          <p:cNvSpPr/>
+          <p:nvPr/>
+        </p:nvSpPr>
+        <p:spPr>
+          <a:xfrm>
+            <a:off x="822960" y="4681728"/>
+            <a:ext cx="10515600" cy="566928"/>
+          </a:xfrm>
+          <a:prstGeom prst="roundRect">
+            <a:avLst/>
+          </a:prstGeom>
+          <a:solidFill>
+            <a:srgbClr val="23282F"/>
+          </a:solidFill>
+          <a:ln>
+            <a:noFill/>
+          </a:ln>
+        </p:spPr>
+        <p:style>
+          <a:lnRef idx="1">
+            <a:schemeClr val="accent1"/>
+          </a:lnRef>
+          <a:fillRef idx="3">
+            <a:schemeClr val="accent1"/>
+          </a:fillRef>
+          <a:effectRef idx="2">
+            <a:schemeClr val="accent1"/>
+          </a:effectRef>
+          <a:fontRef idx="minor">
+            <a:schemeClr val="lt1"/>
+          </a:fontRef>
+        </p:style>
+        <p:txBody>
+          <a:bodyPr rtlCol="0" anchor="ctr"/>
+          <a:lstStyle/>
+          <a:p>
+            <a:pPr algn="ctr"/>
+          </a:p>
+        </p:txBody>
+      </p:sp>
+      <p:sp>
+        <p:nvSpPr>
+          <p:cNvPr id="24" name="TextBox 23"/>
+          <p:cNvSpPr txBox="1"/>
+          <p:nvPr/>
+        </p:nvSpPr>
+        <p:spPr>
+          <a:xfrm>
+            <a:off x="1097280" y="4818888"/>
+            <a:ext cx="3108960" cy="274320"/>
+          </a:xfrm>
+          <a:prstGeom prst="rect">
+            <a:avLst/>
+          </a:prstGeom>
+          <a:noFill/>
+        </p:spPr>
+        <p:txBody>
+          <a:bodyPr wrap="square" lIns="45720" rIns="45720" tIns="27432" bIns="27432" anchor="t">
+            <a:spAutoFit/>
+          </a:bodyPr>
+          <a:lstStyle/>
+          <a:p>
+            <a:r>
+              <a:rPr sz="1500" b="1">
+                <a:solidFill>
+                  <a:srgbClr val="EEF1F3"/>
+                </a:solidFill>
+                <a:latin typeface="Arial"/>
+              </a:rPr>
+              <a:t>trap stack ranges</a:t>
+            </a:r>
+          </a:p>
+        </p:txBody>
+      </p:sp>
+      <p:sp>
+        <p:nvSpPr>
+          <p:cNvPr id="25" name="TextBox 24"/>
+          <p:cNvSpPr txBox="1"/>
+          <p:nvPr/>
+        </p:nvSpPr>
+        <p:spPr>
+          <a:xfrm>
+            <a:off x="4389120" y="4818888"/>
+            <a:ext cx="2194560" cy="274320"/>
+          </a:xfrm>
+          <a:prstGeom prst="rect">
+            <a:avLst/>
+          </a:prstGeom>
+          <a:noFill/>
+        </p:spPr>
+        <p:txBody>
+          <a:bodyPr wrap="square" lIns="45720" rIns="45720" tIns="27432" bIns="27432" anchor="t">
+            <a:spAutoFit/>
+          </a:bodyPr>
+          <a:lstStyle/>
+          <a:p>
+            <a:r>
+              <a:rPr sz="1500" b="1">
+                <a:solidFill>
+                  <a:srgbClr val="65707C"/>
+                </a:solidFill>
+                <a:latin typeface="Courier New"/>
+              </a:rPr>
+              <a:t>no effect</a:t>
+            </a:r>
+          </a:p>
+        </p:txBody>
+      </p:sp>
+      <p:sp>
+        <p:nvSpPr>
+          <p:cNvPr id="26" name="TextBox 25"/>
+          <p:cNvSpPr txBox="1"/>
+          <p:nvPr/>
+        </p:nvSpPr>
+        <p:spPr>
+          <a:xfrm>
+            <a:off x="6766560" y="4818888"/>
+            <a:ext cx="4389120" cy="274320"/>
+          </a:xfrm>
+          <a:prstGeom prst="rect">
+            <a:avLst/>
+          </a:prstGeom>
+          <a:noFill/>
+        </p:spPr>
+        <p:txBody>
+          <a:bodyPr wrap="square" lIns="45720" rIns="45720" tIns="27432" bIns="27432" anchor="t">
+            <a:spAutoFit/>
+          </a:bodyPr>
+          <a:lstStyle/>
+          <a:p>
+            <a:r>
+              <a:rPr sz="1400" b="0">
+                <a:solidFill>
+                  <a:srgbClr val="EEF1F3"/>
+                </a:solidFill>
+                <a:latin typeface="Arial"/>
+              </a:rPr>
+              <a:t>declined: crossing is 48x the copy</a:t>
+            </a:r>
+          </a:p>
+        </p:txBody>
+      </p:sp>
+    </p:spTree>
+  </p:cSld>
+  <p:clrMapOvr>
+    <a:masterClrMapping/>
+  </p:clrMapOvr>
+</p:sld>
+</file>
+
+<file path=ppt/slides/slide13.xml><?xml version="1.0" encoding="utf-8"?>
+<p:sld xmlns:a="http://schemas.openxmlformats.org/drawingml/2006/main" xmlns:p="http://schemas.openxmlformats.org/presentationml/2006/main" xmlns:r="http://schemas.openxmlformats.org/officeDocument/2006/relationships">
+  <p:cSld>
+    <p:spTree>
+      <p:nvGrpSpPr>
+        <p:cNvPr id="1" name=""/>
+        <p:cNvGrpSpPr/>
+        <p:nvPr/>
+      </p:nvGrpSpPr>
+      <p:grpSpPr/>
+      <p:sp>
+        <p:nvSpPr>
+          <p:cNvPr id="2" name="Rectangle 1"/>
+          <p:cNvSpPr/>
+          <p:nvPr/>
+        </p:nvSpPr>
+        <p:spPr>
+          <a:xfrm>
+            <a:off x="0" y="0"/>
+            <a:ext cx="12191695" cy="6858000"/>
+          </a:xfrm>
+          <a:prstGeom prst="rect">
+            <a:avLst/>
+          </a:prstGeom>
+          <a:solidFill>
+            <a:srgbClr val="101317"/>
+          </a:solidFill>
+          <a:ln>
+            <a:noFill/>
+          </a:ln>
+        </p:spPr>
+        <p:style>
+          <a:lnRef idx="1">
+            <a:schemeClr val="accent1"/>
+          </a:lnRef>
+          <a:fillRef idx="3">
+            <a:schemeClr val="accent1"/>
+          </a:fillRef>
+          <a:effectRef idx="2">
+            <a:schemeClr val="accent1"/>
+          </a:effectRef>
+          <a:fontRef idx="minor">
+            <a:schemeClr val="lt1"/>
+          </a:fontRef>
+        </p:style>
+        <p:txBody>
+          <a:bodyPr rtlCol="0" anchor="ctr"/>
+          <a:lstStyle/>
+          <a:p>
+            <a:pPr algn="ctr"/>
+          </a:p>
+        </p:txBody>
+      </p:sp>
+      <p:sp>
+        <p:nvSpPr>
+          <p:cNvPr id="3" name="TextBox 2"/>
+          <p:cNvSpPr txBox="1"/>
+          <p:nvPr/>
+        </p:nvSpPr>
+        <p:spPr>
+          <a:xfrm>
+            <a:off x="594360" y="457200"/>
+            <a:ext cx="10789920" cy="640080"/>
+          </a:xfrm>
+          <a:prstGeom prst="rect">
+            <a:avLst/>
+          </a:prstGeom>
+          <a:noFill/>
+        </p:spPr>
+        <p:txBody>
+          <a:bodyPr wrap="square" lIns="45720" rIns="45720" tIns="27432" bIns="27432" anchor="t">
+            <a:spAutoFit/>
+          </a:bodyPr>
+          <a:lstStyle/>
+          <a:p>
+            <a:r>
+              <a:rPr sz="2800" b="1">
+                <a:solidFill>
+                  <a:srgbClr val="EEF1F3"/>
+                </a:solidFill>
+                <a:latin typeface="Arial"/>
+              </a:rPr>
+              <a:t>4.0 shipped. Here is what I have not done.</a:t>
+            </a:r>
+          </a:p>
+        </p:txBody>
+      </p:sp>
+      <p:sp>
+        <p:nvSpPr>
+          <p:cNvPr id="4" name="TextBox 3"/>
+          <p:cNvSpPr txBox="1"/>
+          <p:nvPr/>
+        </p:nvSpPr>
+        <p:spPr>
+          <a:xfrm>
+            <a:off x="621792" y="1170432"/>
+            <a:ext cx="10607040" cy="411480"/>
+          </a:xfrm>
+          <a:prstGeom prst="rect">
+            <a:avLst/>
+          </a:prstGeom>
+          <a:noFill/>
+        </p:spPr>
+        <p:txBody>
+          <a:bodyPr wrap="square" lIns="45720" rIns="45720" tIns="27432" bIns="27432" anchor="t">
+            <a:spAutoFit/>
+          </a:bodyPr>
+          <a:lstStyle/>
+          <a:p>
+            <a:r>
+              <a:rPr sz="1300" b="0">
+                <a:solidFill>
+                  <a:srgbClr val="72B7D6"/>
+                </a:solidFill>
+                <a:latin typeface="Arial"/>
+              </a:rPr>
+              <a:t>I keep the boundary visible, because a known defect is not the same as an unknown one.</a:t>
+            </a:r>
+          </a:p>
+        </p:txBody>
+      </p:sp>
+      <p:sp>
+        <p:nvSpPr>
+          <p:cNvPr id="5" name="TextBox 4"/>
+          <p:cNvSpPr txBox="1"/>
+          <p:nvPr/>
+        </p:nvSpPr>
+        <p:spPr>
+          <a:xfrm>
+            <a:off x="411480" y="6638544"/>
+            <a:ext cx="1097280" cy="137160"/>
+          </a:xfrm>
+          <a:prstGeom prst="rect">
+            <a:avLst/>
+          </a:prstGeom>
+          <a:noFill/>
+        </p:spPr>
+        <p:txBody>
+          <a:bodyPr wrap="square" lIns="45720" rIns="45720" tIns="27432" bIns="27432" anchor="t">
+            <a:spAutoFit/>
+          </a:bodyPr>
+          <a:lstStyle/>
+          <a:p>
+            <a:r>
+              <a:rPr sz="800" b="1">
+                <a:solidFill>
+                  <a:srgbClr val="65707C"/>
+                </a:solidFill>
+                <a:latin typeface="Arial"/>
+              </a:rPr>
+              <a:t>NANOLANG</a:t>
+            </a:r>
+          </a:p>
+        </p:txBody>
+      </p:sp>
+      <p:sp>
+        <p:nvSpPr>
+          <p:cNvPr id="6" name="TextBox 5"/>
+          <p:cNvSpPr txBox="1"/>
+          <p:nvPr/>
+        </p:nvSpPr>
+        <p:spPr>
+          <a:xfrm>
+            <a:off x="11567160" y="6638544"/>
+            <a:ext cx="228600" cy="137160"/>
+          </a:xfrm>
+          <a:prstGeom prst="rect">
+            <a:avLst/>
+          </a:prstGeom>
+          <a:noFill/>
+        </p:spPr>
+        <p:txBody>
+          <a:bodyPr wrap="square" lIns="45720" rIns="45720" tIns="27432" bIns="27432" anchor="t">
+            <a:spAutoFit/>
+          </a:bodyPr>
+          <a:lstStyle/>
+          <a:p>
+            <a:pPr algn="r"/>
+            <a:r>
+              <a:rPr sz="800" b="1">
+                <a:solidFill>
+                  <a:srgbClr val="65707C"/>
+                </a:solidFill>
+                <a:latin typeface="Arial"/>
+              </a:rPr>
+              <a:t>13</a:t>
+            </a:r>
+          </a:p>
+        </p:txBody>
+      </p:sp>
+      <p:sp>
+        <p:nvSpPr>
+          <p:cNvPr id="7" name="Rounded Rectangle 6"/>
+          <p:cNvSpPr/>
+          <p:nvPr/>
+        </p:nvSpPr>
+        <p:spPr>
+          <a:xfrm>
+            <a:off x="731520" y="1828800"/>
+            <a:ext cx="5166360" cy="3566160"/>
+          </a:xfrm>
+          <a:prstGeom prst="roundRect">
+            <a:avLst/>
+          </a:prstGeom>
+          <a:solidFill>
+            <a:srgbClr val="23282F"/>
+          </a:solidFill>
+          <a:ln>
+            <a:noFill/>
+          </a:ln>
+        </p:spPr>
+        <p:style>
+          <a:lnRef idx="1">
+            <a:schemeClr val="accent1"/>
+          </a:lnRef>
+          <a:fillRef idx="3">
+            <a:schemeClr val="accent1"/>
+          </a:fillRef>
+          <a:effectRef idx="2">
+            <a:schemeClr val="accent1"/>
+          </a:effectRef>
+          <a:fontRef idx="minor">
+            <a:schemeClr val="lt1"/>
+          </a:fontRef>
+        </p:style>
+        <p:txBody>
+          <a:bodyPr rtlCol="0" anchor="ctr"/>
+          <a:lstStyle/>
+          <a:p>
+            <a:pPr algn="ctr"/>
+          </a:p>
+        </p:txBody>
+      </p:sp>
+      <p:sp>
+        <p:nvSpPr>
+          <p:cNvPr id="8" name="TextBox 7"/>
+          <p:cNvSpPr txBox="1"/>
+          <p:nvPr/>
+        </p:nvSpPr>
+        <p:spPr>
+          <a:xfrm>
+            <a:off x="1005840" y="2148840"/>
+            <a:ext cx="4480560" cy="274320"/>
+          </a:xfrm>
+          <a:prstGeom prst="rect">
+            <a:avLst/>
+          </a:prstGeom>
+          <a:noFill/>
+        </p:spPr>
+        <p:txBody>
+          <a:bodyPr wrap="square" lIns="45720" rIns="45720" tIns="27432" bIns="27432" anchor="t">
+            <a:spAutoFit/>
+          </a:bodyPr>
+          <a:lstStyle/>
+          <a:p>
+            <a:r>
+              <a:rPr sz="1500" b="1">
+                <a:solidFill>
+                  <a:srgbClr val="76B900"/>
+                </a:solidFill>
+                <a:latin typeface="Arial"/>
+              </a:rPr>
+              <a:t>4.0 SHIPPED</a:t>
+            </a:r>
+          </a:p>
+        </p:txBody>
+      </p:sp>
+      <p:sp>
+        <p:nvSpPr>
+          <p:cNvPr id="9" name="TextBox 8"/>
+          <p:cNvSpPr txBox="1"/>
+          <p:nvPr/>
+        </p:nvSpPr>
+        <p:spPr>
+          <a:xfrm>
+            <a:off x="1005840" y="2651760"/>
+            <a:ext cx="4297680" cy="2377440"/>
+          </a:xfrm>
+          <a:prstGeom prst="rect">
+            <a:avLst/>
+          </a:prstGeom>
+          <a:noFill/>
+        </p:spPr>
+        <p:txBody>
+          <a:bodyPr wrap="square" lIns="45720" rIns="45720" tIns="27432" bIns="27432" anchor="t">
+            <a:spAutoFit/>
+          </a:bodyPr>
+          <a:lstStyle/>
+          <a:p>
+            <a:r>
+              <a:rPr sz="1800" b="1">
+                <a:solidFill>
+                  <a:srgbClr val="EEF1F3"/>
+                </a:solidFill>
+                <a:latin typeface="Arial"/>
+              </a:rPr>
+              <a:t>v2 module format</a:t>
+            </a:r>
+          </a:p>
+          <a:p>
+            <a:r>
+              <a:rPr sz="1800" b="1">
+                <a:solidFill>
+                  <a:srgbClr val="EEF1F3"/>
+                </a:solidFill>
+                <a:latin typeface="Arial"/>
+              </a:rPr>
+              <a:t>stack and type verification</a:t>
+            </a:r>
+          </a:p>
+          <a:p>
+            <a:r>
+              <a:rPr sz="1800" b="1">
+                <a:solidFill>
+                  <a:srgbClr val="EEF1F3"/>
+                </a:solidFill>
+                <a:latin typeface="Arial"/>
+              </a:rPr>
+              <a:t>return, depth, ownership</a:t>
+            </a:r>
+          </a:p>
+          <a:p>
+            <a:r>
+              <a:rPr sz="1800" b="1">
+                <a:solidFill>
+                  <a:srgbClr val="EEF1F3"/>
+                </a:solidFill>
+                <a:latin typeface="Arial"/>
+              </a:rPr>
+              <a:t>cycle collection</a:t>
+            </a:r>
+          </a:p>
+          <a:p>
+            <a:r>
+              <a:rPr sz="1800" b="1">
+                <a:solidFill>
+                  <a:srgbClr val="EEF1F3"/>
+                </a:solidFill>
+                <a:latin typeface="Arial"/>
+              </a:rPr>
+              <a:t>computed dispatch</a:t>
+            </a:r>
+          </a:p>
+          <a:p>
+            <a:r>
+              <a:rPr sz="1800" b="1">
+                <a:solidFill>
+                  <a:srgbClr val="EEF1F3"/>
+                </a:solidFill>
+                <a:latin typeface="Arial"/>
+              </a:rPr>
+              <a:t>honest measurement</a:t>
+            </a:r>
+          </a:p>
+        </p:txBody>
+      </p:sp>
+      <p:sp>
+        <p:nvSpPr>
+          <p:cNvPr id="10" name="Rounded Rectangle 9"/>
+          <p:cNvSpPr/>
+          <p:nvPr/>
+        </p:nvSpPr>
+        <p:spPr>
+          <a:xfrm>
+            <a:off x="6309360" y="1828800"/>
+            <a:ext cx="5166360" cy="3566160"/>
+          </a:xfrm>
+          <a:prstGeom prst="roundRect">
+            <a:avLst/>
+          </a:prstGeom>
+          <a:solidFill>
+            <a:srgbClr val="101317"/>
+          </a:solidFill>
+          <a:ln>
+            <a:noFill/>
+          </a:ln>
+        </p:spPr>
+        <p:style>
+          <a:lnRef idx="1">
+            <a:schemeClr val="accent1"/>
+          </a:lnRef>
+          <a:fillRef idx="3">
+            <a:schemeClr val="accent1"/>
+          </a:fillRef>
+          <a:effectRef idx="2">
+            <a:schemeClr val="accent1"/>
+          </a:effectRef>
+          <a:fontRef idx="minor">
+            <a:schemeClr val="lt1"/>
+          </a:fontRef>
+        </p:style>
+        <p:txBody>
+          <a:bodyPr rtlCol="0" anchor="ctr"/>
+          <a:lstStyle/>
+          <a:p>
+            <a:pPr algn="ctr"/>
+          </a:p>
+        </p:txBody>
+      </p:sp>
+      <p:sp>
+        <p:nvSpPr>
+          <p:cNvPr id="11" name="TextBox 10"/>
+          <p:cNvSpPr txBox="1"/>
+          <p:nvPr/>
+        </p:nvSpPr>
+        <p:spPr>
+          <a:xfrm>
+            <a:off x="6583680" y="2148840"/>
+            <a:ext cx="4480560" cy="274320"/>
+          </a:xfrm>
+          <a:prstGeom prst="rect">
+            <a:avLst/>
+          </a:prstGeom>
+          <a:noFill/>
+        </p:spPr>
+        <p:txBody>
+          <a:bodyPr wrap="square" lIns="45720" rIns="45720" tIns="27432" bIns="27432" anchor="t">
+            <a:spAutoFit/>
+          </a:bodyPr>
+          <a:lstStyle/>
+          <a:p>
+            <a:r>
+              <a:rPr sz="1500" b="1">
+                <a:solidFill>
+                  <a:srgbClr val="FF6B35"/>
+                </a:solidFill>
+                <a:latin typeface="Arial"/>
+              </a:rPr>
+              <a:t>NOT DONE</a:t>
+            </a:r>
+          </a:p>
+        </p:txBody>
+      </p:sp>
+      <p:sp>
+        <p:nvSpPr>
+          <p:cNvPr id="12" name="TextBox 11"/>
+          <p:cNvSpPr txBox="1"/>
+          <p:nvPr/>
+        </p:nvSpPr>
+        <p:spPr>
+          <a:xfrm>
+            <a:off x="6583680" y="2651760"/>
+            <a:ext cx="4297680" cy="2377440"/>
+          </a:xfrm>
+          <a:prstGeom prst="rect">
+            <a:avLst/>
+          </a:prstGeom>
+          <a:noFill/>
+        </p:spPr>
+        <p:txBody>
+          <a:bodyPr wrap="square" lIns="45720" rIns="45720" tIns="27432" bIns="27432" anchor="t">
+            <a:spAutoFit/>
+          </a:bodyPr>
+          <a:lstStyle/>
+          <a:p>
+            <a:r>
+              <a:rPr sz="1800" b="1">
+                <a:solidFill>
+                  <a:srgbClr val="EEF1F3"/>
+                </a:solidFill>
+                <a:latin typeface="Arial"/>
+              </a:rPr>
+              <a:t>header dependencies (#211)</a:t>
+            </a:r>
+          </a:p>
+          <a:p>
+            <a:r>
+              <a:rPr sz="1800" b="1">
+                <a:solidFill>
+                  <a:srgbClr val="EEF1F3"/>
+                </a:solidFill>
+                <a:latin typeface="Arial"/>
+              </a:rPr>
+              <a:t>module signing → 5.0</a:t>
+            </a:r>
+          </a:p>
+          <a:p>
+            <a:r>
+              <a:rPr sz="1800" b="1">
+                <a:solidFill>
+                  <a:srgbClr val="EEF1F3"/>
+                </a:solidFill>
+                <a:latin typeface="Arial"/>
+              </a:rPr>
+              <a:t>LLVM and Wasm as</a:t>
+            </a:r>
+          </a:p>
+          <a:p>
+            <a:r>
+              <a:rPr sz="1800" b="1">
+                <a:solidFill>
+                  <a:srgbClr val="EEF1F3"/>
+                </a:solidFill>
+                <a:latin typeface="Arial"/>
+              </a:rPr>
+              <a:t>  NanoISA translators</a:t>
+            </a:r>
+          </a:p>
+          <a:p>
+            <a:r>
+              <a:rPr sz="1800" b="1">
+                <a:solidFill>
+                  <a:srgbClr val="EEF1F3"/>
+                </a:solidFill>
+                <a:latin typeface="Arial"/>
+              </a:rPr>
+              <a:t>Forth 2012 → 4.1</a:t>
+            </a:r>
+          </a:p>
+        </p:txBody>
+      </p:sp>
+    </p:spTree>
+  </p:cSld>
+  <p:clrMapOvr>
+    <a:masterClrMapping/>
+  </p:clrMapOvr>
+</p:sld>
+</file>
+
+<file path=ppt/slides/slide14.xml><?xml version="1.0" encoding="utf-8"?>
+<p:sld xmlns:a="http://schemas.openxmlformats.org/drawingml/2006/main" xmlns:p="http://schemas.openxmlformats.org/presentationml/2006/main" xmlns:r="http://schemas.openxmlformats.org/officeDocument/2006/relationships">
+  <p:cSld>
+    <p:spTree>
+      <p:nvGrpSpPr>
+        <p:cNvPr id="1" name=""/>
+        <p:cNvGrpSpPr/>
+        <p:nvPr/>
+      </p:nvGrpSpPr>
+      <p:grpSpPr/>
+      <p:sp>
+        <p:nvSpPr>
+          <p:cNvPr id="2" name="Rectangle 1"/>
+          <p:cNvSpPr/>
+          <p:nvPr/>
+        </p:nvSpPr>
+        <p:spPr>
+          <a:xfrm>
+            <a:off x="0" y="0"/>
+            <a:ext cx="12191695" cy="6858000"/>
+          </a:xfrm>
+          <a:prstGeom prst="rect">
+            <a:avLst/>
+          </a:prstGeom>
+          <a:solidFill>
+            <a:srgbClr val="101317"/>
+          </a:solidFill>
+          <a:ln>
+            <a:noFill/>
+          </a:ln>
+        </p:spPr>
+        <p:style>
+          <a:lnRef idx="1">
+            <a:schemeClr val="accent1"/>
+          </a:lnRef>
+          <a:fillRef idx="3">
+            <a:schemeClr val="accent1"/>
+          </a:fillRef>
+          <a:effectRef idx="2">
+            <a:schemeClr val="accent1"/>
+          </a:effectRef>
+          <a:fontRef idx="minor">
+            <a:schemeClr val="lt1"/>
+          </a:fontRef>
+        </p:style>
+        <p:txBody>
+          <a:bodyPr rtlCol="0" anchor="ctr"/>
+          <a:lstStyle/>
+          <a:p>
+            <a:pPr algn="ctr"/>
+          </a:p>
+        </p:txBody>
+      </p:sp>
       <p:pic>
         <p:nvPicPr>
           <p:cNvPr id="3" name="Picture 2" descr="nanolang-mascot.png"/>
@@ -5187,27 +7402,27 @@
         <p:spPr>
           <a:xfrm>
             <a:off x="731520" y="4800600"/>
-            <a:ext cx="6766560" cy="365760"/>
-          </a:xfrm>
-          <a:prstGeom prst="rect">
-            <a:avLst/>
-          </a:prstGeom>
-          <a:noFill/>
-        </p:spPr>
-        <p:txBody>
-          <a:bodyPr wrap="square" lIns="45720" rIns="45720" tIns="27432" bIns="27432" anchor="t">
-            <a:spAutoFit/>
-          </a:bodyPr>
-          <a:lstStyle/>
-          <a:p>
-            <a:r>
-              <a:rPr sz="1300" b="0">
+            <a:ext cx="6949440" cy="365760"/>
+          </a:xfrm>
+          <a:prstGeom prst="rect">
+            <a:avLst/>
+          </a:prstGeom>
+          <a:noFill/>
+        </p:spPr>
+        <p:txBody>
+          <a:bodyPr wrap="square" lIns="45720" rIns="45720" tIns="27432" bIns="27432" anchor="t">
+            <a:spAutoFit/>
+          </a:bodyPr>
+          <a:lstStyle/>
+          <a:p>
+            <a:r>
+              <a:rPr sz="1200" b="0">
                 <a:solidFill>
                   <a:srgbClr val="72B7D6"/>
                 </a:solidFill>
                 <a:latin typeface="Courier New"/>
               </a:rPr>
-              <a:t>docs/PERSONA.md · docs/ROADMAP.md · CONTRIBUTING.md</a:t>
+              <a:t>docs/RELEASE_4.0.md · docs/ROADMAP.md · docs/NANOISA_MEASUREMENTS.md</a:t>
             </a:r>
           </a:p>
         </p:txBody>
@@ -5276,7 +7491,7 @@
                 </a:solidFill>
                 <a:latin typeface="Arial"/>
               </a:rPr>
-              <a:t>12</a:t>
+              <a:t>14</a:t>
             </a:r>
           </a:p>
         </p:txBody>
@@ -5898,7 +8113,7 @@
             <a:r>
               <a:rPr sz="2800" b="1">
                 <a:solidFill>
-                  <a:srgbClr val="101317"/>
+                  <a:srgbClr val="EEF1F3"/>
                 </a:solidFill>
                 <a:latin typeface="Arial"/>
               </a:rPr>
@@ -5932,7 +8147,7 @@
             <a:r>
               <a:rPr sz="1300" b="0">
                 <a:solidFill>
-                  <a:srgbClr val="65707C"/>
+                  <a:srgbClr val="72B7D6"/>
                 </a:solidFill>
                 <a:latin typeface="Arial"/>
               </a:rPr>
@@ -6449,7 +8664,7 @@
                 </a:solidFill>
                 <a:latin typeface="Arial"/>
               </a:rPr>
-              <a:t>decoded execution</a:t>
+              <a:t>verified execution</a:t>
             </a:r>
           </a:p>
         </p:txBody>
@@ -6994,11 +9209,11 @@
             <a:r>
               <a:rPr sz="2800" b="1">
                 <a:solidFill>
-                  <a:srgbClr val="101317"/>
-                </a:solidFill>
-                <a:latin typeface="Arial"/>
-              </a:rPr>
-              <a:t>NanoVM executes decoded instructions.</a:t>
+                  <a:srgbClr val="EEF1F3"/>
+                </a:solidFill>
+                <a:latin typeface="Arial"/>
+              </a:rPr>
+              <a:t>My module format carries the instruction set.</a:t>
             </a:r>
           </a:p>
         </p:txBody>
@@ -7028,11 +9243,11 @@
             <a:r>
               <a:rPr sz="1300" b="0">
                 <a:solidFill>
-                  <a:srgbClr val="65707C"/>
-                </a:solidFill>
-                <a:latin typeface="Arial"/>
-              </a:rPr>
-              <a:t>I preserve byte offsets for diagnostics while the private cursor advances through instruction records.</a:t>
+                  <a:srgbClr val="72B7D6"/>
+                </a:solidFill>
+                <a:latin typeface="Arial"/>
+              </a:rPr>
+              <a:t>A .nvm file is a v2 container: versioned, bounded, and refused rather than guessed at.</a:t>
             </a:r>
           </a:p>
         </p:txBody>
@@ -7114,8 +9329,8 @@
         </p:nvSpPr>
         <p:spPr>
           <a:xfrm>
-            <a:off x="822960" y="2423160"/>
-            <a:ext cx="2148840" cy="1097280"/>
+            <a:off x="685800" y="2148840"/>
+            <a:ext cx="2240280" cy="1965960"/>
           </a:xfrm>
           <a:prstGeom prst="roundRect">
             <a:avLst/>
@@ -7157,28 +9372,28 @@
         </p:nvSpPr>
         <p:spPr>
           <a:xfrm>
-            <a:off x="960120" y="2606040"/>
-            <a:ext cx="320040" cy="274320"/>
-          </a:xfrm>
-          <a:prstGeom prst="rect">
-            <a:avLst/>
-          </a:prstGeom>
-          <a:noFill/>
-        </p:spPr>
-        <p:txBody>
-          <a:bodyPr wrap="square" lIns="45720" rIns="45720" tIns="27432" bIns="27432" anchor="t">
-            <a:spAutoFit/>
-          </a:bodyPr>
-          <a:lstStyle/>
-          <a:p>
-            <a:r>
-              <a:rPr sz="1600" b="1">
-                <a:solidFill>
-                  <a:srgbClr val="FF6B35"/>
-                </a:solidFill>
-                <a:latin typeface="Arial"/>
-              </a:rPr>
-              <a:t>1</a:t>
+            <a:off x="868680" y="2377440"/>
+            <a:ext cx="1874519" cy="274320"/>
+          </a:xfrm>
+          <a:prstGeom prst="rect">
+            <a:avLst/>
+          </a:prstGeom>
+          <a:noFill/>
+        </p:spPr>
+        <p:txBody>
+          <a:bodyPr wrap="square" lIns="45720" rIns="45720" tIns="27432" bIns="27432" anchor="t">
+            <a:spAutoFit/>
+          </a:bodyPr>
+          <a:lstStyle/>
+          <a:p>
+            <a:r>
+              <a:rPr sz="1300" b="1">
+                <a:solidFill>
+                  <a:srgbClr val="76B900"/>
+                </a:solidFill>
+                <a:latin typeface="Arial"/>
+              </a:rPr>
+              <a:t>BOUNDED</a:t>
             </a:r>
           </a:p>
         </p:txBody>
@@ -7191,28 +9406,39 @@
         </p:nvSpPr>
         <p:spPr>
           <a:xfrm>
-            <a:off x="1325880" y="2606040"/>
-            <a:ext cx="1417320" cy="457200"/>
-          </a:xfrm>
-          <a:prstGeom prst="rect">
-            <a:avLst/>
-          </a:prstGeom>
-          <a:noFill/>
-        </p:spPr>
-        <p:txBody>
-          <a:bodyPr wrap="square" lIns="45720" rIns="45720" tIns="27432" bIns="27432" anchor="t">
-            <a:spAutoFit/>
-          </a:bodyPr>
-          <a:lstStyle/>
-          <a:p>
-            <a:r>
-              <a:rPr sz="1400" b="1">
+            <a:off x="868680" y="2834640"/>
+            <a:ext cx="1874519" cy="1097280"/>
+          </a:xfrm>
+          <a:prstGeom prst="rect">
+            <a:avLst/>
+          </a:prstGeom>
+          <a:noFill/>
+        </p:spPr>
+        <p:txBody>
+          <a:bodyPr wrap="square" lIns="45720" rIns="45720" tIns="27432" bIns="27432" anchor="t">
+            <a:spAutoFit/>
+          </a:bodyPr>
+          <a:lstStyle/>
+          <a:p>
+            <a:r>
+              <a:rPr sz="1400" b="0">
                 <a:solidFill>
                   <a:srgbClr val="EEF1F3"/>
                 </a:solidFill>
                 <a:latin typeface="Arial"/>
               </a:rPr>
-              <a:t>decode once</a:t>
+              <a:t>every range checked</a:t>
+            </a:r>
+          </a:p>
+          <a:p>
+            <a:r>
+              <a:rPr sz="1400" b="0">
+                <a:solidFill>
+                  <a:srgbClr val="EEF1F3"/>
+                </a:solidFill>
+                <a:latin typeface="Arial"/>
+              </a:rPr>
+              <a:t>by subtraction</a:t>
             </a:r>
           </a:p>
         </p:txBody>
@@ -7225,8 +9451,8 @@
         </p:nvSpPr>
         <p:spPr>
           <a:xfrm>
-            <a:off x="3566160" y="2423160"/>
-            <a:ext cx="2148840" cy="1097280"/>
+            <a:off x="3474720" y="2148840"/>
+            <a:ext cx="2240280" cy="1965960"/>
           </a:xfrm>
           <a:prstGeom prst="roundRect">
             <a:avLst/>
@@ -7268,28 +9494,28 @@
         </p:nvSpPr>
         <p:spPr>
           <a:xfrm>
-            <a:off x="3703320" y="2606040"/>
-            <a:ext cx="320040" cy="274320"/>
-          </a:xfrm>
-          <a:prstGeom prst="rect">
-            <a:avLst/>
-          </a:prstGeom>
-          <a:noFill/>
-        </p:spPr>
-        <p:txBody>
-          <a:bodyPr wrap="square" lIns="45720" rIns="45720" tIns="27432" bIns="27432" anchor="t">
-            <a:spAutoFit/>
-          </a:bodyPr>
-          <a:lstStyle/>
-          <a:p>
-            <a:r>
-              <a:rPr sz="1600" b="1">
-                <a:solidFill>
-                  <a:srgbClr val="FF6B35"/>
-                </a:solidFill>
-                <a:latin typeface="Arial"/>
-              </a:rPr>
-              <a:t>2</a:t>
+            <a:off x="3657600" y="2377440"/>
+            <a:ext cx="1874519" cy="274320"/>
+          </a:xfrm>
+          <a:prstGeom prst="rect">
+            <a:avLst/>
+          </a:prstGeom>
+          <a:noFill/>
+        </p:spPr>
+        <p:txBody>
+          <a:bodyPr wrap="square" lIns="45720" rIns="45720" tIns="27432" bIns="27432" anchor="t">
+            <a:spAutoFit/>
+          </a:bodyPr>
+          <a:lstStyle/>
+          <a:p>
+            <a:r>
+              <a:rPr sz="1300" b="1">
+                <a:solidFill>
+                  <a:srgbClr val="72B7D6"/>
+                </a:solidFill>
+                <a:latin typeface="Arial"/>
+              </a:rPr>
+              <a:t>TYPED</a:t>
             </a:r>
           </a:p>
         </p:txBody>
@@ -7302,28 +9528,39 @@
         </p:nvSpPr>
         <p:spPr>
           <a:xfrm>
-            <a:off x="4069080" y="2606040"/>
-            <a:ext cx="1417320" cy="457200"/>
-          </a:xfrm>
-          <a:prstGeom prst="rect">
-            <a:avLst/>
-          </a:prstGeom>
-          <a:noFill/>
-        </p:spPr>
-        <p:txBody>
-          <a:bodyPr wrap="square" lIns="45720" rIns="45720" tIns="27432" bIns="27432" anchor="t">
-            <a:spAutoFit/>
-          </a:bodyPr>
-          <a:lstStyle/>
-          <a:p>
-            <a:r>
-              <a:rPr sz="1400" b="1">
+            <a:off x="3657600" y="2834640"/>
+            <a:ext cx="1874519" cy="1097280"/>
+          </a:xfrm>
+          <a:prstGeom prst="rect">
+            <a:avLst/>
+          </a:prstGeom>
+          <a:noFill/>
+        </p:spPr>
+        <p:txBody>
+          <a:bodyPr wrap="square" lIns="45720" rIns="45720" tIns="27432" bIns="27432" anchor="t">
+            <a:spAutoFit/>
+          </a:bodyPr>
+          <a:lstStyle/>
+          <a:p>
+            <a:r>
+              <a:rPr sz="1400" b="0">
                 <a:solidFill>
                   <a:srgbClr val="EEF1F3"/>
                 </a:solidFill>
                 <a:latin typeface="Arial"/>
               </a:rPr>
-              <a:t>boundary map</a:t>
+              <a:t>signatures deduplicated,</a:t>
+            </a:r>
+          </a:p>
+          <a:p>
+            <a:r>
+              <a:rPr sz="1400" b="0">
+                <a:solidFill>
+                  <a:srgbClr val="EEF1F3"/>
+                </a:solidFill>
+                <a:latin typeface="Arial"/>
+              </a:rPr>
+              <a:t>indices comparable</a:t>
             </a:r>
           </a:p>
         </p:txBody>
@@ -7336,8 +9573,8 @@
         </p:nvSpPr>
         <p:spPr>
           <a:xfrm>
-            <a:off x="6309360" y="2423160"/>
-            <a:ext cx="2148840" cy="1097280"/>
+            <a:off x="6263640" y="2148840"/>
+            <a:ext cx="2240280" cy="1965960"/>
           </a:xfrm>
           <a:prstGeom prst="roundRect">
             <a:avLst/>
@@ -7379,28 +9616,28 @@
         </p:nvSpPr>
         <p:spPr>
           <a:xfrm>
-            <a:off x="6446520" y="2606040"/>
-            <a:ext cx="320040" cy="274320"/>
-          </a:xfrm>
-          <a:prstGeom prst="rect">
-            <a:avLst/>
-          </a:prstGeom>
-          <a:noFill/>
-        </p:spPr>
-        <p:txBody>
-          <a:bodyPr wrap="square" lIns="45720" rIns="45720" tIns="27432" bIns="27432" anchor="t">
-            <a:spAutoFit/>
-          </a:bodyPr>
-          <a:lstStyle/>
-          <a:p>
-            <a:r>
-              <a:rPr sz="1600" b="1">
+            <a:off x="6446520" y="2377440"/>
+            <a:ext cx="1874519" cy="274320"/>
+          </a:xfrm>
+          <a:prstGeom prst="rect">
+            <a:avLst/>
+          </a:prstGeom>
+          <a:noFill/>
+        </p:spPr>
+        <p:txBody>
+          <a:bodyPr wrap="square" lIns="45720" rIns="45720" tIns="27432" bIns="27432" anchor="t">
+            <a:spAutoFit/>
+          </a:bodyPr>
+          <a:lstStyle/>
+          <a:p>
+            <a:r>
+              <a:rPr sz="1300" b="1">
                 <a:solidFill>
                   <a:srgbClr val="FF6B35"/>
                 </a:solidFill>
                 <a:latin typeface="Arial"/>
               </a:rPr>
-              <a:t>3</a:t>
+              <a:t>ACYCLIC</a:t>
             </a:r>
           </a:p>
         </p:txBody>
@@ -7413,28 +9650,39 @@
         </p:nvSpPr>
         <p:spPr>
           <a:xfrm>
-            <a:off x="6812280" y="2606040"/>
-            <a:ext cx="1417320" cy="457200"/>
-          </a:xfrm>
-          <a:prstGeom prst="rect">
-            <a:avLst/>
-          </a:prstGeom>
-          <a:noFill/>
-        </p:spPr>
-        <p:txBody>
-          <a:bodyPr wrap="square" lIns="45720" rIns="45720" tIns="27432" bIns="27432" anchor="t">
-            <a:spAutoFit/>
-          </a:bodyPr>
-          <a:lstStyle/>
-          <a:p>
-            <a:r>
-              <a:rPr sz="1400" b="1">
+            <a:off x="6446520" y="2834640"/>
+            <a:ext cx="1874519" cy="1097280"/>
+          </a:xfrm>
+          <a:prstGeom prst="rect">
+            <a:avLst/>
+          </a:prstGeom>
+          <a:noFill/>
+        </p:spPr>
+        <p:txBody>
+          <a:bodyPr wrap="square" lIns="45720" rIns="45720" tIns="27432" bIns="27432" anchor="t">
+            <a:spAutoFit/>
+          </a:bodyPr>
+          <a:lstStyle/>
+          <a:p>
+            <a:r>
+              <a:rPr sz="1400" b="0">
                 <a:solidFill>
                   <a:srgbClr val="EEF1F3"/>
                 </a:solidFill>
                 <a:latin typeface="Arial"/>
               </a:rPr>
-              <a:t>indexed cursor</a:t>
+              <a:t>layouts nest only</a:t>
+            </a:r>
+          </a:p>
+          <a:p>
+            <a:r>
+              <a:rPr sz="1400" b="0">
+                <a:solidFill>
+                  <a:srgbClr val="EEF1F3"/>
+                </a:solidFill>
+                <a:latin typeface="Arial"/>
+              </a:rPr>
+              <a:t>downward</a:t>
             </a:r>
           </a:p>
         </p:txBody>
@@ -7447,8 +9695,8 @@
         </p:nvSpPr>
         <p:spPr>
           <a:xfrm>
-            <a:off x="9052560" y="2423160"/>
-            <a:ext cx="2148840" cy="1097280"/>
+            <a:off x="9052559" y="2148840"/>
+            <a:ext cx="2240280" cy="1965960"/>
           </a:xfrm>
           <a:prstGeom prst="roundRect">
             <a:avLst/>
@@ -7490,97 +9738,108 @@
         </p:nvSpPr>
         <p:spPr>
           <a:xfrm>
-            <a:off x="9189720" y="2606040"/>
-            <a:ext cx="320040" cy="274320"/>
-          </a:xfrm>
-          <a:prstGeom prst="rect">
-            <a:avLst/>
-          </a:prstGeom>
-          <a:noFill/>
-        </p:spPr>
-        <p:txBody>
-          <a:bodyPr wrap="square" lIns="45720" rIns="45720" tIns="27432" bIns="27432" anchor="t">
-            <a:spAutoFit/>
-          </a:bodyPr>
-          <a:lstStyle/>
-          <a:p>
-            <a:r>
-              <a:rPr sz="1600" b="1">
+            <a:off x="9235439" y="2377440"/>
+            <a:ext cx="1874519" cy="274320"/>
+          </a:xfrm>
+          <a:prstGeom prst="rect">
+            <a:avLst/>
+          </a:prstGeom>
+          <a:noFill/>
+        </p:spPr>
+        <p:txBody>
+          <a:bodyPr wrap="square" lIns="45720" rIns="45720" tIns="27432" bIns="27432" anchor="t">
+            <a:spAutoFit/>
+          </a:bodyPr>
+          <a:lstStyle/>
+          <a:p>
+            <a:r>
+              <a:rPr sz="1300" b="1">
+                <a:solidFill>
+                  <a:srgbClr val="EEF1F3"/>
+                </a:solidFill>
+                <a:latin typeface="Arial"/>
+              </a:rPr>
+              <a:t>EXACT</a:t>
+            </a:r>
+          </a:p>
+        </p:txBody>
+      </p:sp>
+      <p:sp>
+        <p:nvSpPr>
+          <p:cNvPr id="18" name="TextBox 17"/>
+          <p:cNvSpPr txBox="1"/>
+          <p:nvPr/>
+        </p:nvSpPr>
+        <p:spPr>
+          <a:xfrm>
+            <a:off x="9235439" y="2834640"/>
+            <a:ext cx="1874519" cy="1097280"/>
+          </a:xfrm>
+          <a:prstGeom prst="rect">
+            <a:avLst/>
+          </a:prstGeom>
+          <a:noFill/>
+        </p:spPr>
+        <p:txBody>
+          <a:bodyPr wrap="square" lIns="45720" rIns="45720" tIns="27432" bIns="27432" anchor="t">
+            <a:spAutoFit/>
+          </a:bodyPr>
+          <a:lstStyle/>
+          <a:p>
+            <a:r>
+              <a:rPr sz="1400" b="0">
+                <a:solidFill>
+                  <a:srgbClr val="EEF1F3"/>
+                </a:solidFill>
+                <a:latin typeface="Arial"/>
+              </a:rPr>
+              <a:t>constants carry</a:t>
+            </a:r>
+          </a:p>
+          <a:p>
+            <a:r>
+              <a:rPr sz="1400" b="0">
+                <a:solidFill>
+                  <a:srgbClr val="EEF1F3"/>
+                </a:solidFill>
+                <a:latin typeface="Arial"/>
+              </a:rPr>
+              <a:t>explicit lengths</a:t>
+            </a:r>
+          </a:p>
+        </p:txBody>
+      </p:sp>
+      <p:sp>
+        <p:nvSpPr>
+          <p:cNvPr id="19" name="TextBox 18"/>
+          <p:cNvSpPr txBox="1"/>
+          <p:nvPr/>
+        </p:nvSpPr>
+        <p:spPr>
+          <a:xfrm>
+            <a:off x="1828800" y="4892040"/>
+            <a:ext cx="8503920" cy="365760"/>
+          </a:xfrm>
+          <a:prstGeom prst="rect">
+            <a:avLst/>
+          </a:prstGeom>
+          <a:noFill/>
+        </p:spPr>
+        <p:txBody>
+          <a:bodyPr wrap="square" lIns="45720" rIns="45720" tIns="27432" bIns="27432" anchor="t">
+            <a:spAutoFit/>
+          </a:bodyPr>
+          <a:lstStyle/>
+          <a:p>
+            <a:pPr algn="ctr"/>
+            <a:r>
+              <a:rPr sz="1700" b="1">
                 <a:solidFill>
                   <a:srgbClr val="FF6B35"/>
                 </a:solidFill>
-                <a:latin typeface="Arial"/>
-              </a:rPr>
-              <a:t>4</a:t>
-            </a:r>
-          </a:p>
-        </p:txBody>
-      </p:sp>
-      <p:sp>
-        <p:nvSpPr>
-          <p:cNvPr id="18" name="TextBox 17"/>
-          <p:cNvSpPr txBox="1"/>
-          <p:nvPr/>
-        </p:nvSpPr>
-        <p:spPr>
-          <a:xfrm>
-            <a:off x="9555480" y="2606040"/>
-            <a:ext cx="1417320" cy="457200"/>
-          </a:xfrm>
-          <a:prstGeom prst="rect">
-            <a:avLst/>
-          </a:prstGeom>
-          <a:noFill/>
-        </p:spPr>
-        <p:txBody>
-          <a:bodyPr wrap="square" lIns="45720" rIns="45720" tIns="27432" bIns="27432" anchor="t">
-            <a:spAutoFit/>
-          </a:bodyPr>
-          <a:lstStyle/>
-          <a:p>
-            <a:r>
-              <a:rPr sz="1400" b="1">
-                <a:solidFill>
-                  <a:srgbClr val="EEF1F3"/>
-                </a:solidFill>
-                <a:latin typeface="Arial"/>
-              </a:rPr>
-              <a:t>switch dispatch</a:t>
-            </a:r>
-          </a:p>
-        </p:txBody>
-      </p:sp>
-      <p:sp>
-        <p:nvSpPr>
-          <p:cNvPr id="19" name="TextBox 18"/>
-          <p:cNvSpPr txBox="1"/>
-          <p:nvPr/>
-        </p:nvSpPr>
-        <p:spPr>
-          <a:xfrm>
-            <a:off x="3977639" y="4800600"/>
-            <a:ext cx="4297680" cy="320040"/>
-          </a:xfrm>
-          <a:prstGeom prst="rect">
-            <a:avLst/>
-          </a:prstGeom>
-          <a:noFill/>
-        </p:spPr>
-        <p:txBody>
-          <a:bodyPr wrap="square" lIns="45720" rIns="45720" tIns="27432" bIns="27432" anchor="t">
-            <a:spAutoFit/>
-          </a:bodyPr>
-          <a:lstStyle/>
-          <a:p>
-            <a:pPr algn="ctr"/>
-            <a:r>
-              <a:rPr sz="2100" b="1">
-                <a:solidFill>
-                  <a:srgbClr val="FF6B35"/>
-                </a:solidFill>
                 <a:latin typeface="Courier New"/>
               </a:rPr>
-              <a:t>NANO_VM_TRACE=1</a:t>
+              <a:t>size &gt; total - offset   ·   never   offset + size &gt; total</a:t>
             </a:r>
           </a:p>
         </p:txBody>
@@ -7675,7 +9934,7 @@
                 </a:solidFill>
                 <a:latin typeface="Arial"/>
               </a:rPr>
-              <a:t>Every function carries a shadow test.</a:t>
+              <a:t>My verifier proves a program before it runs.</a:t>
             </a:r>
           </a:p>
         </p:txBody>
@@ -7709,7 +9968,7 @@
                 </a:solidFill>
                 <a:latin typeface="Arial"/>
               </a:rPr>
-              <a:t>The test is an executable statement about behavior, not a coverage ornament.</a:t>
+              <a:t>Each property below was a run-time trap. Now it is a rejection.</a:t>
             </a:r>
           </a:p>
         </p:txBody>
@@ -7791,14 +10050,14 @@
         </p:nvSpPr>
         <p:spPr>
           <a:xfrm>
-            <a:off x="731520" y="1828800"/>
-            <a:ext cx="5303520" cy="3474720"/>
+            <a:off x="822960" y="1783080"/>
+            <a:ext cx="10515600" cy="603504"/>
           </a:xfrm>
           <a:prstGeom prst="roundRect">
             <a:avLst/>
           </a:prstGeom>
           <a:solidFill>
-            <a:srgbClr val="101317"/>
+            <a:srgbClr val="23282F"/>
           </a:solidFill>
           <a:ln>
             <a:noFill/>
@@ -7834,140 +10093,506 @@
         </p:nvSpPr>
         <p:spPr>
           <a:xfrm>
-            <a:off x="1005840" y="2148840"/>
-            <a:ext cx="4754880" cy="2651760"/>
-          </a:xfrm>
-          <a:prstGeom prst="rect">
-            <a:avLst/>
-          </a:prstGeom>
-          <a:noFill/>
-        </p:spPr>
-        <p:txBody>
-          <a:bodyPr wrap="square" lIns="45720" rIns="45720" tIns="27432" bIns="27432" anchor="t">
-            <a:spAutoFit/>
-          </a:bodyPr>
-          <a:lstStyle/>
-          <a:p>
-            <a:r>
-              <a:rPr sz="1600" b="0">
+            <a:off x="1097280" y="1938528"/>
+            <a:ext cx="2651760" cy="274320"/>
+          </a:xfrm>
+          <a:prstGeom prst="rect">
+            <a:avLst/>
+          </a:prstGeom>
+          <a:noFill/>
+        </p:spPr>
+        <p:txBody>
+          <a:bodyPr wrap="square" lIns="45720" rIns="45720" tIns="27432" bIns="27432" anchor="t">
+            <a:spAutoFit/>
+          </a:bodyPr>
+          <a:lstStyle/>
+          <a:p>
+            <a:r>
+              <a:rPr sz="1500" b="1">
+                <a:solidFill>
+                  <a:srgbClr val="76B900"/>
+                </a:solidFill>
+                <a:latin typeface="Arial"/>
+              </a:rPr>
+              <a:t>stack height</a:t>
+            </a:r>
+          </a:p>
+        </p:txBody>
+      </p:sp>
+      <p:sp>
+        <p:nvSpPr>
+          <p:cNvPr id="9" name="TextBox 8"/>
+          <p:cNvSpPr txBox="1"/>
+          <p:nvPr/>
+        </p:nvSpPr>
+        <p:spPr>
+          <a:xfrm>
+            <a:off x="3931920" y="1938528"/>
+            <a:ext cx="7223760" cy="274320"/>
+          </a:xfrm>
+          <a:prstGeom prst="rect">
+            <a:avLst/>
+          </a:prstGeom>
+          <a:noFill/>
+        </p:spPr>
+        <p:txBody>
+          <a:bodyPr wrap="square" lIns="45720" rIns="45720" tIns="27432" bIns="27432" anchor="t">
+            <a:spAutoFit/>
+          </a:bodyPr>
+          <a:lstStyle/>
+          <a:p>
+            <a:r>
+              <a:rPr sz="1400" b="0">
                 <a:solidFill>
                   <a:srgbClr val="EEF1F3"/>
                 </a:solidFill>
-                <a:latin typeface="Courier New"/>
-              </a:rPr>
-              <a:t>fn gcd(a: int, b: int) -&gt; int {</a:t>
-            </a:r>
-          </a:p>
-          <a:p>
-            <a:r>
-              <a:rPr sz="1600" b="0">
+                <a:latin typeface="Arial"/>
+              </a:rPr>
+              <a:t>through every basic block, merges must agree</a:t>
+            </a:r>
+          </a:p>
+        </p:txBody>
+      </p:sp>
+      <p:sp>
+        <p:nvSpPr>
+          <p:cNvPr id="10" name="Rounded Rectangle 9"/>
+          <p:cNvSpPr/>
+          <p:nvPr/>
+        </p:nvSpPr>
+        <p:spPr>
+          <a:xfrm>
+            <a:off x="822960" y="2532888"/>
+            <a:ext cx="10515600" cy="603504"/>
+          </a:xfrm>
+          <a:prstGeom prst="roundRect">
+            <a:avLst/>
+          </a:prstGeom>
+          <a:solidFill>
+            <a:srgbClr val="23282F"/>
+          </a:solidFill>
+          <a:ln>
+            <a:noFill/>
+          </a:ln>
+        </p:spPr>
+        <p:style>
+          <a:lnRef idx="1">
+            <a:schemeClr val="accent1"/>
+          </a:lnRef>
+          <a:fillRef idx="3">
+            <a:schemeClr val="accent1"/>
+          </a:fillRef>
+          <a:effectRef idx="2">
+            <a:schemeClr val="accent1"/>
+          </a:effectRef>
+          <a:fontRef idx="minor">
+            <a:schemeClr val="lt1"/>
+          </a:fontRef>
+        </p:style>
+        <p:txBody>
+          <a:bodyPr rtlCol="0" anchor="ctr"/>
+          <a:lstStyle/>
+          <a:p>
+            <a:pPr algn="ctr"/>
+          </a:p>
+        </p:txBody>
+      </p:sp>
+      <p:sp>
+        <p:nvSpPr>
+          <p:cNvPr id="11" name="TextBox 10"/>
+          <p:cNvSpPr txBox="1"/>
+          <p:nvPr/>
+        </p:nvSpPr>
+        <p:spPr>
+          <a:xfrm>
+            <a:off x="1097280" y="2688336"/>
+            <a:ext cx="2651760" cy="274320"/>
+          </a:xfrm>
+          <a:prstGeom prst="rect">
+            <a:avLst/>
+          </a:prstGeom>
+          <a:noFill/>
+        </p:spPr>
+        <p:txBody>
+          <a:bodyPr wrap="square" lIns="45720" rIns="45720" tIns="27432" bIns="27432" anchor="t">
+            <a:spAutoFit/>
+          </a:bodyPr>
+          <a:lstStyle/>
+          <a:p>
+            <a:r>
+              <a:rPr sz="1500" b="1">
+                <a:solidFill>
+                  <a:srgbClr val="76B900"/>
+                </a:solidFill>
+                <a:latin typeface="Arial"/>
+              </a:rPr>
+              <a:t>operand types</a:t>
+            </a:r>
+          </a:p>
+        </p:txBody>
+      </p:sp>
+      <p:sp>
+        <p:nvSpPr>
+          <p:cNvPr id="12" name="TextBox 11"/>
+          <p:cNvSpPr txBox="1"/>
+          <p:nvPr/>
+        </p:nvSpPr>
+        <p:spPr>
+          <a:xfrm>
+            <a:off x="3931920" y="2688336"/>
+            <a:ext cx="7223760" cy="274320"/>
+          </a:xfrm>
+          <a:prstGeom prst="rect">
+            <a:avLst/>
+          </a:prstGeom>
+          <a:noFill/>
+        </p:spPr>
+        <p:txBody>
+          <a:bodyPr wrap="square" lIns="45720" rIns="45720" tIns="27432" bIns="27432" anchor="t">
+            <a:spAutoFit/>
+          </a:bodyPr>
+          <a:lstStyle/>
+          <a:p>
+            <a:r>
+              <a:rPr sz="1400" b="0">
                 <a:solidFill>
                   <a:srgbClr val="EEF1F3"/>
                 </a:solidFill>
-                <a:latin typeface="Courier New"/>
-              </a:rPr>
-              <a:t>    ...</a:t>
-            </a:r>
-          </a:p>
-          <a:p>
-            <a:r>
-              <a:rPr sz="1600" b="0">
+                <a:latin typeface="Arial"/>
+              </a:rPr>
+              <a:t>a known contradiction is refused; unknown never fails</a:t>
+            </a:r>
+          </a:p>
+        </p:txBody>
+      </p:sp>
+      <p:sp>
+        <p:nvSpPr>
+          <p:cNvPr id="13" name="Rounded Rectangle 12"/>
+          <p:cNvSpPr/>
+          <p:nvPr/>
+        </p:nvSpPr>
+        <p:spPr>
+          <a:xfrm>
+            <a:off x="822960" y="3282696"/>
+            <a:ext cx="10515600" cy="603504"/>
+          </a:xfrm>
+          <a:prstGeom prst="roundRect">
+            <a:avLst/>
+          </a:prstGeom>
+          <a:solidFill>
+            <a:srgbClr val="23282F"/>
+          </a:solidFill>
+          <a:ln>
+            <a:noFill/>
+          </a:ln>
+        </p:spPr>
+        <p:style>
+          <a:lnRef idx="1">
+            <a:schemeClr val="accent1"/>
+          </a:lnRef>
+          <a:fillRef idx="3">
+            <a:schemeClr val="accent1"/>
+          </a:fillRef>
+          <a:effectRef idx="2">
+            <a:schemeClr val="accent1"/>
+          </a:effectRef>
+          <a:fontRef idx="minor">
+            <a:schemeClr val="lt1"/>
+          </a:fontRef>
+        </p:style>
+        <p:txBody>
+          <a:bodyPr rtlCol="0" anchor="ctr"/>
+          <a:lstStyle/>
+          <a:p>
+            <a:pPr algn="ctr"/>
+          </a:p>
+        </p:txBody>
+      </p:sp>
+      <p:sp>
+        <p:nvSpPr>
+          <p:cNvPr id="14" name="TextBox 13"/>
+          <p:cNvSpPr txBox="1"/>
+          <p:nvPr/>
+        </p:nvSpPr>
+        <p:spPr>
+          <a:xfrm>
+            <a:off x="1097280" y="3438144"/>
+            <a:ext cx="2651760" cy="274320"/>
+          </a:xfrm>
+          <a:prstGeom prst="rect">
+            <a:avLst/>
+          </a:prstGeom>
+          <a:noFill/>
+        </p:spPr>
+        <p:txBody>
+          <a:bodyPr wrap="square" lIns="45720" rIns="45720" tIns="27432" bIns="27432" anchor="t">
+            <a:spAutoFit/>
+          </a:bodyPr>
+          <a:lstStyle/>
+          <a:p>
+            <a:r>
+              <a:rPr sz="1500" b="1">
+                <a:solidFill>
+                  <a:srgbClr val="76B900"/>
+                </a:solidFill>
+                <a:latin typeface="Arial"/>
+              </a:rPr>
+              <a:t>return shape</a:t>
+            </a:r>
+          </a:p>
+        </p:txBody>
+      </p:sp>
+      <p:sp>
+        <p:nvSpPr>
+          <p:cNvPr id="15" name="TextBox 14"/>
+          <p:cNvSpPr txBox="1"/>
+          <p:nvPr/>
+        </p:nvSpPr>
+        <p:spPr>
+          <a:xfrm>
+            <a:off x="3931920" y="3438144"/>
+            <a:ext cx="7223760" cy="274320"/>
+          </a:xfrm>
+          <a:prstGeom prst="rect">
+            <a:avLst/>
+          </a:prstGeom>
+          <a:noFill/>
+        </p:spPr>
+        <p:txBody>
+          <a:bodyPr wrap="square" lIns="45720" rIns="45720" tIns="27432" bIns="27432" anchor="t">
+            <a:spAutoFit/>
+          </a:bodyPr>
+          <a:lstStyle/>
+          <a:p>
+            <a:r>
+              <a:rPr sz="1400" b="0">
                 <a:solidFill>
                   <a:srgbClr val="EEF1F3"/>
                 </a:solidFill>
-                <a:latin typeface="Courier New"/>
-              </a:rPr>
-              <a:t>}</a:t>
-            </a:r>
-          </a:p>
-          <a:p/>
-          <a:p>
-            <a:r>
-              <a:rPr sz="1600" b="0">
+                <a:latin typeface="Arial"/>
+              </a:rPr>
+              <a:t>every exit leaves exactly what the function declares</a:t>
+            </a:r>
+          </a:p>
+        </p:txBody>
+      </p:sp>
+      <p:sp>
+        <p:nvSpPr>
+          <p:cNvPr id="16" name="Rounded Rectangle 15"/>
+          <p:cNvSpPr/>
+          <p:nvPr/>
+        </p:nvSpPr>
+        <p:spPr>
+          <a:xfrm>
+            <a:off x="822960" y="4032504"/>
+            <a:ext cx="10515600" cy="603504"/>
+          </a:xfrm>
+          <a:prstGeom prst="roundRect">
+            <a:avLst/>
+          </a:prstGeom>
+          <a:solidFill>
+            <a:srgbClr val="23282F"/>
+          </a:solidFill>
+          <a:ln>
+            <a:noFill/>
+          </a:ln>
+        </p:spPr>
+        <p:style>
+          <a:lnRef idx="1">
+            <a:schemeClr val="accent1"/>
+          </a:lnRef>
+          <a:fillRef idx="3">
+            <a:schemeClr val="accent1"/>
+          </a:fillRef>
+          <a:effectRef idx="2">
+            <a:schemeClr val="accent1"/>
+          </a:effectRef>
+          <a:fontRef idx="minor">
+            <a:schemeClr val="lt1"/>
+          </a:fontRef>
+        </p:style>
+        <p:txBody>
+          <a:bodyPr rtlCol="0" anchor="ctr"/>
+          <a:lstStyle/>
+          <a:p>
+            <a:pPr algn="ctr"/>
+          </a:p>
+        </p:txBody>
+      </p:sp>
+      <p:sp>
+        <p:nvSpPr>
+          <p:cNvPr id="17" name="TextBox 16"/>
+          <p:cNvSpPr txBox="1"/>
+          <p:nvPr/>
+        </p:nvSpPr>
+        <p:spPr>
+          <a:xfrm>
+            <a:off x="1097280" y="4187952"/>
+            <a:ext cx="2651760" cy="274320"/>
+          </a:xfrm>
+          <a:prstGeom prst="rect">
+            <a:avLst/>
+          </a:prstGeom>
+          <a:noFill/>
+        </p:spPr>
+        <p:txBody>
+          <a:bodyPr wrap="square" lIns="45720" rIns="45720" tIns="27432" bIns="27432" anchor="t">
+            <a:spAutoFit/>
+          </a:bodyPr>
+          <a:lstStyle/>
+          <a:p>
+            <a:r>
+              <a:rPr sz="1500" b="1">
+                <a:solidFill>
+                  <a:srgbClr val="76B900"/>
+                </a:solidFill>
+                <a:latin typeface="Arial"/>
+              </a:rPr>
+              <a:t>operand depth</a:t>
+            </a:r>
+          </a:p>
+        </p:txBody>
+      </p:sp>
+      <p:sp>
+        <p:nvSpPr>
+          <p:cNvPr id="18" name="TextBox 17"/>
+          <p:cNvSpPr txBox="1"/>
+          <p:nvPr/>
+        </p:nvSpPr>
+        <p:spPr>
+          <a:xfrm>
+            <a:off x="3931920" y="4187952"/>
+            <a:ext cx="7223760" cy="274320"/>
+          </a:xfrm>
+          <a:prstGeom prst="rect">
+            <a:avLst/>
+          </a:prstGeom>
+          <a:noFill/>
+        </p:spPr>
+        <p:txBody>
+          <a:bodyPr wrap="square" lIns="45720" rIns="45720" tIns="27432" bIns="27432" anchor="t">
+            <a:spAutoFit/>
+          </a:bodyPr>
+          <a:lstStyle/>
+          <a:p>
+            <a:r>
+              <a:rPr sz="1400" b="0">
                 <a:solidFill>
                   <a:srgbClr val="EEF1F3"/>
                 </a:solidFill>
-                <a:latin typeface="Courier New"/>
-              </a:rPr>
-              <a:t>shadow gcd {</a:t>
-            </a:r>
-          </a:p>
-          <a:p>
-            <a:r>
-              <a:rPr sz="1600" b="0">
+                <a:latin typeface="Arial"/>
+              </a:rPr>
+              <a:t>producer declares it, loader confirms it</a:t>
+            </a:r>
+          </a:p>
+        </p:txBody>
+      </p:sp>
+      <p:sp>
+        <p:nvSpPr>
+          <p:cNvPr id="19" name="Rounded Rectangle 18"/>
+          <p:cNvSpPr/>
+          <p:nvPr/>
+        </p:nvSpPr>
+        <p:spPr>
+          <a:xfrm>
+            <a:off x="822960" y="4782312"/>
+            <a:ext cx="10515600" cy="603504"/>
+          </a:xfrm>
+          <a:prstGeom prst="roundRect">
+            <a:avLst/>
+          </a:prstGeom>
+          <a:solidFill>
+            <a:srgbClr val="23282F"/>
+          </a:solidFill>
+          <a:ln>
+            <a:noFill/>
+          </a:ln>
+        </p:spPr>
+        <p:style>
+          <a:lnRef idx="1">
+            <a:schemeClr val="accent1"/>
+          </a:lnRef>
+          <a:fillRef idx="3">
+            <a:schemeClr val="accent1"/>
+          </a:fillRef>
+          <a:effectRef idx="2">
+            <a:schemeClr val="accent1"/>
+          </a:effectRef>
+          <a:fontRef idx="minor">
+            <a:schemeClr val="lt1"/>
+          </a:fontRef>
+        </p:style>
+        <p:txBody>
+          <a:bodyPr rtlCol="0" anchor="ctr"/>
+          <a:lstStyle/>
+          <a:p>
+            <a:pPr algn="ctr"/>
+          </a:p>
+        </p:txBody>
+      </p:sp>
+      <p:sp>
+        <p:nvSpPr>
+          <p:cNvPr id="20" name="TextBox 19"/>
+          <p:cNvSpPr txBox="1"/>
+          <p:nvPr/>
+        </p:nvSpPr>
+        <p:spPr>
+          <a:xfrm>
+            <a:off x="1097280" y="4937759"/>
+            <a:ext cx="2651760" cy="274320"/>
+          </a:xfrm>
+          <a:prstGeom prst="rect">
+            <a:avLst/>
+          </a:prstGeom>
+          <a:noFill/>
+        </p:spPr>
+        <p:txBody>
+          <a:bodyPr wrap="square" lIns="45720" rIns="45720" tIns="27432" bIns="27432" anchor="t">
+            <a:spAutoFit/>
+          </a:bodyPr>
+          <a:lstStyle/>
+          <a:p>
+            <a:r>
+              <a:rPr sz="1500" b="1">
+                <a:solidFill>
+                  <a:srgbClr val="76B900"/>
+                </a:solidFill>
+                <a:latin typeface="Arial"/>
+              </a:rPr>
+              <a:t>ownership</a:t>
+            </a:r>
+          </a:p>
+        </p:txBody>
+      </p:sp>
+      <p:sp>
+        <p:nvSpPr>
+          <p:cNvPr id="21" name="TextBox 20"/>
+          <p:cNvSpPr txBox="1"/>
+          <p:nvPr/>
+        </p:nvSpPr>
+        <p:spPr>
+          <a:xfrm>
+            <a:off x="3931920" y="4937759"/>
+            <a:ext cx="7223760" cy="274320"/>
+          </a:xfrm>
+          <a:prstGeom prst="rect">
+            <a:avLst/>
+          </a:prstGeom>
+          <a:noFill/>
+        </p:spPr>
+        <p:txBody>
+          <a:bodyPr wrap="square" lIns="45720" rIns="45720" tIns="27432" bIns="27432" anchor="t">
+            <a:spAutoFit/>
+          </a:bodyPr>
+          <a:lstStyle/>
+          <a:p>
+            <a:r>
+              <a:rPr sz="1400" b="0">
                 <a:solidFill>
                   <a:srgbClr val="EEF1F3"/>
                 </a:solidFill>
-                <a:latin typeface="Courier New"/>
-              </a:rPr>
-              <a:t>    assert (== (gcd 48 18) 6)</a:t>
-            </a:r>
-          </a:p>
-          <a:p>
-            <a:r>
-              <a:rPr sz="1600" b="0">
-                <a:solidFill>
-                  <a:srgbClr val="EEF1F3"/>
-                </a:solidFill>
-                <a:latin typeface="Courier New"/>
-              </a:rPr>
-              <a:t>}</a:t>
-            </a:r>
-          </a:p>
-        </p:txBody>
-      </p:sp>
-      <p:sp>
-        <p:nvSpPr>
-          <p:cNvPr id="9" name="TextBox 8"/>
-          <p:cNvSpPr txBox="1"/>
-          <p:nvPr/>
-        </p:nvSpPr>
-        <p:spPr>
-          <a:xfrm>
-            <a:off x="6537960" y="2240280"/>
-            <a:ext cx="4114800" cy="1554480"/>
-          </a:xfrm>
-          <a:prstGeom prst="rect">
-            <a:avLst/>
-          </a:prstGeom>
-          <a:noFill/>
-        </p:spPr>
-        <p:txBody>
-          <a:bodyPr wrap="square" lIns="45720" rIns="45720" tIns="27432" bIns="27432" anchor="t">
-            <a:spAutoFit/>
-          </a:bodyPr>
-          <a:lstStyle/>
-          <a:p>
-            <a:r>
-              <a:rPr sz="2300" b="1">
-                <a:solidFill>
-                  <a:srgbClr val="76B900"/>
-                </a:solidFill>
-                <a:latin typeface="Arial"/>
-              </a:rPr>
-              <a:t>322 NanoVM tests</a:t>
-            </a:r>
-          </a:p>
-          <a:p>
-            <a:r>
-              <a:rPr sz="2300" b="1">
-                <a:solidFill>
-                  <a:srgbClr val="76B900"/>
-                </a:solidFill>
-                <a:latin typeface="Arial"/>
-              </a:rPr>
-              <a:t>63 NanoVirt tests</a:t>
-            </a:r>
-          </a:p>
-          <a:p>
-            <a:r>
-              <a:rPr sz="2300" b="1">
-                <a:solidFill>
-                  <a:srgbClr val="76B900"/>
-                </a:solidFill>
-                <a:latin typeface="Arial"/>
-              </a:rPr>
-              <a:t>1,090 NanoISA tests</a:t>
+                <a:latin typeface="Arial"/>
+              </a:rPr>
+              <a:t>retain and release must balance on every path</a:t>
             </a:r>
           </a:p>
         </p:txBody>
@@ -8058,11 +10683,11 @@
             <a:r>
               <a:rPr sz="2800" b="1">
                 <a:solidFill>
-                  <a:srgbClr val="101317"/>
-                </a:solidFill>
-                <a:latin typeface="Arial"/>
-              </a:rPr>
-              <a:t>FFI is an explicit unsafe boundary.</a:t>
+                  <a:srgbClr val="EEF1F3"/>
+                </a:solidFill>
+                <a:latin typeface="Arial"/>
+              </a:rPr>
+              <a:t>What my verifier used to miss.</a:t>
             </a:r>
           </a:p>
         </p:txBody>
@@ -8092,11 +10717,11 @@
             <a:r>
               <a:rPr sz="1300" b="0">
                 <a:solidFill>
-                  <a:srgbClr val="65707C"/>
-                </a:solidFill>
-                <a:latin typeface="Arial"/>
-              </a:rPr>
-              <a:t>Imports carry signatures. The co-process can keep foreign code outside my VM process.</a:t>
+                  <a:srgbClr val="72B7D6"/>
+                </a:solidFill>
+                <a:latin typeface="Arial"/>
+              </a:rPr>
+              <a:t>It declared stack effects for 32 of its 161 instructions and skipped the rest.</a:t>
             </a:r>
           </a:p>
         </p:txBody>
@@ -8178,8 +10803,8 @@
         </p:nvSpPr>
         <p:spPr>
           <a:xfrm>
-            <a:off x="731520" y="2057400"/>
-            <a:ext cx="2743200" cy="2377440"/>
+            <a:off x="731520" y="1874519"/>
+            <a:ext cx="5577840" cy="3520440"/>
           </a:xfrm>
           <a:prstGeom prst="roundRect">
             <a:avLst/>
@@ -8221,8 +10846,97 @@
         </p:nvSpPr>
         <p:spPr>
           <a:xfrm>
-            <a:off x="960120" y="2423160"/>
-            <a:ext cx="2286000" cy="274320"/>
+            <a:off x="1005840" y="2240280"/>
+            <a:ext cx="5029200" cy="2377440"/>
+          </a:xfrm>
+          <a:prstGeom prst="rect">
+            <a:avLst/>
+          </a:prstGeom>
+          <a:noFill/>
+        </p:spPr>
+        <p:txBody>
+          <a:bodyPr wrap="square" lIns="45720" rIns="45720" tIns="27432" bIns="27432" anchor="t">
+            <a:spAutoFit/>
+          </a:bodyPr>
+          <a:lstStyle/>
+          <a:p>
+            <a:r>
+              <a:rPr sz="1700" b="0">
+                <a:solidFill>
+                  <a:srgbClr val="EEF1F3"/>
+                </a:solidFill>
+                <a:latin typeface="Courier New"/>
+              </a:rPr>
+              <a:t>PUSH_I64 1</a:t>
+            </a:r>
+          </a:p>
+          <a:p>
+            <a:r>
+              <a:rPr sz="1700" b="0">
+                <a:solidFill>
+                  <a:srgbClr val="EEF1F3"/>
+                </a:solidFill>
+                <a:latin typeface="Courier New"/>
+              </a:rPr>
+              <a:t>I64_ADD    ; no declared effect</a:t>
+            </a:r>
+          </a:p>
+          <a:p>
+            <a:r>
+              <a:rPr sz="1700" b="0">
+                <a:solidFill>
+                  <a:srgbClr val="EEF1F3"/>
+                </a:solidFill>
+                <a:latin typeface="Courier New"/>
+              </a:rPr>
+              <a:t>POP</a:t>
+            </a:r>
+          </a:p>
+          <a:p>
+            <a:r>
+              <a:rPr sz="1700" b="0">
+                <a:solidFill>
+                  <a:srgbClr val="EEF1F3"/>
+                </a:solidFill>
+                <a:latin typeface="Courier New"/>
+              </a:rPr>
+              <a:t>POP</a:t>
+            </a:r>
+          </a:p>
+          <a:p>
+            <a:r>
+              <a:rPr sz="1700" b="0">
+                <a:solidFill>
+                  <a:srgbClr val="EEF1F3"/>
+                </a:solidFill>
+                <a:latin typeface="Courier New"/>
+              </a:rPr>
+              <a:t>POP        ; stack held one</a:t>
+            </a:r>
+          </a:p>
+          <a:p>
+            <a:r>
+              <a:rPr sz="1700" b="0">
+                <a:solidFill>
+                  <a:srgbClr val="EEF1F3"/>
+                </a:solidFill>
+                <a:latin typeface="Courier New"/>
+              </a:rPr>
+              <a:t>RET</a:t>
+            </a:r>
+          </a:p>
+        </p:txBody>
+      </p:sp>
+      <p:sp>
+        <p:nvSpPr>
+          <p:cNvPr id="9" name="TextBox 8"/>
+          <p:cNvSpPr txBox="1"/>
+          <p:nvPr/>
+        </p:nvSpPr>
+        <p:spPr>
+          <a:xfrm>
+            <a:off x="1005840" y="4709160"/>
+            <a:ext cx="5029200" cy="365760"/>
           </a:xfrm>
           <a:prstGeom prst="rect">
             <a:avLst/>
@@ -8238,45 +10952,11 @@
             <a:r>
               <a:rPr sz="1800" b="1">
                 <a:solidFill>
-                  <a:srgbClr val="EEF1F3"/>
-                </a:solidFill>
-                <a:latin typeface="Arial"/>
-              </a:rPr>
-              <a:t>NanoLang</a:t>
-            </a:r>
-          </a:p>
-        </p:txBody>
-      </p:sp>
-      <p:sp>
-        <p:nvSpPr>
-          <p:cNvPr id="9" name="TextBox 8"/>
-          <p:cNvSpPr txBox="1"/>
-          <p:nvPr/>
-        </p:nvSpPr>
-        <p:spPr>
-          <a:xfrm>
-            <a:off x="960120" y="3063240"/>
-            <a:ext cx="2286000" cy="274320"/>
-          </a:xfrm>
-          <a:prstGeom prst="rect">
-            <a:avLst/>
-          </a:prstGeom>
-          <a:noFill/>
-        </p:spPr>
-        <p:txBody>
-          <a:bodyPr wrap="square" lIns="45720" rIns="45720" tIns="27432" bIns="27432" anchor="t">
-            <a:spAutoFit/>
-          </a:bodyPr>
-          <a:lstStyle/>
-          <a:p>
-            <a:r>
-              <a:rPr sz="1500" b="1">
-                <a:solidFill>
-                  <a:srgbClr val="72B7D6"/>
-                </a:solidFill>
-                <a:latin typeface="Arial"/>
-              </a:rPr>
-              <a:t>typed call</a:t>
+                  <a:srgbClr val="FF6B35"/>
+                </a:solidFill>
+                <a:latin typeface="Courier New"/>
+              </a:rPr>
+              <a:t>verified ok</a:t>
             </a:r>
           </a:p>
         </p:txBody>
@@ -8289,14 +10969,14 @@
         </p:nvSpPr>
         <p:spPr>
           <a:xfrm>
-            <a:off x="4709160" y="2057400"/>
-            <a:ext cx="2743200" cy="2377440"/>
+            <a:off x="6629400" y="1874519"/>
+            <a:ext cx="4846320" cy="3520440"/>
           </a:xfrm>
           <a:prstGeom prst="roundRect">
             <a:avLst/>
           </a:prstGeom>
           <a:solidFill>
-            <a:srgbClr val="23282F"/>
+            <a:srgbClr val="101317"/>
           </a:solidFill>
           <a:ln>
             <a:noFill/>
@@ -8332,173 +11012,95 @@
         </p:nvSpPr>
         <p:spPr>
           <a:xfrm>
-            <a:off x="4937760" y="2423160"/>
-            <a:ext cx="2286000" cy="274320"/>
-          </a:xfrm>
-          <a:prstGeom prst="rect">
-            <a:avLst/>
-          </a:prstGeom>
-          <a:noFill/>
-        </p:spPr>
-        <p:txBody>
-          <a:bodyPr wrap="square" lIns="45720" rIns="45720" tIns="27432" bIns="27432" anchor="t">
-            <a:spAutoFit/>
-          </a:bodyPr>
-          <a:lstStyle/>
-          <a:p>
-            <a:r>
-              <a:rPr sz="1800" b="1">
+            <a:off x="6949440" y="2240280"/>
+            <a:ext cx="4206240" cy="2834640"/>
+          </a:xfrm>
+          <a:prstGeom prst="rect">
+            <a:avLst/>
+          </a:prstGeom>
+          <a:noFill/>
+        </p:spPr>
+        <p:txBody>
+          <a:bodyPr wrap="square" lIns="45720" rIns="45720" tIns="27432" bIns="27432" anchor="t">
+            <a:spAutoFit/>
+          </a:bodyPr>
+          <a:lstStyle/>
+          <a:p>
+            <a:r>
+              <a:rPr sz="1700" b="1">
                 <a:solidFill>
                   <a:srgbClr val="EEF1F3"/>
                 </a:solidFill>
                 <a:latin typeface="Arial"/>
               </a:rPr>
-              <a:t>NanoVM</a:t>
-            </a:r>
-          </a:p>
-        </p:txBody>
-      </p:sp>
-      <p:sp>
-        <p:nvSpPr>
-          <p:cNvPr id="12" name="TextBox 11"/>
-          <p:cNvSpPr txBox="1"/>
-          <p:nvPr/>
-        </p:nvSpPr>
-        <p:spPr>
-          <a:xfrm>
-            <a:off x="4937760" y="3063240"/>
-            <a:ext cx="2286000" cy="274320"/>
-          </a:xfrm>
-          <a:prstGeom prst="rect">
-            <a:avLst/>
-          </a:prstGeom>
-          <a:noFill/>
-        </p:spPr>
-        <p:txBody>
-          <a:bodyPr wrap="square" lIns="45720" rIns="45720" tIns="27432" bIns="27432" anchor="t">
-            <a:spAutoFit/>
-          </a:bodyPr>
-          <a:lstStyle/>
-          <a:p>
-            <a:r>
-              <a:rPr sz="1500" b="1">
-                <a:solidFill>
-                  <a:srgbClr val="76B900"/>
-                </a:solidFill>
-                <a:latin typeface="Arial"/>
-              </a:rPr>
-              <a:t>typed trap</a:t>
-            </a:r>
-          </a:p>
-        </p:txBody>
-      </p:sp>
-      <p:sp>
-        <p:nvSpPr>
-          <p:cNvPr id="13" name="Rounded Rectangle 12"/>
-          <p:cNvSpPr/>
-          <p:nvPr/>
-        </p:nvSpPr>
-        <p:spPr>
-          <a:xfrm>
-            <a:off x="8686800" y="2057400"/>
-            <a:ext cx="2743200" cy="2377440"/>
-          </a:xfrm>
-          <a:prstGeom prst="roundRect">
-            <a:avLst/>
-          </a:prstGeom>
-          <a:solidFill>
-            <a:srgbClr val="23282F"/>
-          </a:solidFill>
-          <a:ln>
-            <a:noFill/>
-          </a:ln>
-        </p:spPr>
-        <p:style>
-          <a:lnRef idx="1">
-            <a:schemeClr val="accent1"/>
-          </a:lnRef>
-          <a:fillRef idx="3">
-            <a:schemeClr val="accent1"/>
-          </a:fillRef>
-          <a:effectRef idx="2">
-            <a:schemeClr val="accent1"/>
-          </a:effectRef>
-          <a:fontRef idx="minor">
-            <a:schemeClr val="lt1"/>
-          </a:fontRef>
-        </p:style>
-        <p:txBody>
-          <a:bodyPr rtlCol="0" anchor="ctr"/>
-          <a:lstStyle/>
-          <a:p>
-            <a:pPr algn="ctr"/>
-          </a:p>
-        </p:txBody>
-      </p:sp>
-      <p:sp>
-        <p:nvSpPr>
-          <p:cNvPr id="14" name="TextBox 13"/>
-          <p:cNvSpPr txBox="1"/>
-          <p:nvPr/>
-        </p:nvSpPr>
-        <p:spPr>
-          <a:xfrm>
-            <a:off x="8915400" y="2423160"/>
-            <a:ext cx="2286000" cy="274320"/>
-          </a:xfrm>
-          <a:prstGeom prst="rect">
-            <a:avLst/>
-          </a:prstGeom>
-          <a:noFill/>
-        </p:spPr>
-        <p:txBody>
-          <a:bodyPr wrap="square" lIns="45720" rIns="45720" tIns="27432" bIns="27432" anchor="t">
-            <a:spAutoFit/>
-          </a:bodyPr>
-          <a:lstStyle/>
-          <a:p>
-            <a:r>
-              <a:rPr sz="1800" b="1">
+              <a:t>Skipping an instruction</a:t>
+            </a:r>
+          </a:p>
+          <a:p>
+            <a:r>
+              <a:rPr sz="1700" b="1">
                 <a:solidFill>
                   <a:srgbClr val="EEF1F3"/>
                 </a:solidFill>
                 <a:latin typeface="Arial"/>
               </a:rPr>
-              <a:t>nano_cop</a:t>
-            </a:r>
-          </a:p>
-        </p:txBody>
-      </p:sp>
-      <p:sp>
-        <p:nvSpPr>
-          <p:cNvPr id="15" name="TextBox 14"/>
-          <p:cNvSpPr txBox="1"/>
-          <p:nvPr/>
-        </p:nvSpPr>
-        <p:spPr>
-          <a:xfrm>
-            <a:off x="8915400" y="3063240"/>
-            <a:ext cx="2286000" cy="548640"/>
-          </a:xfrm>
-          <a:prstGeom prst="rect">
-            <a:avLst/>
-          </a:prstGeom>
-          <a:noFill/>
-        </p:spPr>
-        <p:txBody>
-          <a:bodyPr wrap="square" lIns="45720" rIns="45720" tIns="27432" bIns="27432" anchor="t">
-            <a:spAutoFit/>
-          </a:bodyPr>
-          <a:lstStyle/>
-          <a:p>
-            <a:r>
-              <a:rPr sz="1500" b="1">
-                <a:solidFill>
-                  <a:srgbClr val="FF6B35"/>
-                </a:solidFill>
-                <a:latin typeface="Arial"/>
-              </a:rPr>
-              <a:t>foreign process</a:t>
+              <a:t>also skipped its successors,</a:t>
+            </a:r>
+          </a:p>
+          <a:p>
+            <a:r>
+              <a:rPr sz="1700" b="1">
+                <a:solidFill>
+                  <a:srgbClr val="EEF1F3"/>
+                </a:solidFill>
+                <a:latin typeface="Arial"/>
+              </a:rPr>
+              <a:t>so the walk stopped there</a:t>
+            </a:r>
+          </a:p>
+          <a:p>
+            <a:r>
+              <a:rPr sz="1700" b="1">
+                <a:solidFill>
+                  <a:srgbClr val="EEF1F3"/>
+                </a:solidFill>
+                <a:latin typeface="Arial"/>
+              </a:rPr>
+              <a:t>and everything after it</a:t>
+            </a:r>
+          </a:p>
+          <a:p>
+            <a:r>
+              <a:rPr sz="1700" b="1">
+                <a:solidFill>
+                  <a:srgbClr val="EEF1F3"/>
+                </a:solidFill>
+                <a:latin typeface="Arial"/>
+              </a:rPr>
+              <a:t>went unchecked.</a:t>
+            </a:r>
+          </a:p>
+          <a:p/>
+          <a:p>
+            <a:r>
+              <a:rPr sz="1700" b="1">
+                <a:solidFill>
+                  <a:srgbClr val="EEF1F3"/>
+                </a:solidFill>
+                <a:latin typeface="Arial"/>
+              </a:rPr>
+              <a:t>Absence of evidence was</a:t>
+            </a:r>
+          </a:p>
+          <a:p>
+            <a:r>
+              <a:rPr sz="1700" b="1">
+                <a:solidFill>
+                  <a:srgbClr val="EEF1F3"/>
+                </a:solidFill>
+                <a:latin typeface="Arial"/>
+              </a:rPr>
+              <a:t>indistinguishable from proof.</a:t>
             </a:r>
           </a:p>
         </p:txBody>
@@ -8593,7 +11195,7 @@
                 </a:solidFill>
                 <a:latin typeface="Arial"/>
               </a:rPr>
-              <a:t>Diagnostics are optional and cheap when disabled.</a:t>
+              <a:t>I dispatch through a label table, and keep a portable fallback.</a:t>
             </a:r>
           </a:p>
         </p:txBody>
@@ -8627,7 +11229,7 @@
                 </a:solidFill>
                 <a:latin typeface="Arial"/>
               </a:rPr>
-              <a:t>I read runtime switches once, then keep the hot path to a cached boolean guard.</a:t>
+              <a:t>One copy of 161 handlers, reached two ways. Adopted on measurement, not principle.</a:t>
             </a:r>
           </a:p>
         </p:txBody>
@@ -8709,8 +11311,8 @@
         </p:nvSpPr>
         <p:spPr>
           <a:xfrm>
-            <a:off x="914400" y="1920240"/>
-            <a:ext cx="10241280" cy="731520"/>
+            <a:off x="777240" y="1965960"/>
+            <a:ext cx="5212080" cy="2743200"/>
           </a:xfrm>
           <a:prstGeom prst="roundRect">
             <a:avLst/>
@@ -8752,28 +11354,28 @@
         </p:nvSpPr>
         <p:spPr>
           <a:xfrm>
-            <a:off x="1188720" y="2121408"/>
-            <a:ext cx="2743200" cy="274320"/>
-          </a:xfrm>
-          <a:prstGeom prst="rect">
-            <a:avLst/>
-          </a:prstGeom>
-          <a:noFill/>
-        </p:spPr>
-        <p:txBody>
-          <a:bodyPr wrap="square" lIns="45720" rIns="45720" tIns="27432" bIns="27432" anchor="t">
-            <a:spAutoFit/>
-          </a:bodyPr>
-          <a:lstStyle/>
-          <a:p>
-            <a:r>
-              <a:rPr sz="1500" b="1">
-                <a:solidFill>
-                  <a:srgbClr val="FF6B35"/>
-                </a:solidFill>
-                <a:latin typeface="Courier New"/>
-              </a:rPr>
-              <a:t>NANO_VM_TRACE</a:t>
+            <a:off x="1051560" y="2240280"/>
+            <a:ext cx="4663440" cy="274320"/>
+          </a:xfrm>
+          <a:prstGeom prst="rect">
+            <a:avLst/>
+          </a:prstGeom>
+          <a:noFill/>
+        </p:spPr>
+        <p:txBody>
+          <a:bodyPr wrap="square" lIns="45720" rIns="45720" tIns="27432" bIns="27432" anchor="t">
+            <a:spAutoFit/>
+          </a:bodyPr>
+          <a:lstStyle/>
+          <a:p>
+            <a:r>
+              <a:rPr sz="1400" b="1">
+                <a:solidFill>
+                  <a:srgbClr val="76B900"/>
+                </a:solidFill>
+                <a:latin typeface="Arial"/>
+              </a:rPr>
+              <a:t>COMPUTED GOTO</a:t>
             </a:r>
           </a:p>
         </p:txBody>
@@ -8786,28 +11388,51 @@
         </p:nvSpPr>
         <p:spPr>
           <a:xfrm>
-            <a:off x="4297680" y="2121408"/>
-            <a:ext cx="6217920" cy="274320"/>
-          </a:xfrm>
-          <a:prstGeom prst="rect">
-            <a:avLst/>
-          </a:prstGeom>
-          <a:noFill/>
-        </p:spPr>
-        <p:txBody>
-          <a:bodyPr wrap="square" lIns="45720" rIns="45720" tIns="27432" bIns="27432" anchor="t">
-            <a:spAutoFit/>
-          </a:bodyPr>
-          <a:lstStyle/>
-          <a:p>
-            <a:r>
-              <a:rPr sz="1500" b="0">
+            <a:off x="1051560" y="2697480"/>
+            <a:ext cx="4663440" cy="1645920"/>
+          </a:xfrm>
+          <a:prstGeom prst="rect">
+            <a:avLst/>
+          </a:prstGeom>
+          <a:noFill/>
+        </p:spPr>
+        <p:txBody>
+          <a:bodyPr wrap="square" lIns="45720" rIns="45720" tIns="27432" bIns="27432" anchor="t">
+            <a:spAutoFit/>
+          </a:bodyPr>
+          <a:lstStyle/>
+          <a:p>
+            <a:r>
+              <a:rPr sz="1600" b="0">
                 <a:solidFill>
                   <a:srgbClr val="EEF1F3"/>
                 </a:solidFill>
                 <a:latin typeface="Arial"/>
               </a:rPr>
-              <a:t>opcode + stack + FFI records</a:t>
+              <a:t>one indirect branch per opcode</a:t>
+            </a:r>
+          </a:p>
+          <a:p/>
+          <a:p>
+            <a:r>
+              <a:rPr sz="1600" b="0">
+                <a:solidFill>
+                  <a:srgbClr val="EEF1F3"/>
+                </a:solidFill>
+                <a:latin typeface="Arial"/>
+              </a:rPr>
+              <a:t>-4.2% on my Forth interpreter</a:t>
+            </a:r>
+          </a:p>
+          <a:p>
+            <a:r>
+              <a:rPr sz="1600" b="0">
+                <a:solidFill>
+                  <a:srgbClr val="EEF1F3"/>
+                </a:solidFill>
+                <a:latin typeface="Arial"/>
+              </a:rPr>
+              <a:t>against a 1.0-1.6% noise band</a:t>
             </a:r>
           </a:p>
         </p:txBody>
@@ -8820,14 +11445,14 @@
         </p:nvSpPr>
         <p:spPr>
           <a:xfrm>
-            <a:off x="914400" y="2971800"/>
-            <a:ext cx="10241280" cy="731520"/>
+            <a:off x="6400800" y="1965960"/>
+            <a:ext cx="5029200" cy="2743200"/>
           </a:xfrm>
           <a:prstGeom prst="roundRect">
             <a:avLst/>
           </a:prstGeom>
           <a:solidFill>
-            <a:srgbClr val="23282F"/>
+            <a:srgbClr val="101317"/>
           </a:solidFill>
           <a:ln>
             <a:noFill/>
@@ -8863,173 +11488,120 @@
         </p:nvSpPr>
         <p:spPr>
           <a:xfrm>
-            <a:off x="1188720" y="3172968"/>
-            <a:ext cx="2743200" cy="274320"/>
-          </a:xfrm>
-          <a:prstGeom prst="rect">
-            <a:avLst/>
-          </a:prstGeom>
-          <a:noFill/>
-        </p:spPr>
-        <p:txBody>
-          <a:bodyPr wrap="square" lIns="45720" rIns="45720" tIns="27432" bIns="27432" anchor="t">
-            <a:spAutoFit/>
-          </a:bodyPr>
-          <a:lstStyle/>
-          <a:p>
-            <a:r>
-              <a:rPr sz="1500" b="1">
-                <a:solidFill>
-                  <a:srgbClr val="76B900"/>
+            <a:off x="6675120" y="2240280"/>
+            <a:ext cx="4480560" cy="274320"/>
+          </a:xfrm>
+          <a:prstGeom prst="rect">
+            <a:avLst/>
+          </a:prstGeom>
+          <a:noFill/>
+        </p:spPr>
+        <p:txBody>
+          <a:bodyPr wrap="square" lIns="45720" rIns="45720" tIns="27432" bIns="27432" anchor="t">
+            <a:spAutoFit/>
+          </a:bodyPr>
+          <a:lstStyle/>
+          <a:p>
+            <a:r>
+              <a:rPr sz="1400" b="1">
+                <a:solidFill>
+                  <a:srgbClr val="72B7D6"/>
+                </a:solidFill>
+                <a:latin typeface="Arial"/>
+              </a:rPr>
+              <a:t>PORTABLE SWITCH</a:t>
+            </a:r>
+          </a:p>
+        </p:txBody>
+      </p:sp>
+      <p:sp>
+        <p:nvSpPr>
+          <p:cNvPr id="12" name="TextBox 11"/>
+          <p:cNvSpPr txBox="1"/>
+          <p:nvPr/>
+        </p:nvSpPr>
+        <p:spPr>
+          <a:xfrm>
+            <a:off x="6675120" y="2697480"/>
+            <a:ext cx="4480560" cy="1645920"/>
+          </a:xfrm>
+          <a:prstGeom prst="rect">
+            <a:avLst/>
+          </a:prstGeom>
+          <a:noFill/>
+        </p:spPr>
+        <p:txBody>
+          <a:bodyPr wrap="square" lIns="45720" rIns="45720" tIns="27432" bIns="27432" anchor="t">
+            <a:spAutoFit/>
+          </a:bodyPr>
+          <a:lstStyle/>
+          <a:p>
+            <a:r>
+              <a:rPr sz="1600" b="0">
+                <a:solidFill>
+                  <a:srgbClr val="EEF1F3"/>
+                </a:solidFill>
+                <a:latin typeface="Arial"/>
+              </a:rPr>
+              <a:t>any compiler without</a:t>
+            </a:r>
+          </a:p>
+          <a:p>
+            <a:r>
+              <a:rPr sz="1600" b="0">
+                <a:solidFill>
+                  <a:srgbClr val="EEF1F3"/>
+                </a:solidFill>
+                <a:latin typeface="Arial"/>
+              </a:rPr>
+              <a:t>labels as values</a:t>
+            </a:r>
+          </a:p>
+          <a:p/>
+          <a:p>
+            <a:r>
+              <a:rPr sz="1600" b="0">
+                <a:solidFill>
+                  <a:srgbClr val="EEF1F3"/>
+                </a:solidFill>
+                <a:latin typeface="Arial"/>
+              </a:rPr>
+              <a:t>-DNANO_NO_COMPUTED_GOTO</a:t>
+            </a:r>
+          </a:p>
+        </p:txBody>
+      </p:sp>
+      <p:sp>
+        <p:nvSpPr>
+          <p:cNvPr id="13" name="TextBox 12"/>
+          <p:cNvSpPr txBox="1"/>
+          <p:nvPr/>
+        </p:nvSpPr>
+        <p:spPr>
+          <a:xfrm>
+            <a:off x="1828800" y="5074920"/>
+            <a:ext cx="8503920" cy="365760"/>
+          </a:xfrm>
+          <a:prstGeom prst="rect">
+            <a:avLst/>
+          </a:prstGeom>
+          <a:noFill/>
+        </p:spPr>
+        <p:txBody>
+          <a:bodyPr wrap="square" lIns="45720" rIns="45720" tIns="27432" bIns="27432" anchor="t">
+            <a:spAutoFit/>
+          </a:bodyPr>
+          <a:lstStyle/>
+          <a:p>
+            <a:pPr algn="ctr"/>
+            <a:r>
+              <a:rPr sz="1700" b="1">
+                <a:solidFill>
+                  <a:srgbClr val="FF6B35"/>
                 </a:solidFill>
                 <a:latin typeface="Courier New"/>
               </a:rPr>
-              <a:t>NANO_PROFILE</a:t>
-            </a:r>
-          </a:p>
-        </p:txBody>
-      </p:sp>
-      <p:sp>
-        <p:nvSpPr>
-          <p:cNvPr id="12" name="TextBox 11"/>
-          <p:cNvSpPr txBox="1"/>
-          <p:nvPr/>
-        </p:nvSpPr>
-        <p:spPr>
-          <a:xfrm>
-            <a:off x="4297680" y="3172968"/>
-            <a:ext cx="6217920" cy="274320"/>
-          </a:xfrm>
-          <a:prstGeom prst="rect">
-            <a:avLst/>
-          </a:prstGeom>
-          <a:noFill/>
-        </p:spPr>
-        <p:txBody>
-          <a:bodyPr wrap="square" lIns="45720" rIns="45720" tIns="27432" bIns="27432" anchor="t">
-            <a:spAutoFit/>
-          </a:bodyPr>
-          <a:lstStyle/>
-          <a:p>
-            <a:r>
-              <a:rPr sz="1500" b="0">
-                <a:solidFill>
-                  <a:srgbClr val="EEF1F3"/>
-                </a:solidFill>
-                <a:latin typeface="Arial"/>
-              </a:rPr>
-              <a:t>generated-C timing hooks</a:t>
-            </a:r>
-          </a:p>
-        </p:txBody>
-      </p:sp>
-      <p:sp>
-        <p:nvSpPr>
-          <p:cNvPr id="13" name="Rounded Rectangle 12"/>
-          <p:cNvSpPr/>
-          <p:nvPr/>
-        </p:nvSpPr>
-        <p:spPr>
-          <a:xfrm>
-            <a:off x="914400" y="4023360"/>
-            <a:ext cx="10241280" cy="731520"/>
-          </a:xfrm>
-          <a:prstGeom prst="roundRect">
-            <a:avLst/>
-          </a:prstGeom>
-          <a:solidFill>
-            <a:srgbClr val="23282F"/>
-          </a:solidFill>
-          <a:ln>
-            <a:noFill/>
-          </a:ln>
-        </p:spPr>
-        <p:style>
-          <a:lnRef idx="1">
-            <a:schemeClr val="accent1"/>
-          </a:lnRef>
-          <a:fillRef idx="3">
-            <a:schemeClr val="accent1"/>
-          </a:fillRef>
-          <a:effectRef idx="2">
-            <a:schemeClr val="accent1"/>
-          </a:effectRef>
-          <a:fontRef idx="minor">
-            <a:schemeClr val="lt1"/>
-          </a:fontRef>
-        </p:style>
-        <p:txBody>
-          <a:bodyPr rtlCol="0" anchor="ctr"/>
-          <a:lstStyle/>
-          <a:p>
-            <a:pPr algn="ctr"/>
-          </a:p>
-        </p:txBody>
-      </p:sp>
-      <p:sp>
-        <p:nvSpPr>
-          <p:cNvPr id="14" name="TextBox 13"/>
-          <p:cNvSpPr txBox="1"/>
-          <p:nvPr/>
-        </p:nvSpPr>
-        <p:spPr>
-          <a:xfrm>
-            <a:off x="1188720" y="4224528"/>
-            <a:ext cx="2743200" cy="274320"/>
-          </a:xfrm>
-          <a:prstGeom prst="rect">
-            <a:avLst/>
-          </a:prstGeom>
-          <a:noFill/>
-        </p:spPr>
-        <p:txBody>
-          <a:bodyPr wrap="square" lIns="45720" rIns="45720" tIns="27432" bIns="27432" anchor="t">
-            <a:spAutoFit/>
-          </a:bodyPr>
-          <a:lstStyle/>
-          <a:p>
-            <a:r>
-              <a:rPr sz="1500" b="1">
-                <a:solidFill>
-                  <a:srgbClr val="72B7D6"/>
-                </a:solidFill>
-                <a:latin typeface="Courier New"/>
-              </a:rPr>
-              <a:t>--profile-isa</a:t>
-            </a:r>
-          </a:p>
-        </p:txBody>
-      </p:sp>
-      <p:sp>
-        <p:nvSpPr>
-          <p:cNvPr id="15" name="TextBox 14"/>
-          <p:cNvSpPr txBox="1"/>
-          <p:nvPr/>
-        </p:nvSpPr>
-        <p:spPr>
-          <a:xfrm>
-            <a:off x="4297680" y="4224528"/>
-            <a:ext cx="6217920" cy="274320"/>
-          </a:xfrm>
-          <a:prstGeom prst="rect">
-            <a:avLst/>
-          </a:prstGeom>
-          <a:noFill/>
-        </p:spPr>
-        <p:txBody>
-          <a:bodyPr wrap="square" lIns="45720" rIns="45720" tIns="27432" bIns="27432" anchor="t">
-            <a:spAutoFit/>
-          </a:bodyPr>
-          <a:lstStyle/>
-          <a:p>
-            <a:r>
-              <a:rPr sz="1500" b="0">
-                <a:solidFill>
-                  <a:srgbClr val="EEF1F3"/>
-                </a:solidFill>
-                <a:latin typeface="Arial"/>
-              </a:rPr>
-              <a:t>structured VM counters</a:t>
+              <a:t>152 programs, both builds, identical output</a:t>
             </a:r>
           </a:p>
         </p:txBody>
@@ -9120,11 +11692,11 @@
             <a:r>
               <a:rPr sz="2800" b="1">
                 <a:solidFill>
-                  <a:srgbClr val="101317"/>
-                </a:solidFill>
-                <a:latin typeface="Arial"/>
-              </a:rPr>
-              <a:t>What I measured for 3.5.</a:t>
+                  <a:srgbClr val="EEF1F3"/>
+                </a:solidFill>
+                <a:latin typeface="Arial"/>
+              </a:rPr>
+              <a:t>Every function carries a shadow test.</a:t>
             </a:r>
           </a:p>
         </p:txBody>
@@ -9154,11 +11726,11 @@
             <a:r>
               <a:rPr sz="1300" b="0">
                 <a:solidFill>
-                  <a:srgbClr val="65707C"/>
-                </a:solidFill>
-                <a:latin typeface="Arial"/>
-              </a:rPr>
-              <a:t>Seven maintained workloads, 20 samples each, with the result kept as evidence.</a:t>
+                  <a:srgbClr val="72B7D6"/>
+                </a:solidFill>
+                <a:latin typeface="Arial"/>
+              </a:rPr>
+              <a:t>The test is an executable statement about behavior, not a coverage ornament.</a:t>
             </a:r>
           </a:p>
         </p:txBody>
@@ -9234,315 +11806,200 @@
       </p:sp>
       <p:sp>
         <p:nvSpPr>
-          <p:cNvPr id="7" name="TextBox 6"/>
-          <p:cNvSpPr txBox="1"/>
-          <p:nvPr/>
-        </p:nvSpPr>
-        <p:spPr>
-          <a:xfrm>
-            <a:off x="731520" y="2240280"/>
-            <a:ext cx="2194560" cy="685800"/>
-          </a:xfrm>
-          <a:prstGeom prst="rect">
-            <a:avLst/>
-          </a:prstGeom>
-          <a:noFill/>
-        </p:spPr>
-        <p:txBody>
-          <a:bodyPr wrap="square" lIns="45720" rIns="45720" tIns="27432" bIns="27432" anchor="t">
-            <a:spAutoFit/>
-          </a:bodyPr>
+          <p:cNvPr id="7" name="Rounded Rectangle 6"/>
+          <p:cNvSpPr/>
+          <p:nvPr/>
+        </p:nvSpPr>
+        <p:spPr>
+          <a:xfrm>
+            <a:off x="731520" y="1828800"/>
+            <a:ext cx="5303520" cy="3474720"/>
+          </a:xfrm>
+          <a:prstGeom prst="roundRect">
+            <a:avLst/>
+          </a:prstGeom>
+          <a:solidFill>
+            <a:srgbClr val="23282F"/>
+          </a:solidFill>
+          <a:ln>
+            <a:noFill/>
+          </a:ln>
+        </p:spPr>
+        <p:style>
+          <a:lnRef idx="1">
+            <a:schemeClr val="accent1"/>
+          </a:lnRef>
+          <a:fillRef idx="3">
+            <a:schemeClr val="accent1"/>
+          </a:fillRef>
+          <a:effectRef idx="2">
+            <a:schemeClr val="accent1"/>
+          </a:effectRef>
+          <a:fontRef idx="minor">
+            <a:schemeClr val="lt1"/>
+          </a:fontRef>
+        </p:style>
+        <p:txBody>
+          <a:bodyPr rtlCol="0" anchor="ctr"/>
           <a:lstStyle/>
           <a:p>
             <a:pPr algn="ctr"/>
-            <a:r>
-              <a:rPr sz="3800" b="1">
+          </a:p>
+        </p:txBody>
+      </p:sp>
+      <p:sp>
+        <p:nvSpPr>
+          <p:cNvPr id="8" name="TextBox 7"/>
+          <p:cNvSpPr txBox="1"/>
+          <p:nvPr/>
+        </p:nvSpPr>
+        <p:spPr>
+          <a:xfrm>
+            <a:off x="1005840" y="2148840"/>
+            <a:ext cx="4754880" cy="2651760"/>
+          </a:xfrm>
+          <a:prstGeom prst="rect">
+            <a:avLst/>
+          </a:prstGeom>
+          <a:noFill/>
+        </p:spPr>
+        <p:txBody>
+          <a:bodyPr wrap="square" lIns="45720" rIns="45720" tIns="27432" bIns="27432" anchor="t">
+            <a:spAutoFit/>
+          </a:bodyPr>
+          <a:lstStyle/>
+          <a:p>
+            <a:r>
+              <a:rPr sz="1600" b="0">
+                <a:solidFill>
+                  <a:srgbClr val="EEF1F3"/>
+                </a:solidFill>
+                <a:latin typeface="Courier New"/>
+              </a:rPr>
+              <a:t>fn gcd(a: int, b: int) -&gt; int {</a:t>
+            </a:r>
+          </a:p>
+          <a:p>
+            <a:r>
+              <a:rPr sz="1600" b="0">
+                <a:solidFill>
+                  <a:srgbClr val="EEF1F3"/>
+                </a:solidFill>
+                <a:latin typeface="Courier New"/>
+              </a:rPr>
+              <a:t>    ...</a:t>
+            </a:r>
+          </a:p>
+          <a:p>
+            <a:r>
+              <a:rPr sz="1600" b="0">
+                <a:solidFill>
+                  <a:srgbClr val="EEF1F3"/>
+                </a:solidFill>
+                <a:latin typeface="Courier New"/>
+              </a:rPr>
+              <a:t>}</a:t>
+            </a:r>
+          </a:p>
+          <a:p/>
+          <a:p>
+            <a:r>
+              <a:rPr sz="1600" b="0">
+                <a:solidFill>
+                  <a:srgbClr val="EEF1F3"/>
+                </a:solidFill>
+                <a:latin typeface="Courier New"/>
+              </a:rPr>
+              <a:t>shadow gcd {</a:t>
+            </a:r>
+          </a:p>
+          <a:p>
+            <a:r>
+              <a:rPr sz="1600" b="0">
+                <a:solidFill>
+                  <a:srgbClr val="EEF1F3"/>
+                </a:solidFill>
+                <a:latin typeface="Courier New"/>
+              </a:rPr>
+              <a:t>    assert (== (gcd 48 18) 6)</a:t>
+            </a:r>
+          </a:p>
+          <a:p>
+            <a:r>
+              <a:rPr sz="1600" b="0">
+                <a:solidFill>
+                  <a:srgbClr val="EEF1F3"/>
+                </a:solidFill>
+                <a:latin typeface="Courier New"/>
+              </a:rPr>
+              <a:t>}</a:t>
+            </a:r>
+          </a:p>
+        </p:txBody>
+      </p:sp>
+      <p:sp>
+        <p:nvSpPr>
+          <p:cNvPr id="9" name="TextBox 8"/>
+          <p:cNvSpPr txBox="1"/>
+          <p:nvPr/>
+        </p:nvSpPr>
+        <p:spPr>
+          <a:xfrm>
+            <a:off x="6537960" y="2148840"/>
+            <a:ext cx="4297680" cy="2011680"/>
+          </a:xfrm>
+          <a:prstGeom prst="rect">
+            <a:avLst/>
+          </a:prstGeom>
+          <a:noFill/>
+        </p:spPr>
+        <p:txBody>
+          <a:bodyPr wrap="square" lIns="45720" rIns="45720" tIns="27432" bIns="27432" anchor="t">
+            <a:spAutoFit/>
+          </a:bodyPr>
+          <a:lstStyle/>
+          <a:p>
+            <a:r>
+              <a:rPr sz="2200" b="1">
                 <a:solidFill>
                   <a:srgbClr val="76B900"/>
                 </a:solidFill>
                 <a:latin typeface="Arial"/>
               </a:rPr>
-              <a:t>7</a:t>
-            </a:r>
-          </a:p>
-        </p:txBody>
-      </p:sp>
-      <p:sp>
-        <p:nvSpPr>
-          <p:cNvPr id="8" name="TextBox 7"/>
-          <p:cNvSpPr txBox="1"/>
-          <p:nvPr/>
-        </p:nvSpPr>
-        <p:spPr>
-          <a:xfrm>
-            <a:off x="731520" y="3063240"/>
-            <a:ext cx="2194560" cy="320040"/>
-          </a:xfrm>
-          <a:prstGeom prst="rect">
-            <a:avLst/>
-          </a:prstGeom>
-          <a:noFill/>
-        </p:spPr>
-        <p:txBody>
-          <a:bodyPr wrap="square" lIns="45720" rIns="45720" tIns="27432" bIns="27432" anchor="t">
-            <a:spAutoFit/>
-          </a:bodyPr>
-          <a:lstStyle/>
-          <a:p>
-            <a:pPr algn="ctr"/>
-            <a:r>
-              <a:rPr sz="1400" b="1">
-                <a:solidFill>
-                  <a:srgbClr val="EEF1F3"/>
-                </a:solidFill>
-                <a:latin typeface="Arial"/>
-              </a:rPr>
-              <a:t>workloads</a:t>
-            </a:r>
-          </a:p>
-        </p:txBody>
-      </p:sp>
-      <p:sp>
-        <p:nvSpPr>
-          <p:cNvPr id="9" name="TextBox 8"/>
-          <p:cNvSpPr txBox="1"/>
-          <p:nvPr/>
-        </p:nvSpPr>
-        <p:spPr>
-          <a:xfrm>
-            <a:off x="3520439" y="2240280"/>
-            <a:ext cx="2194560" cy="685800"/>
-          </a:xfrm>
-          <a:prstGeom prst="rect">
-            <a:avLst/>
-          </a:prstGeom>
-          <a:noFill/>
-        </p:spPr>
-        <p:txBody>
-          <a:bodyPr wrap="square" lIns="45720" rIns="45720" tIns="27432" bIns="27432" anchor="t">
-            <a:spAutoFit/>
-          </a:bodyPr>
-          <a:lstStyle/>
-          <a:p>
-            <a:pPr algn="ctr"/>
-            <a:r>
-              <a:rPr sz="3800" b="1">
+              <a:t>2,632 NanoISA tests</a:t>
+            </a:r>
+          </a:p>
+          <a:p>
+            <a:r>
+              <a:rPr sz="2200" b="1">
                 <a:solidFill>
                   <a:srgbClr val="76B900"/>
                 </a:solidFill>
                 <a:latin typeface="Arial"/>
               </a:rPr>
-              <a:t>20</a:t>
-            </a:r>
-          </a:p>
-        </p:txBody>
-      </p:sp>
-      <p:sp>
-        <p:nvSpPr>
-          <p:cNvPr id="10" name="TextBox 9"/>
-          <p:cNvSpPr txBox="1"/>
-          <p:nvPr/>
-        </p:nvSpPr>
-        <p:spPr>
-          <a:xfrm>
-            <a:off x="3520439" y="3063240"/>
-            <a:ext cx="2194560" cy="320040"/>
-          </a:xfrm>
-          <a:prstGeom prst="rect">
-            <a:avLst/>
-          </a:prstGeom>
-          <a:noFill/>
-        </p:spPr>
-        <p:txBody>
-          <a:bodyPr wrap="square" lIns="45720" rIns="45720" tIns="27432" bIns="27432" anchor="t">
-            <a:spAutoFit/>
-          </a:bodyPr>
-          <a:lstStyle/>
-          <a:p>
-            <a:pPr algn="ctr"/>
-            <a:r>
-              <a:rPr sz="1400" b="1">
-                <a:solidFill>
-                  <a:srgbClr val="EEF1F3"/>
-                </a:solidFill>
-                <a:latin typeface="Arial"/>
-              </a:rPr>
-              <a:t>samples each</a:t>
-            </a:r>
-          </a:p>
-        </p:txBody>
-      </p:sp>
-      <p:sp>
-        <p:nvSpPr>
-          <p:cNvPr id="11" name="TextBox 10"/>
-          <p:cNvSpPr txBox="1"/>
-          <p:nvPr/>
-        </p:nvSpPr>
-        <p:spPr>
-          <a:xfrm>
-            <a:off x="6309359" y="2240280"/>
-            <a:ext cx="2194560" cy="685800"/>
-          </a:xfrm>
-          <a:prstGeom prst="rect">
-            <a:avLst/>
-          </a:prstGeom>
-          <a:noFill/>
-        </p:spPr>
-        <p:txBody>
-          <a:bodyPr wrap="square" lIns="45720" rIns="45720" tIns="27432" bIns="27432" anchor="t">
-            <a:spAutoFit/>
-          </a:bodyPr>
-          <a:lstStyle/>
-          <a:p>
-            <a:pPr algn="ctr"/>
-            <a:r>
-              <a:rPr sz="3800" b="1">
-                <a:solidFill>
-                  <a:srgbClr val="FF6B35"/>
-                </a:solidFill>
-                <a:latin typeface="Arial"/>
-              </a:rPr>
-              <a:t>0</a:t>
-            </a:r>
-          </a:p>
-        </p:txBody>
-      </p:sp>
-      <p:sp>
-        <p:nvSpPr>
-          <p:cNvPr id="12" name="TextBox 11"/>
-          <p:cNvSpPr txBox="1"/>
-          <p:nvPr/>
-        </p:nvSpPr>
-        <p:spPr>
-          <a:xfrm>
-            <a:off x="6309359" y="3063240"/>
-            <a:ext cx="2194560" cy="320040"/>
-          </a:xfrm>
-          <a:prstGeom prst="rect">
-            <a:avLst/>
-          </a:prstGeom>
-          <a:noFill/>
-        </p:spPr>
-        <p:txBody>
-          <a:bodyPr wrap="square" lIns="45720" rIns="45720" tIns="27432" bIns="27432" anchor="t">
-            <a:spAutoFit/>
-          </a:bodyPr>
-          <a:lstStyle/>
-          <a:p>
-            <a:pPr algn="ctr"/>
-            <a:r>
-              <a:rPr sz="1400" b="1">
-                <a:solidFill>
-                  <a:srgbClr val="EEF1F3"/>
-                </a:solidFill>
-                <a:latin typeface="Arial"/>
-              </a:rPr>
-              <a:t>failed runs</a:t>
-            </a:r>
-          </a:p>
-        </p:txBody>
-      </p:sp>
-      <p:sp>
-        <p:nvSpPr>
-          <p:cNvPr id="13" name="TextBox 12"/>
-          <p:cNvSpPr txBox="1"/>
-          <p:nvPr/>
-        </p:nvSpPr>
-        <p:spPr>
-          <a:xfrm>
-            <a:off x="9098280" y="2240280"/>
-            <a:ext cx="2194560" cy="685800"/>
-          </a:xfrm>
-          <a:prstGeom prst="rect">
-            <a:avLst/>
-          </a:prstGeom>
-          <a:noFill/>
-        </p:spPr>
-        <p:txBody>
-          <a:bodyPr wrap="square" lIns="45720" rIns="45720" tIns="27432" bIns="27432" anchor="t">
-            <a:spAutoFit/>
-          </a:bodyPr>
-          <a:lstStyle/>
-          <a:p>
-            <a:pPr algn="ctr"/>
-            <a:r>
-              <a:rPr sz="3800" b="1">
+              <a:t>621 NanoVM tests</a:t>
+            </a:r>
+          </a:p>
+          <a:p>
+            <a:r>
+              <a:rPr sz="2200" b="1">
                 <a:solidFill>
                   <a:srgbClr val="76B900"/>
                 </a:solidFill>
                 <a:latin typeface="Arial"/>
               </a:rPr>
-              <a:t>all</a:t>
-            </a:r>
-          </a:p>
-        </p:txBody>
-      </p:sp>
-      <p:sp>
-        <p:nvSpPr>
-          <p:cNvPr id="14" name="TextBox 13"/>
-          <p:cNvSpPr txBox="1"/>
-          <p:nvPr/>
-        </p:nvSpPr>
-        <p:spPr>
-          <a:xfrm>
-            <a:off x="9098280" y="3063240"/>
-            <a:ext cx="2194560" cy="320040"/>
-          </a:xfrm>
-          <a:prstGeom prst="rect">
-            <a:avLst/>
-          </a:prstGeom>
-          <a:noFill/>
-        </p:spPr>
-        <p:txBody>
-          <a:bodyPr wrap="square" lIns="45720" rIns="45720" tIns="27432" bIns="27432" anchor="t">
-            <a:spAutoFit/>
-          </a:bodyPr>
-          <a:lstStyle/>
-          <a:p>
-            <a:pPr algn="ctr"/>
-            <a:r>
-              <a:rPr sz="1400" b="1">
-                <a:solidFill>
-                  <a:srgbClr val="EEF1F3"/>
-                </a:solidFill>
-                <a:latin typeface="Arial"/>
-              </a:rPr>
-              <a:t>profiles recorded</a:t>
-            </a:r>
-          </a:p>
-        </p:txBody>
-      </p:sp>
-      <p:sp>
-        <p:nvSpPr>
-          <p:cNvPr id="15" name="TextBox 14"/>
-          <p:cNvSpPr txBox="1"/>
-          <p:nvPr/>
-        </p:nvSpPr>
-        <p:spPr>
-          <a:xfrm>
-            <a:off x="1828800" y="4846320"/>
-            <a:ext cx="8503920" cy="320040"/>
-          </a:xfrm>
-          <a:prstGeom prst="rect">
-            <a:avLst/>
-          </a:prstGeom>
-          <a:noFill/>
-        </p:spPr>
-        <p:txBody>
-          <a:bodyPr wrap="square" lIns="45720" rIns="45720" tIns="27432" bIns="27432" anchor="t">
-            <a:spAutoFit/>
-          </a:bodyPr>
-          <a:lstStyle/>
-          <a:p>
-            <a:pPr algn="ctr"/>
-            <a:r>
-              <a:rPr sz="1800" b="1">
-                <a:solidFill>
-                  <a:srgbClr val="72B7D6"/>
-                </a:solidFill>
-                <a:latin typeface="Courier New"/>
-              </a:rPr>
-              <a:t>retired · branches · calls · heap · traps · FFI</a:t>
+              <a:t>93 verifier tests</a:t>
+            </a:r>
+          </a:p>
+          <a:p>
+            <a:r>
+              <a:rPr sz="2200" b="1">
+                <a:solidFill>
+                  <a:srgbClr val="76B900"/>
+                </a:solidFill>
+                <a:latin typeface="Arial"/>
+              </a:rPr>
+              <a:t>63 NanoVirt tests</a:t>
             </a:r>
           </a:p>
         </p:txBody>

--- a/docs/presentation/nanolang-developer-overview.pptx
+++ b/docs/presentation/nanolang-developer-overview.pptx
@@ -19,6 +19,7 @@
     <p:sldId id="267" r:id="rId19"/>
     <p:sldId id="268" r:id="rId20"/>
     <p:sldId id="269" r:id="rId21"/>
+    <p:sldId id="270" r:id="rId22"/>
   </p:sldIdLst>
   <p:sldSz cx="12191695" cy="6858000" type="screen4x3"/>
   <p:notesSz cx="6858000" cy="9144000"/>
@@ -590,12 +591,12 @@
           <a:lstStyle/>
           <a:p>
             <a:r>
-              <a:t>Authority: docs/EXTERN_FFI.md, src/nanovm/vm_ffi.c, src/nanovm/cop_protocol.c, docs/NANOISA_MEASUREMENTS.md.</a:t>
-            </a:r>
-          </a:p>
-          <a:p>
-            <a:r>
-              <a:t>The FFI boundary is tested; it is not part of the formally verified NanoCore subset.</a:t>
+              <a:t>Authority: CONTRIBUTING.md and the current test suites, counted at the v4.0.0 tag.</a:t>
+            </a:r>
+          </a:p>
+          <a:p>
+            <a:r>
+              <a:t>make test-verify-all-programs additionally verifies every program in tests/, because compiling is not verifying.</a:t>
             </a:r>
           </a:p>
         </p:txBody>
@@ -665,17 +666,12 @@
           <a:lstStyle/>
           <a:p>
             <a:r>
-              <a:t>Authority: src/nanovm/heap_cycles.c, Bacon and Rajan (PLDI 2001), tests/nanovm/test_vm.c.</a:t>
-            </a:r>
-          </a:p>
-          <a:p>
-            <a:r>
-              <a:t>The generated-C runtime already collected cycles; the VM did not, so the two disagreed about whether a program leaks.</a:t>
-            </a:r>
-          </a:p>
-          <a:p>
-            <a:r>
-              <a:t>The test that matters most is the one where a reachable cycle must survive and still be readable.</a:t>
+              <a:t>Authority: docs/EXTERN_FFI.md, src/nanovm/vm_ffi.c, src/nanovm/cop_protocol.c, docs/NANOISA_MEASUREMENTS.md.</a:t>
+            </a:r>
+          </a:p>
+          <a:p>
+            <a:r>
+              <a:t>The FFI boundary is tested; it is not part of the formally verified NanoCore subset.</a:t>
             </a:r>
           </a:p>
         </p:txBody>
@@ -745,17 +741,17 @@
           <a:lstStyle/>
           <a:p>
             <a:r>
-              <a:t>Authority: docs/NANOISA_MEASUREMENTS.md and scripts/benchmark_nanoisa.sh.</a:t>
-            </a:r>
-          </a:p>
-          <a:p>
-            <a:r>
-              <a:t>Before 4.0 the suite timed one process per sample, so every workload took about 17 ms whether it retired 78 instructions or 32,082.</a:t>
-            </a:r>
-          </a:p>
-          <a:p>
-            <a:r>
-              <a:t>It could not have detected an interpreter change of any size, which is why these questions stayed open.</a:t>
+              <a:t>Authority: src/nanovm/heap_cycles.c, Bacon and Rajan (PLDI 2001), tests/nanovm/test_vm.c.</a:t>
+            </a:r>
+          </a:p>
+          <a:p>
+            <a:r>
+              <a:t>The generated-C runtime already collected cycles; the VM did not, so the two disagreed about whether a program leaks.</a:t>
+            </a:r>
+          </a:p>
+          <a:p>
+            <a:r>
+              <a:t>The test that matters most is the one where a reachable cycle must survive and still be readable.</a:t>
             </a:r>
           </a:p>
         </p:txBody>
@@ -825,12 +821,17 @@
           <a:lstStyle/>
           <a:p>
             <a:r>
-              <a:t>Authority: docs/RELEASE_4.0.md, docs/ROADMAP.md, and the open issue list.</a:t>
-            </a:r>
-          </a:p>
-          <a:p>
-            <a:r>
-              <a:t>Phase 12 is 78 of 78. The right column is scope or filed defect, not vagueness.</a:t>
+              <a:t>Authority: docs/NANOISA_MEASUREMENTS.md and scripts/benchmark_nanoisa.sh.</a:t>
+            </a:r>
+          </a:p>
+          <a:p>
+            <a:r>
+              <a:t>Before 4.0 the suite timed one process per sample, so every workload took about 17 ms whether it retired 78 instructions or 32,082.</a:t>
+            </a:r>
+          </a:p>
+          <a:p>
+            <a:r>
+              <a:t>It could not have detected an interpreter change of any size, which is why these questions stayed open.</a:t>
             </a:r>
           </a:p>
         </p:txBody>
@@ -900,6 +901,86 @@
           <a:lstStyle/>
           <a:p>
             <a:r>
+              <a:t>Authority: docs/RELEASE_4.0.md, docs/ROADMAP.md, the open issue list, and git log v3.5.0..v4.0.0.</a:t>
+            </a:r>
+          </a:p>
+          <a:p>
+            <a:r>
+              <a:t>For a reader arriving from 3.5, the one-line delta is that my bytecode used to be well-formed and is now verified.</a:t>
+            </a:r>
+          </a:p>
+          <a:p>
+            <a:r>
+              <a:t>Phase 12 is 78 of 78. The right column is scope or filed defect, not vagueness.</a:t>
+            </a:r>
+          </a:p>
+        </p:txBody>
+      </p:sp>
+      <p:sp>
+        <p:nvSpPr>
+          <p:cNvPr id="4" name="Slide Number Placeholder 3"/>
+          <p:cNvSpPr>
+            <a:spLocks noGrp="1"/>
+          </p:cNvSpPr>
+          <p:nvPr>
+            <p:ph type="sldNum" idx="5" sz="quarter"/>
+          </p:nvPr>
+        </p:nvSpPr>
+        <p:spPr/>
+      </p:sp>
+    </p:spTree>
+  </p:cSld>
+  <p:clrMapOvr>
+    <a:masterClrMapping/>
+  </p:clrMapOvr>
+</p:notes>
+</file>
+
+<file path=ppt/notesSlides/notesSlide15.xml><?xml version="1.0" encoding="utf-8"?>
+<p:notes xmlns:a="http://schemas.openxmlformats.org/drawingml/2006/main" xmlns:p="http://schemas.openxmlformats.org/presentationml/2006/main" xmlns:r="http://schemas.openxmlformats.org/officeDocument/2006/relationships">
+  <p:cSld>
+    <p:spTree>
+      <p:nvGrpSpPr>
+        <p:cNvPr id="1" name=""/>
+        <p:cNvGrpSpPr/>
+        <p:nvPr/>
+      </p:nvGrpSpPr>
+      <p:grpSpPr>
+        <a:xfrm>
+          <a:off x="0" y="0"/>
+          <a:ext cx="0" cy="0"/>
+          <a:chOff x="0" y="0"/>
+          <a:chExt cx="0" cy="0"/>
+        </a:xfrm>
+      </p:grpSpPr>
+      <p:sp>
+        <p:nvSpPr>
+          <p:cNvPr id="2" name="Slide Image Placeholder 1"/>
+          <p:cNvSpPr>
+            <a:spLocks noGrp="1"/>
+          </p:cNvSpPr>
+          <p:nvPr>
+            <p:ph type="sldImg" idx="2"/>
+          </p:nvPr>
+        </p:nvSpPr>
+        <p:spPr/>
+      </p:sp>
+      <p:sp>
+        <p:nvSpPr>
+          <p:cNvPr id="3" name="Notes Placeholder 2"/>
+          <p:cNvSpPr>
+            <a:spLocks noGrp="1"/>
+          </p:cNvSpPr>
+          <p:nvPr>
+            <p:ph type="body" idx="3" sz="quarter"/>
+          </p:nvPr>
+        </p:nvSpPr>
+        <p:spPr/>
+        <p:txBody>
+          <a:bodyPr/>
+          <a:lstStyle/>
+          <a:p>
+            <a:r>
               <a:t>Authority: CONTRIBUTING.md, docs/PERSONA.md, docs/ROADMAP.md.</a:t>
             </a:r>
           </a:p>
@@ -973,6 +1054,21 @@
               <a:t>Authority: docs/PERSONA.md and docs/CANONICAL_STYLE.md.</a:t>
             </a:r>
           </a:p>
+          <a:p>
+            <a:r>
+              <a:t>This slide carries the thesis. Everything after it is a mechanism serving this claim,</a:t>
+            </a:r>
+          </a:p>
+          <a:p>
+            <a:r>
+              <a:t>and a reader who does not accept it here will not care about the module format.</a:t>
+            </a:r>
+          </a:p>
+          <a:p>
+            <a:r>
+              <a:t>PROOF is not decoration: a function without a shadow test does not compile.</a:t>
+            </a:r>
+          </a:p>
         </p:txBody>
       </p:sp>
       <p:sp>
@@ -1420,17 +1516,22 @@
           <a:lstStyle/>
           <a:p>
             <a:r>
-              <a:t>Authority: src/nanovm/vm.c, docs/NANOISA_MEASUREMENTS.md, make test-dispatch-equivalence.</a:t>
-            </a:r>
-          </a:p>
-          <a:p>
-            <a:r>
-              <a:t>VM_CASE and VM_NEXT are the only difference, so the two strategies cannot drift in what an instruction does.</a:t>
-            </a:r>
-          </a:p>
-          <a:p>
-            <a:r>
-              <a:t>The threaded build has no loop around the handlers, so a stray break is a compile error rather than a silent exit.</a:t>
+              <a:t>Authority: tests/nanoisa/test_fuzz_malformed.c, tests/nanovm/test_cop_fuzz.c, tests/fuzzing/README.md.</a:t>
+            </a:r>
+          </a:p>
+          <a:p>
+            <a:r>
+              <a:t>784 lines of fuzz and malformed-input tests were added in 4.0 across the six surfaces named here.</a:t>
+            </a:r>
+          </a:p>
+          <a:p>
+            <a:r>
+              <a:t>Wrapping arithmetic was removed from code-range and section validation, not merely guarded.</a:t>
+            </a:r>
+          </a:p>
+          <a:p>
+            <a:r>
+              <a:t>This slide is the systemic answer to slide 7: a verifier that is correct is still only one layer.</a:t>
             </a:r>
           </a:p>
         </p:txBody>
@@ -1500,12 +1601,17 @@
           <a:lstStyle/>
           <a:p>
             <a:r>
-              <a:t>Authority: CONTRIBUTING.md and the current test suites, counted at the v4.0.0 tag.</a:t>
-            </a:r>
-          </a:p>
-          <a:p>
-            <a:r>
-              <a:t>make test-verify-all-programs additionally verifies every program in tests/, because compiling is not verifying.</a:t>
+              <a:t>Authority: src/nanovm/vm.c, docs/NANOISA_MEASUREMENTS.md, make test-dispatch-equivalence.</a:t>
+            </a:r>
+          </a:p>
+          <a:p>
+            <a:r>
+              <a:t>VM_CASE and VM_NEXT are the only difference, so the two strategies cannot drift in what an instruction does.</a:t>
+            </a:r>
+          </a:p>
+          <a:p>
+            <a:r>
+              <a:t>The threaded build has no loop around the handlers, so a stray break is a compile error rather than a silent exit.</a:t>
             </a:r>
           </a:p>
         </p:txBody>
@@ -4719,27 +4825,38 @@
         </p:nvSpPr>
         <p:spPr>
           <a:xfrm>
-            <a:off x="685800" y="4069080"/>
-            <a:ext cx="6126480" cy="822960"/>
-          </a:xfrm>
-          <a:prstGeom prst="rect">
-            <a:avLst/>
-          </a:prstGeom>
-          <a:noFill/>
-        </p:spPr>
-        <p:txBody>
-          <a:bodyPr wrap="square" lIns="45720" rIns="45720" tIns="27432" bIns="27432" anchor="t">
-            <a:spAutoFit/>
-          </a:bodyPr>
-          <a:lstStyle/>
-          <a:p>
-            <a:r>
-              <a:rPr sz="1700" b="0">
+            <a:off x="685800" y="3977639"/>
+            <a:ext cx="6858000" cy="1097280"/>
+          </a:xfrm>
+          <a:prstGeom prst="rect">
+            <a:avLst/>
+          </a:prstGeom>
+          <a:noFill/>
+        </p:spPr>
+        <p:txBody>
+          <a:bodyPr wrap="square" lIns="45720" rIns="45720" tIns="27432" bIns="27432" anchor="t">
+            <a:spAutoFit/>
+          </a:bodyPr>
+          <a:lstStyle/>
+          <a:p>
+            <a:r>
+              <a:rPr sz="1600" b="0">
                 <a:solidFill>
                   <a:srgbClr val="72B7D6"/>
                 </a:solidFill>
                 <a:latin typeface="Arial"/>
               </a:rPr>
+              <a:t>A small language designed to be written by machines and audited by humans.</a:t>
+            </a:r>
+          </a:p>
+          <a:p>
+            <a:r>
+              <a:rPr sz="1600" b="0">
+                <a:solidFill>
+                  <a:srgbClr val="72B7D6"/>
+                </a:solidFill>
+                <a:latin typeface="Arial"/>
+              </a:rPr>
               <a:t>A developer's view of my syntax, compiler, NanoISA, NanoVM, and what my verifier proves.</a:t>
             </a:r>
           </a:p>
@@ -4754,7 +4871,7 @@
         <p:spPr>
           <a:xfrm>
             <a:off x="685800" y="5989320"/>
-            <a:ext cx="5120640" cy="274320"/>
+            <a:ext cx="6583680" cy="274320"/>
           </a:xfrm>
           <a:prstGeom prst="rect">
             <a:avLst/>
@@ -4774,7 +4891,7 @@
                 </a:solidFill>
                 <a:latin typeface="Arial"/>
               </a:rPr>
-              <a:t>NanoISA v2 · NanoVM v2 · Phase 12 complete</a:t>
+              <a:t>NanoISA v2 · NanoVM v2 · bytecode that is verified, not merely well-formed</a:t>
             </a:r>
           </a:p>
         </p:txBody>
@@ -4812,7 +4929,7 @@
             <a:avLst/>
           </a:prstGeom>
           <a:solidFill>
-            <a:srgbClr val="EEF1F3"/>
+            <a:srgbClr val="101317"/>
           </a:solidFill>
           <a:ln>
             <a:noFill/>
@@ -4865,11 +4982,11 @@
             <a:r>
               <a:rPr sz="2800" b="1">
                 <a:solidFill>
-                  <a:srgbClr val="101317"/>
-                </a:solidFill>
-                <a:latin typeface="Arial"/>
-              </a:rPr>
-              <a:t>FFI is an explicit unsafe boundary.</a:t>
+                  <a:srgbClr val="EEF1F3"/>
+                </a:solidFill>
+                <a:latin typeface="Arial"/>
+              </a:rPr>
+              <a:t>Every function carries a shadow test.</a:t>
             </a:r>
           </a:p>
         </p:txBody>
@@ -4899,11 +5016,11 @@
             <a:r>
               <a:rPr sz="1300" b="0">
                 <a:solidFill>
-                  <a:srgbClr val="65707C"/>
-                </a:solidFill>
-                <a:latin typeface="Arial"/>
-              </a:rPr>
-              <a:t>Imports carry signatures. The co-process can keep foreign code outside my VM process.</a:t>
+                  <a:srgbClr val="72B7D6"/>
+                </a:solidFill>
+                <a:latin typeface="Arial"/>
+              </a:rPr>
+              <a:t>The test is an executable statement about behavior, not a coverage ornament.</a:t>
             </a:r>
           </a:p>
         </p:txBody>
@@ -4985,8 +5102,8 @@
         </p:nvSpPr>
         <p:spPr>
           <a:xfrm>
-            <a:off x="731520" y="2057400"/>
-            <a:ext cx="2743200" cy="2377440"/>
+            <a:off x="731520" y="1828800"/>
+            <a:ext cx="5303520" cy="3474720"/>
           </a:xfrm>
           <a:prstGeom prst="roundRect">
             <a:avLst/>
@@ -5028,28 +5145,84 @@
         </p:nvSpPr>
         <p:spPr>
           <a:xfrm>
-            <a:off x="960120" y="2423160"/>
-            <a:ext cx="2286000" cy="274320"/>
-          </a:xfrm>
-          <a:prstGeom prst="rect">
-            <a:avLst/>
-          </a:prstGeom>
-          <a:noFill/>
-        </p:spPr>
-        <p:txBody>
-          <a:bodyPr wrap="square" lIns="45720" rIns="45720" tIns="27432" bIns="27432" anchor="t">
-            <a:spAutoFit/>
-          </a:bodyPr>
-          <a:lstStyle/>
-          <a:p>
-            <a:r>
-              <a:rPr sz="1800" b="1">
+            <a:off x="1005840" y="2148840"/>
+            <a:ext cx="4754880" cy="2651760"/>
+          </a:xfrm>
+          <a:prstGeom prst="rect">
+            <a:avLst/>
+          </a:prstGeom>
+          <a:noFill/>
+        </p:spPr>
+        <p:txBody>
+          <a:bodyPr wrap="square" lIns="45720" rIns="45720" tIns="27432" bIns="27432" anchor="t">
+            <a:spAutoFit/>
+          </a:bodyPr>
+          <a:lstStyle/>
+          <a:p>
+            <a:r>
+              <a:rPr sz="1600" b="0">
                 <a:solidFill>
                   <a:srgbClr val="EEF1F3"/>
                 </a:solidFill>
-                <a:latin typeface="Arial"/>
-              </a:rPr>
-              <a:t>NanoLang</a:t>
+                <a:latin typeface="Courier New"/>
+              </a:rPr>
+              <a:t>fn gcd(a: int, b: int) -&gt; int {</a:t>
+            </a:r>
+          </a:p>
+          <a:p>
+            <a:r>
+              <a:rPr sz="1600" b="0">
+                <a:solidFill>
+                  <a:srgbClr val="EEF1F3"/>
+                </a:solidFill>
+                <a:latin typeface="Courier New"/>
+              </a:rPr>
+              <a:t>    ...</a:t>
+            </a:r>
+          </a:p>
+          <a:p>
+            <a:r>
+              <a:rPr sz="1600" b="0">
+                <a:solidFill>
+                  <a:srgbClr val="EEF1F3"/>
+                </a:solidFill>
+                <a:latin typeface="Courier New"/>
+              </a:rPr>
+              <a:t>}</a:t>
+            </a:r>
+          </a:p>
+          <a:p/>
+          <a:p>
+            <a:r>
+              <a:rPr sz="1600" b="0">
+                <a:solidFill>
+                  <a:srgbClr val="EEF1F3"/>
+                </a:solidFill>
+                <a:latin typeface="Courier New"/>
+              </a:rPr>
+              <a:t>shadow gcd {</a:t>
+            </a:r>
+          </a:p>
+          <a:p>
+            <a:r>
+              <a:rPr sz="1600" b="0">
+                <a:solidFill>
+                  <a:srgbClr val="EEF1F3"/>
+                </a:solidFill>
+                <a:latin typeface="Courier New"/>
+              </a:rPr>
+              <a:t>    assert (== (gcd 48 18) 6)</a:t>
+            </a:r>
+          </a:p>
+          <a:p>
+            <a:r>
+              <a:rPr sz="1600" b="0">
+                <a:solidFill>
+                  <a:srgbClr val="EEF1F3"/>
+                </a:solidFill>
+                <a:latin typeface="Courier New"/>
+              </a:rPr>
+              <a:t>}</a:t>
             </a:r>
           </a:p>
         </p:txBody>
@@ -5062,285 +5235,61 @@
         </p:nvSpPr>
         <p:spPr>
           <a:xfrm>
-            <a:off x="960120" y="3063240"/>
-            <a:ext cx="2286000" cy="274320"/>
-          </a:xfrm>
-          <a:prstGeom prst="rect">
-            <a:avLst/>
-          </a:prstGeom>
-          <a:noFill/>
-        </p:spPr>
-        <p:txBody>
-          <a:bodyPr wrap="square" lIns="45720" rIns="45720" tIns="27432" bIns="27432" anchor="t">
-            <a:spAutoFit/>
-          </a:bodyPr>
-          <a:lstStyle/>
-          <a:p>
-            <a:r>
-              <a:rPr sz="1500" b="1">
-                <a:solidFill>
-                  <a:srgbClr val="72B7D6"/>
-                </a:solidFill>
-                <a:latin typeface="Arial"/>
-              </a:rPr>
-              <a:t>typed call</a:t>
-            </a:r>
-          </a:p>
-        </p:txBody>
-      </p:sp>
-      <p:sp>
-        <p:nvSpPr>
-          <p:cNvPr id="10" name="Rounded Rectangle 9"/>
-          <p:cNvSpPr/>
-          <p:nvPr/>
-        </p:nvSpPr>
-        <p:spPr>
-          <a:xfrm>
-            <a:off x="4709160" y="2057400"/>
-            <a:ext cx="2743200" cy="2377440"/>
-          </a:xfrm>
-          <a:prstGeom prst="roundRect">
-            <a:avLst/>
-          </a:prstGeom>
-          <a:solidFill>
-            <a:srgbClr val="23282F"/>
-          </a:solidFill>
-          <a:ln>
-            <a:noFill/>
-          </a:ln>
-        </p:spPr>
-        <p:style>
-          <a:lnRef idx="1">
-            <a:schemeClr val="accent1"/>
-          </a:lnRef>
-          <a:fillRef idx="3">
-            <a:schemeClr val="accent1"/>
-          </a:fillRef>
-          <a:effectRef idx="2">
-            <a:schemeClr val="accent1"/>
-          </a:effectRef>
-          <a:fontRef idx="minor">
-            <a:schemeClr val="lt1"/>
-          </a:fontRef>
-        </p:style>
-        <p:txBody>
-          <a:bodyPr rtlCol="0" anchor="ctr"/>
-          <a:lstStyle/>
-          <a:p>
-            <a:pPr algn="ctr"/>
-          </a:p>
-        </p:txBody>
-      </p:sp>
-      <p:sp>
-        <p:nvSpPr>
-          <p:cNvPr id="11" name="TextBox 10"/>
-          <p:cNvSpPr txBox="1"/>
-          <p:nvPr/>
-        </p:nvSpPr>
-        <p:spPr>
-          <a:xfrm>
-            <a:off x="4937760" y="2423160"/>
-            <a:ext cx="2286000" cy="274320"/>
-          </a:xfrm>
-          <a:prstGeom prst="rect">
-            <a:avLst/>
-          </a:prstGeom>
-          <a:noFill/>
-        </p:spPr>
-        <p:txBody>
-          <a:bodyPr wrap="square" lIns="45720" rIns="45720" tIns="27432" bIns="27432" anchor="t">
-            <a:spAutoFit/>
-          </a:bodyPr>
-          <a:lstStyle/>
-          <a:p>
-            <a:r>
-              <a:rPr sz="1800" b="1">
-                <a:solidFill>
-                  <a:srgbClr val="EEF1F3"/>
-                </a:solidFill>
-                <a:latin typeface="Arial"/>
-              </a:rPr>
-              <a:t>NanoVM</a:t>
-            </a:r>
-          </a:p>
-        </p:txBody>
-      </p:sp>
-      <p:sp>
-        <p:nvSpPr>
-          <p:cNvPr id="12" name="TextBox 11"/>
-          <p:cNvSpPr txBox="1"/>
-          <p:nvPr/>
-        </p:nvSpPr>
-        <p:spPr>
-          <a:xfrm>
-            <a:off x="4937760" y="3063240"/>
-            <a:ext cx="2286000" cy="274320"/>
-          </a:xfrm>
-          <a:prstGeom prst="rect">
-            <a:avLst/>
-          </a:prstGeom>
-          <a:noFill/>
-        </p:spPr>
-        <p:txBody>
-          <a:bodyPr wrap="square" lIns="45720" rIns="45720" tIns="27432" bIns="27432" anchor="t">
-            <a:spAutoFit/>
-          </a:bodyPr>
-          <a:lstStyle/>
-          <a:p>
-            <a:r>
-              <a:rPr sz="1500" b="1">
+            <a:off x="6537960" y="2148840"/>
+            <a:ext cx="4297680" cy="2011680"/>
+          </a:xfrm>
+          <a:prstGeom prst="rect">
+            <a:avLst/>
+          </a:prstGeom>
+          <a:noFill/>
+        </p:spPr>
+        <p:txBody>
+          <a:bodyPr wrap="square" lIns="45720" rIns="45720" tIns="27432" bIns="27432" anchor="t">
+            <a:spAutoFit/>
+          </a:bodyPr>
+          <a:lstStyle/>
+          <a:p>
+            <a:r>
+              <a:rPr sz="2200" b="1">
                 <a:solidFill>
                   <a:srgbClr val="76B900"/>
                 </a:solidFill>
                 <a:latin typeface="Arial"/>
               </a:rPr>
-              <a:t>typed trap</a:t>
-            </a:r>
-          </a:p>
-        </p:txBody>
-      </p:sp>
-      <p:sp>
-        <p:nvSpPr>
-          <p:cNvPr id="13" name="Rounded Rectangle 12"/>
-          <p:cNvSpPr/>
-          <p:nvPr/>
-        </p:nvSpPr>
-        <p:spPr>
-          <a:xfrm>
-            <a:off x="8686800" y="2057400"/>
-            <a:ext cx="2743200" cy="2377440"/>
-          </a:xfrm>
-          <a:prstGeom prst="roundRect">
-            <a:avLst/>
-          </a:prstGeom>
-          <a:solidFill>
-            <a:srgbClr val="23282F"/>
-          </a:solidFill>
-          <a:ln>
-            <a:noFill/>
-          </a:ln>
-        </p:spPr>
-        <p:style>
-          <a:lnRef idx="1">
-            <a:schemeClr val="accent1"/>
-          </a:lnRef>
-          <a:fillRef idx="3">
-            <a:schemeClr val="accent1"/>
-          </a:fillRef>
-          <a:effectRef idx="2">
-            <a:schemeClr val="accent1"/>
-          </a:effectRef>
-          <a:fontRef idx="minor">
-            <a:schemeClr val="lt1"/>
-          </a:fontRef>
-        </p:style>
-        <p:txBody>
-          <a:bodyPr rtlCol="0" anchor="ctr"/>
-          <a:lstStyle/>
-          <a:p>
-            <a:pPr algn="ctr"/>
-          </a:p>
-        </p:txBody>
-      </p:sp>
-      <p:sp>
-        <p:nvSpPr>
-          <p:cNvPr id="14" name="TextBox 13"/>
-          <p:cNvSpPr txBox="1"/>
-          <p:nvPr/>
-        </p:nvSpPr>
-        <p:spPr>
-          <a:xfrm>
-            <a:off x="8915400" y="2423160"/>
-            <a:ext cx="2286000" cy="274320"/>
-          </a:xfrm>
-          <a:prstGeom prst="rect">
-            <a:avLst/>
-          </a:prstGeom>
-          <a:noFill/>
-        </p:spPr>
-        <p:txBody>
-          <a:bodyPr wrap="square" lIns="45720" rIns="45720" tIns="27432" bIns="27432" anchor="t">
-            <a:spAutoFit/>
-          </a:bodyPr>
-          <a:lstStyle/>
-          <a:p>
-            <a:r>
-              <a:rPr sz="1800" b="1">
-                <a:solidFill>
-                  <a:srgbClr val="EEF1F3"/>
-                </a:solidFill>
-                <a:latin typeface="Arial"/>
-              </a:rPr>
-              <a:t>nano_cop</a:t>
-            </a:r>
-          </a:p>
-        </p:txBody>
-      </p:sp>
-      <p:sp>
-        <p:nvSpPr>
-          <p:cNvPr id="15" name="TextBox 14"/>
-          <p:cNvSpPr txBox="1"/>
-          <p:nvPr/>
-        </p:nvSpPr>
-        <p:spPr>
-          <a:xfrm>
-            <a:off x="8915400" y="3063240"/>
-            <a:ext cx="2286000" cy="548640"/>
-          </a:xfrm>
-          <a:prstGeom prst="rect">
-            <a:avLst/>
-          </a:prstGeom>
-          <a:noFill/>
-        </p:spPr>
-        <p:txBody>
-          <a:bodyPr wrap="square" lIns="45720" rIns="45720" tIns="27432" bIns="27432" anchor="t">
-            <a:spAutoFit/>
-          </a:bodyPr>
-          <a:lstStyle/>
-          <a:p>
-            <a:r>
-              <a:rPr sz="1500" b="1">
-                <a:solidFill>
-                  <a:srgbClr val="FF6B35"/>
-                </a:solidFill>
-                <a:latin typeface="Arial"/>
-              </a:rPr>
-              <a:t>foreign process</a:t>
-            </a:r>
-          </a:p>
-        </p:txBody>
-      </p:sp>
-      <p:sp>
-        <p:nvSpPr>
-          <p:cNvPr id="16" name="TextBox 15"/>
-          <p:cNvSpPr txBox="1"/>
-          <p:nvPr/>
-        </p:nvSpPr>
-        <p:spPr>
-          <a:xfrm>
-            <a:off x="914400" y="5120640"/>
-            <a:ext cx="10332720" cy="365760"/>
-          </a:xfrm>
-          <a:prstGeom prst="rect">
-            <a:avLst/>
-          </a:prstGeom>
-          <a:noFill/>
-        </p:spPr>
-        <p:txBody>
-          <a:bodyPr wrap="square" lIns="45720" rIns="45720" tIns="27432" bIns="27432" anchor="t">
-            <a:spAutoFit/>
-          </a:bodyPr>
-          <a:lstStyle/>
-          <a:p>
-            <a:pPr algn="ctr"/>
-            <a:r>
-              <a:rPr sz="1500" b="0">
-                <a:solidFill>
-                  <a:srgbClr val="72B7D6"/>
-                </a:solidFill>
-                <a:latin typeface="Arial"/>
-              </a:rPr>
-              <a:t>isolation costs about 48x per crossing — which is what batching exists to amortize</a:t>
+              <a:t>2,632 NanoISA tests</a:t>
+            </a:r>
+          </a:p>
+          <a:p>
+            <a:r>
+              <a:rPr sz="2200" b="1">
+                <a:solidFill>
+                  <a:srgbClr val="76B900"/>
+                </a:solidFill>
+                <a:latin typeface="Arial"/>
+              </a:rPr>
+              <a:t>621 NanoVM tests</a:t>
+            </a:r>
+          </a:p>
+          <a:p>
+            <a:r>
+              <a:rPr sz="2200" b="1">
+                <a:solidFill>
+                  <a:srgbClr val="76B900"/>
+                </a:solidFill>
+                <a:latin typeface="Arial"/>
+              </a:rPr>
+              <a:t>93 verifier tests</a:t>
+            </a:r>
+          </a:p>
+          <a:p>
+            <a:r>
+              <a:rPr sz="2200" b="1">
+                <a:solidFill>
+                  <a:srgbClr val="76B900"/>
+                </a:solidFill>
+                <a:latin typeface="Arial"/>
+              </a:rPr>
+              <a:t>63 NanoVirt tests</a:t>
             </a:r>
           </a:p>
         </p:txBody>
@@ -5378,7 +5327,7 @@
             <a:avLst/>
           </a:prstGeom>
           <a:solidFill>
-            <a:srgbClr val="101317"/>
+            <a:srgbClr val="EEF1F3"/>
           </a:solidFill>
           <a:ln>
             <a:noFill/>
@@ -5431,11 +5380,11 @@
             <a:r>
               <a:rPr sz="2800" b="1">
                 <a:solidFill>
-                  <a:srgbClr val="EEF1F3"/>
-                </a:solidFill>
-                <a:latin typeface="Arial"/>
-              </a:rPr>
-              <a:t>I collect cycles, so my backends agree about leaks.</a:t>
+                  <a:srgbClr val="101317"/>
+                </a:solidFill>
+                <a:latin typeface="Arial"/>
+              </a:rPr>
+              <a:t>FFI is an explicit unsafe boundary.</a:t>
             </a:r>
           </a:p>
         </p:txBody>
@@ -5465,11 +5414,11 @@
             <a:r>
               <a:rPr sz="1300" b="0">
                 <a:solidFill>
-                  <a:srgbClr val="72B7D6"/>
-                </a:solidFill>
-                <a:latin typeface="Arial"/>
-              </a:rPr>
-              <a:t>Reference counting cannot reclaim a cycle, and a cycle is constructible from ordinary NanoLang.</a:t>
+                  <a:srgbClr val="65707C"/>
+                </a:solidFill>
+                <a:latin typeface="Arial"/>
+              </a:rPr>
+              <a:t>Imports carry signatures. The co-process can keep foreign code outside my VM process.</a:t>
             </a:r>
           </a:p>
         </p:txBody>
@@ -5551,8 +5500,8 @@
         </p:nvSpPr>
         <p:spPr>
           <a:xfrm>
-            <a:off x="731520" y="1920240"/>
-            <a:ext cx="5486400" cy="3200400"/>
+            <a:off x="731520" y="2057400"/>
+            <a:ext cx="2743200" cy="2377440"/>
           </a:xfrm>
           <a:prstGeom prst="roundRect">
             <a:avLst/>
@@ -5594,82 +5543,82 @@
         </p:nvSpPr>
         <p:spPr>
           <a:xfrm>
-            <a:off x="1005840" y="2286000"/>
-            <a:ext cx="4937760" cy="2011680"/>
-          </a:xfrm>
-          <a:prstGeom prst="rect">
-            <a:avLst/>
-          </a:prstGeom>
-          <a:noFill/>
-        </p:spPr>
-        <p:txBody>
-          <a:bodyPr wrap="square" lIns="45720" rIns="45720" tIns="27432" bIns="27432" anchor="t">
-            <a:spAutoFit/>
-          </a:bodyPr>
-          <a:lstStyle/>
-          <a:p>
-            <a:r>
-              <a:rPr sz="1600" b="0">
+            <a:off x="960120" y="2423160"/>
+            <a:ext cx="2286000" cy="274320"/>
+          </a:xfrm>
+          <a:prstGeom prst="rect">
+            <a:avLst/>
+          </a:prstGeom>
+          <a:noFill/>
+        </p:spPr>
+        <p:txBody>
+          <a:bodyPr wrap="square" lIns="45720" rIns="45720" tIns="27432" bIns="27432" anchor="t">
+            <a:spAutoFit/>
+          </a:bodyPr>
+          <a:lstStyle/>
+          <a:p>
+            <a:r>
+              <a:rPr sz="1800" b="1">
                 <a:solidFill>
                   <a:srgbClr val="EEF1F3"/>
                 </a:solidFill>
-                <a:latin typeface="Courier New"/>
-              </a:rPr>
-              <a:t>struct Node {</a:t>
-            </a:r>
-          </a:p>
-          <a:p>
-            <a:r>
-              <a:rPr sz="1600" b="0">
-                <a:solidFill>
-                  <a:srgbClr val="EEF1F3"/>
-                </a:solidFill>
-                <a:latin typeface="Courier New"/>
-              </a:rPr>
-              <a:t>  children: array&lt;Node&gt;</a:t>
-            </a:r>
-          </a:p>
-          <a:p>
-            <a:r>
-              <a:rPr sz="1600" b="0">
-                <a:solidFill>
-                  <a:srgbClr val="EEF1F3"/>
-                </a:solidFill>
-                <a:latin typeface="Courier New"/>
-              </a:rPr>
-              <a:t>}</a:t>
-            </a:r>
-          </a:p>
-          <a:p/>
-          <a:p>
-            <a:r>
-              <a:rPr sz="1600" b="0">
-                <a:solidFill>
-                  <a:srgbClr val="EEF1F3"/>
-                </a:solidFill>
-                <a:latin typeface="Courier New"/>
-              </a:rPr>
-              <a:t>set kids (array_push kids n)</a:t>
-            </a:r>
-          </a:p>
-        </p:txBody>
-      </p:sp>
-      <p:sp>
-        <p:nvSpPr>
-          <p:cNvPr id="9" name="Rounded Rectangle 8"/>
+                <a:latin typeface="Arial"/>
+              </a:rPr>
+              <a:t>NanoLang</a:t>
+            </a:r>
+          </a:p>
+        </p:txBody>
+      </p:sp>
+      <p:sp>
+        <p:nvSpPr>
+          <p:cNvPr id="9" name="TextBox 8"/>
+          <p:cNvSpPr txBox="1"/>
+          <p:nvPr/>
+        </p:nvSpPr>
+        <p:spPr>
+          <a:xfrm>
+            <a:off x="960120" y="3063240"/>
+            <a:ext cx="2286000" cy="274320"/>
+          </a:xfrm>
+          <a:prstGeom prst="rect">
+            <a:avLst/>
+          </a:prstGeom>
+          <a:noFill/>
+        </p:spPr>
+        <p:txBody>
+          <a:bodyPr wrap="square" lIns="45720" rIns="45720" tIns="27432" bIns="27432" anchor="t">
+            <a:spAutoFit/>
+          </a:bodyPr>
+          <a:lstStyle/>
+          <a:p>
+            <a:r>
+              <a:rPr sz="1500" b="1">
+                <a:solidFill>
+                  <a:srgbClr val="72B7D6"/>
+                </a:solidFill>
+                <a:latin typeface="Arial"/>
+              </a:rPr>
+              <a:t>typed call</a:t>
+            </a:r>
+          </a:p>
+        </p:txBody>
+      </p:sp>
+      <p:sp>
+        <p:nvSpPr>
+          <p:cNvPr id="10" name="Rounded Rectangle 9"/>
           <p:cNvSpPr/>
           <p:nvPr/>
         </p:nvSpPr>
         <p:spPr>
           <a:xfrm>
-            <a:off x="6537960" y="1920240"/>
-            <a:ext cx="4937760" cy="3200400"/>
+            <a:off x="4709160" y="2057400"/>
+            <a:ext cx="2743200" cy="2377440"/>
           </a:xfrm>
           <a:prstGeom prst="roundRect">
             <a:avLst/>
           </a:prstGeom>
           <a:solidFill>
-            <a:srgbClr val="101317"/>
+            <a:srgbClr val="23282F"/>
           </a:solidFill>
           <a:ln>
             <a:noFill/>
@@ -5699,90 +5648,214 @@
       </p:sp>
       <p:sp>
         <p:nvSpPr>
-          <p:cNvPr id="10" name="TextBox 9"/>
-          <p:cNvSpPr txBox="1"/>
-          <p:nvPr/>
-        </p:nvSpPr>
-        <p:spPr>
-          <a:xfrm>
-            <a:off x="6858000" y="2286000"/>
-            <a:ext cx="4297680" cy="2560320"/>
-          </a:xfrm>
-          <a:prstGeom prst="rect">
-            <a:avLst/>
-          </a:prstGeom>
-          <a:noFill/>
-        </p:spPr>
-        <p:txBody>
-          <a:bodyPr wrap="square" lIns="45720" rIns="45720" tIns="27432" bIns="27432" anchor="t">
-            <a:spAutoFit/>
-          </a:bodyPr>
-          <a:lstStyle/>
-          <a:p>
-            <a:r>
-              <a:rPr sz="1600" b="1">
+          <p:cNvPr id="11" name="TextBox 10"/>
+          <p:cNvSpPr txBox="1"/>
+          <p:nvPr/>
+        </p:nvSpPr>
+        <p:spPr>
+          <a:xfrm>
+            <a:off x="4937760" y="2423160"/>
+            <a:ext cx="2286000" cy="274320"/>
+          </a:xfrm>
+          <a:prstGeom prst="rect">
+            <a:avLst/>
+          </a:prstGeom>
+          <a:noFill/>
+        </p:spPr>
+        <p:txBody>
+          <a:bodyPr wrap="square" lIns="45720" rIns="45720" tIns="27432" bIns="27432" anchor="t">
+            <a:spAutoFit/>
+          </a:bodyPr>
+          <a:lstStyle/>
+          <a:p>
+            <a:r>
+              <a:rPr sz="1800" b="1">
                 <a:solidFill>
                   <a:srgbClr val="EEF1F3"/>
                 </a:solidFill>
                 <a:latin typeface="Arial"/>
               </a:rPr>
-              <a:t>array_push mutates in place,</a:t>
-            </a:r>
-          </a:p>
-          <a:p>
-            <a:r>
-              <a:rPr sz="1600" b="1">
+              <a:t>NanoVM</a:t>
+            </a:r>
+          </a:p>
+        </p:txBody>
+      </p:sp>
+      <p:sp>
+        <p:nvSpPr>
+          <p:cNvPr id="12" name="TextBox 11"/>
+          <p:cNvSpPr txBox="1"/>
+          <p:nvPr/>
+        </p:nvSpPr>
+        <p:spPr>
+          <a:xfrm>
+            <a:off x="4937760" y="3063240"/>
+            <a:ext cx="2286000" cy="274320"/>
+          </a:xfrm>
+          <a:prstGeom prst="rect">
+            <a:avLst/>
+          </a:prstGeom>
+          <a:noFill/>
+        </p:spPr>
+        <p:txBody>
+          <a:bodyPr wrap="square" lIns="45720" rIns="45720" tIns="27432" bIns="27432" anchor="t">
+            <a:spAutoFit/>
+          </a:bodyPr>
+          <a:lstStyle/>
+          <a:p>
+            <a:r>
+              <a:rPr sz="1500" b="1">
+                <a:solidFill>
+                  <a:srgbClr val="76B900"/>
+                </a:solidFill>
+                <a:latin typeface="Arial"/>
+              </a:rPr>
+              <a:t>typed trap</a:t>
+            </a:r>
+          </a:p>
+        </p:txBody>
+      </p:sp>
+      <p:sp>
+        <p:nvSpPr>
+          <p:cNvPr id="13" name="Rounded Rectangle 12"/>
+          <p:cNvSpPr/>
+          <p:nvPr/>
+        </p:nvSpPr>
+        <p:spPr>
+          <a:xfrm>
+            <a:off x="8686800" y="2057400"/>
+            <a:ext cx="2743200" cy="2377440"/>
+          </a:xfrm>
+          <a:prstGeom prst="roundRect">
+            <a:avLst/>
+          </a:prstGeom>
+          <a:solidFill>
+            <a:srgbClr val="23282F"/>
+          </a:solidFill>
+          <a:ln>
+            <a:noFill/>
+          </a:ln>
+        </p:spPr>
+        <p:style>
+          <a:lnRef idx="1">
+            <a:schemeClr val="accent1"/>
+          </a:lnRef>
+          <a:fillRef idx="3">
+            <a:schemeClr val="accent1"/>
+          </a:fillRef>
+          <a:effectRef idx="2">
+            <a:schemeClr val="accent1"/>
+          </a:effectRef>
+          <a:fontRef idx="minor">
+            <a:schemeClr val="lt1"/>
+          </a:fontRef>
+        </p:style>
+        <p:txBody>
+          <a:bodyPr rtlCol="0" anchor="ctr"/>
+          <a:lstStyle/>
+          <a:p>
+            <a:pPr algn="ctr"/>
+          </a:p>
+        </p:txBody>
+      </p:sp>
+      <p:sp>
+        <p:nvSpPr>
+          <p:cNvPr id="14" name="TextBox 13"/>
+          <p:cNvSpPr txBox="1"/>
+          <p:nvPr/>
+        </p:nvSpPr>
+        <p:spPr>
+          <a:xfrm>
+            <a:off x="8915400" y="2423160"/>
+            <a:ext cx="2286000" cy="274320"/>
+          </a:xfrm>
+          <a:prstGeom prst="rect">
+            <a:avLst/>
+          </a:prstGeom>
+          <a:noFill/>
+        </p:spPr>
+        <p:txBody>
+          <a:bodyPr wrap="square" lIns="45720" rIns="45720" tIns="27432" bIns="27432" anchor="t">
+            <a:spAutoFit/>
+          </a:bodyPr>
+          <a:lstStyle/>
+          <a:p>
+            <a:r>
+              <a:rPr sz="1800" b="1">
                 <a:solidFill>
                   <a:srgbClr val="EEF1F3"/>
                 </a:solidFill>
                 <a:latin typeface="Arial"/>
               </a:rPr>
-              <a:t>so the field and the local are</a:t>
-            </a:r>
-          </a:p>
-          <a:p>
-            <a:r>
-              <a:rPr sz="1600" b="1">
-                <a:solidFill>
-                  <a:srgbClr val="EEF1F3"/>
-                </a:solidFill>
-                <a:latin typeface="Arial"/>
-              </a:rPr>
-              <a:t>one object -- and it now</a:t>
-            </a:r>
-          </a:p>
-          <a:p>
-            <a:r>
-              <a:rPr sz="1600" b="1">
-                <a:solidFill>
-                  <a:srgbClr val="EEF1F3"/>
-                </a:solidFill>
-                <a:latin typeface="Arial"/>
-              </a:rPr>
-              <a:t>contains its own owner.</a:t>
-            </a:r>
-          </a:p>
-          <a:p/>
-          <a:p>
-            <a:r>
-              <a:rPr sz="1600" b="1">
-                <a:solidFill>
-                  <a:srgbClr val="EEF1F3"/>
-                </a:solidFill>
-                <a:latin typeface="Arial"/>
-              </a:rPr>
-              <a:t>Forbidding that shape would</a:t>
-            </a:r>
-          </a:p>
-          <a:p>
-            <a:r>
-              <a:rPr sz="1600" b="1">
-                <a:solidFill>
-                  <a:srgbClr val="EEF1F3"/>
-                </a:solidFill>
-                <a:latin typeface="Arial"/>
-              </a:rPr>
-              <a:t>forbid trees and graphs.</a:t>
+              <a:t>nano_cop</a:t>
+            </a:r>
+          </a:p>
+        </p:txBody>
+      </p:sp>
+      <p:sp>
+        <p:nvSpPr>
+          <p:cNvPr id="15" name="TextBox 14"/>
+          <p:cNvSpPr txBox="1"/>
+          <p:nvPr/>
+        </p:nvSpPr>
+        <p:spPr>
+          <a:xfrm>
+            <a:off x="8915400" y="3063240"/>
+            <a:ext cx="2286000" cy="548640"/>
+          </a:xfrm>
+          <a:prstGeom prst="rect">
+            <a:avLst/>
+          </a:prstGeom>
+          <a:noFill/>
+        </p:spPr>
+        <p:txBody>
+          <a:bodyPr wrap="square" lIns="45720" rIns="45720" tIns="27432" bIns="27432" anchor="t">
+            <a:spAutoFit/>
+          </a:bodyPr>
+          <a:lstStyle/>
+          <a:p>
+            <a:r>
+              <a:rPr sz="1500" b="1">
+                <a:solidFill>
+                  <a:srgbClr val="FF6B35"/>
+                </a:solidFill>
+                <a:latin typeface="Arial"/>
+              </a:rPr>
+              <a:t>foreign process</a:t>
+            </a:r>
+          </a:p>
+        </p:txBody>
+      </p:sp>
+      <p:sp>
+        <p:nvSpPr>
+          <p:cNvPr id="16" name="TextBox 15"/>
+          <p:cNvSpPr txBox="1"/>
+          <p:nvPr/>
+        </p:nvSpPr>
+        <p:spPr>
+          <a:xfrm>
+            <a:off x="914400" y="5120640"/>
+            <a:ext cx="10332720" cy="365760"/>
+          </a:xfrm>
+          <a:prstGeom prst="rect">
+            <a:avLst/>
+          </a:prstGeom>
+          <a:noFill/>
+        </p:spPr>
+        <p:txBody>
+          <a:bodyPr wrap="square" lIns="45720" rIns="45720" tIns="27432" bIns="27432" anchor="t">
+            <a:spAutoFit/>
+          </a:bodyPr>
+          <a:lstStyle/>
+          <a:p>
+            <a:pPr algn="ctr"/>
+            <a:r>
+              <a:rPr sz="1500" b="0">
+                <a:solidFill>
+                  <a:srgbClr val="72B7D6"/>
+                </a:solidFill>
+                <a:latin typeface="Arial"/>
+              </a:rPr>
+              <a:t>isolation costs about 48x per crossing — which is what batching exists to amortize</a:t>
             </a:r>
           </a:p>
         </p:txBody>
@@ -5820,7 +5893,7 @@
             <a:avLst/>
           </a:prstGeom>
           <a:solidFill>
-            <a:srgbClr val="EEF1F3"/>
+            <a:srgbClr val="101317"/>
           </a:solidFill>
           <a:ln>
             <a:noFill/>
@@ -5873,11 +5946,11 @@
             <a:r>
               <a:rPr sz="2800" b="1">
                 <a:solidFill>
-                  <a:srgbClr val="101317"/>
-                </a:solidFill>
-                <a:latin typeface="Arial"/>
-              </a:rPr>
-              <a:t>What I measured, and what I declined because of it.</a:t>
+                  <a:srgbClr val="EEF1F3"/>
+                </a:solidFill>
+                <a:latin typeface="Arial"/>
+              </a:rPr>
+              <a:t>I collect cycles, so my backends agree about leaks.</a:t>
             </a:r>
           </a:p>
         </p:txBody>
@@ -5907,11 +5980,11 @@
             <a:r>
               <a:rPr sz="1300" b="0">
                 <a:solidFill>
-                  <a:srgbClr val="65707C"/>
-                </a:solidFill>
-                <a:latin typeface="Arial"/>
-              </a:rPr>
-              <a:t>A number without its spread is not evidence. Every claim below carries a noise band.</a:t>
+                  <a:srgbClr val="72B7D6"/>
+                </a:solidFill>
+                <a:latin typeface="Arial"/>
+              </a:rPr>
+              <a:t>Reference counting cannot reclaim a cycle, and a cycle is constructible from ordinary NanoLang.</a:t>
             </a:r>
           </a:p>
         </p:txBody>
@@ -5993,8 +6066,8 @@
         </p:nvSpPr>
         <p:spPr>
           <a:xfrm>
-            <a:off x="822960" y="1828800"/>
-            <a:ext cx="10515600" cy="566928"/>
+            <a:off x="731520" y="1920240"/>
+            <a:ext cx="5486400" cy="3200400"/>
           </a:xfrm>
           <a:prstGeom prst="roundRect">
             <a:avLst/>
@@ -6036,116 +6109,82 @@
         </p:nvSpPr>
         <p:spPr>
           <a:xfrm>
-            <a:off x="1097280" y="1965960"/>
-            <a:ext cx="3108960" cy="274320"/>
-          </a:xfrm>
-          <a:prstGeom prst="rect">
-            <a:avLst/>
-          </a:prstGeom>
-          <a:noFill/>
-        </p:spPr>
-        <p:txBody>
-          <a:bodyPr wrap="square" lIns="45720" rIns="45720" tIns="27432" bIns="27432" anchor="t">
-            <a:spAutoFit/>
-          </a:bodyPr>
-          <a:lstStyle/>
-          <a:p>
-            <a:r>
-              <a:rPr sz="1500" b="1">
+            <a:off x="1005840" y="2286000"/>
+            <a:ext cx="4937760" cy="2011680"/>
+          </a:xfrm>
+          <a:prstGeom prst="rect">
+            <a:avLst/>
+          </a:prstGeom>
+          <a:noFill/>
+        </p:spPr>
+        <p:txBody>
+          <a:bodyPr wrap="square" lIns="45720" rIns="45720" tIns="27432" bIns="27432" anchor="t">
+            <a:spAutoFit/>
+          </a:bodyPr>
+          <a:lstStyle/>
+          <a:p>
+            <a:r>
+              <a:rPr sz="1600" b="0">
                 <a:solidFill>
                   <a:srgbClr val="EEF1F3"/>
                 </a:solidFill>
-                <a:latin typeface="Arial"/>
-              </a:rPr>
-              <a:t>cold startup</a:t>
-            </a:r>
-          </a:p>
-        </p:txBody>
-      </p:sp>
-      <p:sp>
-        <p:nvSpPr>
-          <p:cNvPr id="9" name="TextBox 8"/>
-          <p:cNvSpPr txBox="1"/>
-          <p:nvPr/>
-        </p:nvSpPr>
-        <p:spPr>
-          <a:xfrm>
-            <a:off x="4389120" y="1965960"/>
-            <a:ext cx="2194560" cy="274320"/>
-          </a:xfrm>
-          <a:prstGeom prst="rect">
-            <a:avLst/>
-          </a:prstGeom>
-          <a:noFill/>
-        </p:spPr>
-        <p:txBody>
-          <a:bodyPr wrap="square" lIns="45720" rIns="45720" tIns="27432" bIns="27432" anchor="t">
-            <a:spAutoFit/>
-          </a:bodyPr>
-          <a:lstStyle/>
-          <a:p>
-            <a:r>
-              <a:rPr sz="1500" b="1">
-                <a:solidFill>
-                  <a:srgbClr val="FF6B35"/>
-                </a:solidFill>
                 <a:latin typeface="Courier New"/>
               </a:rPr>
-              <a:t>17.4 ms</a:t>
-            </a:r>
-          </a:p>
-        </p:txBody>
-      </p:sp>
-      <p:sp>
-        <p:nvSpPr>
-          <p:cNvPr id="10" name="TextBox 9"/>
-          <p:cNvSpPr txBox="1"/>
-          <p:nvPr/>
-        </p:nvSpPr>
-        <p:spPr>
-          <a:xfrm>
-            <a:off x="6766560" y="1965960"/>
-            <a:ext cx="4389120" cy="274320"/>
-          </a:xfrm>
-          <a:prstGeom prst="rect">
-            <a:avLst/>
-          </a:prstGeom>
-          <a:noFill/>
-        </p:spPr>
-        <p:txBody>
-          <a:bodyPr wrap="square" lIns="45720" rIns="45720" tIns="27432" bIns="27432" anchor="t">
-            <a:spAutoFit/>
-          </a:bodyPr>
-          <a:lstStyle/>
-          <a:p>
-            <a:r>
-              <a:rPr sz="1400" b="0">
+              <a:t>struct Node {</a:t>
+            </a:r>
+          </a:p>
+          <a:p>
+            <a:r>
+              <a:rPr sz="1600" b="0">
                 <a:solidFill>
                   <a:srgbClr val="EEF1F3"/>
                 </a:solidFill>
-                <a:latin typeface="Arial"/>
-              </a:rPr>
-              <a:t>60-1800x a single execution</a:t>
-            </a:r>
-          </a:p>
-        </p:txBody>
-      </p:sp>
-      <p:sp>
-        <p:nvSpPr>
-          <p:cNvPr id="11" name="Rounded Rectangle 10"/>
+                <a:latin typeface="Courier New"/>
+              </a:rPr>
+              <a:t>  children: array&lt;Node&gt;</a:t>
+            </a:r>
+          </a:p>
+          <a:p>
+            <a:r>
+              <a:rPr sz="1600" b="0">
+                <a:solidFill>
+                  <a:srgbClr val="EEF1F3"/>
+                </a:solidFill>
+                <a:latin typeface="Courier New"/>
+              </a:rPr>
+              <a:t>}</a:t>
+            </a:r>
+          </a:p>
+          <a:p/>
+          <a:p>
+            <a:r>
+              <a:rPr sz="1600" b="0">
+                <a:solidFill>
+                  <a:srgbClr val="EEF1F3"/>
+                </a:solidFill>
+                <a:latin typeface="Courier New"/>
+              </a:rPr>
+              <a:t>set kids (array_push kids n)</a:t>
+            </a:r>
+          </a:p>
+        </p:txBody>
+      </p:sp>
+      <p:sp>
+        <p:nvSpPr>
+          <p:cNvPr id="9" name="Rounded Rectangle 8"/>
           <p:cNvSpPr/>
           <p:nvPr/>
         </p:nvSpPr>
         <p:spPr>
           <a:xfrm>
-            <a:off x="822960" y="2542032"/>
-            <a:ext cx="10515600" cy="566928"/>
+            <a:off x="6537960" y="1920240"/>
+            <a:ext cx="4937760" cy="3200400"/>
           </a:xfrm>
           <a:prstGeom prst="roundRect">
             <a:avLst/>
           </a:prstGeom>
           <a:solidFill>
-            <a:srgbClr val="23282F"/>
+            <a:srgbClr val="101317"/>
           </a:solidFill>
           <a:ln>
             <a:noFill/>
@@ -6175,537 +6214,90 @@
       </p:sp>
       <p:sp>
         <p:nvSpPr>
-          <p:cNvPr id="12" name="TextBox 11"/>
-          <p:cNvSpPr txBox="1"/>
-          <p:nvPr/>
-        </p:nvSpPr>
-        <p:spPr>
-          <a:xfrm>
-            <a:off x="1097280" y="2679192"/>
-            <a:ext cx="3108960" cy="274320"/>
-          </a:xfrm>
-          <a:prstGeom prst="rect">
-            <a:avLst/>
-          </a:prstGeom>
-          <a:noFill/>
-        </p:spPr>
-        <p:txBody>
-          <a:bodyPr wrap="square" lIns="45720" rIns="45720" tIns="27432" bIns="27432" anchor="t">
-            <a:spAutoFit/>
-          </a:bodyPr>
-          <a:lstStyle/>
-          <a:p>
-            <a:r>
-              <a:rPr sz="1500" b="1">
+          <p:cNvPr id="10" name="TextBox 9"/>
+          <p:cNvSpPr txBox="1"/>
+          <p:nvPr/>
+        </p:nvSpPr>
+        <p:spPr>
+          <a:xfrm>
+            <a:off x="6858000" y="2286000"/>
+            <a:ext cx="4297680" cy="2560320"/>
+          </a:xfrm>
+          <a:prstGeom prst="rect">
+            <a:avLst/>
+          </a:prstGeom>
+          <a:noFill/>
+        </p:spPr>
+        <p:txBody>
+          <a:bodyPr wrap="square" lIns="45720" rIns="45720" tIns="27432" bIns="27432" anchor="t">
+            <a:spAutoFit/>
+          </a:bodyPr>
+          <a:lstStyle/>
+          <a:p>
+            <a:r>
+              <a:rPr sz="1600" b="1">
                 <a:solidFill>
                   <a:srgbClr val="EEF1F3"/>
                 </a:solidFill>
                 <a:latin typeface="Arial"/>
               </a:rPr>
-              <a:t>Forth interpreter</a:t>
-            </a:r>
-          </a:p>
-        </p:txBody>
-      </p:sp>
-      <p:sp>
-        <p:nvSpPr>
-          <p:cNvPr id="13" name="TextBox 12"/>
-          <p:cNvSpPr txBox="1"/>
-          <p:nvPr/>
-        </p:nvSpPr>
-        <p:spPr>
-          <a:xfrm>
-            <a:off x="4389120" y="2679192"/>
-            <a:ext cx="2194560" cy="274320"/>
-          </a:xfrm>
-          <a:prstGeom prst="rect">
-            <a:avLst/>
-          </a:prstGeom>
-          <a:noFill/>
-        </p:spPr>
-        <p:txBody>
-          <a:bodyPr wrap="square" lIns="45720" rIns="45720" tIns="27432" bIns="27432" anchor="t">
-            <a:spAutoFit/>
-          </a:bodyPr>
-          <a:lstStyle/>
-          <a:p>
-            <a:r>
-              <a:rPr sz="1500" b="1">
-                <a:solidFill>
-                  <a:srgbClr val="76B900"/>
-                </a:solidFill>
-                <a:latin typeface="Courier New"/>
-              </a:rPr>
-              <a:t>282.7 us</a:t>
-            </a:r>
-          </a:p>
-        </p:txBody>
-      </p:sp>
-      <p:sp>
-        <p:nvSpPr>
-          <p:cNvPr id="14" name="TextBox 13"/>
-          <p:cNvSpPr txBox="1"/>
-          <p:nvPr/>
-        </p:nvSpPr>
-        <p:spPr>
-          <a:xfrm>
-            <a:off x="6766560" y="2679192"/>
-            <a:ext cx="4389120" cy="274320"/>
-          </a:xfrm>
-          <a:prstGeom prst="rect">
-            <a:avLst/>
-          </a:prstGeom>
-          <a:noFill/>
-        </p:spPr>
-        <p:txBody>
-          <a:bodyPr wrap="square" lIns="45720" rIns="45720" tIns="27432" bIns="27432" anchor="t">
-            <a:spAutoFit/>
-          </a:bodyPr>
-          <a:lstStyle/>
-          <a:p>
-            <a:r>
-              <a:rPr sz="1400" b="0">
+              <a:t>array_push mutates in place,</a:t>
+            </a:r>
+          </a:p>
+          <a:p>
+            <a:r>
+              <a:rPr sz="1600" b="1">
                 <a:solidFill>
                   <a:srgbClr val="EEF1F3"/>
                 </a:solidFill>
                 <a:latin typeface="Arial"/>
               </a:rPr>
-              <a:t>IQR 1.6%</a:t>
-            </a:r>
-          </a:p>
-        </p:txBody>
-      </p:sp>
-      <p:sp>
-        <p:nvSpPr>
-          <p:cNvPr id="15" name="Rounded Rectangle 14"/>
-          <p:cNvSpPr/>
-          <p:nvPr/>
-        </p:nvSpPr>
-        <p:spPr>
-          <a:xfrm>
-            <a:off x="822960" y="3255264"/>
-            <a:ext cx="10515600" cy="566928"/>
-          </a:xfrm>
-          <a:prstGeom prst="roundRect">
-            <a:avLst/>
-          </a:prstGeom>
-          <a:solidFill>
-            <a:srgbClr val="23282F"/>
-          </a:solidFill>
-          <a:ln>
-            <a:noFill/>
-          </a:ln>
-        </p:spPr>
-        <p:style>
-          <a:lnRef idx="1">
-            <a:schemeClr val="accent1"/>
-          </a:lnRef>
-          <a:fillRef idx="3">
-            <a:schemeClr val="accent1"/>
-          </a:fillRef>
-          <a:effectRef idx="2">
-            <a:schemeClr val="accent1"/>
-          </a:effectRef>
-          <a:fontRef idx="minor">
-            <a:schemeClr val="lt1"/>
-          </a:fontRef>
-        </p:style>
-        <p:txBody>
-          <a:bodyPr rtlCol="0" anchor="ctr"/>
-          <a:lstStyle/>
-          <a:p>
-            <a:pPr algn="ctr"/>
-          </a:p>
-        </p:txBody>
-      </p:sp>
-      <p:sp>
-        <p:nvSpPr>
-          <p:cNvPr id="16" name="TextBox 15"/>
-          <p:cNvSpPr txBox="1"/>
-          <p:nvPr/>
-        </p:nvSpPr>
-        <p:spPr>
-          <a:xfrm>
-            <a:off x="1097280" y="3392424"/>
-            <a:ext cx="3108960" cy="274320"/>
-          </a:xfrm>
-          <a:prstGeom prst="rect">
-            <a:avLst/>
-          </a:prstGeom>
-          <a:noFill/>
-        </p:spPr>
-        <p:txBody>
-          <a:bodyPr wrap="square" lIns="45720" rIns="45720" tIns="27432" bIns="27432" anchor="t">
-            <a:spAutoFit/>
-          </a:bodyPr>
-          <a:lstStyle/>
-          <a:p>
-            <a:r>
-              <a:rPr sz="1500" b="1">
+              <a:t>so the field and the local are</a:t>
+            </a:r>
+          </a:p>
+          <a:p>
+            <a:r>
+              <a:rPr sz="1600" b="1">
                 <a:solidFill>
                   <a:srgbClr val="EEF1F3"/>
                 </a:solidFill>
                 <a:latin typeface="Arial"/>
               </a:rPr>
-              <a:t>computed goto</a:t>
-            </a:r>
-          </a:p>
-        </p:txBody>
-      </p:sp>
-      <p:sp>
-        <p:nvSpPr>
-          <p:cNvPr id="17" name="TextBox 16"/>
-          <p:cNvSpPr txBox="1"/>
-          <p:nvPr/>
-        </p:nvSpPr>
-        <p:spPr>
-          <a:xfrm>
-            <a:off x="4389120" y="3392424"/>
-            <a:ext cx="2194560" cy="274320"/>
-          </a:xfrm>
-          <a:prstGeom prst="rect">
-            <a:avLst/>
-          </a:prstGeom>
-          <a:noFill/>
-        </p:spPr>
-        <p:txBody>
-          <a:bodyPr wrap="square" lIns="45720" rIns="45720" tIns="27432" bIns="27432" anchor="t">
-            <a:spAutoFit/>
-          </a:bodyPr>
-          <a:lstStyle/>
-          <a:p>
-            <a:r>
-              <a:rPr sz="1500" b="1">
-                <a:solidFill>
-                  <a:srgbClr val="76B900"/>
-                </a:solidFill>
-                <a:latin typeface="Courier New"/>
-              </a:rPr>
-              <a:t>-4.2%</a:t>
-            </a:r>
-          </a:p>
-        </p:txBody>
-      </p:sp>
-      <p:sp>
-        <p:nvSpPr>
-          <p:cNvPr id="18" name="TextBox 17"/>
-          <p:cNvSpPr txBox="1"/>
-          <p:nvPr/>
-        </p:nvSpPr>
-        <p:spPr>
-          <a:xfrm>
-            <a:off x="6766560" y="3392424"/>
-            <a:ext cx="4389120" cy="274320"/>
-          </a:xfrm>
-          <a:prstGeom prst="rect">
-            <a:avLst/>
-          </a:prstGeom>
-          <a:noFill/>
-        </p:spPr>
-        <p:txBody>
-          <a:bodyPr wrap="square" lIns="45720" rIns="45720" tIns="27432" bIns="27432" anchor="t">
-            <a:spAutoFit/>
-          </a:bodyPr>
-          <a:lstStyle/>
-          <a:p>
-            <a:r>
-              <a:rPr sz="1400" b="0">
+              <a:t>one object -- and it now</a:t>
+            </a:r>
+          </a:p>
+          <a:p>
+            <a:r>
+              <a:rPr sz="1600" b="1">
                 <a:solidFill>
                   <a:srgbClr val="EEF1F3"/>
                 </a:solidFill>
                 <a:latin typeface="Arial"/>
               </a:rPr>
-              <a:t>accepted: beats the band</a:t>
-            </a:r>
-          </a:p>
-        </p:txBody>
-      </p:sp>
-      <p:sp>
-        <p:nvSpPr>
-          <p:cNvPr id="19" name="Rounded Rectangle 18"/>
-          <p:cNvSpPr/>
-          <p:nvPr/>
-        </p:nvSpPr>
-        <p:spPr>
-          <a:xfrm>
-            <a:off x="822960" y="3968496"/>
-            <a:ext cx="10515600" cy="566928"/>
-          </a:xfrm>
-          <a:prstGeom prst="roundRect">
-            <a:avLst/>
-          </a:prstGeom>
-          <a:solidFill>
-            <a:srgbClr val="23282F"/>
-          </a:solidFill>
-          <a:ln>
-            <a:noFill/>
-          </a:ln>
-        </p:spPr>
-        <p:style>
-          <a:lnRef idx="1">
-            <a:schemeClr val="accent1"/>
-          </a:lnRef>
-          <a:fillRef idx="3">
-            <a:schemeClr val="accent1"/>
-          </a:fillRef>
-          <a:effectRef idx="2">
-            <a:schemeClr val="accent1"/>
-          </a:effectRef>
-          <a:fontRef idx="minor">
-            <a:schemeClr val="lt1"/>
-          </a:fontRef>
-        </p:style>
-        <p:txBody>
-          <a:bodyPr rtlCol="0" anchor="ctr"/>
-          <a:lstStyle/>
-          <a:p>
-            <a:pPr algn="ctr"/>
-          </a:p>
-        </p:txBody>
-      </p:sp>
-      <p:sp>
-        <p:nvSpPr>
-          <p:cNvPr id="20" name="TextBox 19"/>
-          <p:cNvSpPr txBox="1"/>
-          <p:nvPr/>
-        </p:nvSpPr>
-        <p:spPr>
-          <a:xfrm>
-            <a:off x="1097280" y="4105656"/>
-            <a:ext cx="3108960" cy="274320"/>
-          </a:xfrm>
-          <a:prstGeom prst="rect">
-            <a:avLst/>
-          </a:prstGeom>
-          <a:noFill/>
-        </p:spPr>
-        <p:txBody>
-          <a:bodyPr wrap="square" lIns="45720" rIns="45720" tIns="27432" bIns="27432" anchor="t">
-            <a:spAutoFit/>
-          </a:bodyPr>
-          <a:lstStyle/>
-          <a:p>
-            <a:r>
-              <a:rPr sz="1500" b="1">
+              <a:t>contains its own owner.</a:t>
+            </a:r>
+          </a:p>
+          <a:p/>
+          <a:p>
+            <a:r>
+              <a:rPr sz="1600" b="1">
                 <a:solidFill>
                   <a:srgbClr val="EEF1F3"/>
                 </a:solidFill>
                 <a:latin typeface="Arial"/>
               </a:rPr>
-              <a:t>split tag stacks</a:t>
-            </a:r>
-          </a:p>
-        </p:txBody>
-      </p:sp>
-      <p:sp>
-        <p:nvSpPr>
-          <p:cNvPr id="21" name="TextBox 20"/>
-          <p:cNvSpPr txBox="1"/>
-          <p:nvPr/>
-        </p:nvSpPr>
-        <p:spPr>
-          <a:xfrm>
-            <a:off x="4389120" y="4105656"/>
-            <a:ext cx="2194560" cy="274320"/>
-          </a:xfrm>
-          <a:prstGeom prst="rect">
-            <a:avLst/>
-          </a:prstGeom>
-          <a:noFill/>
-        </p:spPr>
-        <p:txBody>
-          <a:bodyPr wrap="square" lIns="45720" rIns="45720" tIns="27432" bIns="27432" anchor="t">
-            <a:spAutoFit/>
-          </a:bodyPr>
-          <a:lstStyle/>
-          <a:p>
-            <a:r>
-              <a:rPr sz="1500" b="1">
-                <a:solidFill>
-                  <a:srgbClr val="65707C"/>
-                </a:solidFill>
-                <a:latin typeface="Courier New"/>
-              </a:rPr>
-              <a:t>unmeasurable</a:t>
-            </a:r>
-          </a:p>
-        </p:txBody>
-      </p:sp>
-      <p:sp>
-        <p:nvSpPr>
-          <p:cNvPr id="22" name="TextBox 21"/>
-          <p:cNvSpPr txBox="1"/>
-          <p:nvPr/>
-        </p:nvSpPr>
-        <p:spPr>
-          <a:xfrm>
-            <a:off x="6766560" y="4105656"/>
-            <a:ext cx="4389120" cy="274320"/>
-          </a:xfrm>
-          <a:prstGeom prst="rect">
-            <a:avLst/>
-          </a:prstGeom>
-          <a:noFill/>
-        </p:spPr>
-        <p:txBody>
-          <a:bodyPr wrap="square" lIns="45720" rIns="45720" tIns="27432" bIns="27432" anchor="t">
-            <a:spAutoFit/>
-          </a:bodyPr>
-          <a:lstStyle/>
-          <a:p>
-            <a:r>
-              <a:rPr sz="1400" b="0">
+              <a:t>Forbidding that shape would</a:t>
+            </a:r>
+          </a:p>
+          <a:p>
+            <a:r>
+              <a:rPr sz="1600" b="1">
                 <a:solidFill>
                   <a:srgbClr val="EEF1F3"/>
                 </a:solidFill>
                 <a:latin typeface="Arial"/>
               </a:rPr>
-              <a:t>declined: band is 5-10%</a:t>
-            </a:r>
-          </a:p>
-        </p:txBody>
-      </p:sp>
-      <p:sp>
-        <p:nvSpPr>
-          <p:cNvPr id="23" name="Rounded Rectangle 22"/>
-          <p:cNvSpPr/>
-          <p:nvPr/>
-        </p:nvSpPr>
-        <p:spPr>
-          <a:xfrm>
-            <a:off x="822960" y="4681728"/>
-            <a:ext cx="10515600" cy="566928"/>
-          </a:xfrm>
-          <a:prstGeom prst="roundRect">
-            <a:avLst/>
-          </a:prstGeom>
-          <a:solidFill>
-            <a:srgbClr val="23282F"/>
-          </a:solidFill>
-          <a:ln>
-            <a:noFill/>
-          </a:ln>
-        </p:spPr>
-        <p:style>
-          <a:lnRef idx="1">
-            <a:schemeClr val="accent1"/>
-          </a:lnRef>
-          <a:fillRef idx="3">
-            <a:schemeClr val="accent1"/>
-          </a:fillRef>
-          <a:effectRef idx="2">
-            <a:schemeClr val="accent1"/>
-          </a:effectRef>
-          <a:fontRef idx="minor">
-            <a:schemeClr val="lt1"/>
-          </a:fontRef>
-        </p:style>
-        <p:txBody>
-          <a:bodyPr rtlCol="0" anchor="ctr"/>
-          <a:lstStyle/>
-          <a:p>
-            <a:pPr algn="ctr"/>
-          </a:p>
-        </p:txBody>
-      </p:sp>
-      <p:sp>
-        <p:nvSpPr>
-          <p:cNvPr id="24" name="TextBox 23"/>
-          <p:cNvSpPr txBox="1"/>
-          <p:nvPr/>
-        </p:nvSpPr>
-        <p:spPr>
-          <a:xfrm>
-            <a:off x="1097280" y="4818888"/>
-            <a:ext cx="3108960" cy="274320"/>
-          </a:xfrm>
-          <a:prstGeom prst="rect">
-            <a:avLst/>
-          </a:prstGeom>
-          <a:noFill/>
-        </p:spPr>
-        <p:txBody>
-          <a:bodyPr wrap="square" lIns="45720" rIns="45720" tIns="27432" bIns="27432" anchor="t">
-            <a:spAutoFit/>
-          </a:bodyPr>
-          <a:lstStyle/>
-          <a:p>
-            <a:r>
-              <a:rPr sz="1500" b="1">
-                <a:solidFill>
-                  <a:srgbClr val="EEF1F3"/>
-                </a:solidFill>
-                <a:latin typeface="Arial"/>
-              </a:rPr>
-              <a:t>trap stack ranges</a:t>
-            </a:r>
-          </a:p>
-        </p:txBody>
-      </p:sp>
-      <p:sp>
-        <p:nvSpPr>
-          <p:cNvPr id="25" name="TextBox 24"/>
-          <p:cNvSpPr txBox="1"/>
-          <p:nvPr/>
-        </p:nvSpPr>
-        <p:spPr>
-          <a:xfrm>
-            <a:off x="4389120" y="4818888"/>
-            <a:ext cx="2194560" cy="274320"/>
-          </a:xfrm>
-          <a:prstGeom prst="rect">
-            <a:avLst/>
-          </a:prstGeom>
-          <a:noFill/>
-        </p:spPr>
-        <p:txBody>
-          <a:bodyPr wrap="square" lIns="45720" rIns="45720" tIns="27432" bIns="27432" anchor="t">
-            <a:spAutoFit/>
-          </a:bodyPr>
-          <a:lstStyle/>
-          <a:p>
-            <a:r>
-              <a:rPr sz="1500" b="1">
-                <a:solidFill>
-                  <a:srgbClr val="65707C"/>
-                </a:solidFill>
-                <a:latin typeface="Courier New"/>
-              </a:rPr>
-              <a:t>no effect</a:t>
-            </a:r>
-          </a:p>
-        </p:txBody>
-      </p:sp>
-      <p:sp>
-        <p:nvSpPr>
-          <p:cNvPr id="26" name="TextBox 25"/>
-          <p:cNvSpPr txBox="1"/>
-          <p:nvPr/>
-        </p:nvSpPr>
-        <p:spPr>
-          <a:xfrm>
-            <a:off x="6766560" y="4818888"/>
-            <a:ext cx="4389120" cy="274320"/>
-          </a:xfrm>
-          <a:prstGeom prst="rect">
-            <a:avLst/>
-          </a:prstGeom>
-          <a:noFill/>
-        </p:spPr>
-        <p:txBody>
-          <a:bodyPr wrap="square" lIns="45720" rIns="45720" tIns="27432" bIns="27432" anchor="t">
-            <a:spAutoFit/>
-          </a:bodyPr>
-          <a:lstStyle/>
-          <a:p>
-            <a:r>
-              <a:rPr sz="1400" b="0">
-                <a:solidFill>
-                  <a:srgbClr val="EEF1F3"/>
-                </a:solidFill>
-                <a:latin typeface="Arial"/>
-              </a:rPr>
-              <a:t>declined: crossing is 48x the copy</a:t>
+              <a:t>forbid trees and graphs.</a:t>
             </a:r>
           </a:p>
         </p:txBody>
@@ -6743,7 +6335,7 @@
             <a:avLst/>
           </a:prstGeom>
           <a:solidFill>
-            <a:srgbClr val="101317"/>
+            <a:srgbClr val="EEF1F3"/>
           </a:solidFill>
           <a:ln>
             <a:noFill/>
@@ -6796,11 +6388,11 @@
             <a:r>
               <a:rPr sz="2800" b="1">
                 <a:solidFill>
-                  <a:srgbClr val="EEF1F3"/>
-                </a:solidFill>
-                <a:latin typeface="Arial"/>
-              </a:rPr>
-              <a:t>4.0 shipped. Here is what I have not done.</a:t>
+                  <a:srgbClr val="101317"/>
+                </a:solidFill>
+                <a:latin typeface="Arial"/>
+              </a:rPr>
+              <a:t>What I measured, and what I declined because of it.</a:t>
             </a:r>
           </a:p>
         </p:txBody>
@@ -6830,11 +6422,11 @@
             <a:r>
               <a:rPr sz="1300" b="0">
                 <a:solidFill>
-                  <a:srgbClr val="72B7D6"/>
-                </a:solidFill>
-                <a:latin typeface="Arial"/>
-              </a:rPr>
-              <a:t>I keep the boundary visible, because a known defect is not the same as an unknown one.</a:t>
+                  <a:srgbClr val="65707C"/>
+                </a:solidFill>
+                <a:latin typeface="Arial"/>
+              </a:rPr>
+              <a:t>A number without its spread is not evidence. Every claim below carries a noise band.</a:t>
             </a:r>
           </a:p>
         </p:txBody>
@@ -6916,8 +6508,8 @@
         </p:nvSpPr>
         <p:spPr>
           <a:xfrm>
-            <a:off x="731520" y="1828800"/>
-            <a:ext cx="5166360" cy="3566160"/>
+            <a:off x="822960" y="1828800"/>
+            <a:ext cx="10515600" cy="566928"/>
           </a:xfrm>
           <a:prstGeom prst="roundRect">
             <a:avLst/>
@@ -6959,8 +6551,8 @@
         </p:nvSpPr>
         <p:spPr>
           <a:xfrm>
-            <a:off x="1005840" y="2148840"/>
-            <a:ext cx="4480560" cy="274320"/>
+            <a:off x="1097280" y="1965960"/>
+            <a:ext cx="3108960" cy="274320"/>
           </a:xfrm>
           <a:prstGeom prst="rect">
             <a:avLst/>
@@ -6976,11 +6568,11 @@
             <a:r>
               <a:rPr sz="1500" b="1">
                 <a:solidFill>
-                  <a:srgbClr val="76B900"/>
-                </a:solidFill>
-                <a:latin typeface="Arial"/>
-              </a:rPr>
-              <a:t>4.0 SHIPPED</a:t>
+                  <a:srgbClr val="EEF1F3"/>
+                </a:solidFill>
+                <a:latin typeface="Arial"/>
+              </a:rPr>
+              <a:t>cold startup</a:t>
             </a:r>
           </a:p>
         </p:txBody>
@@ -6993,103 +6585,82 @@
         </p:nvSpPr>
         <p:spPr>
           <a:xfrm>
-            <a:off x="1005840" y="2651760"/>
-            <a:ext cx="4297680" cy="2377440"/>
-          </a:xfrm>
-          <a:prstGeom prst="rect">
-            <a:avLst/>
-          </a:prstGeom>
-          <a:noFill/>
-        </p:spPr>
-        <p:txBody>
-          <a:bodyPr wrap="square" lIns="45720" rIns="45720" tIns="27432" bIns="27432" anchor="t">
-            <a:spAutoFit/>
-          </a:bodyPr>
-          <a:lstStyle/>
-          <a:p>
-            <a:r>
-              <a:rPr sz="1800" b="1">
+            <a:off x="4389120" y="1965960"/>
+            <a:ext cx="2194560" cy="274320"/>
+          </a:xfrm>
+          <a:prstGeom prst="rect">
+            <a:avLst/>
+          </a:prstGeom>
+          <a:noFill/>
+        </p:spPr>
+        <p:txBody>
+          <a:bodyPr wrap="square" lIns="45720" rIns="45720" tIns="27432" bIns="27432" anchor="t">
+            <a:spAutoFit/>
+          </a:bodyPr>
+          <a:lstStyle/>
+          <a:p>
+            <a:r>
+              <a:rPr sz="1500" b="1">
+                <a:solidFill>
+                  <a:srgbClr val="FF6B35"/>
+                </a:solidFill>
+                <a:latin typeface="Courier New"/>
+              </a:rPr>
+              <a:t>17.4 ms</a:t>
+            </a:r>
+          </a:p>
+        </p:txBody>
+      </p:sp>
+      <p:sp>
+        <p:nvSpPr>
+          <p:cNvPr id="10" name="TextBox 9"/>
+          <p:cNvSpPr txBox="1"/>
+          <p:nvPr/>
+        </p:nvSpPr>
+        <p:spPr>
+          <a:xfrm>
+            <a:off x="6766560" y="1965960"/>
+            <a:ext cx="4389120" cy="274320"/>
+          </a:xfrm>
+          <a:prstGeom prst="rect">
+            <a:avLst/>
+          </a:prstGeom>
+          <a:noFill/>
+        </p:spPr>
+        <p:txBody>
+          <a:bodyPr wrap="square" lIns="45720" rIns="45720" tIns="27432" bIns="27432" anchor="t">
+            <a:spAutoFit/>
+          </a:bodyPr>
+          <a:lstStyle/>
+          <a:p>
+            <a:r>
+              <a:rPr sz="1400" b="0">
                 <a:solidFill>
                   <a:srgbClr val="EEF1F3"/>
                 </a:solidFill>
                 <a:latin typeface="Arial"/>
               </a:rPr>
-              <a:t>v2 module format</a:t>
-            </a:r>
-          </a:p>
-          <a:p>
-            <a:r>
-              <a:rPr sz="1800" b="1">
-                <a:solidFill>
-                  <a:srgbClr val="EEF1F3"/>
-                </a:solidFill>
-                <a:latin typeface="Arial"/>
-              </a:rPr>
-              <a:t>stack and type verification</a:t>
-            </a:r>
-          </a:p>
-          <a:p>
-            <a:r>
-              <a:rPr sz="1800" b="1">
-                <a:solidFill>
-                  <a:srgbClr val="EEF1F3"/>
-                </a:solidFill>
-                <a:latin typeface="Arial"/>
-              </a:rPr>
-              <a:t>return, depth, ownership</a:t>
-            </a:r>
-          </a:p>
-          <a:p>
-            <a:r>
-              <a:rPr sz="1800" b="1">
-                <a:solidFill>
-                  <a:srgbClr val="EEF1F3"/>
-                </a:solidFill>
-                <a:latin typeface="Arial"/>
-              </a:rPr>
-              <a:t>cycle collection</a:t>
-            </a:r>
-          </a:p>
-          <a:p>
-            <a:r>
-              <a:rPr sz="1800" b="1">
-                <a:solidFill>
-                  <a:srgbClr val="EEF1F3"/>
-                </a:solidFill>
-                <a:latin typeface="Arial"/>
-              </a:rPr>
-              <a:t>computed dispatch</a:t>
-            </a:r>
-          </a:p>
-          <a:p>
-            <a:r>
-              <a:rPr sz="1800" b="1">
-                <a:solidFill>
-                  <a:srgbClr val="EEF1F3"/>
-                </a:solidFill>
-                <a:latin typeface="Arial"/>
-              </a:rPr>
-              <a:t>honest measurement</a:t>
-            </a:r>
-          </a:p>
-        </p:txBody>
-      </p:sp>
-      <p:sp>
-        <p:nvSpPr>
-          <p:cNvPr id="10" name="Rounded Rectangle 9"/>
+              <a:t>60-1800x a single execution</a:t>
+            </a:r>
+          </a:p>
+        </p:txBody>
+      </p:sp>
+      <p:sp>
+        <p:nvSpPr>
+          <p:cNvPr id="11" name="Rounded Rectangle 10"/>
           <p:cNvSpPr/>
           <p:nvPr/>
         </p:nvSpPr>
         <p:spPr>
           <a:xfrm>
-            <a:off x="6309360" y="1828800"/>
-            <a:ext cx="5166360" cy="3566160"/>
+            <a:off x="822960" y="2542032"/>
+            <a:ext cx="10515600" cy="566928"/>
           </a:xfrm>
           <a:prstGeom prst="roundRect">
             <a:avLst/>
           </a:prstGeom>
           <a:solidFill>
-            <a:srgbClr val="101317"/>
+            <a:srgbClr val="23282F"/>
           </a:solidFill>
           <a:ln>
             <a:noFill/>
@@ -7119,14 +6690,14 @@
       </p:sp>
       <p:sp>
         <p:nvSpPr>
-          <p:cNvPr id="11" name="TextBox 10"/>
-          <p:cNvSpPr txBox="1"/>
-          <p:nvPr/>
-        </p:nvSpPr>
-        <p:spPr>
-          <a:xfrm>
-            <a:off x="6583680" y="2148840"/>
-            <a:ext cx="4480560" cy="274320"/>
+          <p:cNvPr id="12" name="TextBox 11"/>
+          <p:cNvSpPr txBox="1"/>
+          <p:nvPr/>
+        </p:nvSpPr>
+        <p:spPr>
+          <a:xfrm>
+            <a:off x="1097280" y="2679192"/>
+            <a:ext cx="3108960" cy="274320"/>
           </a:xfrm>
           <a:prstGeom prst="rect">
             <a:avLst/>
@@ -7142,89 +6713,514 @@
             <a:r>
               <a:rPr sz="1500" b="1">
                 <a:solidFill>
-                  <a:srgbClr val="FF6B35"/>
-                </a:solidFill>
-                <a:latin typeface="Arial"/>
-              </a:rPr>
-              <a:t>NOT DONE</a:t>
-            </a:r>
-          </a:p>
-        </p:txBody>
-      </p:sp>
-      <p:sp>
-        <p:nvSpPr>
-          <p:cNvPr id="12" name="TextBox 11"/>
-          <p:cNvSpPr txBox="1"/>
-          <p:nvPr/>
-        </p:nvSpPr>
-        <p:spPr>
-          <a:xfrm>
-            <a:off x="6583680" y="2651760"/>
-            <a:ext cx="4297680" cy="2377440"/>
-          </a:xfrm>
-          <a:prstGeom prst="rect">
-            <a:avLst/>
-          </a:prstGeom>
-          <a:noFill/>
-        </p:spPr>
-        <p:txBody>
-          <a:bodyPr wrap="square" lIns="45720" rIns="45720" tIns="27432" bIns="27432" anchor="t">
-            <a:spAutoFit/>
-          </a:bodyPr>
-          <a:lstStyle/>
-          <a:p>
-            <a:r>
-              <a:rPr sz="1800" b="1">
-                <a:solidFill>
                   <a:srgbClr val="EEF1F3"/>
                 </a:solidFill>
                 <a:latin typeface="Arial"/>
               </a:rPr>
-              <a:t>header dependencies (#211)</a:t>
-            </a:r>
-          </a:p>
-          <a:p>
-            <a:r>
-              <a:rPr sz="1800" b="1">
+              <a:t>Forth interpreter</a:t>
+            </a:r>
+          </a:p>
+        </p:txBody>
+      </p:sp>
+      <p:sp>
+        <p:nvSpPr>
+          <p:cNvPr id="13" name="TextBox 12"/>
+          <p:cNvSpPr txBox="1"/>
+          <p:nvPr/>
+        </p:nvSpPr>
+        <p:spPr>
+          <a:xfrm>
+            <a:off x="4389120" y="2679192"/>
+            <a:ext cx="2194560" cy="274320"/>
+          </a:xfrm>
+          <a:prstGeom prst="rect">
+            <a:avLst/>
+          </a:prstGeom>
+          <a:noFill/>
+        </p:spPr>
+        <p:txBody>
+          <a:bodyPr wrap="square" lIns="45720" rIns="45720" tIns="27432" bIns="27432" anchor="t">
+            <a:spAutoFit/>
+          </a:bodyPr>
+          <a:lstStyle/>
+          <a:p>
+            <a:r>
+              <a:rPr sz="1500" b="1">
+                <a:solidFill>
+                  <a:srgbClr val="76B900"/>
+                </a:solidFill>
+                <a:latin typeface="Courier New"/>
+              </a:rPr>
+              <a:t>282.7 us</a:t>
+            </a:r>
+          </a:p>
+        </p:txBody>
+      </p:sp>
+      <p:sp>
+        <p:nvSpPr>
+          <p:cNvPr id="14" name="TextBox 13"/>
+          <p:cNvSpPr txBox="1"/>
+          <p:nvPr/>
+        </p:nvSpPr>
+        <p:spPr>
+          <a:xfrm>
+            <a:off x="6766560" y="2679192"/>
+            <a:ext cx="4389120" cy="274320"/>
+          </a:xfrm>
+          <a:prstGeom prst="rect">
+            <a:avLst/>
+          </a:prstGeom>
+          <a:noFill/>
+        </p:spPr>
+        <p:txBody>
+          <a:bodyPr wrap="square" lIns="45720" rIns="45720" tIns="27432" bIns="27432" anchor="t">
+            <a:spAutoFit/>
+          </a:bodyPr>
+          <a:lstStyle/>
+          <a:p>
+            <a:r>
+              <a:rPr sz="1400" b="0">
                 <a:solidFill>
                   <a:srgbClr val="EEF1F3"/>
                 </a:solidFill>
                 <a:latin typeface="Arial"/>
               </a:rPr>
-              <a:t>module signing → 5.0</a:t>
-            </a:r>
-          </a:p>
-          <a:p>
-            <a:r>
-              <a:rPr sz="1800" b="1">
+              <a:t>IQR 1.6%</a:t>
+            </a:r>
+          </a:p>
+        </p:txBody>
+      </p:sp>
+      <p:sp>
+        <p:nvSpPr>
+          <p:cNvPr id="15" name="Rounded Rectangle 14"/>
+          <p:cNvSpPr/>
+          <p:nvPr/>
+        </p:nvSpPr>
+        <p:spPr>
+          <a:xfrm>
+            <a:off x="822960" y="3255264"/>
+            <a:ext cx="10515600" cy="566928"/>
+          </a:xfrm>
+          <a:prstGeom prst="roundRect">
+            <a:avLst/>
+          </a:prstGeom>
+          <a:solidFill>
+            <a:srgbClr val="23282F"/>
+          </a:solidFill>
+          <a:ln>
+            <a:noFill/>
+          </a:ln>
+        </p:spPr>
+        <p:style>
+          <a:lnRef idx="1">
+            <a:schemeClr val="accent1"/>
+          </a:lnRef>
+          <a:fillRef idx="3">
+            <a:schemeClr val="accent1"/>
+          </a:fillRef>
+          <a:effectRef idx="2">
+            <a:schemeClr val="accent1"/>
+          </a:effectRef>
+          <a:fontRef idx="minor">
+            <a:schemeClr val="lt1"/>
+          </a:fontRef>
+        </p:style>
+        <p:txBody>
+          <a:bodyPr rtlCol="0" anchor="ctr"/>
+          <a:lstStyle/>
+          <a:p>
+            <a:pPr algn="ctr"/>
+          </a:p>
+        </p:txBody>
+      </p:sp>
+      <p:sp>
+        <p:nvSpPr>
+          <p:cNvPr id="16" name="TextBox 15"/>
+          <p:cNvSpPr txBox="1"/>
+          <p:nvPr/>
+        </p:nvSpPr>
+        <p:spPr>
+          <a:xfrm>
+            <a:off x="1097280" y="3392424"/>
+            <a:ext cx="3108960" cy="274320"/>
+          </a:xfrm>
+          <a:prstGeom prst="rect">
+            <a:avLst/>
+          </a:prstGeom>
+          <a:noFill/>
+        </p:spPr>
+        <p:txBody>
+          <a:bodyPr wrap="square" lIns="45720" rIns="45720" tIns="27432" bIns="27432" anchor="t">
+            <a:spAutoFit/>
+          </a:bodyPr>
+          <a:lstStyle/>
+          <a:p>
+            <a:r>
+              <a:rPr sz="1500" b="1">
                 <a:solidFill>
                   <a:srgbClr val="EEF1F3"/>
                 </a:solidFill>
                 <a:latin typeface="Arial"/>
               </a:rPr>
-              <a:t>LLVM and Wasm as</a:t>
-            </a:r>
-          </a:p>
-          <a:p>
-            <a:r>
-              <a:rPr sz="1800" b="1">
+              <a:t>computed goto</a:t>
+            </a:r>
+          </a:p>
+        </p:txBody>
+      </p:sp>
+      <p:sp>
+        <p:nvSpPr>
+          <p:cNvPr id="17" name="TextBox 16"/>
+          <p:cNvSpPr txBox="1"/>
+          <p:nvPr/>
+        </p:nvSpPr>
+        <p:spPr>
+          <a:xfrm>
+            <a:off x="4389120" y="3392424"/>
+            <a:ext cx="2194560" cy="274320"/>
+          </a:xfrm>
+          <a:prstGeom prst="rect">
+            <a:avLst/>
+          </a:prstGeom>
+          <a:noFill/>
+        </p:spPr>
+        <p:txBody>
+          <a:bodyPr wrap="square" lIns="45720" rIns="45720" tIns="27432" bIns="27432" anchor="t">
+            <a:spAutoFit/>
+          </a:bodyPr>
+          <a:lstStyle/>
+          <a:p>
+            <a:r>
+              <a:rPr sz="1500" b="1">
+                <a:solidFill>
+                  <a:srgbClr val="76B900"/>
+                </a:solidFill>
+                <a:latin typeface="Courier New"/>
+              </a:rPr>
+              <a:t>-4.2%</a:t>
+            </a:r>
+          </a:p>
+        </p:txBody>
+      </p:sp>
+      <p:sp>
+        <p:nvSpPr>
+          <p:cNvPr id="18" name="TextBox 17"/>
+          <p:cNvSpPr txBox="1"/>
+          <p:nvPr/>
+        </p:nvSpPr>
+        <p:spPr>
+          <a:xfrm>
+            <a:off x="6766560" y="3392424"/>
+            <a:ext cx="4389120" cy="274320"/>
+          </a:xfrm>
+          <a:prstGeom prst="rect">
+            <a:avLst/>
+          </a:prstGeom>
+          <a:noFill/>
+        </p:spPr>
+        <p:txBody>
+          <a:bodyPr wrap="square" lIns="45720" rIns="45720" tIns="27432" bIns="27432" anchor="t">
+            <a:spAutoFit/>
+          </a:bodyPr>
+          <a:lstStyle/>
+          <a:p>
+            <a:r>
+              <a:rPr sz="1400" b="0">
                 <a:solidFill>
                   <a:srgbClr val="EEF1F3"/>
                 </a:solidFill>
                 <a:latin typeface="Arial"/>
               </a:rPr>
-              <a:t>  NanoISA translators</a:t>
-            </a:r>
-          </a:p>
-          <a:p>
-            <a:r>
-              <a:rPr sz="1800" b="1">
+              <a:t>accepted: beats the band</a:t>
+            </a:r>
+          </a:p>
+        </p:txBody>
+      </p:sp>
+      <p:sp>
+        <p:nvSpPr>
+          <p:cNvPr id="19" name="Rounded Rectangle 18"/>
+          <p:cNvSpPr/>
+          <p:nvPr/>
+        </p:nvSpPr>
+        <p:spPr>
+          <a:xfrm>
+            <a:off x="822960" y="3968496"/>
+            <a:ext cx="10515600" cy="566928"/>
+          </a:xfrm>
+          <a:prstGeom prst="roundRect">
+            <a:avLst/>
+          </a:prstGeom>
+          <a:solidFill>
+            <a:srgbClr val="23282F"/>
+          </a:solidFill>
+          <a:ln>
+            <a:noFill/>
+          </a:ln>
+        </p:spPr>
+        <p:style>
+          <a:lnRef idx="1">
+            <a:schemeClr val="accent1"/>
+          </a:lnRef>
+          <a:fillRef idx="3">
+            <a:schemeClr val="accent1"/>
+          </a:fillRef>
+          <a:effectRef idx="2">
+            <a:schemeClr val="accent1"/>
+          </a:effectRef>
+          <a:fontRef idx="minor">
+            <a:schemeClr val="lt1"/>
+          </a:fontRef>
+        </p:style>
+        <p:txBody>
+          <a:bodyPr rtlCol="0" anchor="ctr"/>
+          <a:lstStyle/>
+          <a:p>
+            <a:pPr algn="ctr"/>
+          </a:p>
+        </p:txBody>
+      </p:sp>
+      <p:sp>
+        <p:nvSpPr>
+          <p:cNvPr id="20" name="TextBox 19"/>
+          <p:cNvSpPr txBox="1"/>
+          <p:nvPr/>
+        </p:nvSpPr>
+        <p:spPr>
+          <a:xfrm>
+            <a:off x="1097280" y="4105656"/>
+            <a:ext cx="3108960" cy="274320"/>
+          </a:xfrm>
+          <a:prstGeom prst="rect">
+            <a:avLst/>
+          </a:prstGeom>
+          <a:noFill/>
+        </p:spPr>
+        <p:txBody>
+          <a:bodyPr wrap="square" lIns="45720" rIns="45720" tIns="27432" bIns="27432" anchor="t">
+            <a:spAutoFit/>
+          </a:bodyPr>
+          <a:lstStyle/>
+          <a:p>
+            <a:r>
+              <a:rPr sz="1500" b="1">
                 <a:solidFill>
                   <a:srgbClr val="EEF1F3"/>
                 </a:solidFill>
                 <a:latin typeface="Arial"/>
               </a:rPr>
-              <a:t>Forth 2012 → 4.1</a:t>
+              <a:t>split tag stacks</a:t>
+            </a:r>
+          </a:p>
+        </p:txBody>
+      </p:sp>
+      <p:sp>
+        <p:nvSpPr>
+          <p:cNvPr id="21" name="TextBox 20"/>
+          <p:cNvSpPr txBox="1"/>
+          <p:nvPr/>
+        </p:nvSpPr>
+        <p:spPr>
+          <a:xfrm>
+            <a:off x="4389120" y="4105656"/>
+            <a:ext cx="2194560" cy="274320"/>
+          </a:xfrm>
+          <a:prstGeom prst="rect">
+            <a:avLst/>
+          </a:prstGeom>
+          <a:noFill/>
+        </p:spPr>
+        <p:txBody>
+          <a:bodyPr wrap="square" lIns="45720" rIns="45720" tIns="27432" bIns="27432" anchor="t">
+            <a:spAutoFit/>
+          </a:bodyPr>
+          <a:lstStyle/>
+          <a:p>
+            <a:r>
+              <a:rPr sz="1500" b="1">
+                <a:solidFill>
+                  <a:srgbClr val="65707C"/>
+                </a:solidFill>
+                <a:latin typeface="Courier New"/>
+              </a:rPr>
+              <a:t>unmeasurable</a:t>
+            </a:r>
+          </a:p>
+        </p:txBody>
+      </p:sp>
+      <p:sp>
+        <p:nvSpPr>
+          <p:cNvPr id="22" name="TextBox 21"/>
+          <p:cNvSpPr txBox="1"/>
+          <p:nvPr/>
+        </p:nvSpPr>
+        <p:spPr>
+          <a:xfrm>
+            <a:off x="6766560" y="4105656"/>
+            <a:ext cx="4389120" cy="274320"/>
+          </a:xfrm>
+          <a:prstGeom prst="rect">
+            <a:avLst/>
+          </a:prstGeom>
+          <a:noFill/>
+        </p:spPr>
+        <p:txBody>
+          <a:bodyPr wrap="square" lIns="45720" rIns="45720" tIns="27432" bIns="27432" anchor="t">
+            <a:spAutoFit/>
+          </a:bodyPr>
+          <a:lstStyle/>
+          <a:p>
+            <a:r>
+              <a:rPr sz="1400" b="0">
+                <a:solidFill>
+                  <a:srgbClr val="EEF1F3"/>
+                </a:solidFill>
+                <a:latin typeface="Arial"/>
+              </a:rPr>
+              <a:t>declined: band is 5-10%</a:t>
+            </a:r>
+          </a:p>
+        </p:txBody>
+      </p:sp>
+      <p:sp>
+        <p:nvSpPr>
+          <p:cNvPr id="23" name="Rounded Rectangle 22"/>
+          <p:cNvSpPr/>
+          <p:nvPr/>
+        </p:nvSpPr>
+        <p:spPr>
+          <a:xfrm>
+            <a:off x="822960" y="4681728"/>
+            <a:ext cx="10515600" cy="566928"/>
+          </a:xfrm>
+          <a:prstGeom prst="roundRect">
+            <a:avLst/>
+          </a:prstGeom>
+          <a:solidFill>
+            <a:srgbClr val="23282F"/>
+          </a:solidFill>
+          <a:ln>
+            <a:noFill/>
+          </a:ln>
+        </p:spPr>
+        <p:style>
+          <a:lnRef idx="1">
+            <a:schemeClr val="accent1"/>
+          </a:lnRef>
+          <a:fillRef idx="3">
+            <a:schemeClr val="accent1"/>
+          </a:fillRef>
+          <a:effectRef idx="2">
+            <a:schemeClr val="accent1"/>
+          </a:effectRef>
+          <a:fontRef idx="minor">
+            <a:schemeClr val="lt1"/>
+          </a:fontRef>
+        </p:style>
+        <p:txBody>
+          <a:bodyPr rtlCol="0" anchor="ctr"/>
+          <a:lstStyle/>
+          <a:p>
+            <a:pPr algn="ctr"/>
+          </a:p>
+        </p:txBody>
+      </p:sp>
+      <p:sp>
+        <p:nvSpPr>
+          <p:cNvPr id="24" name="TextBox 23"/>
+          <p:cNvSpPr txBox="1"/>
+          <p:nvPr/>
+        </p:nvSpPr>
+        <p:spPr>
+          <a:xfrm>
+            <a:off x="1097280" y="4818888"/>
+            <a:ext cx="3108960" cy="274320"/>
+          </a:xfrm>
+          <a:prstGeom prst="rect">
+            <a:avLst/>
+          </a:prstGeom>
+          <a:noFill/>
+        </p:spPr>
+        <p:txBody>
+          <a:bodyPr wrap="square" lIns="45720" rIns="45720" tIns="27432" bIns="27432" anchor="t">
+            <a:spAutoFit/>
+          </a:bodyPr>
+          <a:lstStyle/>
+          <a:p>
+            <a:r>
+              <a:rPr sz="1500" b="1">
+                <a:solidFill>
+                  <a:srgbClr val="EEF1F3"/>
+                </a:solidFill>
+                <a:latin typeface="Arial"/>
+              </a:rPr>
+              <a:t>trap stack ranges</a:t>
+            </a:r>
+          </a:p>
+        </p:txBody>
+      </p:sp>
+      <p:sp>
+        <p:nvSpPr>
+          <p:cNvPr id="25" name="TextBox 24"/>
+          <p:cNvSpPr txBox="1"/>
+          <p:nvPr/>
+        </p:nvSpPr>
+        <p:spPr>
+          <a:xfrm>
+            <a:off x="4389120" y="4818888"/>
+            <a:ext cx="2194560" cy="274320"/>
+          </a:xfrm>
+          <a:prstGeom prst="rect">
+            <a:avLst/>
+          </a:prstGeom>
+          <a:noFill/>
+        </p:spPr>
+        <p:txBody>
+          <a:bodyPr wrap="square" lIns="45720" rIns="45720" tIns="27432" bIns="27432" anchor="t">
+            <a:spAutoFit/>
+          </a:bodyPr>
+          <a:lstStyle/>
+          <a:p>
+            <a:r>
+              <a:rPr sz="1500" b="1">
+                <a:solidFill>
+                  <a:srgbClr val="65707C"/>
+                </a:solidFill>
+                <a:latin typeface="Courier New"/>
+              </a:rPr>
+              <a:t>no effect</a:t>
+            </a:r>
+          </a:p>
+        </p:txBody>
+      </p:sp>
+      <p:sp>
+        <p:nvSpPr>
+          <p:cNvPr id="26" name="TextBox 25"/>
+          <p:cNvSpPr txBox="1"/>
+          <p:nvPr/>
+        </p:nvSpPr>
+        <p:spPr>
+          <a:xfrm>
+            <a:off x="6766560" y="4818888"/>
+            <a:ext cx="4389120" cy="274320"/>
+          </a:xfrm>
+          <a:prstGeom prst="rect">
+            <a:avLst/>
+          </a:prstGeom>
+          <a:noFill/>
+        </p:spPr>
+        <p:txBody>
+          <a:bodyPr wrap="square" lIns="45720" rIns="45720" tIns="27432" bIns="27432" anchor="t">
+            <a:spAutoFit/>
+          </a:bodyPr>
+          <a:lstStyle/>
+          <a:p>
+            <a:r>
+              <a:rPr sz="1400" b="0">
+                <a:solidFill>
+                  <a:srgbClr val="EEF1F3"/>
+                </a:solidFill>
+                <a:latin typeface="Arial"/>
+              </a:rPr>
+              <a:t>declined: crossing is 48x the copy</a:t>
             </a:r>
           </a:p>
         </p:txBody>
@@ -7290,6 +7286,525 @@
           </a:p>
         </p:txBody>
       </p:sp>
+      <p:sp>
+        <p:nvSpPr>
+          <p:cNvPr id="3" name="TextBox 2"/>
+          <p:cNvSpPr txBox="1"/>
+          <p:nvPr/>
+        </p:nvSpPr>
+        <p:spPr>
+          <a:xfrm>
+            <a:off x="594360" y="457200"/>
+            <a:ext cx="10789920" cy="640080"/>
+          </a:xfrm>
+          <a:prstGeom prst="rect">
+            <a:avLst/>
+          </a:prstGeom>
+          <a:noFill/>
+        </p:spPr>
+        <p:txBody>
+          <a:bodyPr wrap="square" lIns="45720" rIns="45720" tIns="27432" bIns="27432" anchor="t">
+            <a:spAutoFit/>
+          </a:bodyPr>
+          <a:lstStyle/>
+          <a:p>
+            <a:r>
+              <a:rPr sz="2800" b="1">
+                <a:solidFill>
+                  <a:srgbClr val="EEF1F3"/>
+                </a:solidFill>
+                <a:latin typeface="Arial"/>
+              </a:rPr>
+              <a:t>4.0 shipped. Here is what I have not done.</a:t>
+            </a:r>
+          </a:p>
+        </p:txBody>
+      </p:sp>
+      <p:sp>
+        <p:nvSpPr>
+          <p:cNvPr id="4" name="TextBox 3"/>
+          <p:cNvSpPr txBox="1"/>
+          <p:nvPr/>
+        </p:nvSpPr>
+        <p:spPr>
+          <a:xfrm>
+            <a:off x="621792" y="1170432"/>
+            <a:ext cx="10607040" cy="411480"/>
+          </a:xfrm>
+          <a:prstGeom prst="rect">
+            <a:avLst/>
+          </a:prstGeom>
+          <a:noFill/>
+        </p:spPr>
+        <p:txBody>
+          <a:bodyPr wrap="square" lIns="45720" rIns="45720" tIns="27432" bIns="27432" anchor="t">
+            <a:spAutoFit/>
+          </a:bodyPr>
+          <a:lstStyle/>
+          <a:p>
+            <a:r>
+              <a:rPr sz="1300" b="0">
+                <a:solidFill>
+                  <a:srgbClr val="72B7D6"/>
+                </a:solidFill>
+                <a:latin typeface="Arial"/>
+              </a:rPr>
+              <a:t>107 commits since 3.5, and more new test code than new source. A known defect is not an unknown one.</a:t>
+            </a:r>
+          </a:p>
+        </p:txBody>
+      </p:sp>
+      <p:sp>
+        <p:nvSpPr>
+          <p:cNvPr id="5" name="TextBox 4"/>
+          <p:cNvSpPr txBox="1"/>
+          <p:nvPr/>
+        </p:nvSpPr>
+        <p:spPr>
+          <a:xfrm>
+            <a:off x="411480" y="6638544"/>
+            <a:ext cx="1097280" cy="137160"/>
+          </a:xfrm>
+          <a:prstGeom prst="rect">
+            <a:avLst/>
+          </a:prstGeom>
+          <a:noFill/>
+        </p:spPr>
+        <p:txBody>
+          <a:bodyPr wrap="square" lIns="45720" rIns="45720" tIns="27432" bIns="27432" anchor="t">
+            <a:spAutoFit/>
+          </a:bodyPr>
+          <a:lstStyle/>
+          <a:p>
+            <a:r>
+              <a:rPr sz="800" b="1">
+                <a:solidFill>
+                  <a:srgbClr val="65707C"/>
+                </a:solidFill>
+                <a:latin typeface="Arial"/>
+              </a:rPr>
+              <a:t>NANOLANG</a:t>
+            </a:r>
+          </a:p>
+        </p:txBody>
+      </p:sp>
+      <p:sp>
+        <p:nvSpPr>
+          <p:cNvPr id="6" name="TextBox 5"/>
+          <p:cNvSpPr txBox="1"/>
+          <p:nvPr/>
+        </p:nvSpPr>
+        <p:spPr>
+          <a:xfrm>
+            <a:off x="11567160" y="6638544"/>
+            <a:ext cx="228600" cy="137160"/>
+          </a:xfrm>
+          <a:prstGeom prst="rect">
+            <a:avLst/>
+          </a:prstGeom>
+          <a:noFill/>
+        </p:spPr>
+        <p:txBody>
+          <a:bodyPr wrap="square" lIns="45720" rIns="45720" tIns="27432" bIns="27432" anchor="t">
+            <a:spAutoFit/>
+          </a:bodyPr>
+          <a:lstStyle/>
+          <a:p>
+            <a:pPr algn="r"/>
+            <a:r>
+              <a:rPr sz="800" b="1">
+                <a:solidFill>
+                  <a:srgbClr val="65707C"/>
+                </a:solidFill>
+                <a:latin typeface="Arial"/>
+              </a:rPr>
+              <a:t>14</a:t>
+            </a:r>
+          </a:p>
+        </p:txBody>
+      </p:sp>
+      <p:sp>
+        <p:nvSpPr>
+          <p:cNvPr id="7" name="Rounded Rectangle 6"/>
+          <p:cNvSpPr/>
+          <p:nvPr/>
+        </p:nvSpPr>
+        <p:spPr>
+          <a:xfrm>
+            <a:off x="731520" y="1828800"/>
+            <a:ext cx="5166360" cy="3566160"/>
+          </a:xfrm>
+          <a:prstGeom prst="roundRect">
+            <a:avLst/>
+          </a:prstGeom>
+          <a:solidFill>
+            <a:srgbClr val="23282F"/>
+          </a:solidFill>
+          <a:ln>
+            <a:noFill/>
+          </a:ln>
+        </p:spPr>
+        <p:style>
+          <a:lnRef idx="1">
+            <a:schemeClr val="accent1"/>
+          </a:lnRef>
+          <a:fillRef idx="3">
+            <a:schemeClr val="accent1"/>
+          </a:fillRef>
+          <a:effectRef idx="2">
+            <a:schemeClr val="accent1"/>
+          </a:effectRef>
+          <a:fontRef idx="minor">
+            <a:schemeClr val="lt1"/>
+          </a:fontRef>
+        </p:style>
+        <p:txBody>
+          <a:bodyPr rtlCol="0" anchor="ctr"/>
+          <a:lstStyle/>
+          <a:p>
+            <a:pPr algn="ctr"/>
+          </a:p>
+        </p:txBody>
+      </p:sp>
+      <p:sp>
+        <p:nvSpPr>
+          <p:cNvPr id="8" name="TextBox 7"/>
+          <p:cNvSpPr txBox="1"/>
+          <p:nvPr/>
+        </p:nvSpPr>
+        <p:spPr>
+          <a:xfrm>
+            <a:off x="1005840" y="2148840"/>
+            <a:ext cx="4480560" cy="274320"/>
+          </a:xfrm>
+          <a:prstGeom prst="rect">
+            <a:avLst/>
+          </a:prstGeom>
+          <a:noFill/>
+        </p:spPr>
+        <p:txBody>
+          <a:bodyPr wrap="square" lIns="45720" rIns="45720" tIns="27432" bIns="27432" anchor="t">
+            <a:spAutoFit/>
+          </a:bodyPr>
+          <a:lstStyle/>
+          <a:p>
+            <a:r>
+              <a:rPr sz="1500" b="1">
+                <a:solidFill>
+                  <a:srgbClr val="76B900"/>
+                </a:solidFill>
+                <a:latin typeface="Arial"/>
+              </a:rPr>
+              <a:t>4.0 SHIPPED</a:t>
+            </a:r>
+          </a:p>
+        </p:txBody>
+      </p:sp>
+      <p:sp>
+        <p:nvSpPr>
+          <p:cNvPr id="9" name="TextBox 8"/>
+          <p:cNvSpPr txBox="1"/>
+          <p:nvPr/>
+        </p:nvSpPr>
+        <p:spPr>
+          <a:xfrm>
+            <a:off x="1005840" y="2651760"/>
+            <a:ext cx="4297680" cy="2377440"/>
+          </a:xfrm>
+          <a:prstGeom prst="rect">
+            <a:avLst/>
+          </a:prstGeom>
+          <a:noFill/>
+        </p:spPr>
+        <p:txBody>
+          <a:bodyPr wrap="square" lIns="45720" rIns="45720" tIns="27432" bIns="27432" anchor="t">
+            <a:spAutoFit/>
+          </a:bodyPr>
+          <a:lstStyle/>
+          <a:p>
+            <a:r>
+              <a:rPr sz="1800" b="1">
+                <a:solidFill>
+                  <a:srgbClr val="EEF1F3"/>
+                </a:solidFill>
+                <a:latin typeface="Arial"/>
+              </a:rPr>
+              <a:t>v2 module format</a:t>
+            </a:r>
+          </a:p>
+          <a:p>
+            <a:r>
+              <a:rPr sz="1800" b="1">
+                <a:solidFill>
+                  <a:srgbClr val="EEF1F3"/>
+                </a:solidFill>
+                <a:latin typeface="Arial"/>
+              </a:rPr>
+              <a:t>stack and type verification</a:t>
+            </a:r>
+          </a:p>
+          <a:p>
+            <a:r>
+              <a:rPr sz="1800" b="1">
+                <a:solidFill>
+                  <a:srgbClr val="EEF1F3"/>
+                </a:solidFill>
+                <a:latin typeface="Arial"/>
+              </a:rPr>
+              <a:t>return, depth, ownership</a:t>
+            </a:r>
+          </a:p>
+          <a:p>
+            <a:r>
+              <a:rPr sz="1800" b="1">
+                <a:solidFill>
+                  <a:srgbClr val="EEF1F3"/>
+                </a:solidFill>
+                <a:latin typeface="Arial"/>
+              </a:rPr>
+              <a:t>fuzzed parsing surfaces</a:t>
+            </a:r>
+          </a:p>
+          <a:p>
+            <a:r>
+              <a:rPr sz="1800" b="1">
+                <a:solidFill>
+                  <a:srgbClr val="EEF1F3"/>
+                </a:solidFill>
+                <a:latin typeface="Arial"/>
+              </a:rPr>
+              <a:t>cycle collection</a:t>
+            </a:r>
+          </a:p>
+          <a:p>
+            <a:r>
+              <a:rPr sz="1800" b="1">
+                <a:solidFill>
+                  <a:srgbClr val="EEF1F3"/>
+                </a:solidFill>
+                <a:latin typeface="Arial"/>
+              </a:rPr>
+              <a:t>honest measurement</a:t>
+            </a:r>
+          </a:p>
+        </p:txBody>
+      </p:sp>
+      <p:sp>
+        <p:nvSpPr>
+          <p:cNvPr id="10" name="Rounded Rectangle 9"/>
+          <p:cNvSpPr/>
+          <p:nvPr/>
+        </p:nvSpPr>
+        <p:spPr>
+          <a:xfrm>
+            <a:off x="6309360" y="1828800"/>
+            <a:ext cx="5166360" cy="3566160"/>
+          </a:xfrm>
+          <a:prstGeom prst="roundRect">
+            <a:avLst/>
+          </a:prstGeom>
+          <a:solidFill>
+            <a:srgbClr val="101317"/>
+          </a:solidFill>
+          <a:ln>
+            <a:noFill/>
+          </a:ln>
+        </p:spPr>
+        <p:style>
+          <a:lnRef idx="1">
+            <a:schemeClr val="accent1"/>
+          </a:lnRef>
+          <a:fillRef idx="3">
+            <a:schemeClr val="accent1"/>
+          </a:fillRef>
+          <a:effectRef idx="2">
+            <a:schemeClr val="accent1"/>
+          </a:effectRef>
+          <a:fontRef idx="minor">
+            <a:schemeClr val="lt1"/>
+          </a:fontRef>
+        </p:style>
+        <p:txBody>
+          <a:bodyPr rtlCol="0" anchor="ctr"/>
+          <a:lstStyle/>
+          <a:p>
+            <a:pPr algn="ctr"/>
+          </a:p>
+        </p:txBody>
+      </p:sp>
+      <p:sp>
+        <p:nvSpPr>
+          <p:cNvPr id="11" name="TextBox 10"/>
+          <p:cNvSpPr txBox="1"/>
+          <p:nvPr/>
+        </p:nvSpPr>
+        <p:spPr>
+          <a:xfrm>
+            <a:off x="6583680" y="2148840"/>
+            <a:ext cx="4480560" cy="274320"/>
+          </a:xfrm>
+          <a:prstGeom prst="rect">
+            <a:avLst/>
+          </a:prstGeom>
+          <a:noFill/>
+        </p:spPr>
+        <p:txBody>
+          <a:bodyPr wrap="square" lIns="45720" rIns="45720" tIns="27432" bIns="27432" anchor="t">
+            <a:spAutoFit/>
+          </a:bodyPr>
+          <a:lstStyle/>
+          <a:p>
+            <a:r>
+              <a:rPr sz="1500" b="1">
+                <a:solidFill>
+                  <a:srgbClr val="FF6B35"/>
+                </a:solidFill>
+                <a:latin typeface="Arial"/>
+              </a:rPr>
+              <a:t>NOT DONE</a:t>
+            </a:r>
+          </a:p>
+        </p:txBody>
+      </p:sp>
+      <p:sp>
+        <p:nvSpPr>
+          <p:cNvPr id="12" name="TextBox 11"/>
+          <p:cNvSpPr txBox="1"/>
+          <p:nvPr/>
+        </p:nvSpPr>
+        <p:spPr>
+          <a:xfrm>
+            <a:off x="6583680" y="2651760"/>
+            <a:ext cx="4297680" cy="2377440"/>
+          </a:xfrm>
+          <a:prstGeom prst="rect">
+            <a:avLst/>
+          </a:prstGeom>
+          <a:noFill/>
+        </p:spPr>
+        <p:txBody>
+          <a:bodyPr wrap="square" lIns="45720" rIns="45720" tIns="27432" bIns="27432" anchor="t">
+            <a:spAutoFit/>
+          </a:bodyPr>
+          <a:lstStyle/>
+          <a:p>
+            <a:r>
+              <a:rPr sz="1800" b="1">
+                <a:solidFill>
+                  <a:srgbClr val="EEF1F3"/>
+                </a:solidFill>
+                <a:latin typeface="Arial"/>
+              </a:rPr>
+              <a:t>header dependencies (#211)</a:t>
+            </a:r>
+          </a:p>
+          <a:p>
+            <a:r>
+              <a:rPr sz="1800" b="1">
+                <a:solidFill>
+                  <a:srgbClr val="EEF1F3"/>
+                </a:solidFill>
+                <a:latin typeface="Arial"/>
+              </a:rPr>
+              <a:t>module signing → 5.0</a:t>
+            </a:r>
+          </a:p>
+          <a:p>
+            <a:r>
+              <a:rPr sz="1800" b="1">
+                <a:solidFill>
+                  <a:srgbClr val="EEF1F3"/>
+                </a:solidFill>
+                <a:latin typeface="Arial"/>
+              </a:rPr>
+              <a:t>LLVM and Wasm as</a:t>
+            </a:r>
+          </a:p>
+          <a:p>
+            <a:r>
+              <a:rPr sz="1800" b="1">
+                <a:solidFill>
+                  <a:srgbClr val="EEF1F3"/>
+                </a:solidFill>
+                <a:latin typeface="Arial"/>
+              </a:rPr>
+              <a:t>  NanoISA translators</a:t>
+            </a:r>
+          </a:p>
+          <a:p>
+            <a:r>
+              <a:rPr sz="1800" b="1">
+                <a:solidFill>
+                  <a:srgbClr val="EEF1F3"/>
+                </a:solidFill>
+                <a:latin typeface="Arial"/>
+              </a:rPr>
+              <a:t>Forth 2012 → 4.1</a:t>
+            </a:r>
+          </a:p>
+        </p:txBody>
+      </p:sp>
+    </p:spTree>
+  </p:cSld>
+  <p:clrMapOvr>
+    <a:masterClrMapping/>
+  </p:clrMapOvr>
+</p:sld>
+</file>
+
+<file path=ppt/slides/slide15.xml><?xml version="1.0" encoding="utf-8"?>
+<p:sld xmlns:a="http://schemas.openxmlformats.org/drawingml/2006/main" xmlns:p="http://schemas.openxmlformats.org/presentationml/2006/main" xmlns:r="http://schemas.openxmlformats.org/officeDocument/2006/relationships">
+  <p:cSld>
+    <p:spTree>
+      <p:nvGrpSpPr>
+        <p:cNvPr id="1" name=""/>
+        <p:cNvGrpSpPr/>
+        <p:nvPr/>
+      </p:nvGrpSpPr>
+      <p:grpSpPr/>
+      <p:sp>
+        <p:nvSpPr>
+          <p:cNvPr id="2" name="Rectangle 1"/>
+          <p:cNvSpPr/>
+          <p:nvPr/>
+        </p:nvSpPr>
+        <p:spPr>
+          <a:xfrm>
+            <a:off x="0" y="0"/>
+            <a:ext cx="12191695" cy="6858000"/>
+          </a:xfrm>
+          <a:prstGeom prst="rect">
+            <a:avLst/>
+          </a:prstGeom>
+          <a:solidFill>
+            <a:srgbClr val="101317"/>
+          </a:solidFill>
+          <a:ln>
+            <a:noFill/>
+          </a:ln>
+        </p:spPr>
+        <p:style>
+          <a:lnRef idx="1">
+            <a:schemeClr val="accent1"/>
+          </a:lnRef>
+          <a:fillRef idx="3">
+            <a:schemeClr val="accent1"/>
+          </a:fillRef>
+          <a:effectRef idx="2">
+            <a:schemeClr val="accent1"/>
+          </a:effectRef>
+          <a:fontRef idx="minor">
+            <a:schemeClr val="lt1"/>
+          </a:fontRef>
+        </p:style>
+        <p:txBody>
+          <a:bodyPr rtlCol="0" anchor="ctr"/>
+          <a:lstStyle/>
+          <a:p>
+            <a:pPr algn="ctr"/>
+          </a:p>
+        </p:txBody>
+      </p:sp>
       <p:pic>
         <p:nvPicPr>
           <p:cNvPr id="3" name="Picture 2" descr="nanolang-mascot.png"/>
@@ -7491,7 +8006,7 @@
                 </a:solidFill>
                 <a:latin typeface="Arial"/>
               </a:rPr>
-              <a:t>14</a:t>
+              <a:t>15</a:t>
             </a:r>
           </a:p>
         </p:txBody>
@@ -7586,7 +8101,7 @@
                 </a:solidFill>
                 <a:latin typeface="Arial"/>
               </a:rPr>
-              <a:t>My design refuses ambiguity.</a:t>
+              <a:t>Machines write code now. The bottleneck is checking it.</a:t>
             </a:r>
           </a:p>
         </p:txBody>
@@ -7620,7 +8135,7 @@
                 </a:solidFill>
                 <a:latin typeface="Arial"/>
               </a:rPr>
-              <a:t>Prefix calls, explicit boundaries, and one canonical form keep generated code readable.</a:t>
+              <a:t>So I refuse ambiguity: one canonical form, explicit boundaries, and evidence required to compile.</a:t>
             </a:r>
           </a:p>
         </p:txBody>
@@ -9839,7 +10354,7 @@
                 </a:solidFill>
                 <a:latin typeface="Courier New"/>
               </a:rPr>
-              <a:t>size &gt; total - offset   ·   never   offset + size &gt; total</a:t>
+              <a:t>ten sections · a malformed module is refused, never guessed at</a:t>
             </a:r>
           </a:p>
         </p:txBody>
@@ -11195,7 +11710,7 @@
                 </a:solidFill>
                 <a:latin typeface="Arial"/>
               </a:rPr>
-              <a:t>I dispatch through a label table, and keep a portable fallback.</a:t>
+              <a:t>I treat every module as hostile input.</a:t>
             </a:r>
           </a:p>
         </p:txBody>
@@ -11229,7 +11744,7 @@
                 </a:solidFill>
                 <a:latin typeface="Arial"/>
               </a:rPr>
-              <a:t>One copy of 161 handlers, reached two ways. Adopted on measurement, not principle.</a:t>
+              <a:t>The verifier is one defence. The parsers underneath it are the other, and they are fuzzed.</a:t>
             </a:r>
           </a:p>
         </p:txBody>
@@ -11311,8 +11826,8 @@
         </p:nvSpPr>
         <p:spPr>
           <a:xfrm>
-            <a:off x="777240" y="1965960"/>
-            <a:ext cx="5212080" cy="2743200"/>
+            <a:off x="777240" y="1874519"/>
+            <a:ext cx="3337560" cy="585216"/>
           </a:xfrm>
           <a:prstGeom prst="roundRect">
             <a:avLst/>
@@ -11354,105 +11869,48 @@
         </p:nvSpPr>
         <p:spPr>
           <a:xfrm>
-            <a:off x="1051560" y="2240280"/>
-            <a:ext cx="4663440" cy="274320"/>
-          </a:xfrm>
-          <a:prstGeom prst="rect">
-            <a:avLst/>
-          </a:prstGeom>
-          <a:noFill/>
-        </p:spPr>
-        <p:txBody>
-          <a:bodyPr wrap="square" lIns="45720" rIns="45720" tIns="27432" bIns="27432" anchor="t">
-            <a:spAutoFit/>
-          </a:bodyPr>
-          <a:lstStyle/>
-          <a:p>
-            <a:r>
-              <a:rPr sz="1400" b="1">
+            <a:off x="1005840" y="2039112"/>
+            <a:ext cx="2926080" cy="274320"/>
+          </a:xfrm>
+          <a:prstGeom prst="rect">
+            <a:avLst/>
+          </a:prstGeom>
+          <a:noFill/>
+        </p:spPr>
+        <p:txBody>
+          <a:bodyPr wrap="square" lIns="45720" rIns="45720" tIns="27432" bIns="27432" anchor="t">
+            <a:spAutoFit/>
+          </a:bodyPr>
+          <a:lstStyle/>
+          <a:p>
+            <a:r>
+              <a:rPr sz="1600" b="1">
                 <a:solidFill>
                   <a:srgbClr val="76B900"/>
                 </a:solidFill>
-                <a:latin typeface="Arial"/>
-              </a:rPr>
-              <a:t>COMPUTED GOTO</a:t>
-            </a:r>
-          </a:p>
-        </p:txBody>
-      </p:sp>
-      <p:sp>
-        <p:nvSpPr>
-          <p:cNvPr id="9" name="TextBox 8"/>
-          <p:cNvSpPr txBox="1"/>
-          <p:nvPr/>
-        </p:nvSpPr>
-        <p:spPr>
-          <a:xfrm>
-            <a:off x="1051560" y="2697480"/>
-            <a:ext cx="4663440" cy="1645920"/>
-          </a:xfrm>
-          <a:prstGeom prst="rect">
-            <a:avLst/>
-          </a:prstGeom>
-          <a:noFill/>
-        </p:spPr>
-        <p:txBody>
-          <a:bodyPr wrap="square" lIns="45720" rIns="45720" tIns="27432" bIns="27432" anchor="t">
-            <a:spAutoFit/>
-          </a:bodyPr>
-          <a:lstStyle/>
-          <a:p>
-            <a:r>
-              <a:rPr sz="1600" b="0">
-                <a:solidFill>
-                  <a:srgbClr val="EEF1F3"/>
-                </a:solidFill>
-                <a:latin typeface="Arial"/>
-              </a:rPr>
-              <a:t>one indirect branch per opcode</a:t>
-            </a:r>
-          </a:p>
-          <a:p/>
-          <a:p>
-            <a:r>
-              <a:rPr sz="1600" b="0">
-                <a:solidFill>
-                  <a:srgbClr val="EEF1F3"/>
-                </a:solidFill>
-                <a:latin typeface="Arial"/>
-              </a:rPr>
-              <a:t>-4.2% on my Forth interpreter</a:t>
-            </a:r>
-          </a:p>
-          <a:p>
-            <a:r>
-              <a:rPr sz="1600" b="0">
-                <a:solidFill>
-                  <a:srgbClr val="EEF1F3"/>
-                </a:solidFill>
-                <a:latin typeface="Arial"/>
-              </a:rPr>
-              <a:t>against a 1.0-1.6% noise band</a:t>
-            </a:r>
-          </a:p>
-        </p:txBody>
-      </p:sp>
-      <p:sp>
-        <p:nvSpPr>
-          <p:cNvPr id="10" name="Rounded Rectangle 9"/>
+                <a:latin typeface="Courier New"/>
+              </a:rPr>
+              <a:t>decoder</a:t>
+            </a:r>
+          </a:p>
+        </p:txBody>
+      </p:sp>
+      <p:sp>
+        <p:nvSpPr>
+          <p:cNvPr id="9" name="Rounded Rectangle 8"/>
           <p:cNvSpPr/>
           <p:nvPr/>
         </p:nvSpPr>
         <p:spPr>
           <a:xfrm>
-            <a:off x="6400800" y="1965960"/>
-            <a:ext cx="5029200" cy="2743200"/>
+            <a:off x="4389120" y="1874519"/>
+            <a:ext cx="3337560" cy="585216"/>
           </a:xfrm>
           <a:prstGeom prst="roundRect">
             <a:avLst/>
           </a:prstGeom>
           <a:solidFill>
-            <a:srgbClr val="101317"/>
+            <a:srgbClr val="23282F"/>
           </a:solidFill>
           <a:ln>
             <a:noFill/>
@@ -11482,35 +11940,78 @@
       </p:sp>
       <p:sp>
         <p:nvSpPr>
-          <p:cNvPr id="11" name="TextBox 10"/>
-          <p:cNvSpPr txBox="1"/>
-          <p:nvPr/>
-        </p:nvSpPr>
-        <p:spPr>
-          <a:xfrm>
-            <a:off x="6675120" y="2240280"/>
-            <a:ext cx="4480560" cy="274320"/>
-          </a:xfrm>
-          <a:prstGeom prst="rect">
-            <a:avLst/>
-          </a:prstGeom>
-          <a:noFill/>
-        </p:spPr>
-        <p:txBody>
-          <a:bodyPr wrap="square" lIns="45720" rIns="45720" tIns="27432" bIns="27432" anchor="t">
-            <a:spAutoFit/>
-          </a:bodyPr>
-          <a:lstStyle/>
-          <a:p>
-            <a:r>
-              <a:rPr sz="1400" b="1">
-                <a:solidFill>
-                  <a:srgbClr val="72B7D6"/>
-                </a:solidFill>
-                <a:latin typeface="Arial"/>
-              </a:rPr>
-              <a:t>PORTABLE SWITCH</a:t>
-            </a:r>
+          <p:cNvPr id="10" name="TextBox 9"/>
+          <p:cNvSpPr txBox="1"/>
+          <p:nvPr/>
+        </p:nvSpPr>
+        <p:spPr>
+          <a:xfrm>
+            <a:off x="4617720" y="2039112"/>
+            <a:ext cx="2926080" cy="274320"/>
+          </a:xfrm>
+          <a:prstGeom prst="rect">
+            <a:avLst/>
+          </a:prstGeom>
+          <a:noFill/>
+        </p:spPr>
+        <p:txBody>
+          <a:bodyPr wrap="square" lIns="45720" rIns="45720" tIns="27432" bIns="27432" anchor="t">
+            <a:spAutoFit/>
+          </a:bodyPr>
+          <a:lstStyle/>
+          <a:p>
+            <a:r>
+              <a:rPr sz="1600" b="1">
+                <a:solidFill>
+                  <a:srgbClr val="76B900"/>
+                </a:solidFill>
+                <a:latin typeface="Courier New"/>
+              </a:rPr>
+              <a:t>loader</a:t>
+            </a:r>
+          </a:p>
+        </p:txBody>
+      </p:sp>
+      <p:sp>
+        <p:nvSpPr>
+          <p:cNvPr id="11" name="Rounded Rectangle 10"/>
+          <p:cNvSpPr/>
+          <p:nvPr/>
+        </p:nvSpPr>
+        <p:spPr>
+          <a:xfrm>
+            <a:off x="8001000" y="1874519"/>
+            <a:ext cx="3337560" cy="585216"/>
+          </a:xfrm>
+          <a:prstGeom prst="roundRect">
+            <a:avLst/>
+          </a:prstGeom>
+          <a:solidFill>
+            <a:srgbClr val="23282F"/>
+          </a:solidFill>
+          <a:ln>
+            <a:noFill/>
+          </a:ln>
+        </p:spPr>
+        <p:style>
+          <a:lnRef idx="1">
+            <a:schemeClr val="accent1"/>
+          </a:lnRef>
+          <a:fillRef idx="3">
+            <a:schemeClr val="accent1"/>
+          </a:fillRef>
+          <a:effectRef idx="2">
+            <a:schemeClr val="accent1"/>
+          </a:effectRef>
+          <a:fontRef idx="minor">
+            <a:schemeClr val="lt1"/>
+          </a:fontRef>
+        </p:style>
+        <p:txBody>
+          <a:bodyPr rtlCol="0" anchor="ctr"/>
+          <a:lstStyle/>
+          <a:p>
+            <a:pPr algn="ctr"/>
           </a:p>
         </p:txBody>
       </p:sp>
@@ -11522,64 +12023,417 @@
         </p:nvSpPr>
         <p:spPr>
           <a:xfrm>
-            <a:off x="6675120" y="2697480"/>
-            <a:ext cx="4480560" cy="1645920"/>
-          </a:xfrm>
-          <a:prstGeom prst="rect">
-            <a:avLst/>
-          </a:prstGeom>
-          <a:noFill/>
-        </p:spPr>
-        <p:txBody>
-          <a:bodyPr wrap="square" lIns="45720" rIns="45720" tIns="27432" bIns="27432" anchor="t">
-            <a:spAutoFit/>
-          </a:bodyPr>
-          <a:lstStyle/>
-          <a:p>
-            <a:r>
-              <a:rPr sz="1600" b="0">
+            <a:off x="8229600" y="2039112"/>
+            <a:ext cx="2926080" cy="274320"/>
+          </a:xfrm>
+          <a:prstGeom prst="rect">
+            <a:avLst/>
+          </a:prstGeom>
+          <a:noFill/>
+        </p:spPr>
+        <p:txBody>
+          <a:bodyPr wrap="square" lIns="45720" rIns="45720" tIns="27432" bIns="27432" anchor="t">
+            <a:spAutoFit/>
+          </a:bodyPr>
+          <a:lstStyle/>
+          <a:p>
+            <a:r>
+              <a:rPr sz="1600" b="1">
+                <a:solidFill>
+                  <a:srgbClr val="76B900"/>
+                </a:solidFill>
+                <a:latin typeface="Courier New"/>
+              </a:rPr>
+              <a:t>verifier</a:t>
+            </a:r>
+          </a:p>
+        </p:txBody>
+      </p:sp>
+      <p:sp>
+        <p:nvSpPr>
+          <p:cNvPr id="13" name="Rounded Rectangle 12"/>
+          <p:cNvSpPr/>
+          <p:nvPr/>
+        </p:nvSpPr>
+        <p:spPr>
+          <a:xfrm>
+            <a:off x="777240" y="2624327"/>
+            <a:ext cx="3337560" cy="585216"/>
+          </a:xfrm>
+          <a:prstGeom prst="roundRect">
+            <a:avLst/>
+          </a:prstGeom>
+          <a:solidFill>
+            <a:srgbClr val="23282F"/>
+          </a:solidFill>
+          <a:ln>
+            <a:noFill/>
+          </a:ln>
+        </p:spPr>
+        <p:style>
+          <a:lnRef idx="1">
+            <a:schemeClr val="accent1"/>
+          </a:lnRef>
+          <a:fillRef idx="3">
+            <a:schemeClr val="accent1"/>
+          </a:fillRef>
+          <a:effectRef idx="2">
+            <a:schemeClr val="accent1"/>
+          </a:effectRef>
+          <a:fontRef idx="minor">
+            <a:schemeClr val="lt1"/>
+          </a:fontRef>
+        </p:style>
+        <p:txBody>
+          <a:bodyPr rtlCol="0" anchor="ctr"/>
+          <a:lstStyle/>
+          <a:p>
+            <a:pPr algn="ctr"/>
+          </a:p>
+        </p:txBody>
+      </p:sp>
+      <p:sp>
+        <p:nvSpPr>
+          <p:cNvPr id="14" name="TextBox 13"/>
+          <p:cNvSpPr txBox="1"/>
+          <p:nvPr/>
+        </p:nvSpPr>
+        <p:spPr>
+          <a:xfrm>
+            <a:off x="1005840" y="2788920"/>
+            <a:ext cx="2926080" cy="274320"/>
+          </a:xfrm>
+          <a:prstGeom prst="rect">
+            <a:avLst/>
+          </a:prstGeom>
+          <a:noFill/>
+        </p:spPr>
+        <p:txBody>
+          <a:bodyPr wrap="square" lIns="45720" rIns="45720" tIns="27432" bIns="27432" anchor="t">
+            <a:spAutoFit/>
+          </a:bodyPr>
+          <a:lstStyle/>
+          <a:p>
+            <a:r>
+              <a:rPr sz="1600" b="1">
+                <a:solidFill>
+                  <a:srgbClr val="76B900"/>
+                </a:solidFill>
+                <a:latin typeface="Courier New"/>
+              </a:rPr>
+              <a:t>assembler</a:t>
+            </a:r>
+          </a:p>
+        </p:txBody>
+      </p:sp>
+      <p:sp>
+        <p:nvSpPr>
+          <p:cNvPr id="15" name="Rounded Rectangle 14"/>
+          <p:cNvSpPr/>
+          <p:nvPr/>
+        </p:nvSpPr>
+        <p:spPr>
+          <a:xfrm>
+            <a:off x="4389120" y="2624327"/>
+            <a:ext cx="3337560" cy="585216"/>
+          </a:xfrm>
+          <a:prstGeom prst="roundRect">
+            <a:avLst/>
+          </a:prstGeom>
+          <a:solidFill>
+            <a:srgbClr val="23282F"/>
+          </a:solidFill>
+          <a:ln>
+            <a:noFill/>
+          </a:ln>
+        </p:spPr>
+        <p:style>
+          <a:lnRef idx="1">
+            <a:schemeClr val="accent1"/>
+          </a:lnRef>
+          <a:fillRef idx="3">
+            <a:schemeClr val="accent1"/>
+          </a:fillRef>
+          <a:effectRef idx="2">
+            <a:schemeClr val="accent1"/>
+          </a:effectRef>
+          <a:fontRef idx="minor">
+            <a:schemeClr val="lt1"/>
+          </a:fontRef>
+        </p:style>
+        <p:txBody>
+          <a:bodyPr rtlCol="0" anchor="ctr"/>
+          <a:lstStyle/>
+          <a:p>
+            <a:pPr algn="ctr"/>
+          </a:p>
+        </p:txBody>
+      </p:sp>
+      <p:sp>
+        <p:nvSpPr>
+          <p:cNvPr id="16" name="TextBox 15"/>
+          <p:cNvSpPr txBox="1"/>
+          <p:nvPr/>
+        </p:nvSpPr>
+        <p:spPr>
+          <a:xfrm>
+            <a:off x="4617720" y="2788920"/>
+            <a:ext cx="2926080" cy="274320"/>
+          </a:xfrm>
+          <a:prstGeom prst="rect">
+            <a:avLst/>
+          </a:prstGeom>
+          <a:noFill/>
+        </p:spPr>
+        <p:txBody>
+          <a:bodyPr wrap="square" lIns="45720" rIns="45720" tIns="27432" bIns="27432" anchor="t">
+            <a:spAutoFit/>
+          </a:bodyPr>
+          <a:lstStyle/>
+          <a:p>
+            <a:r>
+              <a:rPr sz="1600" b="1">
+                <a:solidFill>
+                  <a:srgbClr val="76B900"/>
+                </a:solidFill>
+                <a:latin typeface="Courier New"/>
+              </a:rPr>
+              <a:t>disassembler</a:t>
+            </a:r>
+          </a:p>
+        </p:txBody>
+      </p:sp>
+      <p:sp>
+        <p:nvSpPr>
+          <p:cNvPr id="17" name="Rounded Rectangle 16"/>
+          <p:cNvSpPr/>
+          <p:nvPr/>
+        </p:nvSpPr>
+        <p:spPr>
+          <a:xfrm>
+            <a:off x="8001000" y="2624327"/>
+            <a:ext cx="3337560" cy="585216"/>
+          </a:xfrm>
+          <a:prstGeom prst="roundRect">
+            <a:avLst/>
+          </a:prstGeom>
+          <a:solidFill>
+            <a:srgbClr val="23282F"/>
+          </a:solidFill>
+          <a:ln>
+            <a:noFill/>
+          </a:ln>
+        </p:spPr>
+        <p:style>
+          <a:lnRef idx="1">
+            <a:schemeClr val="accent1"/>
+          </a:lnRef>
+          <a:fillRef idx="3">
+            <a:schemeClr val="accent1"/>
+          </a:fillRef>
+          <a:effectRef idx="2">
+            <a:schemeClr val="accent1"/>
+          </a:effectRef>
+          <a:fontRef idx="minor">
+            <a:schemeClr val="lt1"/>
+          </a:fontRef>
+        </p:style>
+        <p:txBody>
+          <a:bodyPr rtlCol="0" anchor="ctr"/>
+          <a:lstStyle/>
+          <a:p>
+            <a:pPr algn="ctr"/>
+          </a:p>
+        </p:txBody>
+      </p:sp>
+      <p:sp>
+        <p:nvSpPr>
+          <p:cNvPr id="18" name="TextBox 17"/>
+          <p:cNvSpPr txBox="1"/>
+          <p:nvPr/>
+        </p:nvSpPr>
+        <p:spPr>
+          <a:xfrm>
+            <a:off x="8229600" y="2788920"/>
+            <a:ext cx="2926080" cy="274320"/>
+          </a:xfrm>
+          <a:prstGeom prst="rect">
+            <a:avLst/>
+          </a:prstGeom>
+          <a:noFill/>
+        </p:spPr>
+        <p:txBody>
+          <a:bodyPr wrap="square" lIns="45720" rIns="45720" tIns="27432" bIns="27432" anchor="t">
+            <a:spAutoFit/>
+          </a:bodyPr>
+          <a:lstStyle/>
+          <a:p>
+            <a:r>
+              <a:rPr sz="1600" b="1">
+                <a:solidFill>
+                  <a:srgbClr val="76B900"/>
+                </a:solidFill>
+                <a:latin typeface="Courier New"/>
+              </a:rPr>
+              <a:t>co-process</a:t>
+            </a:r>
+          </a:p>
+        </p:txBody>
+      </p:sp>
+      <p:sp>
+        <p:nvSpPr>
+          <p:cNvPr id="19" name="Rounded Rectangle 18"/>
+          <p:cNvSpPr/>
+          <p:nvPr/>
+        </p:nvSpPr>
+        <p:spPr>
+          <a:xfrm>
+            <a:off x="777240" y="3520440"/>
+            <a:ext cx="10652760" cy="1828800"/>
+          </a:xfrm>
+          <a:prstGeom prst="roundRect">
+            <a:avLst/>
+          </a:prstGeom>
+          <a:solidFill>
+            <a:srgbClr val="23282F"/>
+          </a:solidFill>
+          <a:ln>
+            <a:noFill/>
+          </a:ln>
+        </p:spPr>
+        <p:style>
+          <a:lnRef idx="1">
+            <a:schemeClr val="accent1"/>
+          </a:lnRef>
+          <a:fillRef idx="3">
+            <a:schemeClr val="accent1"/>
+          </a:fillRef>
+          <a:effectRef idx="2">
+            <a:schemeClr val="accent1"/>
+          </a:effectRef>
+          <a:fontRef idx="minor">
+            <a:schemeClr val="lt1"/>
+          </a:fontRef>
+        </p:style>
+        <p:txBody>
+          <a:bodyPr rtlCol="0" anchor="ctr"/>
+          <a:lstStyle/>
+          <a:p>
+            <a:pPr algn="ctr"/>
+          </a:p>
+        </p:txBody>
+      </p:sp>
+      <p:sp>
+        <p:nvSpPr>
+          <p:cNvPr id="20" name="TextBox 19"/>
+          <p:cNvSpPr txBox="1"/>
+          <p:nvPr/>
+        </p:nvSpPr>
+        <p:spPr>
+          <a:xfrm>
+            <a:off x="1051560" y="3794760"/>
+            <a:ext cx="4572000" cy="320040"/>
+          </a:xfrm>
+          <a:prstGeom prst="rect">
+            <a:avLst/>
+          </a:prstGeom>
+          <a:noFill/>
+        </p:spPr>
+        <p:txBody>
+          <a:bodyPr wrap="square" lIns="45720" rIns="45720" tIns="27432" bIns="27432" anchor="t">
+            <a:spAutoFit/>
+          </a:bodyPr>
+          <a:lstStyle/>
+          <a:p>
+            <a:r>
+              <a:rPr sz="2000" b="1">
+                <a:solidFill>
+                  <a:srgbClr val="FF6B35"/>
+                </a:solidFill>
+                <a:latin typeface="Courier New"/>
+              </a:rPr>
+              <a:t>size &gt; total - offset</a:t>
+            </a:r>
+          </a:p>
+        </p:txBody>
+      </p:sp>
+      <p:sp>
+        <p:nvSpPr>
+          <p:cNvPr id="21" name="TextBox 20"/>
+          <p:cNvSpPr txBox="1"/>
+          <p:nvPr/>
+        </p:nvSpPr>
+        <p:spPr>
+          <a:xfrm>
+            <a:off x="6035040" y="3840480"/>
+            <a:ext cx="5120640" cy="274320"/>
+          </a:xfrm>
+          <a:prstGeom prst="rect">
+            <a:avLst/>
+          </a:prstGeom>
+          <a:noFill/>
+        </p:spPr>
+        <p:txBody>
+          <a:bodyPr wrap="square" lIns="45720" rIns="45720" tIns="27432" bIns="27432" anchor="t">
+            <a:spAutoFit/>
+          </a:bodyPr>
+          <a:lstStyle/>
+          <a:p>
+            <a:r>
+              <a:rPr sz="1500" b="1">
+                <a:solidFill>
+                  <a:srgbClr val="65707C"/>
+                </a:solidFill>
+                <a:latin typeface="Courier New"/>
+              </a:rPr>
+              <a:t>never  offset + size &gt; total</a:t>
+            </a:r>
+          </a:p>
+        </p:txBody>
+      </p:sp>
+      <p:sp>
+        <p:nvSpPr>
+          <p:cNvPr id="22" name="TextBox 21"/>
+          <p:cNvSpPr txBox="1"/>
+          <p:nvPr/>
+        </p:nvSpPr>
+        <p:spPr>
+          <a:xfrm>
+            <a:off x="1051560" y="4343400"/>
+            <a:ext cx="10058400" cy="868680"/>
+          </a:xfrm>
+          <a:prstGeom prst="rect">
+            <a:avLst/>
+          </a:prstGeom>
+          <a:noFill/>
+        </p:spPr>
+        <p:txBody>
+          <a:bodyPr wrap="square" lIns="45720" rIns="45720" tIns="27432" bIns="27432" anchor="t">
+            <a:spAutoFit/>
+          </a:bodyPr>
+          <a:lstStyle/>
+          <a:p>
+            <a:r>
+              <a:rPr sz="1500" b="0">
                 <a:solidFill>
                   <a:srgbClr val="EEF1F3"/>
                 </a:solidFill>
                 <a:latin typeface="Arial"/>
               </a:rPr>
-              <a:t>any compiler without</a:t>
-            </a:r>
-          </a:p>
-          <a:p>
-            <a:r>
-              <a:rPr sz="1600" b="0">
-                <a:solidFill>
-                  <a:srgbClr val="EEF1F3"/>
-                </a:solidFill>
-                <a:latin typeface="Arial"/>
-              </a:rPr>
-              <a:t>labels as values</a:t>
-            </a:r>
-          </a:p>
-          <a:p/>
-          <a:p>
-            <a:r>
-              <a:rPr sz="1600" b="0">
-                <a:solidFill>
-                  <a:srgbClr val="EEF1F3"/>
-                </a:solidFill>
-                <a:latin typeface="Arial"/>
-              </a:rPr>
-              <a:t>-DNANO_NO_COMPUTED_GOTO</a:t>
-            </a:r>
-          </a:p>
-        </p:txBody>
-      </p:sp>
-      <p:sp>
-        <p:nvSpPr>
-          <p:cNvPr id="13" name="TextBox 12"/>
-          <p:cNvSpPr txBox="1"/>
-          <p:nvPr/>
-        </p:nvSpPr>
-        <p:spPr>
-          <a:xfrm>
-            <a:off x="1828800" y="5074920"/>
+              <a:t>The second form wraps, so an offset near the top of the range passes the check that exists to stop it. Every range in the v2 decoder is written as the first form. Argument limits agree across imports, traps, direct FFI and the co-process, so no path is the lenient one.</a:t>
+            </a:r>
+          </a:p>
+        </p:txBody>
+      </p:sp>
+      <p:sp>
+        <p:nvSpPr>
+          <p:cNvPr id="23" name="TextBox 22"/>
+          <p:cNvSpPr txBox="1"/>
+          <p:nvPr/>
+        </p:nvSpPr>
+        <p:spPr>
+          <a:xfrm>
+            <a:off x="1828800" y="5623560"/>
             <a:ext cx="8503920" cy="365760"/>
           </a:xfrm>
           <a:prstGeom prst="rect">
@@ -11601,7 +12455,7 @@
                 </a:solidFill>
                 <a:latin typeface="Courier New"/>
               </a:rPr>
-              <a:t>152 programs, both builds, identical output</a:t>
+              <a:t>784 lines of fuzz and malformed-input tests, added in 4.0, across all six</a:t>
             </a:r>
           </a:p>
         </p:txBody>
@@ -11639,7 +12493,7 @@
             <a:avLst/>
           </a:prstGeom>
           <a:solidFill>
-            <a:srgbClr val="101317"/>
+            <a:srgbClr val="EEF1F3"/>
           </a:solidFill>
           <a:ln>
             <a:noFill/>
@@ -11692,11 +12546,11 @@
             <a:r>
               <a:rPr sz="2800" b="1">
                 <a:solidFill>
-                  <a:srgbClr val="EEF1F3"/>
-                </a:solidFill>
-                <a:latin typeface="Arial"/>
-              </a:rPr>
-              <a:t>Every function carries a shadow test.</a:t>
+                  <a:srgbClr val="101317"/>
+                </a:solidFill>
+                <a:latin typeface="Arial"/>
+              </a:rPr>
+              <a:t>I dispatch through a label table, and keep a portable fallback.</a:t>
             </a:r>
           </a:p>
         </p:txBody>
@@ -11726,11 +12580,11 @@
             <a:r>
               <a:rPr sz="1300" b="0">
                 <a:solidFill>
-                  <a:srgbClr val="72B7D6"/>
-                </a:solidFill>
-                <a:latin typeface="Arial"/>
-              </a:rPr>
-              <a:t>The test is an executable statement about behavior, not a coverage ornament.</a:t>
+                  <a:srgbClr val="65707C"/>
+                </a:solidFill>
+                <a:latin typeface="Arial"/>
+              </a:rPr>
+              <a:t>One copy of 161 handlers, reached two ways. Adopted on measurement, not principle.</a:t>
             </a:r>
           </a:p>
         </p:txBody>
@@ -11812,8 +12666,8 @@
         </p:nvSpPr>
         <p:spPr>
           <a:xfrm>
-            <a:off x="731520" y="1828800"/>
-            <a:ext cx="5303520" cy="3474720"/>
+            <a:off x="777240" y="1965960"/>
+            <a:ext cx="5212080" cy="2743200"/>
           </a:xfrm>
           <a:prstGeom prst="roundRect">
             <a:avLst/>
@@ -11855,8 +12709,42 @@
         </p:nvSpPr>
         <p:spPr>
           <a:xfrm>
-            <a:off x="1005840" y="2148840"/>
-            <a:ext cx="4754880" cy="2651760"/>
+            <a:off x="1051560" y="2240280"/>
+            <a:ext cx="4663440" cy="274320"/>
+          </a:xfrm>
+          <a:prstGeom prst="rect">
+            <a:avLst/>
+          </a:prstGeom>
+          <a:noFill/>
+        </p:spPr>
+        <p:txBody>
+          <a:bodyPr wrap="square" lIns="45720" rIns="45720" tIns="27432" bIns="27432" anchor="t">
+            <a:spAutoFit/>
+          </a:bodyPr>
+          <a:lstStyle/>
+          <a:p>
+            <a:r>
+              <a:rPr sz="1400" b="1">
+                <a:solidFill>
+                  <a:srgbClr val="76B900"/>
+                </a:solidFill>
+                <a:latin typeface="Arial"/>
+              </a:rPr>
+              <a:t>COMPUTED GOTO</a:t>
+            </a:r>
+          </a:p>
+        </p:txBody>
+      </p:sp>
+      <p:sp>
+        <p:nvSpPr>
+          <p:cNvPr id="9" name="TextBox 8"/>
+          <p:cNvSpPr txBox="1"/>
+          <p:nvPr/>
+        </p:nvSpPr>
+        <p:spPr>
+          <a:xfrm>
+            <a:off x="1051560" y="2697480"/>
+            <a:ext cx="4663440" cy="1645920"/>
           </a:xfrm>
           <a:prstGeom prst="rect">
             <a:avLst/>
@@ -11874,132 +12762,201 @@
                 <a:solidFill>
                   <a:srgbClr val="EEF1F3"/>
                 </a:solidFill>
+                <a:latin typeface="Arial"/>
+              </a:rPr>
+              <a:t>one indirect branch per opcode</a:t>
+            </a:r>
+          </a:p>
+          <a:p/>
+          <a:p>
+            <a:r>
+              <a:rPr sz="1600" b="0">
+                <a:solidFill>
+                  <a:srgbClr val="EEF1F3"/>
+                </a:solidFill>
+                <a:latin typeface="Arial"/>
+              </a:rPr>
+              <a:t>-4.2% on my Forth interpreter</a:t>
+            </a:r>
+          </a:p>
+          <a:p>
+            <a:r>
+              <a:rPr sz="1600" b="0">
+                <a:solidFill>
+                  <a:srgbClr val="EEF1F3"/>
+                </a:solidFill>
+                <a:latin typeface="Arial"/>
+              </a:rPr>
+              <a:t>against a 1.0-1.6% noise band</a:t>
+            </a:r>
+          </a:p>
+        </p:txBody>
+      </p:sp>
+      <p:sp>
+        <p:nvSpPr>
+          <p:cNvPr id="10" name="Rounded Rectangle 9"/>
+          <p:cNvSpPr/>
+          <p:nvPr/>
+        </p:nvSpPr>
+        <p:spPr>
+          <a:xfrm>
+            <a:off x="6400800" y="1965960"/>
+            <a:ext cx="5029200" cy="2743200"/>
+          </a:xfrm>
+          <a:prstGeom prst="roundRect">
+            <a:avLst/>
+          </a:prstGeom>
+          <a:solidFill>
+            <a:srgbClr val="101317"/>
+          </a:solidFill>
+          <a:ln>
+            <a:noFill/>
+          </a:ln>
+        </p:spPr>
+        <p:style>
+          <a:lnRef idx="1">
+            <a:schemeClr val="accent1"/>
+          </a:lnRef>
+          <a:fillRef idx="3">
+            <a:schemeClr val="accent1"/>
+          </a:fillRef>
+          <a:effectRef idx="2">
+            <a:schemeClr val="accent1"/>
+          </a:effectRef>
+          <a:fontRef idx="minor">
+            <a:schemeClr val="lt1"/>
+          </a:fontRef>
+        </p:style>
+        <p:txBody>
+          <a:bodyPr rtlCol="0" anchor="ctr"/>
+          <a:lstStyle/>
+          <a:p>
+            <a:pPr algn="ctr"/>
+          </a:p>
+        </p:txBody>
+      </p:sp>
+      <p:sp>
+        <p:nvSpPr>
+          <p:cNvPr id="11" name="TextBox 10"/>
+          <p:cNvSpPr txBox="1"/>
+          <p:nvPr/>
+        </p:nvSpPr>
+        <p:spPr>
+          <a:xfrm>
+            <a:off x="6675120" y="2240280"/>
+            <a:ext cx="4480560" cy="274320"/>
+          </a:xfrm>
+          <a:prstGeom prst="rect">
+            <a:avLst/>
+          </a:prstGeom>
+          <a:noFill/>
+        </p:spPr>
+        <p:txBody>
+          <a:bodyPr wrap="square" lIns="45720" rIns="45720" tIns="27432" bIns="27432" anchor="t">
+            <a:spAutoFit/>
+          </a:bodyPr>
+          <a:lstStyle/>
+          <a:p>
+            <a:r>
+              <a:rPr sz="1400" b="1">
+                <a:solidFill>
+                  <a:srgbClr val="72B7D6"/>
+                </a:solidFill>
+                <a:latin typeface="Arial"/>
+              </a:rPr>
+              <a:t>PORTABLE SWITCH</a:t>
+            </a:r>
+          </a:p>
+        </p:txBody>
+      </p:sp>
+      <p:sp>
+        <p:nvSpPr>
+          <p:cNvPr id="12" name="TextBox 11"/>
+          <p:cNvSpPr txBox="1"/>
+          <p:nvPr/>
+        </p:nvSpPr>
+        <p:spPr>
+          <a:xfrm>
+            <a:off x="6675120" y="2697480"/>
+            <a:ext cx="4480560" cy="1645920"/>
+          </a:xfrm>
+          <a:prstGeom prst="rect">
+            <a:avLst/>
+          </a:prstGeom>
+          <a:noFill/>
+        </p:spPr>
+        <p:txBody>
+          <a:bodyPr wrap="square" lIns="45720" rIns="45720" tIns="27432" bIns="27432" anchor="t">
+            <a:spAutoFit/>
+          </a:bodyPr>
+          <a:lstStyle/>
+          <a:p>
+            <a:r>
+              <a:rPr sz="1600" b="0">
+                <a:solidFill>
+                  <a:srgbClr val="EEF1F3"/>
+                </a:solidFill>
+                <a:latin typeface="Arial"/>
+              </a:rPr>
+              <a:t>any compiler without</a:t>
+            </a:r>
+          </a:p>
+          <a:p>
+            <a:r>
+              <a:rPr sz="1600" b="0">
+                <a:solidFill>
+                  <a:srgbClr val="EEF1F3"/>
+                </a:solidFill>
+                <a:latin typeface="Arial"/>
+              </a:rPr>
+              <a:t>labels as values</a:t>
+            </a:r>
+          </a:p>
+          <a:p/>
+          <a:p>
+            <a:r>
+              <a:rPr sz="1600" b="0">
+                <a:solidFill>
+                  <a:srgbClr val="EEF1F3"/>
+                </a:solidFill>
+                <a:latin typeface="Arial"/>
+              </a:rPr>
+              <a:t>-DNANO_NO_COMPUTED_GOTO</a:t>
+            </a:r>
+          </a:p>
+        </p:txBody>
+      </p:sp>
+      <p:sp>
+        <p:nvSpPr>
+          <p:cNvPr id="13" name="TextBox 12"/>
+          <p:cNvSpPr txBox="1"/>
+          <p:nvPr/>
+        </p:nvSpPr>
+        <p:spPr>
+          <a:xfrm>
+            <a:off x="1828800" y="5074920"/>
+            <a:ext cx="8503920" cy="365760"/>
+          </a:xfrm>
+          <a:prstGeom prst="rect">
+            <a:avLst/>
+          </a:prstGeom>
+          <a:noFill/>
+        </p:spPr>
+        <p:txBody>
+          <a:bodyPr wrap="square" lIns="45720" rIns="45720" tIns="27432" bIns="27432" anchor="t">
+            <a:spAutoFit/>
+          </a:bodyPr>
+          <a:lstStyle/>
+          <a:p>
+            <a:pPr algn="ctr"/>
+            <a:r>
+              <a:rPr sz="1700" b="1">
+                <a:solidFill>
+                  <a:srgbClr val="FF6B35"/>
+                </a:solidFill>
                 <a:latin typeface="Courier New"/>
               </a:rPr>
-              <a:t>fn gcd(a: int, b: int) -&gt; int {</a:t>
-            </a:r>
-          </a:p>
-          <a:p>
-            <a:r>
-              <a:rPr sz="1600" b="0">
-                <a:solidFill>
-                  <a:srgbClr val="EEF1F3"/>
-                </a:solidFill>
-                <a:latin typeface="Courier New"/>
-              </a:rPr>
-              <a:t>    ...</a:t>
-            </a:r>
-          </a:p>
-          <a:p>
-            <a:r>
-              <a:rPr sz="1600" b="0">
-                <a:solidFill>
-                  <a:srgbClr val="EEF1F3"/>
-                </a:solidFill>
-                <a:latin typeface="Courier New"/>
-              </a:rPr>
-              <a:t>}</a:t>
-            </a:r>
-          </a:p>
-          <a:p/>
-          <a:p>
-            <a:r>
-              <a:rPr sz="1600" b="0">
-                <a:solidFill>
-                  <a:srgbClr val="EEF1F3"/>
-                </a:solidFill>
-                <a:latin typeface="Courier New"/>
-              </a:rPr>
-              <a:t>shadow gcd {</a:t>
-            </a:r>
-          </a:p>
-          <a:p>
-            <a:r>
-              <a:rPr sz="1600" b="0">
-                <a:solidFill>
-                  <a:srgbClr val="EEF1F3"/>
-                </a:solidFill>
-                <a:latin typeface="Courier New"/>
-              </a:rPr>
-              <a:t>    assert (== (gcd 48 18) 6)</a:t>
-            </a:r>
-          </a:p>
-          <a:p>
-            <a:r>
-              <a:rPr sz="1600" b="0">
-                <a:solidFill>
-                  <a:srgbClr val="EEF1F3"/>
-                </a:solidFill>
-                <a:latin typeface="Courier New"/>
-              </a:rPr>
-              <a:t>}</a:t>
-            </a:r>
-          </a:p>
-        </p:txBody>
-      </p:sp>
-      <p:sp>
-        <p:nvSpPr>
-          <p:cNvPr id="9" name="TextBox 8"/>
-          <p:cNvSpPr txBox="1"/>
-          <p:nvPr/>
-        </p:nvSpPr>
-        <p:spPr>
-          <a:xfrm>
-            <a:off x="6537960" y="2148840"/>
-            <a:ext cx="4297680" cy="2011680"/>
-          </a:xfrm>
-          <a:prstGeom prst="rect">
-            <a:avLst/>
-          </a:prstGeom>
-          <a:noFill/>
-        </p:spPr>
-        <p:txBody>
-          <a:bodyPr wrap="square" lIns="45720" rIns="45720" tIns="27432" bIns="27432" anchor="t">
-            <a:spAutoFit/>
-          </a:bodyPr>
-          <a:lstStyle/>
-          <a:p>
-            <a:r>
-              <a:rPr sz="2200" b="1">
-                <a:solidFill>
-                  <a:srgbClr val="76B900"/>
-                </a:solidFill>
-                <a:latin typeface="Arial"/>
-              </a:rPr>
-              <a:t>2,632 NanoISA tests</a:t>
-            </a:r>
-          </a:p>
-          <a:p>
-            <a:r>
-              <a:rPr sz="2200" b="1">
-                <a:solidFill>
-                  <a:srgbClr val="76B900"/>
-                </a:solidFill>
-                <a:latin typeface="Arial"/>
-              </a:rPr>
-              <a:t>621 NanoVM tests</a:t>
-            </a:r>
-          </a:p>
-          <a:p>
-            <a:r>
-              <a:rPr sz="2200" b="1">
-                <a:solidFill>
-                  <a:srgbClr val="76B900"/>
-                </a:solidFill>
-                <a:latin typeface="Arial"/>
-              </a:rPr>
-              <a:t>93 verifier tests</a:t>
-            </a:r>
-          </a:p>
-          <a:p>
-            <a:r>
-              <a:rPr sz="2200" b="1">
-                <a:solidFill>
-                  <a:srgbClr val="76B900"/>
-                </a:solidFill>
-                <a:latin typeface="Arial"/>
-              </a:rPr>
-              <a:t>63 NanoVirt tests</a:t>
+              <a:t>152 programs, both builds, identical output</a:t>
             </a:r>
           </a:p>
         </p:txBody>

--- a/docs/presentation/nanolang-developer-overview.pptx
+++ b/docs/presentation/nanolang-developer-overview.pptx
@@ -516,7 +516,7 @@
           <a:lstStyle/>
           <a:p>
             <a:r>
-              <a:t>Authority: docs/PERSONA.md, README.md, docs/RELEASE_4.0.md.</a:t>
+              <a:t>Authority: docs/PERSONA.md, README.md, docs/RELEASE_4.4.md.</a:t>
             </a:r>
           </a:p>
           <a:p>
@@ -901,17 +901,17 @@
           <a:lstStyle/>
           <a:p>
             <a:r>
-              <a:t>Authority: docs/RELEASE_4.0.md, docs/ROADMAP.md, the open issue list, and git log v3.5.0..v4.0.0.</a:t>
-            </a:r>
-          </a:p>
-          <a:p>
-            <a:r>
-              <a:t>For a reader arriving from 3.5, the one-line delta is that my bytecode used to be well-formed and is now verified.</a:t>
-            </a:r>
-          </a:p>
-          <a:p>
-            <a:r>
-              <a:t>Phase 12 is 78 of 78. The right column is scope or filed defect, not vagueness.</a:t>
+              <a:t>Authority: docs/RELEASE_4.4.md, docs/ROADMAP.md, docs/FORTH_2012.md, docs/NSI_FABRIC.md, docs/NANO_EMACS.md.</a:t>
+            </a:r>
+          </a:p>
+          <a:p>
+            <a:r>
+              <a:t>Catalogs and machine-draft guides exist. JSON/TOON stay English.</a:t>
+            </a:r>
+          </a:p>
+          <a:p>
+            <a:r>
+              <a:t>The live editor uses bin/nano_emacs_worker, not dlopen.</a:t>
             </a:r>
           </a:p>
         </p:txBody>
@@ -4756,7 +4756,7 @@
                 </a:solidFill>
                 <a:latin typeface="Arial"/>
               </a:rPr>
-              <a:t>NANOLANG 4.0</a:t>
+              <a:t>NANOLANG 4.4</a:t>
             </a:r>
           </a:p>
         </p:txBody>
@@ -4857,7 +4857,7 @@
                 </a:solidFill>
                 <a:latin typeface="Arial"/>
               </a:rPr>
-              <a:t>A developer's view of my syntax, compiler, NanoISA, NanoVM, and what my verifier proves.</a:t>
+              <a:t>A developer's view of my syntax, compiler, NanoISA, NanoVM, NSI, and what my verifier proves.</a:t>
             </a:r>
           </a:p>
         </p:txBody>
@@ -4891,7 +4891,7 @@
                 </a:solidFill>
                 <a:latin typeface="Arial"/>
               </a:rPr>
-              <a:t>NanoISA v2 · NanoVM v2 · bytecode that is verified, not merely well-formed</a:t>
+              <a:t>Verified bytecode · Forth evidence · NSI fabric · isolated editor walker</a:t>
             </a:r>
           </a:p>
         </p:txBody>
@@ -7315,7 +7315,7 @@
                 </a:solidFill>
                 <a:latin typeface="Arial"/>
               </a:rPr>
-              <a:t>4.0 shipped. Here is what I have not done.</a:t>
+              <a:t>4.4 shipped. Here is what I have not done.</a:t>
             </a:r>
           </a:p>
         </p:txBody>
@@ -7349,7 +7349,7 @@
                 </a:solidFill>
                 <a:latin typeface="Arial"/>
               </a:rPr>
-              <a:t>107 commits since 3.5, and more new test code than new source. A known defect is not an unknown one.</a:t>
+              <a:t>One tag from v4.0.0. Product phases 4.1–4.4, not four Git tags.</a:t>
             </a:r>
           </a:p>
         </p:txBody>
@@ -7495,7 +7495,7 @@
                 </a:solidFill>
                 <a:latin typeface="Arial"/>
               </a:rPr>
-              <a:t>4.0 SHIPPED</a:t>
+              <a:t>4.4 SHIPPED</a:t>
             </a:r>
           </a:p>
         </p:txBody>
@@ -7529,7 +7529,7 @@
                 </a:solidFill>
                 <a:latin typeface="Arial"/>
               </a:rPr>
-              <a:t>v2 module format</a:t>
+              <a:t>verified NanoISA v2 (4.0)</a:t>
             </a:r>
           </a:p>
           <a:p>
@@ -7540,7 +7540,7 @@
                 </a:solidFill>
                 <a:latin typeface="Arial"/>
               </a:rPr>
-              <a:t>stack and type verification</a:t>
+              <a:t>Forth Core evidence</a:t>
             </a:r>
           </a:p>
           <a:p>
@@ -7551,7 +7551,7 @@
                 </a:solidFill>
                 <a:latin typeface="Arial"/>
               </a:rPr>
-              <a:t>return, depth, ownership</a:t>
+              <a:t>NSI v0 + POSIX fabric</a:t>
             </a:r>
           </a:p>
           <a:p>
@@ -7562,7 +7562,7 @@
                 </a:solidFill>
                 <a:latin typeface="Arial"/>
               </a:rPr>
-              <a:t>fuzzed parsing surfaces</a:t>
+              <a:t>unforgeable capabilities</a:t>
             </a:r>
           </a:p>
           <a:p>
@@ -7573,7 +7573,7 @@
                 </a:solidFill>
                 <a:latin typeface="Arial"/>
               </a:rPr>
-              <a:t>cycle collection</a:t>
+              <a:t>isolated editor walker</a:t>
             </a:r>
           </a:p>
           <a:p>
@@ -7584,7 +7584,7 @@
                 </a:solidFill>
                 <a:latin typeface="Arial"/>
               </a:rPr>
-              <a:t>honest measurement</a:t>
+              <a:t>six-language catalogs</a:t>
             </a:r>
           </a:p>
         </p:txBody>
@@ -7695,7 +7695,7 @@
                 </a:solidFill>
                 <a:latin typeface="Arial"/>
               </a:rPr>
-              <a:t>header dependencies (#211)</a:t>
+              <a:t>Standard System / INCLUDED</a:t>
             </a:r>
           </a:p>
           <a:p>
@@ -7706,7 +7706,7 @@
                 </a:solidFill>
                 <a:latin typeface="Arial"/>
               </a:rPr>
-              <a:t>module signing → 5.0</a:t>
+              <a:t>internationalized compiler</a:t>
             </a:r>
           </a:p>
           <a:p>
@@ -7717,7 +7717,7 @@
                 </a:solidFill>
                 <a:latin typeface="Arial"/>
               </a:rPr>
-              <a:t>LLVM and Wasm as</a:t>
+              <a:t>GNU Emacs / a kernel</a:t>
             </a:r>
           </a:p>
           <a:p>
@@ -7728,7 +7728,7 @@
                 </a:solidFill>
                 <a:latin typeface="Arial"/>
               </a:rPr>
-              <a:t>  NanoISA translators</a:t>
+              <a:t>CUDA or CPython wrap</a:t>
             </a:r>
           </a:p>
           <a:p>
@@ -7739,7 +7739,18 @@
                 </a:solidFill>
                 <a:latin typeface="Arial"/>
               </a:rPr>
-              <a:t>Forth 2012 → 4.1</a:t>
+              <a:t>header deps (#211)</a:t>
+            </a:r>
+          </a:p>
+          <a:p>
+            <a:r>
+              <a:rPr sz="1800" b="1">
+                <a:solidFill>
+                  <a:srgbClr val="EEF1F3"/>
+                </a:solidFill>
+                <a:latin typeface="Arial"/>
+              </a:rPr>
+              <a:t>5.0 One IR</a:t>
             </a:r>
           </a:p>
         </p:txBody>
@@ -7937,7 +7948,7 @@
                 </a:solidFill>
                 <a:latin typeface="Courier New"/>
               </a:rPr>
-              <a:t>docs/RELEASE_4.0.md · docs/ROADMAP.md · docs/NANOISA_MEASUREMENTS.md</a:t>
+              <a:t>docs/RELEASE_4.4.md · docs/ROADMAP.md · docs/NSI_FABRIC.md</a:t>
             </a:r>
           </a:p>
         </p:txBody>

--- a/docs/presentation/nanolang-developer-overview.pptx
+++ b/docs/presentation/nanolang-developer-overview.pptx
@@ -20,6 +20,7 @@
     <p:sldId id="268" r:id="rId20"/>
     <p:sldId id="269" r:id="rId21"/>
     <p:sldId id="270" r:id="rId22"/>
+    <p:sldId id="271" r:id="rId23"/>
   </p:sldIdLst>
   <p:sldSz cx="12191695" cy="6858000" type="screen4x3"/>
   <p:notesSz cx="6858000" cy="9144000"/>
@@ -516,7 +517,12 @@
           <a:lstStyle/>
           <a:p>
             <a:r>
-              <a:t>Authority: docs/PERSONA.md, README.md, docs/RELEASE_4.4.md.</a:t>
+              <a:t>Authority: docs/PERSONA.md, README.md, docs/RELEASE_4.5.md.</a:t>
+            </a:r>
+          </a:p>
+          <a:p>
+            <a:r>
+              <a:t>I am a language and a secure runtime. I do not claim a kernel.</a:t>
             </a:r>
           </a:p>
           <a:p>
@@ -901,17 +907,17 @@
           <a:lstStyle/>
           <a:p>
             <a:r>
-              <a:t>Authority: docs/RELEASE_4.4.md, docs/ROADMAP.md, docs/FORTH_2012.md, docs/NSI_FABRIC.md, docs/NANO_EMACS.md.</a:t>
-            </a:r>
-          </a:p>
-          <a:p>
-            <a:r>
-              <a:t>Catalogs and machine-draft guides exist. JSON/TOON stay English.</a:t>
-            </a:r>
-          </a:p>
-          <a:p>
-            <a:r>
-              <a:t>The live editor uses bin/nano_emacs_worker, not dlopen.</a:t>
+              <a:t>Authority: docs/NSI.md, docs/NSI_FABRIC.md, docs/NSI_EFFECTS.md, schema/nsi/effect_map.v0.json.</a:t>
+            </a:r>
+          </a:p>
+          <a:p>
+            <a:r>
+              <a:t>State has no host cap. Err maps to TRAP_ERROR and invents no NSI method.</a:t>
+            </a:r>
+          </a:p>
+          <a:p>
+            <a:r>
+              <a:t>I do not claim a kernel, AES, PKI, or that the journal is wired into every trap.</a:t>
             </a:r>
           </a:p>
         </p:txBody>
@@ -981,7 +987,87 @@
           <a:lstStyle/>
           <a:p>
             <a:r>
-              <a:t>Authority: CONTRIBUTING.md, docs/PERSONA.md, docs/ROADMAP.md.</a:t>
+              <a:t>Authority: docs/RELEASE_4.5.md, docs/ROADMAP.md, docs/FORTH_STANDARD_SYSTEM.md, docs/NSI_EFFECTS.md.</a:t>
+            </a:r>
+          </a:p>
+          <a:p>
+            <a:r>
+              <a:t>Catalogs and machine-draft guides exist. JSON/TOON stay English.</a:t>
+            </a:r>
+          </a:p>
+          <a:p>
+            <a:r>
+              <a:t>The live editor uses bin/nano_emacs_worker, not dlopen.</a:t>
+            </a:r>
+          </a:p>
+        </p:txBody>
+      </p:sp>
+      <p:sp>
+        <p:nvSpPr>
+          <p:cNvPr id="4" name="Slide Number Placeholder 3"/>
+          <p:cNvSpPr>
+            <a:spLocks noGrp="1"/>
+          </p:cNvSpPr>
+          <p:nvPr>
+            <p:ph type="sldNum" idx="5" sz="quarter"/>
+          </p:nvPr>
+        </p:nvSpPr>
+        <p:spPr/>
+      </p:sp>
+    </p:spTree>
+  </p:cSld>
+  <p:clrMapOvr>
+    <a:masterClrMapping/>
+  </p:clrMapOvr>
+</p:notes>
+</file>
+
+<file path=ppt/notesSlides/notesSlide16.xml><?xml version="1.0" encoding="utf-8"?>
+<p:notes xmlns:a="http://schemas.openxmlformats.org/drawingml/2006/main" xmlns:p="http://schemas.openxmlformats.org/presentationml/2006/main" xmlns:r="http://schemas.openxmlformats.org/officeDocument/2006/relationships">
+  <p:cSld>
+    <p:spTree>
+      <p:nvGrpSpPr>
+        <p:cNvPr id="1" name=""/>
+        <p:cNvGrpSpPr/>
+        <p:nvPr/>
+      </p:nvGrpSpPr>
+      <p:grpSpPr>
+        <a:xfrm>
+          <a:off x="0" y="0"/>
+          <a:ext cx="0" cy="0"/>
+          <a:chOff x="0" y="0"/>
+          <a:chExt cx="0" cy="0"/>
+        </a:xfrm>
+      </p:grpSpPr>
+      <p:sp>
+        <p:nvSpPr>
+          <p:cNvPr id="2" name="Slide Image Placeholder 1"/>
+          <p:cNvSpPr>
+            <a:spLocks noGrp="1"/>
+          </p:cNvSpPr>
+          <p:nvPr>
+            <p:ph type="sldImg" idx="2"/>
+          </p:nvPr>
+        </p:nvSpPr>
+        <p:spPr/>
+      </p:sp>
+      <p:sp>
+        <p:nvSpPr>
+          <p:cNvPr id="3" name="Notes Placeholder 2"/>
+          <p:cNvSpPr>
+            <a:spLocks noGrp="1"/>
+          </p:cNvSpPr>
+          <p:nvPr>
+            <p:ph type="body" idx="3" sz="quarter"/>
+          </p:nvPr>
+        </p:nvSpPr>
+        <p:spPr/>
+        <p:txBody>
+          <a:bodyPr/>
+          <a:lstStyle/>
+          <a:p>
+            <a:r>
+              <a:t>Authority: CONTRIBUTING.md, docs/PERSONA.md, docs/ROADMAP.md, docs/RELEASE_4.5.md.</a:t>
             </a:r>
           </a:p>
         </p:txBody>
@@ -4756,7 +4842,7 @@
                 </a:solidFill>
                 <a:latin typeface="Arial"/>
               </a:rPr>
-              <a:t>NANOLANG 4.4</a:t>
+              <a:t>NANOLANG 4.5</a:t>
             </a:r>
           </a:p>
         </p:txBody>
@@ -4857,7 +4943,7 @@
                 </a:solidFill>
                 <a:latin typeface="Arial"/>
               </a:rPr>
-              <a:t>A developer's view of my syntax, compiler, NanoISA, NanoVM, NSI, and what my verifier proves.</a:t>
+              <a:t>A developer's view of my syntax, compiler, NanoISA, and the secure runtime I host on POSIX.</a:t>
             </a:r>
           </a:p>
         </p:txBody>
@@ -4891,7 +4977,7 @@
                 </a:solidFill>
                 <a:latin typeface="Arial"/>
               </a:rPr>
-              <a:t>Verified bytecode · Forth evidence · NSI fabric · isolated editor walker</a:t>
+              <a:t>Verified bytecode · NSI · capabilities · fabric · trap journal</a:t>
             </a:r>
           </a:p>
         </p:txBody>
@@ -7258,7 +7344,7 @@
             <a:avLst/>
           </a:prstGeom>
           <a:solidFill>
-            <a:srgbClr val="101317"/>
+            <a:srgbClr val="EEF1F3"/>
           </a:solidFill>
           <a:ln>
             <a:noFill/>
@@ -7311,11 +7397,11 @@
             <a:r>
               <a:rPr sz="2800" b="1">
                 <a:solidFill>
-                  <a:srgbClr val="EEF1F3"/>
-                </a:solidFill>
-                <a:latin typeface="Arial"/>
-              </a:rPr>
-              <a:t>4.4 shipped. Here is what I have not done.</a:t>
+                  <a:srgbClr val="101317"/>
+                </a:solidFill>
+                <a:latin typeface="Arial"/>
+              </a:rPr>
+              <a:t>I host a secure runtime on an ordinary kernel.</a:t>
             </a:r>
           </a:p>
         </p:txBody>
@@ -7345,11 +7431,11 @@
             <a:r>
               <a:rPr sz="1300" b="0">
                 <a:solidFill>
-                  <a:srgbClr val="72B7D6"/>
-                </a:solidFill>
-                <a:latin typeface="Arial"/>
-              </a:rPr>
-              <a:t>One tag from v4.0.0. Product phases 4.1–4.4, not four Git tags.</a:t>
+                  <a:srgbClr val="65707C"/>
+                </a:solidFill>
+                <a:latin typeface="Arial"/>
+              </a:rPr>
+              <a:t>Contracts, capabilities, a POSIX fabric, and a journal. Five layers. Not synonyms.</a:t>
             </a:r>
           </a:p>
         </p:txBody>
@@ -7431,8 +7517,8 @@
         </p:nvSpPr>
         <p:spPr>
           <a:xfrm>
-            <a:off x="731520" y="1828800"/>
-            <a:ext cx="5166360" cy="3566160"/>
+            <a:off x="502920" y="1965960"/>
+            <a:ext cx="2103120" cy="1554480"/>
           </a:xfrm>
           <a:prstGeom prst="roundRect">
             <a:avLst/>
@@ -7474,28 +7560,28 @@
         </p:nvSpPr>
         <p:spPr>
           <a:xfrm>
-            <a:off x="1005840" y="2148840"/>
-            <a:ext cx="4480560" cy="274320"/>
-          </a:xfrm>
-          <a:prstGeom prst="rect">
-            <a:avLst/>
-          </a:prstGeom>
-          <a:noFill/>
-        </p:spPr>
-        <p:txBody>
-          <a:bodyPr wrap="square" lIns="45720" rIns="45720" tIns="27432" bIns="27432" anchor="t">
-            <a:spAutoFit/>
-          </a:bodyPr>
-          <a:lstStyle/>
-          <a:p>
-            <a:r>
-              <a:rPr sz="1500" b="1">
+            <a:off x="612648" y="2194560"/>
+            <a:ext cx="1874519" cy="320040"/>
+          </a:xfrm>
+          <a:prstGeom prst="rect">
+            <a:avLst/>
+          </a:prstGeom>
+          <a:noFill/>
+        </p:spPr>
+        <p:txBody>
+          <a:bodyPr wrap="square" lIns="45720" rIns="45720" tIns="27432" bIns="27432" anchor="t">
+            <a:spAutoFit/>
+          </a:bodyPr>
+          <a:lstStyle/>
+          <a:p>
+            <a:r>
+              <a:rPr sz="1400" b="1">
                 <a:solidFill>
                   <a:srgbClr val="76B900"/>
                 </a:solidFill>
-                <a:latin typeface="Arial"/>
-              </a:rPr>
-              <a:t>4.4 SHIPPED</a:t>
+                <a:latin typeface="Courier New"/>
+              </a:rPr>
+              <a:t>EFFECT</a:t>
             </a:r>
           </a:p>
         </p:txBody>
@@ -7508,83 +7594,28 @@
         </p:nvSpPr>
         <p:spPr>
           <a:xfrm>
-            <a:off x="1005840" y="2651760"/>
-            <a:ext cx="4297680" cy="2377440"/>
-          </a:xfrm>
-          <a:prstGeom prst="rect">
-            <a:avLst/>
-          </a:prstGeom>
-          <a:noFill/>
-        </p:spPr>
-        <p:txBody>
-          <a:bodyPr wrap="square" lIns="45720" rIns="45720" tIns="27432" bIns="27432" anchor="t">
-            <a:spAutoFit/>
-          </a:bodyPr>
-          <a:lstStyle/>
-          <a:p>
-            <a:r>
-              <a:rPr sz="1800" b="1">
+            <a:off x="612648" y="2651760"/>
+            <a:ext cx="1874519" cy="502920"/>
+          </a:xfrm>
+          <a:prstGeom prst="rect">
+            <a:avLst/>
+          </a:prstGeom>
+          <a:noFill/>
+        </p:spPr>
+        <p:txBody>
+          <a:bodyPr wrap="square" lIns="45720" rIns="45720" tIns="27432" bIns="27432" anchor="t">
+            <a:spAutoFit/>
+          </a:bodyPr>
+          <a:lstStyle/>
+          <a:p>
+            <a:r>
+              <a:rPr sz="1400" b="0">
                 <a:solidFill>
                   <a:srgbClr val="EEF1F3"/>
                 </a:solidFill>
                 <a:latin typeface="Arial"/>
               </a:rPr>
-              <a:t>verified NanoISA v2 (4.0)</a:t>
-            </a:r>
-          </a:p>
-          <a:p>
-            <a:r>
-              <a:rPr sz="1800" b="1">
-                <a:solidFill>
-                  <a:srgbClr val="EEF1F3"/>
-                </a:solidFill>
-                <a:latin typeface="Arial"/>
-              </a:rPr>
-              <a:t>Forth Core evidence</a:t>
-            </a:r>
-          </a:p>
-          <a:p>
-            <a:r>
-              <a:rPr sz="1800" b="1">
-                <a:solidFill>
-                  <a:srgbClr val="EEF1F3"/>
-                </a:solidFill>
-                <a:latin typeface="Arial"/>
-              </a:rPr>
-              <a:t>NSI v0 + POSIX fabric</a:t>
-            </a:r>
-          </a:p>
-          <a:p>
-            <a:r>
-              <a:rPr sz="1800" b="1">
-                <a:solidFill>
-                  <a:srgbClr val="EEF1F3"/>
-                </a:solidFill>
-                <a:latin typeface="Arial"/>
-              </a:rPr>
-              <a:t>unforgeable capabilities</a:t>
-            </a:r>
-          </a:p>
-          <a:p>
-            <a:r>
-              <a:rPr sz="1800" b="1">
-                <a:solidFill>
-                  <a:srgbClr val="EEF1F3"/>
-                </a:solidFill>
-                <a:latin typeface="Arial"/>
-              </a:rPr>
-              <a:t>isolated editor walker</a:t>
-            </a:r>
-          </a:p>
-          <a:p>
-            <a:r>
-              <a:rPr sz="1800" b="1">
-                <a:solidFill>
-                  <a:srgbClr val="EEF1F3"/>
-                </a:solidFill>
-                <a:latin typeface="Arial"/>
-              </a:rPr>
-              <a:t>six-language catalogs</a:t>
+              <a:t>source row</a:t>
             </a:r>
           </a:p>
         </p:txBody>
@@ -7597,8 +7628,452 @@
         </p:nvSpPr>
         <p:spPr>
           <a:xfrm>
-            <a:off x="6309360" y="1828800"/>
-            <a:ext cx="5166360" cy="3566160"/>
+            <a:off x="2788920" y="1965960"/>
+            <a:ext cx="2103120" cy="1554480"/>
+          </a:xfrm>
+          <a:prstGeom prst="roundRect">
+            <a:avLst/>
+          </a:prstGeom>
+          <a:solidFill>
+            <a:srgbClr val="23282F"/>
+          </a:solidFill>
+          <a:ln>
+            <a:noFill/>
+          </a:ln>
+        </p:spPr>
+        <p:style>
+          <a:lnRef idx="1">
+            <a:schemeClr val="accent1"/>
+          </a:lnRef>
+          <a:fillRef idx="3">
+            <a:schemeClr val="accent1"/>
+          </a:fillRef>
+          <a:effectRef idx="2">
+            <a:schemeClr val="accent1"/>
+          </a:effectRef>
+          <a:fontRef idx="minor">
+            <a:schemeClr val="lt1"/>
+          </a:fontRef>
+        </p:style>
+        <p:txBody>
+          <a:bodyPr rtlCol="0" anchor="ctr"/>
+          <a:lstStyle/>
+          <a:p>
+            <a:pPr algn="ctr"/>
+          </a:p>
+        </p:txBody>
+      </p:sp>
+      <p:sp>
+        <p:nvSpPr>
+          <p:cNvPr id="11" name="TextBox 10"/>
+          <p:cNvSpPr txBox="1"/>
+          <p:nvPr/>
+        </p:nvSpPr>
+        <p:spPr>
+          <a:xfrm>
+            <a:off x="2898648" y="2194560"/>
+            <a:ext cx="1874519" cy="320040"/>
+          </a:xfrm>
+          <a:prstGeom prst="rect">
+            <a:avLst/>
+          </a:prstGeom>
+          <a:noFill/>
+        </p:spPr>
+        <p:txBody>
+          <a:bodyPr wrap="square" lIns="45720" rIns="45720" tIns="27432" bIns="27432" anchor="t">
+            <a:spAutoFit/>
+          </a:bodyPr>
+          <a:lstStyle/>
+          <a:p>
+            <a:r>
+              <a:rPr sz="1400" b="1">
+                <a:solidFill>
+                  <a:srgbClr val="76B900"/>
+                </a:solidFill>
+                <a:latin typeface="Courier New"/>
+              </a:rPr>
+              <a:t>MANIFEST</a:t>
+            </a:r>
+          </a:p>
+        </p:txBody>
+      </p:sp>
+      <p:sp>
+        <p:nvSpPr>
+          <p:cNvPr id="12" name="TextBox 11"/>
+          <p:cNvSpPr txBox="1"/>
+          <p:nvPr/>
+        </p:nvSpPr>
+        <p:spPr>
+          <a:xfrm>
+            <a:off x="2898648" y="2651760"/>
+            <a:ext cx="1874519" cy="502920"/>
+          </a:xfrm>
+          <a:prstGeom prst="rect">
+            <a:avLst/>
+          </a:prstGeom>
+          <a:noFill/>
+        </p:spPr>
+        <p:txBody>
+          <a:bodyPr wrap="square" lIns="45720" rIns="45720" tIns="27432" bIns="27432" anchor="t">
+            <a:spAutoFit/>
+          </a:bodyPr>
+          <a:lstStyle/>
+          <a:p>
+            <a:r>
+              <a:rPr sz="1400" b="0">
+                <a:solidFill>
+                  <a:srgbClr val="EEF1F3"/>
+                </a:solidFill>
+                <a:latin typeface="Arial"/>
+              </a:rPr>
+              <a:t>required caps</a:t>
+            </a:r>
+          </a:p>
+        </p:txBody>
+      </p:sp>
+      <p:sp>
+        <p:nvSpPr>
+          <p:cNvPr id="13" name="Rounded Rectangle 12"/>
+          <p:cNvSpPr/>
+          <p:nvPr/>
+        </p:nvSpPr>
+        <p:spPr>
+          <a:xfrm>
+            <a:off x="5074920" y="1965960"/>
+            <a:ext cx="2103120" cy="1554480"/>
+          </a:xfrm>
+          <a:prstGeom prst="roundRect">
+            <a:avLst/>
+          </a:prstGeom>
+          <a:solidFill>
+            <a:srgbClr val="23282F"/>
+          </a:solidFill>
+          <a:ln>
+            <a:noFill/>
+          </a:ln>
+        </p:spPr>
+        <p:style>
+          <a:lnRef idx="1">
+            <a:schemeClr val="accent1"/>
+          </a:lnRef>
+          <a:fillRef idx="3">
+            <a:schemeClr val="accent1"/>
+          </a:fillRef>
+          <a:effectRef idx="2">
+            <a:schemeClr val="accent1"/>
+          </a:effectRef>
+          <a:fontRef idx="minor">
+            <a:schemeClr val="lt1"/>
+          </a:fontRef>
+        </p:style>
+        <p:txBody>
+          <a:bodyPr rtlCol="0" anchor="ctr"/>
+          <a:lstStyle/>
+          <a:p>
+            <a:pPr algn="ctr"/>
+          </a:p>
+        </p:txBody>
+      </p:sp>
+      <p:sp>
+        <p:nvSpPr>
+          <p:cNvPr id="14" name="TextBox 13"/>
+          <p:cNvSpPr txBox="1"/>
+          <p:nvPr/>
+        </p:nvSpPr>
+        <p:spPr>
+          <a:xfrm>
+            <a:off x="5184648" y="2194560"/>
+            <a:ext cx="1874519" cy="320040"/>
+          </a:xfrm>
+          <a:prstGeom prst="rect">
+            <a:avLst/>
+          </a:prstGeom>
+          <a:noFill/>
+        </p:spPr>
+        <p:txBody>
+          <a:bodyPr wrap="square" lIns="45720" rIns="45720" tIns="27432" bIns="27432" anchor="t">
+            <a:spAutoFit/>
+          </a:bodyPr>
+          <a:lstStyle/>
+          <a:p>
+            <a:r>
+              <a:rPr sz="1400" b="1">
+                <a:solidFill>
+                  <a:srgbClr val="76B900"/>
+                </a:solidFill>
+                <a:latin typeface="Courier New"/>
+              </a:rPr>
+              <a:t>TRAP</a:t>
+            </a:r>
+          </a:p>
+        </p:txBody>
+      </p:sp>
+      <p:sp>
+        <p:nvSpPr>
+          <p:cNvPr id="15" name="TextBox 14"/>
+          <p:cNvSpPr txBox="1"/>
+          <p:nvPr/>
+        </p:nvSpPr>
+        <p:spPr>
+          <a:xfrm>
+            <a:off x="5184648" y="2651760"/>
+            <a:ext cx="1874519" cy="502920"/>
+          </a:xfrm>
+          <a:prstGeom prst="rect">
+            <a:avLst/>
+          </a:prstGeom>
+          <a:noFill/>
+        </p:spPr>
+        <p:txBody>
+          <a:bodyPr wrap="square" lIns="45720" rIns="45720" tIns="27432" bIns="27432" anchor="t">
+            <a:spAutoFit/>
+          </a:bodyPr>
+          <a:lstStyle/>
+          <a:p>
+            <a:r>
+              <a:rPr sz="1400" b="0">
+                <a:solidFill>
+                  <a:srgbClr val="EEF1F3"/>
+                </a:solidFill>
+                <a:latin typeface="Arial"/>
+              </a:rPr>
+              <a:t>NanoISA</a:t>
+            </a:r>
+          </a:p>
+        </p:txBody>
+      </p:sp>
+      <p:sp>
+        <p:nvSpPr>
+          <p:cNvPr id="16" name="Rounded Rectangle 15"/>
+          <p:cNvSpPr/>
+          <p:nvPr/>
+        </p:nvSpPr>
+        <p:spPr>
+          <a:xfrm>
+            <a:off x="7360920" y="1965960"/>
+            <a:ext cx="2103120" cy="1554480"/>
+          </a:xfrm>
+          <a:prstGeom prst="roundRect">
+            <a:avLst/>
+          </a:prstGeom>
+          <a:solidFill>
+            <a:srgbClr val="23282F"/>
+          </a:solidFill>
+          <a:ln>
+            <a:noFill/>
+          </a:ln>
+        </p:spPr>
+        <p:style>
+          <a:lnRef idx="1">
+            <a:schemeClr val="accent1"/>
+          </a:lnRef>
+          <a:fillRef idx="3">
+            <a:schemeClr val="accent1"/>
+          </a:fillRef>
+          <a:effectRef idx="2">
+            <a:schemeClr val="accent1"/>
+          </a:effectRef>
+          <a:fontRef idx="minor">
+            <a:schemeClr val="lt1"/>
+          </a:fontRef>
+        </p:style>
+        <p:txBody>
+          <a:bodyPr rtlCol="0" anchor="ctr"/>
+          <a:lstStyle/>
+          <a:p>
+            <a:pPr algn="ctr"/>
+          </a:p>
+        </p:txBody>
+      </p:sp>
+      <p:sp>
+        <p:nvSpPr>
+          <p:cNvPr id="17" name="TextBox 16"/>
+          <p:cNvSpPr txBox="1"/>
+          <p:nvPr/>
+        </p:nvSpPr>
+        <p:spPr>
+          <a:xfrm>
+            <a:off x="7470648" y="2194560"/>
+            <a:ext cx="1874519" cy="320040"/>
+          </a:xfrm>
+          <a:prstGeom prst="rect">
+            <a:avLst/>
+          </a:prstGeom>
+          <a:noFill/>
+        </p:spPr>
+        <p:txBody>
+          <a:bodyPr wrap="square" lIns="45720" rIns="45720" tIns="27432" bIns="27432" anchor="t">
+            <a:spAutoFit/>
+          </a:bodyPr>
+          <a:lstStyle/>
+          <a:p>
+            <a:r>
+              <a:rPr sz="1400" b="1">
+                <a:solidFill>
+                  <a:srgbClr val="76B900"/>
+                </a:solidFill>
+                <a:latin typeface="Courier New"/>
+              </a:rPr>
+              <a:t>NSI</a:t>
+            </a:r>
+          </a:p>
+        </p:txBody>
+      </p:sp>
+      <p:sp>
+        <p:nvSpPr>
+          <p:cNvPr id="18" name="TextBox 17"/>
+          <p:cNvSpPr txBox="1"/>
+          <p:nvPr/>
+        </p:nvSpPr>
+        <p:spPr>
+          <a:xfrm>
+            <a:off x="7470648" y="2651760"/>
+            <a:ext cx="1874519" cy="502920"/>
+          </a:xfrm>
+          <a:prstGeom prst="rect">
+            <a:avLst/>
+          </a:prstGeom>
+          <a:noFill/>
+        </p:spPr>
+        <p:txBody>
+          <a:bodyPr wrap="square" lIns="45720" rIns="45720" tIns="27432" bIns="27432" anchor="t">
+            <a:spAutoFit/>
+          </a:bodyPr>
+          <a:lstStyle/>
+          <a:p>
+            <a:r>
+              <a:rPr sz="1400" b="0">
+                <a:solidFill>
+                  <a:srgbClr val="EEF1F3"/>
+                </a:solidFill>
+                <a:latin typeface="Arial"/>
+              </a:rPr>
+              <a:t>method id</a:t>
+            </a:r>
+          </a:p>
+        </p:txBody>
+      </p:sp>
+      <p:sp>
+        <p:nvSpPr>
+          <p:cNvPr id="19" name="Rounded Rectangle 18"/>
+          <p:cNvSpPr/>
+          <p:nvPr/>
+        </p:nvSpPr>
+        <p:spPr>
+          <a:xfrm>
+            <a:off x="9646920" y="1965960"/>
+            <a:ext cx="2103120" cy="1554480"/>
+          </a:xfrm>
+          <a:prstGeom prst="roundRect">
+            <a:avLst/>
+          </a:prstGeom>
+          <a:solidFill>
+            <a:srgbClr val="23282F"/>
+          </a:solidFill>
+          <a:ln>
+            <a:noFill/>
+          </a:ln>
+        </p:spPr>
+        <p:style>
+          <a:lnRef idx="1">
+            <a:schemeClr val="accent1"/>
+          </a:lnRef>
+          <a:fillRef idx="3">
+            <a:schemeClr val="accent1"/>
+          </a:fillRef>
+          <a:effectRef idx="2">
+            <a:schemeClr val="accent1"/>
+          </a:effectRef>
+          <a:fontRef idx="minor">
+            <a:schemeClr val="lt1"/>
+          </a:fontRef>
+        </p:style>
+        <p:txBody>
+          <a:bodyPr rtlCol="0" anchor="ctr"/>
+          <a:lstStyle/>
+          <a:p>
+            <a:pPr algn="ctr"/>
+          </a:p>
+        </p:txBody>
+      </p:sp>
+      <p:sp>
+        <p:nvSpPr>
+          <p:cNvPr id="20" name="TextBox 19"/>
+          <p:cNvSpPr txBox="1"/>
+          <p:nvPr/>
+        </p:nvSpPr>
+        <p:spPr>
+          <a:xfrm>
+            <a:off x="9756648" y="2194560"/>
+            <a:ext cx="1874519" cy="320040"/>
+          </a:xfrm>
+          <a:prstGeom prst="rect">
+            <a:avLst/>
+          </a:prstGeom>
+          <a:noFill/>
+        </p:spPr>
+        <p:txBody>
+          <a:bodyPr wrap="square" lIns="45720" rIns="45720" tIns="27432" bIns="27432" anchor="t">
+            <a:spAutoFit/>
+          </a:bodyPr>
+          <a:lstStyle/>
+          <a:p>
+            <a:r>
+              <a:rPr sz="1400" b="1">
+                <a:solidFill>
+                  <a:srgbClr val="76B900"/>
+                </a:solidFill>
+                <a:latin typeface="Courier New"/>
+              </a:rPr>
+              <a:t>CAP</a:t>
+            </a:r>
+          </a:p>
+        </p:txBody>
+      </p:sp>
+      <p:sp>
+        <p:nvSpPr>
+          <p:cNvPr id="21" name="TextBox 20"/>
+          <p:cNvSpPr txBox="1"/>
+          <p:nvPr/>
+        </p:nvSpPr>
+        <p:spPr>
+          <a:xfrm>
+            <a:off x="9756648" y="2651760"/>
+            <a:ext cx="1874519" cy="502920"/>
+          </a:xfrm>
+          <a:prstGeom prst="rect">
+            <a:avLst/>
+          </a:prstGeom>
+          <a:noFill/>
+        </p:spPr>
+        <p:txBody>
+          <a:bodyPr wrap="square" lIns="45720" rIns="45720" tIns="27432" bIns="27432" anchor="t">
+            <a:spAutoFit/>
+          </a:bodyPr>
+          <a:lstStyle/>
+          <a:p>
+            <a:r>
+              <a:rPr sz="1400" b="0">
+                <a:solidFill>
+                  <a:srgbClr val="EEF1F3"/>
+                </a:solidFill>
+                <a:latin typeface="Arial"/>
+              </a:rPr>
+              <a:t>unforgeable</a:t>
+            </a:r>
+          </a:p>
+        </p:txBody>
+      </p:sp>
+      <p:sp>
+        <p:nvSpPr>
+          <p:cNvPr id="22" name="Rounded Rectangle 21"/>
+          <p:cNvSpPr/>
+          <p:nvPr/>
+        </p:nvSpPr>
+        <p:spPr>
+          <a:xfrm>
+            <a:off x="502920" y="3794760"/>
+            <a:ext cx="11155680" cy="1965960"/>
           </a:xfrm>
           <a:prstGeom prst="roundRect">
             <a:avLst/>
@@ -7634,123 +8109,90 @@
       </p:sp>
       <p:sp>
         <p:nvSpPr>
-          <p:cNvPr id="11" name="TextBox 10"/>
-          <p:cNvSpPr txBox="1"/>
-          <p:nvPr/>
-        </p:nvSpPr>
-        <p:spPr>
-          <a:xfrm>
-            <a:off x="6583680" y="2148840"/>
-            <a:ext cx="4480560" cy="274320"/>
-          </a:xfrm>
-          <a:prstGeom prst="rect">
-            <a:avLst/>
-          </a:prstGeom>
-          <a:noFill/>
-        </p:spPr>
-        <p:txBody>
-          <a:bodyPr wrap="square" lIns="45720" rIns="45720" tIns="27432" bIns="27432" anchor="t">
-            <a:spAutoFit/>
-          </a:bodyPr>
-          <a:lstStyle/>
-          <a:p>
-            <a:r>
-              <a:rPr sz="1500" b="1">
+          <p:cNvPr id="23" name="TextBox 22"/>
+          <p:cNvSpPr txBox="1"/>
+          <p:nvPr/>
+        </p:nvSpPr>
+        <p:spPr>
+          <a:xfrm>
+            <a:off x="777240" y="4023360"/>
+            <a:ext cx="2011680" cy="274320"/>
+          </a:xfrm>
+          <a:prstGeom prst="rect">
+            <a:avLst/>
+          </a:prstGeom>
+          <a:noFill/>
+        </p:spPr>
+        <p:txBody>
+          <a:bodyPr wrap="square" lIns="45720" rIns="45720" tIns="27432" bIns="27432" anchor="t">
+            <a:spAutoFit/>
+          </a:bodyPr>
+          <a:lstStyle/>
+          <a:p>
+            <a:r>
+              <a:rPr sz="1400" b="1">
                 <a:solidFill>
                   <a:srgbClr val="FF6B35"/>
                 </a:solidFill>
                 <a:latin typeface="Arial"/>
               </a:rPr>
-              <a:t>NOT DONE</a:t>
-            </a:r>
-          </a:p>
-        </p:txBody>
-      </p:sp>
-      <p:sp>
-        <p:nvSpPr>
-          <p:cNvPr id="12" name="TextBox 11"/>
-          <p:cNvSpPr txBox="1"/>
-          <p:nvPr/>
-        </p:nvSpPr>
-        <p:spPr>
-          <a:xfrm>
-            <a:off x="6583680" y="2651760"/>
-            <a:ext cx="4297680" cy="2377440"/>
-          </a:xfrm>
-          <a:prstGeom prst="rect">
-            <a:avLst/>
-          </a:prstGeom>
-          <a:noFill/>
-        </p:spPr>
-        <p:txBody>
-          <a:bodyPr wrap="square" lIns="45720" rIns="45720" tIns="27432" bIns="27432" anchor="t">
-            <a:spAutoFit/>
-          </a:bodyPr>
-          <a:lstStyle/>
-          <a:p>
-            <a:r>
-              <a:rPr sz="1800" b="1">
+              <a:t>JOURNAL</a:t>
+            </a:r>
+          </a:p>
+        </p:txBody>
+      </p:sp>
+      <p:sp>
+        <p:nvSpPr>
+          <p:cNvPr id="24" name="TextBox 23"/>
+          <p:cNvSpPr txBox="1"/>
+          <p:nvPr/>
+        </p:nvSpPr>
+        <p:spPr>
+          <a:xfrm>
+            <a:off x="777240" y="4434840"/>
+            <a:ext cx="10515600" cy="1097280"/>
+          </a:xfrm>
+          <a:prstGeom prst="rect">
+            <a:avLst/>
+          </a:prstGeom>
+          <a:noFill/>
+        </p:spPr>
+        <p:txBody>
+          <a:bodyPr wrap="square" lIns="45720" rIns="45720" tIns="27432" bIns="27432" anchor="t">
+            <a:spAutoFit/>
+          </a:bodyPr>
+          <a:lstStyle/>
+          <a:p>
+            <a:r>
+              <a:rPr sz="1500" b="0">
                 <a:solidFill>
                   <a:srgbClr val="EEF1F3"/>
                 </a:solidFill>
                 <a:latin typeface="Arial"/>
               </a:rPr>
-              <a:t>Standard System / INCLUDED</a:t>
-            </a:r>
-          </a:p>
-          <a:p>
-            <a:r>
-              <a:rPr sz="1800" b="1">
+              <a:t>Record at the trap. Replay the recorded result. Do not call the original service.</a:t>
+            </a:r>
+          </a:p>
+          <a:p>
+            <a:r>
+              <a:rPr sz="1500" b="0">
                 <a:solidFill>
                   <a:srgbClr val="EEF1F3"/>
                 </a:solidFill>
                 <a:latin typeface="Arial"/>
               </a:rPr>
-              <a:t>internationalized compiler</a:t>
-            </a:r>
-          </a:p>
-          <a:p>
-            <a:r>
-              <a:rPr sz="1800" b="1">
+              <a:t>SHA-256 + HMAC with a deployment key. Sequence checkpoints, not heap snapshots.</a:t>
+            </a:r>
+          </a:p>
+          <a:p>
+            <a:r>
+              <a:rPr sz="1500" b="0">
                 <a:solidFill>
                   <a:srgbClr val="EEF1F3"/>
                 </a:solidFill>
                 <a:latin typeface="Arial"/>
               </a:rPr>
-              <a:t>GNU Emacs / a kernel</a:t>
-            </a:r>
-          </a:p>
-          <a:p>
-            <a:r>
-              <a:rPr sz="1800" b="1">
-                <a:solidFill>
-                  <a:srgbClr val="EEF1F3"/>
-                </a:solidFill>
-                <a:latin typeface="Arial"/>
-              </a:rPr>
-              <a:t>CUDA or CPython wrap</a:t>
-            </a:r>
-          </a:p>
-          <a:p>
-            <a:r>
-              <a:rPr sz="1800" b="1">
-                <a:solidFill>
-                  <a:srgbClr val="EEF1F3"/>
-                </a:solidFill>
-                <a:latin typeface="Arial"/>
-              </a:rPr>
-              <a:t>header deps (#211)</a:t>
-            </a:r>
-          </a:p>
-          <a:p>
-            <a:r>
-              <a:rPr sz="1800" b="1">
-                <a:solidFill>
-                  <a:srgbClr val="EEF1F3"/>
-                </a:solidFill>
-                <a:latin typeface="Arial"/>
-              </a:rPr>
-              <a:t>5.0 One IR</a:t>
+              <a:t>Tested C library in 4.5. Not a hook on every vm.c trap. POSIX is the host.</a:t>
             </a:r>
           </a:p>
         </p:txBody>
@@ -7816,6 +8258,536 @@
           </a:p>
         </p:txBody>
       </p:sp>
+      <p:sp>
+        <p:nvSpPr>
+          <p:cNvPr id="3" name="TextBox 2"/>
+          <p:cNvSpPr txBox="1"/>
+          <p:nvPr/>
+        </p:nvSpPr>
+        <p:spPr>
+          <a:xfrm>
+            <a:off x="594360" y="457200"/>
+            <a:ext cx="10789920" cy="640080"/>
+          </a:xfrm>
+          <a:prstGeom prst="rect">
+            <a:avLst/>
+          </a:prstGeom>
+          <a:noFill/>
+        </p:spPr>
+        <p:txBody>
+          <a:bodyPr wrap="square" lIns="45720" rIns="45720" tIns="27432" bIns="27432" anchor="t">
+            <a:spAutoFit/>
+          </a:bodyPr>
+          <a:lstStyle/>
+          <a:p>
+            <a:r>
+              <a:rPr sz="2800" b="1">
+                <a:solidFill>
+                  <a:srgbClr val="EEF1F3"/>
+                </a:solidFill>
+                <a:latin typeface="Arial"/>
+              </a:rPr>
+              <a:t>4.1–4.5 shipped. Here is what I have not done.</a:t>
+            </a:r>
+          </a:p>
+        </p:txBody>
+      </p:sp>
+      <p:sp>
+        <p:nvSpPr>
+          <p:cNvPr id="4" name="TextBox 3"/>
+          <p:cNvSpPr txBox="1"/>
+          <p:nvPr/>
+        </p:nvSpPr>
+        <p:spPr>
+          <a:xfrm>
+            <a:off x="621792" y="1170432"/>
+            <a:ext cx="10607040" cy="411480"/>
+          </a:xfrm>
+          <a:prstGeom prst="rect">
+            <a:avLst/>
+          </a:prstGeom>
+          <a:noFill/>
+        </p:spPr>
+        <p:txBody>
+          <a:bodyPr wrap="square" lIns="45720" rIns="45720" tIns="27432" bIns="27432" anchor="t">
+            <a:spAutoFit/>
+          </a:bodyPr>
+          <a:lstStyle/>
+          <a:p>
+            <a:r>
+              <a:rPr sz="1300" b="0">
+                <a:solidFill>
+                  <a:srgbClr val="72B7D6"/>
+                </a:solidFill>
+                <a:latin typeface="Arial"/>
+              </a:rPr>
+              <a:t>One public tag from v4.0.0. Five product phases, not five GitHub Releases.</a:t>
+            </a:r>
+          </a:p>
+        </p:txBody>
+      </p:sp>
+      <p:sp>
+        <p:nvSpPr>
+          <p:cNvPr id="5" name="TextBox 4"/>
+          <p:cNvSpPr txBox="1"/>
+          <p:nvPr/>
+        </p:nvSpPr>
+        <p:spPr>
+          <a:xfrm>
+            <a:off x="411480" y="6638544"/>
+            <a:ext cx="1097280" cy="137160"/>
+          </a:xfrm>
+          <a:prstGeom prst="rect">
+            <a:avLst/>
+          </a:prstGeom>
+          <a:noFill/>
+        </p:spPr>
+        <p:txBody>
+          <a:bodyPr wrap="square" lIns="45720" rIns="45720" tIns="27432" bIns="27432" anchor="t">
+            <a:spAutoFit/>
+          </a:bodyPr>
+          <a:lstStyle/>
+          <a:p>
+            <a:r>
+              <a:rPr sz="800" b="1">
+                <a:solidFill>
+                  <a:srgbClr val="65707C"/>
+                </a:solidFill>
+                <a:latin typeface="Arial"/>
+              </a:rPr>
+              <a:t>NANOLANG</a:t>
+            </a:r>
+          </a:p>
+        </p:txBody>
+      </p:sp>
+      <p:sp>
+        <p:nvSpPr>
+          <p:cNvPr id="6" name="TextBox 5"/>
+          <p:cNvSpPr txBox="1"/>
+          <p:nvPr/>
+        </p:nvSpPr>
+        <p:spPr>
+          <a:xfrm>
+            <a:off x="11567160" y="6638544"/>
+            <a:ext cx="228600" cy="137160"/>
+          </a:xfrm>
+          <a:prstGeom prst="rect">
+            <a:avLst/>
+          </a:prstGeom>
+          <a:noFill/>
+        </p:spPr>
+        <p:txBody>
+          <a:bodyPr wrap="square" lIns="45720" rIns="45720" tIns="27432" bIns="27432" anchor="t">
+            <a:spAutoFit/>
+          </a:bodyPr>
+          <a:lstStyle/>
+          <a:p>
+            <a:pPr algn="r"/>
+            <a:r>
+              <a:rPr sz="800" b="1">
+                <a:solidFill>
+                  <a:srgbClr val="65707C"/>
+                </a:solidFill>
+                <a:latin typeface="Arial"/>
+              </a:rPr>
+              <a:t>15</a:t>
+            </a:r>
+          </a:p>
+        </p:txBody>
+      </p:sp>
+      <p:sp>
+        <p:nvSpPr>
+          <p:cNvPr id="7" name="Rounded Rectangle 6"/>
+          <p:cNvSpPr/>
+          <p:nvPr/>
+        </p:nvSpPr>
+        <p:spPr>
+          <a:xfrm>
+            <a:off x="731520" y="1828800"/>
+            <a:ext cx="5166360" cy="3566160"/>
+          </a:xfrm>
+          <a:prstGeom prst="roundRect">
+            <a:avLst/>
+          </a:prstGeom>
+          <a:solidFill>
+            <a:srgbClr val="23282F"/>
+          </a:solidFill>
+          <a:ln>
+            <a:noFill/>
+          </a:ln>
+        </p:spPr>
+        <p:style>
+          <a:lnRef idx="1">
+            <a:schemeClr val="accent1"/>
+          </a:lnRef>
+          <a:fillRef idx="3">
+            <a:schemeClr val="accent1"/>
+          </a:fillRef>
+          <a:effectRef idx="2">
+            <a:schemeClr val="accent1"/>
+          </a:effectRef>
+          <a:fontRef idx="minor">
+            <a:schemeClr val="lt1"/>
+          </a:fontRef>
+        </p:style>
+        <p:txBody>
+          <a:bodyPr rtlCol="0" anchor="ctr"/>
+          <a:lstStyle/>
+          <a:p>
+            <a:pPr algn="ctr"/>
+          </a:p>
+        </p:txBody>
+      </p:sp>
+      <p:sp>
+        <p:nvSpPr>
+          <p:cNvPr id="8" name="TextBox 7"/>
+          <p:cNvSpPr txBox="1"/>
+          <p:nvPr/>
+        </p:nvSpPr>
+        <p:spPr>
+          <a:xfrm>
+            <a:off x="1005840" y="2148840"/>
+            <a:ext cx="4480560" cy="274320"/>
+          </a:xfrm>
+          <a:prstGeom prst="rect">
+            <a:avLst/>
+          </a:prstGeom>
+          <a:noFill/>
+        </p:spPr>
+        <p:txBody>
+          <a:bodyPr wrap="square" lIns="45720" rIns="45720" tIns="27432" bIns="27432" anchor="t">
+            <a:spAutoFit/>
+          </a:bodyPr>
+          <a:lstStyle/>
+          <a:p>
+            <a:r>
+              <a:rPr sz="1500" b="1">
+                <a:solidFill>
+                  <a:srgbClr val="76B900"/>
+                </a:solidFill>
+                <a:latin typeface="Arial"/>
+              </a:rPr>
+              <a:t>4.5 SHIPPED</a:t>
+            </a:r>
+          </a:p>
+        </p:txBody>
+      </p:sp>
+      <p:sp>
+        <p:nvSpPr>
+          <p:cNvPr id="9" name="TextBox 8"/>
+          <p:cNvSpPr txBox="1"/>
+          <p:nvPr/>
+        </p:nvSpPr>
+        <p:spPr>
+          <a:xfrm>
+            <a:off x="1005840" y="2651760"/>
+            <a:ext cx="4297680" cy="2377440"/>
+          </a:xfrm>
+          <a:prstGeom prst="rect">
+            <a:avLst/>
+          </a:prstGeom>
+          <a:noFill/>
+        </p:spPr>
+        <p:txBody>
+          <a:bodyPr wrap="square" lIns="45720" rIns="45720" tIns="27432" bIns="27432" anchor="t">
+            <a:spAutoFit/>
+          </a:bodyPr>
+          <a:lstStyle/>
+          <a:p>
+            <a:r>
+              <a:rPr sz="1800" b="1">
+                <a:solidFill>
+                  <a:srgbClr val="EEF1F3"/>
+                </a:solidFill>
+                <a:latin typeface="Arial"/>
+              </a:rPr>
+              <a:t>verified NanoISA v2 (4.0)</a:t>
+            </a:r>
+          </a:p>
+          <a:p>
+            <a:r>
+              <a:rPr sz="1800" b="1">
+                <a:solidFill>
+                  <a:srgbClr val="EEF1F3"/>
+                </a:solidFill>
+                <a:latin typeface="Arial"/>
+              </a:rPr>
+              <a:t>Forth Core evidence</a:t>
+            </a:r>
+          </a:p>
+          <a:p>
+            <a:r>
+              <a:rPr sz="1800" b="1">
+                <a:solidFill>
+                  <a:srgbClr val="EEF1F3"/>
+                </a:solidFill>
+                <a:latin typeface="Arial"/>
+              </a:rPr>
+              <a:t>NSI v0 + POSIX fabric</a:t>
+            </a:r>
+          </a:p>
+          <a:p>
+            <a:r>
+              <a:rPr sz="1800" b="1">
+                <a:solidFill>
+                  <a:srgbClr val="EEF1F3"/>
+                </a:solidFill>
+                <a:latin typeface="Arial"/>
+              </a:rPr>
+              <a:t>unforgeable capabilities</a:t>
+            </a:r>
+          </a:p>
+          <a:p>
+            <a:r>
+              <a:rPr sz="1800" b="1">
+                <a:solidFill>
+                  <a:srgbClr val="EEF1F3"/>
+                </a:solidFill>
+                <a:latin typeface="Arial"/>
+              </a:rPr>
+              <a:t>isolated editor walker</a:t>
+            </a:r>
+          </a:p>
+          <a:p>
+            <a:r>
+              <a:rPr sz="1800" b="1">
+                <a:solidFill>
+                  <a:srgbClr val="EEF1F3"/>
+                </a:solidFill>
+                <a:latin typeface="Arial"/>
+              </a:rPr>
+              <a:t>effects → policy + journal</a:t>
+            </a:r>
+          </a:p>
+        </p:txBody>
+      </p:sp>
+      <p:sp>
+        <p:nvSpPr>
+          <p:cNvPr id="10" name="Rounded Rectangle 9"/>
+          <p:cNvSpPr/>
+          <p:nvPr/>
+        </p:nvSpPr>
+        <p:spPr>
+          <a:xfrm>
+            <a:off x="6309360" y="1828800"/>
+            <a:ext cx="5166360" cy="3566160"/>
+          </a:xfrm>
+          <a:prstGeom prst="roundRect">
+            <a:avLst/>
+          </a:prstGeom>
+          <a:solidFill>
+            <a:srgbClr val="101317"/>
+          </a:solidFill>
+          <a:ln>
+            <a:noFill/>
+          </a:ln>
+        </p:spPr>
+        <p:style>
+          <a:lnRef idx="1">
+            <a:schemeClr val="accent1"/>
+          </a:lnRef>
+          <a:fillRef idx="3">
+            <a:schemeClr val="accent1"/>
+          </a:fillRef>
+          <a:effectRef idx="2">
+            <a:schemeClr val="accent1"/>
+          </a:effectRef>
+          <a:fontRef idx="minor">
+            <a:schemeClr val="lt1"/>
+          </a:fontRef>
+        </p:style>
+        <p:txBody>
+          <a:bodyPr rtlCol="0" anchor="ctr"/>
+          <a:lstStyle/>
+          <a:p>
+            <a:pPr algn="ctr"/>
+          </a:p>
+        </p:txBody>
+      </p:sp>
+      <p:sp>
+        <p:nvSpPr>
+          <p:cNvPr id="11" name="TextBox 10"/>
+          <p:cNvSpPr txBox="1"/>
+          <p:nvPr/>
+        </p:nvSpPr>
+        <p:spPr>
+          <a:xfrm>
+            <a:off x="6583680" y="2148840"/>
+            <a:ext cx="4480560" cy="274320"/>
+          </a:xfrm>
+          <a:prstGeom prst="rect">
+            <a:avLst/>
+          </a:prstGeom>
+          <a:noFill/>
+        </p:spPr>
+        <p:txBody>
+          <a:bodyPr wrap="square" lIns="45720" rIns="45720" tIns="27432" bIns="27432" anchor="t">
+            <a:spAutoFit/>
+          </a:bodyPr>
+          <a:lstStyle/>
+          <a:p>
+            <a:r>
+              <a:rPr sz="1500" b="1">
+                <a:solidFill>
+                  <a:srgbClr val="FF6B35"/>
+                </a:solidFill>
+                <a:latin typeface="Arial"/>
+              </a:rPr>
+              <a:t>NOT DONE</a:t>
+            </a:r>
+          </a:p>
+        </p:txBody>
+      </p:sp>
+      <p:sp>
+        <p:nvSpPr>
+          <p:cNvPr id="12" name="TextBox 11"/>
+          <p:cNvSpPr txBox="1"/>
+          <p:nvPr/>
+        </p:nvSpPr>
+        <p:spPr>
+          <a:xfrm>
+            <a:off x="6583680" y="2651760"/>
+            <a:ext cx="4297680" cy="2377440"/>
+          </a:xfrm>
+          <a:prstGeom prst="rect">
+            <a:avLst/>
+          </a:prstGeom>
+          <a:noFill/>
+        </p:spPr>
+        <p:txBody>
+          <a:bodyPr wrap="square" lIns="45720" rIns="45720" tIns="27432" bIns="27432" anchor="t">
+            <a:spAutoFit/>
+          </a:bodyPr>
+          <a:lstStyle/>
+          <a:p>
+            <a:r>
+              <a:rPr sz="1800" b="1">
+                <a:solidFill>
+                  <a:srgbClr val="EEF1F3"/>
+                </a:solidFill>
+                <a:latin typeface="Arial"/>
+              </a:rPr>
+              <a:t>Standard System / INCLUDED</a:t>
+            </a:r>
+          </a:p>
+          <a:p>
+            <a:r>
+              <a:rPr sz="1800" b="1">
+                <a:solidFill>
+                  <a:srgbClr val="EEF1F3"/>
+                </a:solidFill>
+                <a:latin typeface="Arial"/>
+              </a:rPr>
+              <a:t>internationalized compiler</a:t>
+            </a:r>
+          </a:p>
+          <a:p>
+            <a:r>
+              <a:rPr sz="1800" b="1">
+                <a:solidFill>
+                  <a:srgbClr val="EEF1F3"/>
+                </a:solidFill>
+                <a:latin typeface="Arial"/>
+              </a:rPr>
+              <a:t>GNU Emacs / a kernel</a:t>
+            </a:r>
+          </a:p>
+          <a:p>
+            <a:r>
+              <a:rPr sz="1800" b="1">
+                <a:solidFill>
+                  <a:srgbClr val="EEF1F3"/>
+                </a:solidFill>
+                <a:latin typeface="Arial"/>
+              </a:rPr>
+              <a:t>CUDA or CPython wrap</a:t>
+            </a:r>
+          </a:p>
+          <a:p>
+            <a:r>
+              <a:rPr sz="1800" b="1">
+                <a:solidFill>
+                  <a:srgbClr val="EEF1F3"/>
+                </a:solidFill>
+                <a:latin typeface="Arial"/>
+              </a:rPr>
+              <a:t>journal on every trap</a:t>
+            </a:r>
+          </a:p>
+          <a:p>
+            <a:r>
+              <a:rPr sz="1800" b="1">
+                <a:solidFill>
+                  <a:srgbClr val="EEF1F3"/>
+                </a:solidFill>
+                <a:latin typeface="Arial"/>
+              </a:rPr>
+              <a:t>5.0 One IR</a:t>
+            </a:r>
+          </a:p>
+        </p:txBody>
+      </p:sp>
+    </p:spTree>
+  </p:cSld>
+  <p:clrMapOvr>
+    <a:masterClrMapping/>
+  </p:clrMapOvr>
+</p:sld>
+</file>
+
+<file path=ppt/slides/slide16.xml><?xml version="1.0" encoding="utf-8"?>
+<p:sld xmlns:a="http://schemas.openxmlformats.org/drawingml/2006/main" xmlns:p="http://schemas.openxmlformats.org/presentationml/2006/main" xmlns:r="http://schemas.openxmlformats.org/officeDocument/2006/relationships">
+  <p:cSld>
+    <p:spTree>
+      <p:nvGrpSpPr>
+        <p:cNvPr id="1" name=""/>
+        <p:cNvGrpSpPr/>
+        <p:nvPr/>
+      </p:nvGrpSpPr>
+      <p:grpSpPr/>
+      <p:sp>
+        <p:nvSpPr>
+          <p:cNvPr id="2" name="Rectangle 1"/>
+          <p:cNvSpPr/>
+          <p:nvPr/>
+        </p:nvSpPr>
+        <p:spPr>
+          <a:xfrm>
+            <a:off x="0" y="0"/>
+            <a:ext cx="12191695" cy="6858000"/>
+          </a:xfrm>
+          <a:prstGeom prst="rect">
+            <a:avLst/>
+          </a:prstGeom>
+          <a:solidFill>
+            <a:srgbClr val="101317"/>
+          </a:solidFill>
+          <a:ln>
+            <a:noFill/>
+          </a:ln>
+        </p:spPr>
+        <p:style>
+          <a:lnRef idx="1">
+            <a:schemeClr val="accent1"/>
+          </a:lnRef>
+          <a:fillRef idx="3">
+            <a:schemeClr val="accent1"/>
+          </a:fillRef>
+          <a:effectRef idx="2">
+            <a:schemeClr val="accent1"/>
+          </a:effectRef>
+          <a:fontRef idx="minor">
+            <a:schemeClr val="lt1"/>
+          </a:fontRef>
+        </p:style>
+        <p:txBody>
+          <a:bodyPr rtlCol="0" anchor="ctr"/>
+          <a:lstStyle/>
+          <a:p>
+            <a:pPr algn="ctr"/>
+          </a:p>
+        </p:txBody>
+      </p:sp>
       <p:pic>
         <p:nvPicPr>
           <p:cNvPr id="3" name="Picture 2" descr="nanolang-mascot.png"/>
@@ -7948,7 +8920,7 @@
                 </a:solidFill>
                 <a:latin typeface="Courier New"/>
               </a:rPr>
-              <a:t>docs/RELEASE_4.4.md · docs/ROADMAP.md · docs/NSI_FABRIC.md</a:t>
+              <a:t>docs/RELEASE_4.5.md · userguide/guide/08_secure_runtime.md</a:t>
             </a:r>
           </a:p>
         </p:txBody>
@@ -8017,7 +8989,7 @@
                 </a:solidFill>
                 <a:latin typeface="Arial"/>
               </a:rPr>
-              <a:t>15</a:t>
+              <a:t>16</a:t>
             </a:r>
           </a:p>
         </p:txBody>
